--- a/经验技巧总结/演讲：客户价值规划/客户价值规划.pptx
+++ b/经验技巧总结/演讲：客户价值规划/客户价值规划.pptx
@@ -5,10 +5,10 @@
     <p:sldMasterId id="2147483648" r:id="rId1"/>
   </p:sldMasterIdLst>
   <p:notesMasterIdLst>
-    <p:notesMasterId r:id="rId20"/>
+    <p:notesMasterId r:id="rId19"/>
   </p:notesMasterIdLst>
   <p:handoutMasterIdLst>
-    <p:handoutMasterId r:id="rId21"/>
+    <p:handoutMasterId r:id="rId20"/>
   </p:handoutMasterIdLst>
   <p:sldIdLst>
     <p:sldId id="624" r:id="rId2"/>
@@ -26,9 +26,8 @@
     <p:sldId id="646" r:id="rId14"/>
     <p:sldId id="647" r:id="rId15"/>
     <p:sldId id="640" r:id="rId16"/>
-    <p:sldId id="634" r:id="rId17"/>
-    <p:sldId id="635" r:id="rId18"/>
-    <p:sldId id="597" r:id="rId19"/>
+    <p:sldId id="650" r:id="rId17"/>
+    <p:sldId id="597" r:id="rId18"/>
   </p:sldIdLst>
   <p:sldSz cx="12192000" cy="6858000"/>
   <p:notesSz cx="6858000" cy="9144000"/>
@@ -251,7 +250,7 @@
             <a:fld id="{43434051-BEF0-7D4C-9196-86755A91DC50}" type="datetimeFigureOut">
               <a:rPr kumimoji="1" lang="zh-CN" altLang="en-US" smtClean="0"/>
               <a:pPr/>
-              <a:t>2016-04-22</a:t>
+              <a:t>2016-05-13</a:t>
             </a:fld>
             <a:endParaRPr kumimoji="1" lang="zh-CN" altLang="en-US"/>
           </a:p>
@@ -418,7 +417,7 @@
             <a:fld id="{74E5CB33-C662-8F41-8A71-5104D135C80E}" type="datetimeFigureOut">
               <a:rPr kumimoji="1" lang="zh-CN" altLang="en-US" smtClean="0"/>
               <a:pPr/>
-              <a:t>2016-04-22</a:t>
+              <a:t>2016-05-13</a:t>
             </a:fld>
             <a:endParaRPr kumimoji="1" lang="zh-CN" altLang="en-US"/>
           </a:p>
@@ -766,6 +765,188 @@
     <p:extLst>
       <p:ext uri="{BB962C8B-B14F-4D97-AF65-F5344CB8AC3E}">
         <p14:creationId xmlns:p14="http://schemas.microsoft.com/office/powerpoint/2010/main" val="3754212190"/>
+      </p:ext>
+    </p:extLst>
+  </p:cSld>
+  <p:clrMapOvr>
+    <a:masterClrMapping/>
+  </p:clrMapOvr>
+</p:notes>
+</file>
+
+<file path=ppt/notesSlides/notesSlide10.xml><?xml version="1.0" encoding="utf-8"?>
+<p:notes xmlns:a="http://schemas.openxmlformats.org/drawingml/2006/main" xmlns:r="http://schemas.openxmlformats.org/officeDocument/2006/relationships" xmlns:p="http://schemas.openxmlformats.org/presentationml/2006/main">
+  <p:cSld>
+    <p:spTree>
+      <p:nvGrpSpPr>
+        <p:cNvPr id="1" name=""/>
+        <p:cNvGrpSpPr/>
+        <p:nvPr/>
+      </p:nvGrpSpPr>
+      <p:grpSpPr>
+        <a:xfrm>
+          <a:off x="0" y="0"/>
+          <a:ext cx="0" cy="0"/>
+          <a:chOff x="0" y="0"/>
+          <a:chExt cx="0" cy="0"/>
+        </a:xfrm>
+      </p:grpSpPr>
+      <p:sp>
+        <p:nvSpPr>
+          <p:cNvPr id="2" name="幻灯片图像占位符 1"/>
+          <p:cNvSpPr>
+            <a:spLocks noGrp="1" noRot="1" noChangeAspect="1"/>
+          </p:cNvSpPr>
+          <p:nvPr>
+            <p:ph type="sldImg"/>
+          </p:nvPr>
+        </p:nvSpPr>
+        <p:spPr/>
+      </p:sp>
+      <p:sp>
+        <p:nvSpPr>
+          <p:cNvPr id="3" name="备注占位符 2"/>
+          <p:cNvSpPr>
+            <a:spLocks noGrp="1"/>
+          </p:cNvSpPr>
+          <p:nvPr>
+            <p:ph type="body" idx="1"/>
+          </p:nvPr>
+        </p:nvSpPr>
+        <p:spPr/>
+        <p:txBody>
+          <a:bodyPr/>
+          <a:lstStyle/>
+          <a:p>
+            <a:endParaRPr lang="zh-CN" altLang="en-US" dirty="0"/>
+          </a:p>
+        </p:txBody>
+      </p:sp>
+      <p:sp>
+        <p:nvSpPr>
+          <p:cNvPr id="4" name="灯片编号占位符 3"/>
+          <p:cNvSpPr>
+            <a:spLocks noGrp="1"/>
+          </p:cNvSpPr>
+          <p:nvPr>
+            <p:ph type="sldNum" sz="quarter" idx="10"/>
+          </p:nvPr>
+        </p:nvSpPr>
+        <p:spPr/>
+        <p:txBody>
+          <a:bodyPr/>
+          <a:lstStyle/>
+          <a:p>
+            <a:fld id="{62863DDE-E268-D241-A46D-5F7888E658E3}" type="slidenum">
+              <a:rPr kumimoji="1" lang="zh-CN" altLang="en-US" smtClean="0"/>
+              <a:pPr/>
+              <a:t>15</a:t>
+            </a:fld>
+            <a:endParaRPr kumimoji="1" lang="zh-CN" altLang="en-US"/>
+          </a:p>
+        </p:txBody>
+      </p:sp>
+    </p:spTree>
+    <p:extLst>
+      <p:ext uri="{BB962C8B-B14F-4D97-AF65-F5344CB8AC3E}">
+        <p14:creationId xmlns:p14="http://schemas.microsoft.com/office/powerpoint/2010/main" val="1634969174"/>
+      </p:ext>
+    </p:extLst>
+  </p:cSld>
+  <p:clrMapOvr>
+    <a:masterClrMapping/>
+  </p:clrMapOvr>
+</p:notes>
+</file>
+
+<file path=ppt/notesSlides/notesSlide11.xml><?xml version="1.0" encoding="utf-8"?>
+<p:notes xmlns:a="http://schemas.openxmlformats.org/drawingml/2006/main" xmlns:r="http://schemas.openxmlformats.org/officeDocument/2006/relationships" xmlns:p="http://schemas.openxmlformats.org/presentationml/2006/main">
+  <p:cSld>
+    <p:spTree>
+      <p:nvGrpSpPr>
+        <p:cNvPr id="1" name=""/>
+        <p:cNvGrpSpPr/>
+        <p:nvPr/>
+      </p:nvGrpSpPr>
+      <p:grpSpPr>
+        <a:xfrm>
+          <a:off x="0" y="0"/>
+          <a:ext cx="0" cy="0"/>
+          <a:chOff x="0" y="0"/>
+          <a:chExt cx="0" cy="0"/>
+        </a:xfrm>
+      </p:grpSpPr>
+      <p:sp>
+        <p:nvSpPr>
+          <p:cNvPr id="2" name="幻灯片图像占位符 1"/>
+          <p:cNvSpPr>
+            <a:spLocks noGrp="1" noRot="1" noChangeAspect="1"/>
+          </p:cNvSpPr>
+          <p:nvPr>
+            <p:ph type="sldImg"/>
+          </p:nvPr>
+        </p:nvSpPr>
+        <p:spPr/>
+      </p:sp>
+      <p:sp>
+        <p:nvSpPr>
+          <p:cNvPr id="3" name="备注占位符 2"/>
+          <p:cNvSpPr>
+            <a:spLocks noGrp="1"/>
+          </p:cNvSpPr>
+          <p:nvPr>
+            <p:ph type="body" idx="1"/>
+          </p:nvPr>
+        </p:nvSpPr>
+        <p:spPr/>
+        <p:txBody>
+          <a:bodyPr/>
+          <a:lstStyle/>
+          <a:p>
+            <a:r>
+              <a:rPr lang="zh-CN" altLang="en-US" sz="1200" b="0" i="0" kern="1200" dirty="0" smtClean="0">
+                <a:solidFill>
+                  <a:schemeClr val="tx1"/>
+                </a:solidFill>
+                <a:effectLst/>
+                <a:latin typeface="+mn-lt"/>
+                <a:ea typeface="+mn-ea"/>
+                <a:cs typeface="+mn-cs"/>
+              </a:rPr>
+              <a:t>漫长的创作，成功后短暂的喜悦，然后是毫不犹豫的毁灭</a:t>
+            </a:r>
+            <a:endParaRPr lang="zh-CN" altLang="en-US" dirty="0"/>
+          </a:p>
+        </p:txBody>
+      </p:sp>
+      <p:sp>
+        <p:nvSpPr>
+          <p:cNvPr id="4" name="灯片编号占位符 3"/>
+          <p:cNvSpPr>
+            <a:spLocks noGrp="1"/>
+          </p:cNvSpPr>
+          <p:nvPr>
+            <p:ph type="sldNum" sz="quarter" idx="10"/>
+          </p:nvPr>
+        </p:nvSpPr>
+        <p:spPr/>
+        <p:txBody>
+          <a:bodyPr/>
+          <a:lstStyle/>
+          <a:p>
+            <a:fld id="{62863DDE-E268-D241-A46D-5F7888E658E3}" type="slidenum">
+              <a:rPr kumimoji="1" lang="zh-CN" altLang="en-US" smtClean="0"/>
+              <a:pPr/>
+              <a:t>16</a:t>
+            </a:fld>
+            <a:endParaRPr kumimoji="1" lang="zh-CN" altLang="en-US"/>
+          </a:p>
+        </p:txBody>
+      </p:sp>
+    </p:spTree>
+    <p:extLst>
+      <p:ext uri="{BB962C8B-B14F-4D97-AF65-F5344CB8AC3E}">
+        <p14:creationId xmlns:p14="http://schemas.microsoft.com/office/powerpoint/2010/main" val="3889311973"/>
       </p:ext>
     </p:extLst>
   </p:cSld>
@@ -1316,6 +1497,47 @@
               <a:rPr lang="zh-CN" altLang="en-US" dirty="0" smtClean="0"/>
               <a:t>此处需要和前面提的问题进行呼应</a:t>
             </a:r>
+            <a:endParaRPr lang="en-US" altLang="zh-CN" dirty="0" smtClean="0"/>
+          </a:p>
+          <a:p>
+            <a:r>
+              <a:rPr lang="zh-CN" altLang="en-US" dirty="0" smtClean="0"/>
+              <a:t>就拿知识分享这件事来说，</a:t>
+            </a:r>
+            <a:endParaRPr lang="en-US" altLang="zh-CN" dirty="0" smtClean="0"/>
+          </a:p>
+          <a:p>
+            <a:endParaRPr lang="en-US" altLang="zh-CN" dirty="0" smtClean="0"/>
+          </a:p>
+          <a:p>
+            <a:pPr marL="0" marR="0" indent="0" algn="l" defTabSz="457200" rtl="0" eaLnBrk="1" fontAlgn="auto" latinLnBrk="0" hangingPunct="1">
+              <a:lnSpc>
+                <a:spcPct val="100000"/>
+              </a:lnSpc>
+              <a:spcBef>
+                <a:spcPts val="0"/>
+              </a:spcBef>
+              <a:spcAft>
+                <a:spcPts val="0"/>
+              </a:spcAft>
+              <a:buClrTx/>
+              <a:buSzTx/>
+              <a:buFontTx/>
+              <a:buNone/>
+              <a:tabLst/>
+              <a:defRPr/>
+            </a:pPr>
+            <a:r>
+              <a:rPr lang="zh-CN" altLang="en-US" dirty="0" smtClean="0"/>
+              <a:t>那么在和客户打交道时，怎么做才是“以利他之心度人生”</a:t>
+            </a:r>
+            <a:r>
+              <a:rPr lang="zh-CN" altLang="en-US" smtClean="0"/>
+              <a:t>呢？怎样才能“合作  共赢  创造价值”呢？</a:t>
+            </a:r>
+            <a:endParaRPr lang="zh-CN" altLang="en-US" dirty="0" smtClean="0"/>
+          </a:p>
+          <a:p>
             <a:endParaRPr lang="zh-CN" altLang="en-US" dirty="0"/>
           </a:p>
         </p:txBody>
@@ -1401,10 +1623,29 @@
           <a:bodyPr/>
           <a:lstStyle/>
           <a:p>
+            <a:pPr marL="0" marR="0" indent="0" algn="l" defTabSz="457200" rtl="0" eaLnBrk="1" fontAlgn="auto" latinLnBrk="0" hangingPunct="1">
+              <a:lnSpc>
+                <a:spcPct val="100000"/>
+              </a:lnSpc>
+              <a:spcBef>
+                <a:spcPts val="0"/>
+              </a:spcBef>
+              <a:spcAft>
+                <a:spcPts val="0"/>
+              </a:spcAft>
+              <a:buClrTx/>
+              <a:buSzTx/>
+              <a:buFontTx/>
+              <a:buNone/>
+              <a:tabLst/>
+              <a:defRPr/>
+            </a:pPr>
             <a:r>
               <a:rPr lang="zh-CN" altLang="en-US" dirty="0" smtClean="0"/>
               <a:t>什么是客户价值规划，或者说做什么才算客户价值规划？</a:t>
             </a:r>
+          </a:p>
+          <a:p>
             <a:endParaRPr lang="zh-CN" altLang="en-US" dirty="0"/>
           </a:p>
         </p:txBody>
@@ -1427,7 +1668,7 @@
             <a:fld id="{62863DDE-E268-D241-A46D-5F7888E658E3}" type="slidenum">
               <a:rPr kumimoji="1" lang="zh-CN" altLang="en-US" smtClean="0"/>
               <a:pPr/>
-              <a:t>8</a:t>
+              <a:t>7</a:t>
             </a:fld>
             <a:endParaRPr kumimoji="1" lang="zh-CN" altLang="en-US"/>
           </a:p>
@@ -1436,7 +1677,7 @@
     </p:spTree>
     <p:extLst>
       <p:ext uri="{BB962C8B-B14F-4D97-AF65-F5344CB8AC3E}">
-        <p14:creationId xmlns:p14="http://schemas.microsoft.com/office/powerpoint/2010/main" val="3475497611"/>
+        <p14:creationId xmlns:p14="http://schemas.microsoft.com/office/powerpoint/2010/main" val="2831238017"/>
       </p:ext>
     </p:extLst>
   </p:cSld>
@@ -1512,7 +1753,7 @@
             <a:fld id="{62863DDE-E268-D241-A46D-5F7888E658E3}" type="slidenum">
               <a:rPr kumimoji="1" lang="zh-CN" altLang="en-US" smtClean="0"/>
               <a:pPr/>
-              <a:t>16</a:t>
+              <a:t>8</a:t>
             </a:fld>
             <a:endParaRPr kumimoji="1" lang="zh-CN" altLang="en-US"/>
           </a:p>
@@ -1521,7 +1762,92 @@
     </p:spTree>
     <p:extLst>
       <p:ext uri="{BB962C8B-B14F-4D97-AF65-F5344CB8AC3E}">
-        <p14:creationId xmlns:p14="http://schemas.microsoft.com/office/powerpoint/2010/main" val="2349742069"/>
+        <p14:creationId xmlns:p14="http://schemas.microsoft.com/office/powerpoint/2010/main" val="3475497611"/>
+      </p:ext>
+    </p:extLst>
+  </p:cSld>
+  <p:clrMapOvr>
+    <a:masterClrMapping/>
+  </p:clrMapOvr>
+</p:notes>
+</file>
+
+<file path=ppt/notesSlides/notesSlide9.xml><?xml version="1.0" encoding="utf-8"?>
+<p:notes xmlns:a="http://schemas.openxmlformats.org/drawingml/2006/main" xmlns:r="http://schemas.openxmlformats.org/officeDocument/2006/relationships" xmlns:p="http://schemas.openxmlformats.org/presentationml/2006/main">
+  <p:cSld>
+    <p:spTree>
+      <p:nvGrpSpPr>
+        <p:cNvPr id="1" name=""/>
+        <p:cNvGrpSpPr/>
+        <p:nvPr/>
+      </p:nvGrpSpPr>
+      <p:grpSpPr>
+        <a:xfrm>
+          <a:off x="0" y="0"/>
+          <a:ext cx="0" cy="0"/>
+          <a:chOff x="0" y="0"/>
+          <a:chExt cx="0" cy="0"/>
+        </a:xfrm>
+      </p:grpSpPr>
+      <p:sp>
+        <p:nvSpPr>
+          <p:cNvPr id="2" name="幻灯片图像占位符 1"/>
+          <p:cNvSpPr>
+            <a:spLocks noGrp="1" noRot="1" noChangeAspect="1"/>
+          </p:cNvSpPr>
+          <p:nvPr>
+            <p:ph type="sldImg"/>
+          </p:nvPr>
+        </p:nvSpPr>
+        <p:spPr/>
+      </p:sp>
+      <p:sp>
+        <p:nvSpPr>
+          <p:cNvPr id="3" name="备注占位符 2"/>
+          <p:cNvSpPr>
+            <a:spLocks noGrp="1"/>
+          </p:cNvSpPr>
+          <p:nvPr>
+            <p:ph type="body" idx="1"/>
+          </p:nvPr>
+        </p:nvSpPr>
+        <p:spPr/>
+        <p:txBody>
+          <a:bodyPr/>
+          <a:lstStyle/>
+          <a:p>
+            <a:endParaRPr lang="zh-CN" altLang="en-US" dirty="0"/>
+          </a:p>
+        </p:txBody>
+      </p:sp>
+      <p:sp>
+        <p:nvSpPr>
+          <p:cNvPr id="4" name="灯片编号占位符 3"/>
+          <p:cNvSpPr>
+            <a:spLocks noGrp="1"/>
+          </p:cNvSpPr>
+          <p:nvPr>
+            <p:ph type="sldNum" sz="quarter" idx="10"/>
+          </p:nvPr>
+        </p:nvSpPr>
+        <p:spPr/>
+        <p:txBody>
+          <a:bodyPr/>
+          <a:lstStyle/>
+          <a:p>
+            <a:fld id="{62863DDE-E268-D241-A46D-5F7888E658E3}" type="slidenum">
+              <a:rPr kumimoji="1" lang="zh-CN" altLang="en-US" smtClean="0"/>
+              <a:pPr/>
+              <a:t>10</a:t>
+            </a:fld>
+            <a:endParaRPr kumimoji="1" lang="zh-CN" altLang="en-US"/>
+          </a:p>
+        </p:txBody>
+      </p:sp>
+    </p:spTree>
+    <p:extLst>
+      <p:ext uri="{BB962C8B-B14F-4D97-AF65-F5344CB8AC3E}">
+        <p14:creationId xmlns:p14="http://schemas.microsoft.com/office/powerpoint/2010/main" val="4241210068"/>
       </p:ext>
     </p:extLst>
   </p:cSld>
@@ -2883,6 +3209,99 @@
 
 <file path=ppt/slideLayouts/slideLayout5.xml><?xml version="1.0" encoding="utf-8"?>
 <p:sldLayout xmlns:a="http://schemas.openxmlformats.org/drawingml/2006/main" xmlns:r="http://schemas.openxmlformats.org/officeDocument/2006/relationships" xmlns:p="http://schemas.openxmlformats.org/presentationml/2006/main" preserve="1" userDrawn="1">
+  <p:cSld name="空白页-logo">
+    <p:spTree>
+      <p:nvGrpSpPr>
+        <p:cNvPr id="1" name=""/>
+        <p:cNvGrpSpPr/>
+        <p:nvPr/>
+      </p:nvGrpSpPr>
+      <p:grpSpPr>
+        <a:xfrm>
+          <a:off x="0" y="0"/>
+          <a:ext cx="0" cy="0"/>
+          <a:chOff x="0" y="0"/>
+          <a:chExt cx="0" cy="0"/>
+        </a:xfrm>
+      </p:grpSpPr>
+      <p:pic>
+        <p:nvPicPr>
+          <p:cNvPr id="6" name="Picture 2"/>
+          <p:cNvPicPr>
+            <a:picLocks noChangeAspect="1" noChangeArrowheads="1"/>
+          </p:cNvPicPr>
+          <p:nvPr userDrawn="1"/>
+        </p:nvPicPr>
+        <p:blipFill>
+          <a:blip r:embed="rId2" cstate="print"/>
+          <a:srcRect/>
+          <a:stretch>
+            <a:fillRect/>
+          </a:stretch>
+        </p:blipFill>
+        <p:spPr bwMode="auto">
+          <a:xfrm>
+            <a:off x="9168341" y="6428047"/>
+            <a:ext cx="2768608" cy="243335"/>
+          </a:xfrm>
+          <a:prstGeom prst="rect">
+            <a:avLst/>
+          </a:prstGeom>
+          <a:noFill/>
+          <a:ln w="9525">
+            <a:noFill/>
+            <a:miter lim="800000"/>
+            <a:headEnd/>
+            <a:tailEnd/>
+          </a:ln>
+          <a:effectLst/>
+        </p:spPr>
+      </p:pic>
+    </p:spTree>
+    <p:extLst>
+      <p:ext uri="{BB962C8B-B14F-4D97-AF65-F5344CB8AC3E}">
+        <p14:creationId xmlns:p14="http://schemas.microsoft.com/office/powerpoint/2010/main" val="1049005156"/>
+      </p:ext>
+    </p:extLst>
+  </p:cSld>
+  <p:clrMapOvr>
+    <a:masterClrMapping/>
+  </p:clrMapOvr>
+</p:sldLayout>
+</file>
+
+<file path=ppt/slideLayouts/slideLayout6.xml><?xml version="1.0" encoding="utf-8"?>
+<p:sldLayout xmlns:a="http://schemas.openxmlformats.org/drawingml/2006/main" xmlns:r="http://schemas.openxmlformats.org/officeDocument/2006/relationships" xmlns:p="http://schemas.openxmlformats.org/presentationml/2006/main" preserve="1" userDrawn="1">
+  <p:cSld name="空白页">
+    <p:spTree>
+      <p:nvGrpSpPr>
+        <p:cNvPr id="1" name=""/>
+        <p:cNvGrpSpPr/>
+        <p:nvPr/>
+      </p:nvGrpSpPr>
+      <p:grpSpPr>
+        <a:xfrm>
+          <a:off x="0" y="0"/>
+          <a:ext cx="0" cy="0"/>
+          <a:chOff x="0" y="0"/>
+          <a:chExt cx="0" cy="0"/>
+        </a:xfrm>
+      </p:grpSpPr>
+    </p:spTree>
+    <p:extLst>
+      <p:ext uri="{BB962C8B-B14F-4D97-AF65-F5344CB8AC3E}">
+        <p14:creationId xmlns:p14="http://schemas.microsoft.com/office/powerpoint/2010/main" val="1811723370"/>
+      </p:ext>
+    </p:extLst>
+  </p:cSld>
+  <p:clrMapOvr>
+    <a:masterClrMapping/>
+  </p:clrMapOvr>
+</p:sldLayout>
+</file>
+
+<file path=ppt/slideLayouts/slideLayout7.xml><?xml version="1.0" encoding="utf-8"?>
+<p:sldLayout xmlns:a="http://schemas.openxmlformats.org/drawingml/2006/main" xmlns:r="http://schemas.openxmlformats.org/officeDocument/2006/relationships" xmlns:p="http://schemas.openxmlformats.org/presentationml/2006/main" preserve="1" userDrawn="1">
   <p:cSld name="Thanks">
     <p:spTree>
       <p:nvGrpSpPr>
@@ -3391,7 +3810,7 @@
             <a:fld id="{120C7143-BB4D-47C6-9008-44C955299D49}" type="datetimeFigureOut">
               <a:rPr lang="zh-CN" altLang="en-US" smtClean="0"/>
               <a:pPr/>
-              <a:t>2016-04-22</a:t>
+              <a:t>2016-05-13</a:t>
             </a:fld>
             <a:endParaRPr lang="zh-CN" altLang="en-US"/>
           </a:p>
@@ -3490,7 +3909,9 @@
     <p:sldLayoutId id="2147483655" r:id="rId2"/>
     <p:sldLayoutId id="2147483659" r:id="rId3"/>
     <p:sldLayoutId id="2147483657" r:id="rId4"/>
-    <p:sldLayoutId id="2147483656" r:id="rId5"/>
+    <p:sldLayoutId id="2147483660" r:id="rId5"/>
+    <p:sldLayoutId id="2147483661" r:id="rId6"/>
+    <p:sldLayoutId id="2147483656" r:id="rId7"/>
   </p:sldLayoutIdLst>
   <p:txStyles>
     <p:titleStyle>
@@ -4010,6 +4431,14 @@
 <file path=ppt/slides/slide10.xml><?xml version="1.0" encoding="utf-8"?>
 <p:sld xmlns:a="http://schemas.openxmlformats.org/drawingml/2006/main" xmlns:r="http://schemas.openxmlformats.org/officeDocument/2006/relationships" xmlns:p="http://schemas.openxmlformats.org/presentationml/2006/main">
   <p:cSld>
+    <p:bg>
+      <p:bgPr>
+        <a:solidFill>
+          <a:schemeClr val="bg1"/>
+        </a:solidFill>
+        <a:effectLst/>
+      </p:bgPr>
+    </p:bg>
     <p:spTree>
       <p:nvGrpSpPr>
         <p:cNvPr id="1" name=""/>
@@ -4039,7 +4468,960 @@
           <a:bodyPr/>
           <a:lstStyle/>
           <a:p>
-            <a:endParaRPr lang="zh-CN" altLang="en-US"/>
+            <a:r>
+              <a:rPr lang="zh-CN" altLang="en-US" dirty="0" smtClean="0"/>
+              <a:t>华夏人寿的客户价值规划总结</a:t>
+            </a:r>
+            <a:endParaRPr lang="zh-CN" altLang="en-US" dirty="0"/>
+          </a:p>
+        </p:txBody>
+      </p:sp>
+      <p:sp>
+        <p:nvSpPr>
+          <p:cNvPr id="2" name="流程图: 联系 1"/>
+          <p:cNvSpPr/>
+          <p:nvPr/>
+        </p:nvSpPr>
+        <p:spPr>
+          <a:xfrm>
+            <a:off x="5176634" y="1772816"/>
+            <a:ext cx="2160000" cy="2160000"/>
+          </a:xfrm>
+          <a:prstGeom prst="flowChartConnector">
+            <a:avLst/>
+          </a:prstGeom>
+          <a:solidFill>
+            <a:srgbClr val="17375E"/>
+          </a:solidFill>
+          <a:ln>
+            <a:noFill/>
+          </a:ln>
+        </p:spPr>
+        <p:style>
+          <a:lnRef idx="2">
+            <a:schemeClr val="dk1"/>
+          </a:lnRef>
+          <a:fillRef idx="1">
+            <a:schemeClr val="lt1"/>
+          </a:fillRef>
+          <a:effectRef idx="0">
+            <a:schemeClr val="dk1"/>
+          </a:effectRef>
+          <a:fontRef idx="minor">
+            <a:schemeClr val="dk1"/>
+          </a:fontRef>
+        </p:style>
+        <p:txBody>
+          <a:bodyPr rot="0" spcFirstLastPara="0" vertOverflow="overflow" horzOverflow="overflow" vert="horz" wrap="square" lIns="91440" tIns="45720" rIns="91440" bIns="45720" numCol="1" spcCol="0" rtlCol="0" fromWordArt="0" anchor="ctr" anchorCtr="0" forceAA="0" compatLnSpc="1">
+            <a:prstTxWarp prst="textNoShape">
+              <a:avLst/>
+            </a:prstTxWarp>
+            <a:noAutofit/>
+          </a:bodyPr>
+          <a:lstStyle/>
+          <a:p>
+            <a:pPr algn="ctr"/>
+            <a:r>
+              <a:rPr lang="zh-CN" altLang="en-US" sz="2400" b="1" dirty="0" smtClean="0">
+                <a:solidFill>
+                  <a:schemeClr val="bg1"/>
+                </a:solidFill>
+                <a:latin typeface="Microsoft YaHei" charset="0"/>
+                <a:ea typeface="Microsoft YaHei" charset="0"/>
+                <a:cs typeface="Microsoft YaHei" charset="0"/>
+              </a:rPr>
+              <a:t>客户</a:t>
+            </a:r>
+            <a:endParaRPr lang="zh-CN" altLang="en-US" sz="2400" b="1" dirty="0" smtClean="0">
+              <a:solidFill>
+                <a:schemeClr val="bg1"/>
+              </a:solidFill>
+              <a:latin typeface="Microsoft YaHei" charset="0"/>
+              <a:ea typeface="Microsoft YaHei" charset="0"/>
+              <a:cs typeface="Microsoft YaHei" charset="0"/>
+            </a:endParaRPr>
+          </a:p>
+        </p:txBody>
+      </p:sp>
+      <p:sp>
+        <p:nvSpPr>
+          <p:cNvPr id="4" name="流程图: 联系 3"/>
+          <p:cNvSpPr/>
+          <p:nvPr/>
+        </p:nvSpPr>
+        <p:spPr>
+          <a:xfrm>
+            <a:off x="4218416" y="3212976"/>
+            <a:ext cx="2160000" cy="2160000"/>
+          </a:xfrm>
+          <a:prstGeom prst="flowChartConnector">
+            <a:avLst/>
+          </a:prstGeom>
+          <a:solidFill>
+            <a:srgbClr val="17375E"/>
+          </a:solidFill>
+          <a:ln>
+            <a:noFill/>
+          </a:ln>
+        </p:spPr>
+        <p:style>
+          <a:lnRef idx="2">
+            <a:schemeClr val="dk1"/>
+          </a:lnRef>
+          <a:fillRef idx="1">
+            <a:schemeClr val="lt1"/>
+          </a:fillRef>
+          <a:effectRef idx="0">
+            <a:schemeClr val="dk1"/>
+          </a:effectRef>
+          <a:fontRef idx="minor">
+            <a:schemeClr val="dk1"/>
+          </a:fontRef>
+        </p:style>
+        <p:txBody>
+          <a:bodyPr rot="0" spcFirstLastPara="0" vertOverflow="overflow" horzOverflow="overflow" vert="horz" wrap="square" lIns="91440" tIns="45720" rIns="91440" bIns="45720" numCol="1" spcCol="0" rtlCol="0" fromWordArt="0" anchor="ctr" anchorCtr="0" forceAA="0" compatLnSpc="1">
+            <a:prstTxWarp prst="textNoShape">
+              <a:avLst/>
+            </a:prstTxWarp>
+            <a:noAutofit/>
+          </a:bodyPr>
+          <a:lstStyle/>
+          <a:p>
+            <a:pPr algn="ctr"/>
+            <a:r>
+              <a:rPr lang="zh-CN" altLang="en-US" sz="2400" b="1" dirty="0" smtClean="0">
+                <a:solidFill>
+                  <a:schemeClr val="bg1"/>
+                </a:solidFill>
+                <a:latin typeface="Microsoft YaHei" charset="0"/>
+                <a:ea typeface="Microsoft YaHei" charset="0"/>
+                <a:cs typeface="Microsoft YaHei" charset="0"/>
+              </a:rPr>
+              <a:t>公司</a:t>
+            </a:r>
+            <a:endParaRPr lang="zh-CN" altLang="en-US" sz="2400" b="1" dirty="0" smtClean="0">
+              <a:solidFill>
+                <a:schemeClr val="bg1"/>
+              </a:solidFill>
+              <a:latin typeface="Microsoft YaHei" charset="0"/>
+              <a:ea typeface="Microsoft YaHei" charset="0"/>
+              <a:cs typeface="Microsoft YaHei" charset="0"/>
+            </a:endParaRPr>
+          </a:p>
+        </p:txBody>
+      </p:sp>
+      <p:sp>
+        <p:nvSpPr>
+          <p:cNvPr id="5" name="流程图: 联系 4"/>
+          <p:cNvSpPr/>
+          <p:nvPr/>
+        </p:nvSpPr>
+        <p:spPr>
+          <a:xfrm>
+            <a:off x="6198301" y="3212976"/>
+            <a:ext cx="2160000" cy="2160000"/>
+          </a:xfrm>
+          <a:prstGeom prst="flowChartConnector">
+            <a:avLst/>
+          </a:prstGeom>
+          <a:solidFill>
+            <a:srgbClr val="17375E"/>
+          </a:solidFill>
+          <a:ln>
+            <a:noFill/>
+          </a:ln>
+        </p:spPr>
+        <p:style>
+          <a:lnRef idx="2">
+            <a:schemeClr val="dk1"/>
+          </a:lnRef>
+          <a:fillRef idx="1">
+            <a:schemeClr val="lt1"/>
+          </a:fillRef>
+          <a:effectRef idx="0">
+            <a:schemeClr val="dk1"/>
+          </a:effectRef>
+          <a:fontRef idx="minor">
+            <a:schemeClr val="dk1"/>
+          </a:fontRef>
+        </p:style>
+        <p:txBody>
+          <a:bodyPr rot="0" spcFirstLastPara="0" vertOverflow="overflow" horzOverflow="overflow" vert="horz" wrap="square" lIns="91440" tIns="45720" rIns="91440" bIns="45720" numCol="1" spcCol="0" rtlCol="0" fromWordArt="0" anchor="ctr" anchorCtr="0" forceAA="0" compatLnSpc="1">
+            <a:prstTxWarp prst="textNoShape">
+              <a:avLst/>
+            </a:prstTxWarp>
+            <a:noAutofit/>
+          </a:bodyPr>
+          <a:lstStyle/>
+          <a:p>
+            <a:pPr algn="ctr"/>
+            <a:r>
+              <a:rPr lang="zh-CN" altLang="en-US" sz="2400" b="1" dirty="0">
+                <a:solidFill>
+                  <a:schemeClr val="bg1"/>
+                </a:solidFill>
+                <a:latin typeface="Microsoft YaHei" charset="0"/>
+                <a:ea typeface="Microsoft YaHei" charset="0"/>
+                <a:cs typeface="Microsoft YaHei" charset="0"/>
+              </a:rPr>
+              <a:t>员工</a:t>
+            </a:r>
+            <a:endParaRPr lang="zh-CN" altLang="en-US" sz="2400" b="1" dirty="0" smtClean="0">
+              <a:solidFill>
+                <a:schemeClr val="bg1"/>
+              </a:solidFill>
+              <a:latin typeface="Microsoft YaHei" charset="0"/>
+              <a:ea typeface="Microsoft YaHei" charset="0"/>
+              <a:cs typeface="Microsoft YaHei" charset="0"/>
+            </a:endParaRPr>
+          </a:p>
+        </p:txBody>
+      </p:sp>
+      <p:cxnSp>
+        <p:nvCxnSpPr>
+          <p:cNvPr id="7" name="直接连接符 6"/>
+          <p:cNvCxnSpPr>
+            <a:stCxn id="2" idx="1"/>
+          </p:cNvCxnSpPr>
+          <p:nvPr/>
+        </p:nvCxnSpPr>
+        <p:spPr>
+          <a:xfrm flipH="1" flipV="1">
+            <a:off x="4973925" y="1772816"/>
+            <a:ext cx="519034" cy="316325"/>
+          </a:xfrm>
+          <a:prstGeom prst="line">
+            <a:avLst/>
+          </a:prstGeom>
+          <a:ln w="25400">
+            <a:solidFill>
+              <a:schemeClr val="tx1">
+                <a:lumMod val="75000"/>
+              </a:schemeClr>
+            </a:solidFill>
+          </a:ln>
+        </p:spPr>
+        <p:style>
+          <a:lnRef idx="1">
+            <a:schemeClr val="accent1"/>
+          </a:lnRef>
+          <a:fillRef idx="0">
+            <a:schemeClr val="accent1"/>
+          </a:fillRef>
+          <a:effectRef idx="0">
+            <a:schemeClr val="accent1"/>
+          </a:effectRef>
+          <a:fontRef idx="minor">
+            <a:schemeClr val="tx1"/>
+          </a:fontRef>
+        </p:style>
+      </p:cxnSp>
+      <p:cxnSp>
+        <p:nvCxnSpPr>
+          <p:cNvPr id="9" name="直接连接符 8"/>
+          <p:cNvCxnSpPr/>
+          <p:nvPr/>
+        </p:nvCxnSpPr>
+        <p:spPr>
+          <a:xfrm flipH="1">
+            <a:off x="4438008" y="1772816"/>
+            <a:ext cx="535917" cy="0"/>
+          </a:xfrm>
+          <a:prstGeom prst="line">
+            <a:avLst/>
+          </a:prstGeom>
+          <a:ln w="25400">
+            <a:solidFill>
+              <a:schemeClr val="tx1">
+                <a:lumMod val="75000"/>
+              </a:schemeClr>
+            </a:solidFill>
+          </a:ln>
+        </p:spPr>
+        <p:style>
+          <a:lnRef idx="1">
+            <a:schemeClr val="accent1"/>
+          </a:lnRef>
+          <a:fillRef idx="0">
+            <a:schemeClr val="accent1"/>
+          </a:fillRef>
+          <a:effectRef idx="0">
+            <a:schemeClr val="accent1"/>
+          </a:effectRef>
+          <a:fontRef idx="minor">
+            <a:schemeClr val="tx1"/>
+          </a:fontRef>
+        </p:style>
+      </p:cxnSp>
+      <p:sp>
+        <p:nvSpPr>
+          <p:cNvPr id="10" name="文本框 9"/>
+          <p:cNvSpPr txBox="1"/>
+          <p:nvPr/>
+        </p:nvSpPr>
+        <p:spPr>
+          <a:xfrm>
+            <a:off x="4751498" y="1412776"/>
+            <a:ext cx="654475" cy="369332"/>
+          </a:xfrm>
+          <a:prstGeom prst="rect">
+            <a:avLst/>
+          </a:prstGeom>
+          <a:noFill/>
+        </p:spPr>
+        <p:txBody>
+          <a:bodyPr wrap="square" rtlCol="0">
+            <a:spAutoFit/>
+          </a:bodyPr>
+          <a:lstStyle/>
+          <a:p>
+            <a:r>
+              <a:rPr lang="zh-CN" altLang="en-US" dirty="0" smtClean="0">
+                <a:solidFill>
+                  <a:srgbClr val="C00000"/>
+                </a:solidFill>
+                <a:latin typeface="Microsoft YaHei" charset="0"/>
+                <a:ea typeface="Microsoft YaHei" charset="0"/>
+                <a:cs typeface="Microsoft YaHei" charset="0"/>
+              </a:rPr>
+              <a:t>企业</a:t>
+            </a:r>
+            <a:endParaRPr lang="zh-CN" altLang="en-US" dirty="0" smtClean="0">
+              <a:solidFill>
+                <a:srgbClr val="C00000"/>
+              </a:solidFill>
+              <a:latin typeface="Microsoft YaHei" charset="0"/>
+              <a:ea typeface="Microsoft YaHei" charset="0"/>
+              <a:cs typeface="Microsoft YaHei" charset="0"/>
+            </a:endParaRPr>
+          </a:p>
+        </p:txBody>
+      </p:sp>
+      <p:cxnSp>
+        <p:nvCxnSpPr>
+          <p:cNvPr id="11" name="直接连接符 10"/>
+          <p:cNvCxnSpPr>
+            <a:stCxn id="2" idx="7"/>
+          </p:cNvCxnSpPr>
+          <p:nvPr/>
+        </p:nvCxnSpPr>
+        <p:spPr>
+          <a:xfrm flipV="1">
+            <a:off x="7020309" y="1782108"/>
+            <a:ext cx="454341" cy="307033"/>
+          </a:xfrm>
+          <a:prstGeom prst="line">
+            <a:avLst/>
+          </a:prstGeom>
+          <a:ln w="25400">
+            <a:solidFill>
+              <a:schemeClr val="tx1">
+                <a:lumMod val="75000"/>
+              </a:schemeClr>
+            </a:solidFill>
+          </a:ln>
+        </p:spPr>
+        <p:style>
+          <a:lnRef idx="1">
+            <a:schemeClr val="accent1"/>
+          </a:lnRef>
+          <a:fillRef idx="0">
+            <a:schemeClr val="accent1"/>
+          </a:fillRef>
+          <a:effectRef idx="0">
+            <a:schemeClr val="accent1"/>
+          </a:effectRef>
+          <a:fontRef idx="minor">
+            <a:schemeClr val="tx1"/>
+          </a:fontRef>
+        </p:style>
+      </p:cxnSp>
+      <p:cxnSp>
+        <p:nvCxnSpPr>
+          <p:cNvPr id="12" name="直接连接符 11"/>
+          <p:cNvCxnSpPr/>
+          <p:nvPr/>
+        </p:nvCxnSpPr>
+        <p:spPr>
+          <a:xfrm flipH="1">
+            <a:off x="7455805" y="1786671"/>
+            <a:ext cx="535916" cy="0"/>
+          </a:xfrm>
+          <a:prstGeom prst="line">
+            <a:avLst/>
+          </a:prstGeom>
+          <a:ln w="25400">
+            <a:solidFill>
+              <a:schemeClr val="tx1">
+                <a:lumMod val="75000"/>
+              </a:schemeClr>
+            </a:solidFill>
+          </a:ln>
+        </p:spPr>
+        <p:style>
+          <a:lnRef idx="1">
+            <a:schemeClr val="accent1"/>
+          </a:lnRef>
+          <a:fillRef idx="0">
+            <a:schemeClr val="accent1"/>
+          </a:fillRef>
+          <a:effectRef idx="0">
+            <a:schemeClr val="accent1"/>
+          </a:effectRef>
+          <a:fontRef idx="minor">
+            <a:schemeClr val="tx1"/>
+          </a:fontRef>
+        </p:style>
+      </p:cxnSp>
+      <p:sp>
+        <p:nvSpPr>
+          <p:cNvPr id="13" name="文本框 12"/>
+          <p:cNvSpPr txBox="1"/>
+          <p:nvPr/>
+        </p:nvSpPr>
+        <p:spPr>
+          <a:xfrm>
+            <a:off x="6990149" y="1426631"/>
+            <a:ext cx="654475" cy="369332"/>
+          </a:xfrm>
+          <a:prstGeom prst="rect">
+            <a:avLst/>
+          </a:prstGeom>
+          <a:noFill/>
+        </p:spPr>
+        <p:txBody>
+          <a:bodyPr wrap="square" rtlCol="0">
+            <a:spAutoFit/>
+          </a:bodyPr>
+          <a:lstStyle/>
+          <a:p>
+            <a:r>
+              <a:rPr lang="zh-CN" altLang="en-US" dirty="0">
+                <a:solidFill>
+                  <a:srgbClr val="C00000"/>
+                </a:solidFill>
+                <a:latin typeface="Microsoft YaHei" charset="0"/>
+                <a:ea typeface="Microsoft YaHei" charset="0"/>
+                <a:cs typeface="Microsoft YaHei" charset="0"/>
+              </a:rPr>
+              <a:t>个人</a:t>
+            </a:r>
+            <a:endParaRPr lang="zh-CN" altLang="en-US" dirty="0" smtClean="0">
+              <a:solidFill>
+                <a:srgbClr val="C00000"/>
+              </a:solidFill>
+              <a:latin typeface="Microsoft YaHei" charset="0"/>
+              <a:ea typeface="Microsoft YaHei" charset="0"/>
+              <a:cs typeface="Microsoft YaHei" charset="0"/>
+            </a:endParaRPr>
+          </a:p>
+        </p:txBody>
+      </p:sp>
+      <p:sp>
+        <p:nvSpPr>
+          <p:cNvPr id="18" name="文本框 17"/>
+          <p:cNvSpPr txBox="1"/>
+          <p:nvPr/>
+        </p:nvSpPr>
+        <p:spPr>
+          <a:xfrm>
+            <a:off x="2165613" y="1268760"/>
+            <a:ext cx="2272395" cy="923330"/>
+          </a:xfrm>
+          <a:prstGeom prst="rect">
+            <a:avLst/>
+          </a:prstGeom>
+          <a:noFill/>
+        </p:spPr>
+        <p:txBody>
+          <a:bodyPr wrap="square" rtlCol="0">
+            <a:spAutoFit/>
+          </a:bodyPr>
+          <a:lstStyle/>
+          <a:p>
+            <a:r>
+              <a:rPr lang="en-US" altLang="zh-CN" dirty="0" smtClean="0">
+                <a:solidFill>
+                  <a:schemeClr val="tx2">
+                    <a:lumMod val="75000"/>
+                  </a:schemeClr>
+                </a:solidFill>
+                <a:latin typeface="Microsoft YaHei" charset="0"/>
+                <a:ea typeface="Microsoft YaHei" charset="0"/>
+                <a:cs typeface="Microsoft YaHei" charset="0"/>
+              </a:rPr>
+              <a:t>IT</a:t>
+            </a:r>
+            <a:r>
+              <a:rPr lang="zh-CN" altLang="en-US" dirty="0" smtClean="0">
+                <a:solidFill>
+                  <a:schemeClr val="tx2">
+                    <a:lumMod val="75000"/>
+                  </a:schemeClr>
+                </a:solidFill>
+                <a:latin typeface="Microsoft YaHei" charset="0"/>
+                <a:ea typeface="Microsoft YaHei" charset="0"/>
+                <a:cs typeface="Microsoft YaHei" charset="0"/>
+              </a:rPr>
+              <a:t>引领</a:t>
+            </a:r>
+            <a:r>
+              <a:rPr lang="zh-CN" altLang="en-US" dirty="0" smtClean="0">
+                <a:solidFill>
+                  <a:schemeClr val="tx2">
+                    <a:lumMod val="75000"/>
+                  </a:schemeClr>
+                </a:solidFill>
+                <a:latin typeface="Microsoft YaHei" charset="0"/>
+                <a:ea typeface="Microsoft YaHei" charset="0"/>
+                <a:cs typeface="Microsoft YaHei" charset="0"/>
+              </a:rPr>
+              <a:t>业务发展</a:t>
+            </a:r>
+            <a:endParaRPr lang="en-US" altLang="zh-CN" dirty="0" smtClean="0">
+              <a:solidFill>
+                <a:schemeClr val="tx2">
+                  <a:lumMod val="75000"/>
+                </a:schemeClr>
+              </a:solidFill>
+              <a:latin typeface="Microsoft YaHei" charset="0"/>
+              <a:ea typeface="Microsoft YaHei" charset="0"/>
+              <a:cs typeface="Microsoft YaHei" charset="0"/>
+            </a:endParaRPr>
+          </a:p>
+          <a:p>
+            <a:r>
+              <a:rPr lang="zh-CN" altLang="en-US" dirty="0">
+                <a:solidFill>
+                  <a:schemeClr val="tx2">
+                    <a:lumMod val="75000"/>
+                  </a:schemeClr>
+                </a:solidFill>
+                <a:latin typeface="Microsoft YaHei" charset="0"/>
+                <a:ea typeface="Microsoft YaHei" charset="0"/>
+                <a:cs typeface="Microsoft YaHei" charset="0"/>
+              </a:rPr>
+              <a:t>核心竞争力自主掌</a:t>
+            </a:r>
+            <a:r>
+              <a:rPr lang="zh-CN" altLang="en-US" dirty="0" smtClean="0">
+                <a:solidFill>
+                  <a:schemeClr val="tx2">
+                    <a:lumMod val="75000"/>
+                  </a:schemeClr>
+                </a:solidFill>
+                <a:latin typeface="Microsoft YaHei" charset="0"/>
+                <a:ea typeface="Microsoft YaHei" charset="0"/>
+                <a:cs typeface="Microsoft YaHei" charset="0"/>
+              </a:rPr>
+              <a:t>控</a:t>
+            </a:r>
+            <a:endParaRPr lang="en-US" altLang="zh-CN" dirty="0" smtClean="0">
+              <a:solidFill>
+                <a:schemeClr val="tx2">
+                  <a:lumMod val="75000"/>
+                </a:schemeClr>
+              </a:solidFill>
+              <a:latin typeface="Microsoft YaHei" charset="0"/>
+              <a:ea typeface="Microsoft YaHei" charset="0"/>
+              <a:cs typeface="Microsoft YaHei" charset="0"/>
+            </a:endParaRPr>
+          </a:p>
+          <a:p>
+            <a:r>
+              <a:rPr lang="zh-CN" altLang="en-US" dirty="0" smtClean="0">
+                <a:solidFill>
+                  <a:schemeClr val="tx2">
+                    <a:lumMod val="75000"/>
+                  </a:schemeClr>
+                </a:solidFill>
+                <a:latin typeface="Microsoft YaHei" charset="0"/>
+                <a:ea typeface="Microsoft YaHei" charset="0"/>
+                <a:cs typeface="Microsoft YaHei" charset="0"/>
+              </a:rPr>
+              <a:t>提升企业运营效率</a:t>
+            </a:r>
+            <a:endParaRPr lang="zh-CN" altLang="en-US" dirty="0" smtClean="0">
+              <a:solidFill>
+                <a:schemeClr val="tx2">
+                  <a:lumMod val="75000"/>
+                </a:schemeClr>
+              </a:solidFill>
+              <a:latin typeface="Microsoft YaHei" charset="0"/>
+              <a:ea typeface="Microsoft YaHei" charset="0"/>
+              <a:cs typeface="Microsoft YaHei" charset="0"/>
+            </a:endParaRPr>
+          </a:p>
+        </p:txBody>
+      </p:sp>
+      <p:sp>
+        <p:nvSpPr>
+          <p:cNvPr id="19" name="文本框 18"/>
+          <p:cNvSpPr txBox="1"/>
+          <p:nvPr/>
+        </p:nvSpPr>
+        <p:spPr>
+          <a:xfrm>
+            <a:off x="8083182" y="1414517"/>
+            <a:ext cx="2272395" cy="646331"/>
+          </a:xfrm>
+          <a:prstGeom prst="rect">
+            <a:avLst/>
+          </a:prstGeom>
+          <a:noFill/>
+        </p:spPr>
+        <p:txBody>
+          <a:bodyPr wrap="square" rtlCol="0">
+            <a:spAutoFit/>
+          </a:bodyPr>
+          <a:lstStyle/>
+          <a:p>
+            <a:r>
+              <a:rPr lang="zh-CN" altLang="en-US" dirty="0" smtClean="0">
+                <a:solidFill>
+                  <a:schemeClr val="tx2">
+                    <a:lumMod val="75000"/>
+                  </a:schemeClr>
+                </a:solidFill>
+                <a:latin typeface="Microsoft YaHei" charset="0"/>
+                <a:ea typeface="Microsoft YaHei" charset="0"/>
+                <a:cs typeface="Microsoft YaHei" charset="0"/>
+              </a:rPr>
+              <a:t>个人地位的迅速确立</a:t>
+            </a:r>
+            <a:endParaRPr lang="en-US" altLang="zh-CN" dirty="0" smtClean="0">
+              <a:solidFill>
+                <a:schemeClr val="tx2">
+                  <a:lumMod val="75000"/>
+                </a:schemeClr>
+              </a:solidFill>
+              <a:latin typeface="Microsoft YaHei" charset="0"/>
+              <a:ea typeface="Microsoft YaHei" charset="0"/>
+              <a:cs typeface="Microsoft YaHei" charset="0"/>
+            </a:endParaRPr>
+          </a:p>
+          <a:p>
+            <a:r>
+              <a:rPr lang="zh-CN" altLang="en-US" dirty="0" smtClean="0">
+                <a:solidFill>
+                  <a:schemeClr val="tx2">
+                    <a:lumMod val="75000"/>
+                  </a:schemeClr>
+                </a:solidFill>
+                <a:latin typeface="Microsoft YaHei" charset="0"/>
+                <a:ea typeface="Microsoft YaHei" charset="0"/>
+                <a:cs typeface="Microsoft YaHei" charset="0"/>
+              </a:rPr>
+              <a:t>个人视野的开拓</a:t>
+            </a:r>
+            <a:endParaRPr lang="zh-CN" altLang="en-US" dirty="0" smtClean="0">
+              <a:solidFill>
+                <a:schemeClr val="tx2">
+                  <a:lumMod val="75000"/>
+                </a:schemeClr>
+              </a:solidFill>
+              <a:latin typeface="Microsoft YaHei" charset="0"/>
+              <a:ea typeface="Microsoft YaHei" charset="0"/>
+              <a:cs typeface="Microsoft YaHei" charset="0"/>
+            </a:endParaRPr>
+          </a:p>
+        </p:txBody>
+      </p:sp>
+      <p:cxnSp>
+        <p:nvCxnSpPr>
+          <p:cNvPr id="20" name="直接连接符 19"/>
+          <p:cNvCxnSpPr>
+            <a:stCxn id="4" idx="3"/>
+          </p:cNvCxnSpPr>
+          <p:nvPr/>
+        </p:nvCxnSpPr>
+        <p:spPr>
+          <a:xfrm flipH="1">
+            <a:off x="4029979" y="5056651"/>
+            <a:ext cx="504762" cy="316325"/>
+          </a:xfrm>
+          <a:prstGeom prst="line">
+            <a:avLst/>
+          </a:prstGeom>
+          <a:ln w="25400">
+            <a:solidFill>
+              <a:schemeClr val="tx1">
+                <a:lumMod val="75000"/>
+              </a:schemeClr>
+            </a:solidFill>
+          </a:ln>
+        </p:spPr>
+        <p:style>
+          <a:lnRef idx="1">
+            <a:schemeClr val="accent1"/>
+          </a:lnRef>
+          <a:fillRef idx="0">
+            <a:schemeClr val="accent1"/>
+          </a:fillRef>
+          <a:effectRef idx="0">
+            <a:schemeClr val="accent1"/>
+          </a:effectRef>
+          <a:fontRef idx="minor">
+            <a:schemeClr val="tx1"/>
+          </a:fontRef>
+        </p:style>
+      </p:cxnSp>
+      <p:cxnSp>
+        <p:nvCxnSpPr>
+          <p:cNvPr id="21" name="直接连接符 20"/>
+          <p:cNvCxnSpPr/>
+          <p:nvPr/>
+        </p:nvCxnSpPr>
+        <p:spPr>
+          <a:xfrm flipH="1">
+            <a:off x="3494062" y="5372976"/>
+            <a:ext cx="535917" cy="0"/>
+          </a:xfrm>
+          <a:prstGeom prst="line">
+            <a:avLst/>
+          </a:prstGeom>
+          <a:ln w="25400">
+            <a:solidFill>
+              <a:schemeClr val="tx1">
+                <a:lumMod val="75000"/>
+              </a:schemeClr>
+            </a:solidFill>
+          </a:ln>
+        </p:spPr>
+        <p:style>
+          <a:lnRef idx="1">
+            <a:schemeClr val="accent1"/>
+          </a:lnRef>
+          <a:fillRef idx="0">
+            <a:schemeClr val="accent1"/>
+          </a:fillRef>
+          <a:effectRef idx="0">
+            <a:schemeClr val="accent1"/>
+          </a:effectRef>
+          <a:fontRef idx="minor">
+            <a:schemeClr val="tx1"/>
+          </a:fontRef>
+        </p:style>
+      </p:cxnSp>
+      <p:sp>
+        <p:nvSpPr>
+          <p:cNvPr id="24" name="文本框 23"/>
+          <p:cNvSpPr txBox="1"/>
+          <p:nvPr/>
+        </p:nvSpPr>
+        <p:spPr>
+          <a:xfrm>
+            <a:off x="1127448" y="5049861"/>
+            <a:ext cx="2272395" cy="646331"/>
+          </a:xfrm>
+          <a:prstGeom prst="rect">
+            <a:avLst/>
+          </a:prstGeom>
+          <a:noFill/>
+        </p:spPr>
+        <p:txBody>
+          <a:bodyPr wrap="square" rtlCol="0">
+            <a:spAutoFit/>
+          </a:bodyPr>
+          <a:lstStyle/>
+          <a:p>
+            <a:r>
+              <a:rPr lang="zh-CN" altLang="en-US" dirty="0" smtClean="0">
+                <a:solidFill>
+                  <a:schemeClr val="tx2">
+                    <a:lumMod val="75000"/>
+                  </a:schemeClr>
+                </a:solidFill>
+                <a:latin typeface="Microsoft YaHei" charset="0"/>
+                <a:ea typeface="Microsoft YaHei" charset="0"/>
+                <a:cs typeface="Microsoft YaHei" charset="0"/>
+              </a:rPr>
+              <a:t>长期稳定的收入来源</a:t>
+            </a:r>
+            <a:endParaRPr lang="en-US" altLang="zh-CN" dirty="0" smtClean="0">
+              <a:solidFill>
+                <a:schemeClr val="tx2">
+                  <a:lumMod val="75000"/>
+                </a:schemeClr>
+              </a:solidFill>
+              <a:latin typeface="Microsoft YaHei" charset="0"/>
+              <a:ea typeface="Microsoft YaHei" charset="0"/>
+              <a:cs typeface="Microsoft YaHei" charset="0"/>
+            </a:endParaRPr>
+          </a:p>
+          <a:p>
+            <a:r>
+              <a:rPr lang="zh-CN" altLang="en-US" dirty="0" smtClean="0">
+                <a:solidFill>
+                  <a:schemeClr val="tx2">
+                    <a:lumMod val="75000"/>
+                  </a:schemeClr>
+                </a:solidFill>
+                <a:latin typeface="Microsoft YaHei" charset="0"/>
+                <a:ea typeface="Microsoft YaHei" charset="0"/>
+                <a:cs typeface="Microsoft YaHei" charset="0"/>
+              </a:rPr>
+              <a:t>人才培养基地</a:t>
+            </a:r>
+            <a:endParaRPr lang="zh-CN" altLang="en-US" dirty="0" smtClean="0">
+              <a:solidFill>
+                <a:schemeClr val="tx2">
+                  <a:lumMod val="75000"/>
+                </a:schemeClr>
+              </a:solidFill>
+              <a:latin typeface="Microsoft YaHei" charset="0"/>
+              <a:ea typeface="Microsoft YaHei" charset="0"/>
+              <a:cs typeface="Microsoft YaHei" charset="0"/>
+            </a:endParaRPr>
+          </a:p>
+        </p:txBody>
+      </p:sp>
+      <p:cxnSp>
+        <p:nvCxnSpPr>
+          <p:cNvPr id="25" name="直接连接符 24"/>
+          <p:cNvCxnSpPr>
+            <a:stCxn id="5" idx="5"/>
+          </p:cNvCxnSpPr>
+          <p:nvPr/>
+        </p:nvCxnSpPr>
+        <p:spPr>
+          <a:xfrm>
+            <a:off x="8041976" y="5056651"/>
+            <a:ext cx="460341" cy="316325"/>
+          </a:xfrm>
+          <a:prstGeom prst="line">
+            <a:avLst/>
+          </a:prstGeom>
+          <a:ln w="25400">
+            <a:solidFill>
+              <a:schemeClr val="tx1">
+                <a:lumMod val="75000"/>
+              </a:schemeClr>
+            </a:solidFill>
+          </a:ln>
+        </p:spPr>
+        <p:style>
+          <a:lnRef idx="1">
+            <a:schemeClr val="accent1"/>
+          </a:lnRef>
+          <a:fillRef idx="0">
+            <a:schemeClr val="accent1"/>
+          </a:fillRef>
+          <a:effectRef idx="0">
+            <a:schemeClr val="accent1"/>
+          </a:effectRef>
+          <a:fontRef idx="minor">
+            <a:schemeClr val="tx1"/>
+          </a:fontRef>
+        </p:style>
+      </p:cxnSp>
+      <p:cxnSp>
+        <p:nvCxnSpPr>
+          <p:cNvPr id="26" name="直接连接符 25"/>
+          <p:cNvCxnSpPr/>
+          <p:nvPr/>
+        </p:nvCxnSpPr>
+        <p:spPr>
+          <a:xfrm flipH="1">
+            <a:off x="8488462" y="5381655"/>
+            <a:ext cx="535917" cy="0"/>
+          </a:xfrm>
+          <a:prstGeom prst="line">
+            <a:avLst/>
+          </a:prstGeom>
+          <a:ln w="25400">
+            <a:solidFill>
+              <a:schemeClr val="tx1">
+                <a:lumMod val="75000"/>
+              </a:schemeClr>
+            </a:solidFill>
+          </a:ln>
+        </p:spPr>
+        <p:style>
+          <a:lnRef idx="1">
+            <a:schemeClr val="accent1"/>
+          </a:lnRef>
+          <a:fillRef idx="0">
+            <a:schemeClr val="accent1"/>
+          </a:fillRef>
+          <a:effectRef idx="0">
+            <a:schemeClr val="accent1"/>
+          </a:effectRef>
+          <a:fontRef idx="minor">
+            <a:schemeClr val="tx1"/>
+          </a:fontRef>
+        </p:style>
+      </p:cxnSp>
+      <p:sp>
+        <p:nvSpPr>
+          <p:cNvPr id="27" name="文本框 26"/>
+          <p:cNvSpPr txBox="1"/>
+          <p:nvPr/>
+        </p:nvSpPr>
+        <p:spPr>
+          <a:xfrm>
+            <a:off x="9101424" y="5049810"/>
+            <a:ext cx="2272395" cy="646331"/>
+          </a:xfrm>
+          <a:prstGeom prst="rect">
+            <a:avLst/>
+          </a:prstGeom>
+          <a:noFill/>
+        </p:spPr>
+        <p:txBody>
+          <a:bodyPr wrap="square" rtlCol="0">
+            <a:spAutoFit/>
+          </a:bodyPr>
+          <a:lstStyle/>
+          <a:p>
+            <a:r>
+              <a:rPr lang="zh-CN" altLang="en-US" dirty="0" smtClean="0">
+                <a:solidFill>
+                  <a:schemeClr val="tx2">
+                    <a:lumMod val="75000"/>
+                  </a:schemeClr>
+                </a:solidFill>
+                <a:latin typeface="Microsoft YaHei" charset="0"/>
+                <a:ea typeface="Microsoft YaHei" charset="0"/>
+                <a:cs typeface="Microsoft YaHei" charset="0"/>
+              </a:rPr>
+              <a:t>个人持续成长</a:t>
+            </a:r>
+            <a:endParaRPr lang="en-US" altLang="zh-CN" dirty="0" smtClean="0">
+              <a:solidFill>
+                <a:schemeClr val="tx2">
+                  <a:lumMod val="75000"/>
+                </a:schemeClr>
+              </a:solidFill>
+              <a:latin typeface="Microsoft YaHei" charset="0"/>
+              <a:ea typeface="Microsoft YaHei" charset="0"/>
+              <a:cs typeface="Microsoft YaHei" charset="0"/>
+            </a:endParaRPr>
+          </a:p>
+          <a:p>
+            <a:r>
+              <a:rPr lang="zh-CN" altLang="en-US" dirty="0" smtClean="0">
+                <a:solidFill>
+                  <a:schemeClr val="tx2">
+                    <a:lumMod val="75000"/>
+                  </a:schemeClr>
+                </a:solidFill>
+                <a:latin typeface="Microsoft YaHei" charset="0"/>
+                <a:ea typeface="Microsoft YaHei" charset="0"/>
+                <a:cs typeface="Microsoft YaHei" charset="0"/>
+              </a:rPr>
+              <a:t>个人价值体现</a:t>
+            </a:r>
+            <a:endParaRPr lang="zh-CN" altLang="en-US" dirty="0" smtClean="0">
+              <a:solidFill>
+                <a:schemeClr val="tx2">
+                  <a:lumMod val="75000"/>
+                </a:schemeClr>
+              </a:solidFill>
+              <a:latin typeface="Microsoft YaHei" charset="0"/>
+              <a:ea typeface="Microsoft YaHei" charset="0"/>
+              <a:cs typeface="Microsoft YaHei" charset="0"/>
+            </a:endParaRPr>
           </a:p>
         </p:txBody>
       </p:sp>
@@ -4056,9 +5438,1390 @@
   <p:timing>
     <p:tnLst>
       <p:par>
-        <p:cTn id="1" dur="indefinite" restart="never" nodeType="tmRoot"/>
+        <p:cTn id="1" dur="indefinite" restart="never" nodeType="tmRoot">
+          <p:childTnLst>
+            <p:seq concurrent="1" nextAc="seek">
+              <p:cTn id="2" dur="indefinite" nodeType="mainSeq">
+                <p:childTnLst>
+                  <p:par>
+                    <p:cTn id="3" fill="hold">
+                      <p:stCondLst>
+                        <p:cond delay="indefinite"/>
+                      </p:stCondLst>
+                      <p:childTnLst>
+                        <p:par>
+                          <p:cTn id="4" fill="hold">
+                            <p:stCondLst>
+                              <p:cond delay="0"/>
+                            </p:stCondLst>
+                            <p:childTnLst>
+                              <p:par>
+                                <p:cTn id="5" presetID="14" presetClass="entr" presetSubtype="10" fill="hold" grpId="0" nodeType="clickEffect">
+                                  <p:stCondLst>
+                                    <p:cond delay="0"/>
+                                  </p:stCondLst>
+                                  <p:childTnLst>
+                                    <p:set>
+                                      <p:cBhvr>
+                                        <p:cTn id="6" dur="1" fill="hold">
+                                          <p:stCondLst>
+                                            <p:cond delay="0"/>
+                                          </p:stCondLst>
+                                        </p:cTn>
+                                        <p:tgtEl>
+                                          <p:spTgt spid="2"/>
+                                        </p:tgtEl>
+                                        <p:attrNameLst>
+                                          <p:attrName>style.visibility</p:attrName>
+                                        </p:attrNameLst>
+                                      </p:cBhvr>
+                                      <p:to>
+                                        <p:strVal val="visible"/>
+                                      </p:to>
+                                    </p:set>
+                                    <p:animEffect transition="in" filter="randombar(horizontal)">
+                                      <p:cBhvr>
+                                        <p:cTn id="7" dur="500"/>
+                                        <p:tgtEl>
+                                          <p:spTgt spid="2"/>
+                                        </p:tgtEl>
+                                      </p:cBhvr>
+                                    </p:animEffect>
+                                  </p:childTnLst>
+                                </p:cTn>
+                              </p:par>
+                            </p:childTnLst>
+                          </p:cTn>
+                        </p:par>
+                        <p:par>
+                          <p:cTn id="8" fill="hold">
+                            <p:stCondLst>
+                              <p:cond delay="500"/>
+                            </p:stCondLst>
+                            <p:childTnLst>
+                              <p:par>
+                                <p:cTn id="9" presetID="14" presetClass="entr" presetSubtype="10" fill="hold" grpId="0" nodeType="afterEffect">
+                                  <p:stCondLst>
+                                    <p:cond delay="0"/>
+                                  </p:stCondLst>
+                                  <p:childTnLst>
+                                    <p:set>
+                                      <p:cBhvr>
+                                        <p:cTn id="10" dur="1" fill="hold">
+                                          <p:stCondLst>
+                                            <p:cond delay="0"/>
+                                          </p:stCondLst>
+                                        </p:cTn>
+                                        <p:tgtEl>
+                                          <p:spTgt spid="4"/>
+                                        </p:tgtEl>
+                                        <p:attrNameLst>
+                                          <p:attrName>style.visibility</p:attrName>
+                                        </p:attrNameLst>
+                                      </p:cBhvr>
+                                      <p:to>
+                                        <p:strVal val="visible"/>
+                                      </p:to>
+                                    </p:set>
+                                    <p:animEffect transition="in" filter="randombar(horizontal)">
+                                      <p:cBhvr>
+                                        <p:cTn id="11" dur="500"/>
+                                        <p:tgtEl>
+                                          <p:spTgt spid="4"/>
+                                        </p:tgtEl>
+                                      </p:cBhvr>
+                                    </p:animEffect>
+                                  </p:childTnLst>
+                                </p:cTn>
+                              </p:par>
+                            </p:childTnLst>
+                          </p:cTn>
+                        </p:par>
+                        <p:par>
+                          <p:cTn id="12" fill="hold">
+                            <p:stCondLst>
+                              <p:cond delay="1000"/>
+                            </p:stCondLst>
+                            <p:childTnLst>
+                              <p:par>
+                                <p:cTn id="13" presetID="14" presetClass="entr" presetSubtype="10" fill="hold" grpId="0" nodeType="afterEffect">
+                                  <p:stCondLst>
+                                    <p:cond delay="0"/>
+                                  </p:stCondLst>
+                                  <p:childTnLst>
+                                    <p:set>
+                                      <p:cBhvr>
+                                        <p:cTn id="14" dur="1" fill="hold">
+                                          <p:stCondLst>
+                                            <p:cond delay="0"/>
+                                          </p:stCondLst>
+                                        </p:cTn>
+                                        <p:tgtEl>
+                                          <p:spTgt spid="5"/>
+                                        </p:tgtEl>
+                                        <p:attrNameLst>
+                                          <p:attrName>style.visibility</p:attrName>
+                                        </p:attrNameLst>
+                                      </p:cBhvr>
+                                      <p:to>
+                                        <p:strVal val="visible"/>
+                                      </p:to>
+                                    </p:set>
+                                    <p:animEffect transition="in" filter="randombar(horizontal)">
+                                      <p:cBhvr>
+                                        <p:cTn id="15" dur="500"/>
+                                        <p:tgtEl>
+                                          <p:spTgt spid="5"/>
+                                        </p:tgtEl>
+                                      </p:cBhvr>
+                                    </p:animEffect>
+                                  </p:childTnLst>
+                                </p:cTn>
+                              </p:par>
+                            </p:childTnLst>
+                          </p:cTn>
+                        </p:par>
+                      </p:childTnLst>
+                    </p:cTn>
+                  </p:par>
+                  <p:par>
+                    <p:cTn id="16" fill="hold">
+                      <p:stCondLst>
+                        <p:cond delay="indefinite"/>
+                      </p:stCondLst>
+                      <p:childTnLst>
+                        <p:par>
+                          <p:cTn id="17" fill="hold">
+                            <p:stCondLst>
+                              <p:cond delay="0"/>
+                            </p:stCondLst>
+                            <p:childTnLst>
+                              <p:par>
+                                <p:cTn id="18" presetID="42" presetClass="entr" presetSubtype="0" fill="hold" nodeType="clickEffect">
+                                  <p:stCondLst>
+                                    <p:cond delay="0"/>
+                                  </p:stCondLst>
+                                  <p:childTnLst>
+                                    <p:set>
+                                      <p:cBhvr>
+                                        <p:cTn id="19" dur="1" fill="hold">
+                                          <p:stCondLst>
+                                            <p:cond delay="0"/>
+                                          </p:stCondLst>
+                                        </p:cTn>
+                                        <p:tgtEl>
+                                          <p:spTgt spid="7"/>
+                                        </p:tgtEl>
+                                        <p:attrNameLst>
+                                          <p:attrName>style.visibility</p:attrName>
+                                        </p:attrNameLst>
+                                      </p:cBhvr>
+                                      <p:to>
+                                        <p:strVal val="visible"/>
+                                      </p:to>
+                                    </p:set>
+                                    <p:animEffect transition="in" filter="fade">
+                                      <p:cBhvr>
+                                        <p:cTn id="20" dur="1000"/>
+                                        <p:tgtEl>
+                                          <p:spTgt spid="7"/>
+                                        </p:tgtEl>
+                                      </p:cBhvr>
+                                    </p:animEffect>
+                                    <p:anim calcmode="lin" valueType="num">
+                                      <p:cBhvr>
+                                        <p:cTn id="21" dur="1000" fill="hold"/>
+                                        <p:tgtEl>
+                                          <p:spTgt spid="7"/>
+                                        </p:tgtEl>
+                                        <p:attrNameLst>
+                                          <p:attrName>ppt_x</p:attrName>
+                                        </p:attrNameLst>
+                                      </p:cBhvr>
+                                      <p:tavLst>
+                                        <p:tav tm="0">
+                                          <p:val>
+                                            <p:strVal val="#ppt_x"/>
+                                          </p:val>
+                                        </p:tav>
+                                        <p:tav tm="100000">
+                                          <p:val>
+                                            <p:strVal val="#ppt_x"/>
+                                          </p:val>
+                                        </p:tav>
+                                      </p:tavLst>
+                                    </p:anim>
+                                    <p:anim calcmode="lin" valueType="num">
+                                      <p:cBhvr>
+                                        <p:cTn id="22" dur="1000" fill="hold"/>
+                                        <p:tgtEl>
+                                          <p:spTgt spid="7"/>
+                                        </p:tgtEl>
+                                        <p:attrNameLst>
+                                          <p:attrName>ppt_y</p:attrName>
+                                        </p:attrNameLst>
+                                      </p:cBhvr>
+                                      <p:tavLst>
+                                        <p:tav tm="0">
+                                          <p:val>
+                                            <p:strVal val="#ppt_y+.1"/>
+                                          </p:val>
+                                        </p:tav>
+                                        <p:tav tm="100000">
+                                          <p:val>
+                                            <p:strVal val="#ppt_y"/>
+                                          </p:val>
+                                        </p:tav>
+                                      </p:tavLst>
+                                    </p:anim>
+                                  </p:childTnLst>
+                                </p:cTn>
+                              </p:par>
+                              <p:par>
+                                <p:cTn id="23" presetID="42" presetClass="entr" presetSubtype="0" fill="hold" nodeType="withEffect">
+                                  <p:stCondLst>
+                                    <p:cond delay="0"/>
+                                  </p:stCondLst>
+                                  <p:childTnLst>
+                                    <p:set>
+                                      <p:cBhvr>
+                                        <p:cTn id="24" dur="1" fill="hold">
+                                          <p:stCondLst>
+                                            <p:cond delay="0"/>
+                                          </p:stCondLst>
+                                        </p:cTn>
+                                        <p:tgtEl>
+                                          <p:spTgt spid="9"/>
+                                        </p:tgtEl>
+                                        <p:attrNameLst>
+                                          <p:attrName>style.visibility</p:attrName>
+                                        </p:attrNameLst>
+                                      </p:cBhvr>
+                                      <p:to>
+                                        <p:strVal val="visible"/>
+                                      </p:to>
+                                    </p:set>
+                                    <p:animEffect transition="in" filter="fade">
+                                      <p:cBhvr>
+                                        <p:cTn id="25" dur="1000"/>
+                                        <p:tgtEl>
+                                          <p:spTgt spid="9"/>
+                                        </p:tgtEl>
+                                      </p:cBhvr>
+                                    </p:animEffect>
+                                    <p:anim calcmode="lin" valueType="num">
+                                      <p:cBhvr>
+                                        <p:cTn id="26" dur="1000" fill="hold"/>
+                                        <p:tgtEl>
+                                          <p:spTgt spid="9"/>
+                                        </p:tgtEl>
+                                        <p:attrNameLst>
+                                          <p:attrName>ppt_x</p:attrName>
+                                        </p:attrNameLst>
+                                      </p:cBhvr>
+                                      <p:tavLst>
+                                        <p:tav tm="0">
+                                          <p:val>
+                                            <p:strVal val="#ppt_x"/>
+                                          </p:val>
+                                        </p:tav>
+                                        <p:tav tm="100000">
+                                          <p:val>
+                                            <p:strVal val="#ppt_x"/>
+                                          </p:val>
+                                        </p:tav>
+                                      </p:tavLst>
+                                    </p:anim>
+                                    <p:anim calcmode="lin" valueType="num">
+                                      <p:cBhvr>
+                                        <p:cTn id="27" dur="1000" fill="hold"/>
+                                        <p:tgtEl>
+                                          <p:spTgt spid="9"/>
+                                        </p:tgtEl>
+                                        <p:attrNameLst>
+                                          <p:attrName>ppt_y</p:attrName>
+                                        </p:attrNameLst>
+                                      </p:cBhvr>
+                                      <p:tavLst>
+                                        <p:tav tm="0">
+                                          <p:val>
+                                            <p:strVal val="#ppt_y+.1"/>
+                                          </p:val>
+                                        </p:tav>
+                                        <p:tav tm="100000">
+                                          <p:val>
+                                            <p:strVal val="#ppt_y"/>
+                                          </p:val>
+                                        </p:tav>
+                                      </p:tavLst>
+                                    </p:anim>
+                                  </p:childTnLst>
+                                </p:cTn>
+                              </p:par>
+                              <p:par>
+                                <p:cTn id="28" presetID="42" presetClass="entr" presetSubtype="0" fill="hold" grpId="0" nodeType="withEffect">
+                                  <p:stCondLst>
+                                    <p:cond delay="0"/>
+                                  </p:stCondLst>
+                                  <p:childTnLst>
+                                    <p:set>
+                                      <p:cBhvr>
+                                        <p:cTn id="29" dur="1" fill="hold">
+                                          <p:stCondLst>
+                                            <p:cond delay="0"/>
+                                          </p:stCondLst>
+                                        </p:cTn>
+                                        <p:tgtEl>
+                                          <p:spTgt spid="10"/>
+                                        </p:tgtEl>
+                                        <p:attrNameLst>
+                                          <p:attrName>style.visibility</p:attrName>
+                                        </p:attrNameLst>
+                                      </p:cBhvr>
+                                      <p:to>
+                                        <p:strVal val="visible"/>
+                                      </p:to>
+                                    </p:set>
+                                    <p:animEffect transition="in" filter="fade">
+                                      <p:cBhvr>
+                                        <p:cTn id="30" dur="1000"/>
+                                        <p:tgtEl>
+                                          <p:spTgt spid="10"/>
+                                        </p:tgtEl>
+                                      </p:cBhvr>
+                                    </p:animEffect>
+                                    <p:anim calcmode="lin" valueType="num">
+                                      <p:cBhvr>
+                                        <p:cTn id="31" dur="1000" fill="hold"/>
+                                        <p:tgtEl>
+                                          <p:spTgt spid="10"/>
+                                        </p:tgtEl>
+                                        <p:attrNameLst>
+                                          <p:attrName>ppt_x</p:attrName>
+                                        </p:attrNameLst>
+                                      </p:cBhvr>
+                                      <p:tavLst>
+                                        <p:tav tm="0">
+                                          <p:val>
+                                            <p:strVal val="#ppt_x"/>
+                                          </p:val>
+                                        </p:tav>
+                                        <p:tav tm="100000">
+                                          <p:val>
+                                            <p:strVal val="#ppt_x"/>
+                                          </p:val>
+                                        </p:tav>
+                                      </p:tavLst>
+                                    </p:anim>
+                                    <p:anim calcmode="lin" valueType="num">
+                                      <p:cBhvr>
+                                        <p:cTn id="32" dur="1000" fill="hold"/>
+                                        <p:tgtEl>
+                                          <p:spTgt spid="10"/>
+                                        </p:tgtEl>
+                                        <p:attrNameLst>
+                                          <p:attrName>ppt_y</p:attrName>
+                                        </p:attrNameLst>
+                                      </p:cBhvr>
+                                      <p:tavLst>
+                                        <p:tav tm="0">
+                                          <p:val>
+                                            <p:strVal val="#ppt_y+.1"/>
+                                          </p:val>
+                                        </p:tav>
+                                        <p:tav tm="100000">
+                                          <p:val>
+                                            <p:strVal val="#ppt_y"/>
+                                          </p:val>
+                                        </p:tav>
+                                      </p:tavLst>
+                                    </p:anim>
+                                  </p:childTnLst>
+                                </p:cTn>
+                              </p:par>
+                              <p:par>
+                                <p:cTn id="33" presetID="42" presetClass="entr" presetSubtype="0" fill="hold" grpId="0" nodeType="withEffect">
+                                  <p:stCondLst>
+                                    <p:cond delay="0"/>
+                                  </p:stCondLst>
+                                  <p:childTnLst>
+                                    <p:set>
+                                      <p:cBhvr>
+                                        <p:cTn id="34" dur="1" fill="hold">
+                                          <p:stCondLst>
+                                            <p:cond delay="0"/>
+                                          </p:stCondLst>
+                                        </p:cTn>
+                                        <p:tgtEl>
+                                          <p:spTgt spid="18"/>
+                                        </p:tgtEl>
+                                        <p:attrNameLst>
+                                          <p:attrName>style.visibility</p:attrName>
+                                        </p:attrNameLst>
+                                      </p:cBhvr>
+                                      <p:to>
+                                        <p:strVal val="visible"/>
+                                      </p:to>
+                                    </p:set>
+                                    <p:animEffect transition="in" filter="fade">
+                                      <p:cBhvr>
+                                        <p:cTn id="35" dur="1000"/>
+                                        <p:tgtEl>
+                                          <p:spTgt spid="18"/>
+                                        </p:tgtEl>
+                                      </p:cBhvr>
+                                    </p:animEffect>
+                                    <p:anim calcmode="lin" valueType="num">
+                                      <p:cBhvr>
+                                        <p:cTn id="36" dur="1000" fill="hold"/>
+                                        <p:tgtEl>
+                                          <p:spTgt spid="18"/>
+                                        </p:tgtEl>
+                                        <p:attrNameLst>
+                                          <p:attrName>ppt_x</p:attrName>
+                                        </p:attrNameLst>
+                                      </p:cBhvr>
+                                      <p:tavLst>
+                                        <p:tav tm="0">
+                                          <p:val>
+                                            <p:strVal val="#ppt_x"/>
+                                          </p:val>
+                                        </p:tav>
+                                        <p:tav tm="100000">
+                                          <p:val>
+                                            <p:strVal val="#ppt_x"/>
+                                          </p:val>
+                                        </p:tav>
+                                      </p:tavLst>
+                                    </p:anim>
+                                    <p:anim calcmode="lin" valueType="num">
+                                      <p:cBhvr>
+                                        <p:cTn id="37" dur="1000" fill="hold"/>
+                                        <p:tgtEl>
+                                          <p:spTgt spid="18"/>
+                                        </p:tgtEl>
+                                        <p:attrNameLst>
+                                          <p:attrName>ppt_y</p:attrName>
+                                        </p:attrNameLst>
+                                      </p:cBhvr>
+                                      <p:tavLst>
+                                        <p:tav tm="0">
+                                          <p:val>
+                                            <p:strVal val="#ppt_y+.1"/>
+                                          </p:val>
+                                        </p:tav>
+                                        <p:tav tm="100000">
+                                          <p:val>
+                                            <p:strVal val="#ppt_y"/>
+                                          </p:val>
+                                        </p:tav>
+                                      </p:tavLst>
+                                    </p:anim>
+                                  </p:childTnLst>
+                                </p:cTn>
+                              </p:par>
+                            </p:childTnLst>
+                          </p:cTn>
+                        </p:par>
+                      </p:childTnLst>
+                    </p:cTn>
+                  </p:par>
+                  <p:par>
+                    <p:cTn id="38" fill="hold">
+                      <p:stCondLst>
+                        <p:cond delay="indefinite"/>
+                      </p:stCondLst>
+                      <p:childTnLst>
+                        <p:par>
+                          <p:cTn id="39" fill="hold">
+                            <p:stCondLst>
+                              <p:cond delay="0"/>
+                            </p:stCondLst>
+                            <p:childTnLst>
+                              <p:par>
+                                <p:cTn id="40" presetID="42" presetClass="entr" presetSubtype="0" fill="hold" nodeType="clickEffect">
+                                  <p:stCondLst>
+                                    <p:cond delay="0"/>
+                                  </p:stCondLst>
+                                  <p:childTnLst>
+                                    <p:set>
+                                      <p:cBhvr>
+                                        <p:cTn id="41" dur="1" fill="hold">
+                                          <p:stCondLst>
+                                            <p:cond delay="0"/>
+                                          </p:stCondLst>
+                                        </p:cTn>
+                                        <p:tgtEl>
+                                          <p:spTgt spid="11"/>
+                                        </p:tgtEl>
+                                        <p:attrNameLst>
+                                          <p:attrName>style.visibility</p:attrName>
+                                        </p:attrNameLst>
+                                      </p:cBhvr>
+                                      <p:to>
+                                        <p:strVal val="visible"/>
+                                      </p:to>
+                                    </p:set>
+                                    <p:animEffect transition="in" filter="fade">
+                                      <p:cBhvr>
+                                        <p:cTn id="42" dur="1000"/>
+                                        <p:tgtEl>
+                                          <p:spTgt spid="11"/>
+                                        </p:tgtEl>
+                                      </p:cBhvr>
+                                    </p:animEffect>
+                                    <p:anim calcmode="lin" valueType="num">
+                                      <p:cBhvr>
+                                        <p:cTn id="43" dur="1000" fill="hold"/>
+                                        <p:tgtEl>
+                                          <p:spTgt spid="11"/>
+                                        </p:tgtEl>
+                                        <p:attrNameLst>
+                                          <p:attrName>ppt_x</p:attrName>
+                                        </p:attrNameLst>
+                                      </p:cBhvr>
+                                      <p:tavLst>
+                                        <p:tav tm="0">
+                                          <p:val>
+                                            <p:strVal val="#ppt_x"/>
+                                          </p:val>
+                                        </p:tav>
+                                        <p:tav tm="100000">
+                                          <p:val>
+                                            <p:strVal val="#ppt_x"/>
+                                          </p:val>
+                                        </p:tav>
+                                      </p:tavLst>
+                                    </p:anim>
+                                    <p:anim calcmode="lin" valueType="num">
+                                      <p:cBhvr>
+                                        <p:cTn id="44" dur="1000" fill="hold"/>
+                                        <p:tgtEl>
+                                          <p:spTgt spid="11"/>
+                                        </p:tgtEl>
+                                        <p:attrNameLst>
+                                          <p:attrName>ppt_y</p:attrName>
+                                        </p:attrNameLst>
+                                      </p:cBhvr>
+                                      <p:tavLst>
+                                        <p:tav tm="0">
+                                          <p:val>
+                                            <p:strVal val="#ppt_y+.1"/>
+                                          </p:val>
+                                        </p:tav>
+                                        <p:tav tm="100000">
+                                          <p:val>
+                                            <p:strVal val="#ppt_y"/>
+                                          </p:val>
+                                        </p:tav>
+                                      </p:tavLst>
+                                    </p:anim>
+                                  </p:childTnLst>
+                                </p:cTn>
+                              </p:par>
+                              <p:par>
+                                <p:cTn id="45" presetID="42" presetClass="entr" presetSubtype="0" fill="hold" nodeType="withEffect">
+                                  <p:stCondLst>
+                                    <p:cond delay="0"/>
+                                  </p:stCondLst>
+                                  <p:childTnLst>
+                                    <p:set>
+                                      <p:cBhvr>
+                                        <p:cTn id="46" dur="1" fill="hold">
+                                          <p:stCondLst>
+                                            <p:cond delay="0"/>
+                                          </p:stCondLst>
+                                        </p:cTn>
+                                        <p:tgtEl>
+                                          <p:spTgt spid="12"/>
+                                        </p:tgtEl>
+                                        <p:attrNameLst>
+                                          <p:attrName>style.visibility</p:attrName>
+                                        </p:attrNameLst>
+                                      </p:cBhvr>
+                                      <p:to>
+                                        <p:strVal val="visible"/>
+                                      </p:to>
+                                    </p:set>
+                                    <p:animEffect transition="in" filter="fade">
+                                      <p:cBhvr>
+                                        <p:cTn id="47" dur="1000"/>
+                                        <p:tgtEl>
+                                          <p:spTgt spid="12"/>
+                                        </p:tgtEl>
+                                      </p:cBhvr>
+                                    </p:animEffect>
+                                    <p:anim calcmode="lin" valueType="num">
+                                      <p:cBhvr>
+                                        <p:cTn id="48" dur="1000" fill="hold"/>
+                                        <p:tgtEl>
+                                          <p:spTgt spid="12"/>
+                                        </p:tgtEl>
+                                        <p:attrNameLst>
+                                          <p:attrName>ppt_x</p:attrName>
+                                        </p:attrNameLst>
+                                      </p:cBhvr>
+                                      <p:tavLst>
+                                        <p:tav tm="0">
+                                          <p:val>
+                                            <p:strVal val="#ppt_x"/>
+                                          </p:val>
+                                        </p:tav>
+                                        <p:tav tm="100000">
+                                          <p:val>
+                                            <p:strVal val="#ppt_x"/>
+                                          </p:val>
+                                        </p:tav>
+                                      </p:tavLst>
+                                    </p:anim>
+                                    <p:anim calcmode="lin" valueType="num">
+                                      <p:cBhvr>
+                                        <p:cTn id="49" dur="1000" fill="hold"/>
+                                        <p:tgtEl>
+                                          <p:spTgt spid="12"/>
+                                        </p:tgtEl>
+                                        <p:attrNameLst>
+                                          <p:attrName>ppt_y</p:attrName>
+                                        </p:attrNameLst>
+                                      </p:cBhvr>
+                                      <p:tavLst>
+                                        <p:tav tm="0">
+                                          <p:val>
+                                            <p:strVal val="#ppt_y+.1"/>
+                                          </p:val>
+                                        </p:tav>
+                                        <p:tav tm="100000">
+                                          <p:val>
+                                            <p:strVal val="#ppt_y"/>
+                                          </p:val>
+                                        </p:tav>
+                                      </p:tavLst>
+                                    </p:anim>
+                                  </p:childTnLst>
+                                </p:cTn>
+                              </p:par>
+                              <p:par>
+                                <p:cTn id="50" presetID="42" presetClass="entr" presetSubtype="0" fill="hold" grpId="0" nodeType="withEffect">
+                                  <p:stCondLst>
+                                    <p:cond delay="0"/>
+                                  </p:stCondLst>
+                                  <p:childTnLst>
+                                    <p:set>
+                                      <p:cBhvr>
+                                        <p:cTn id="51" dur="1" fill="hold">
+                                          <p:stCondLst>
+                                            <p:cond delay="0"/>
+                                          </p:stCondLst>
+                                        </p:cTn>
+                                        <p:tgtEl>
+                                          <p:spTgt spid="13"/>
+                                        </p:tgtEl>
+                                        <p:attrNameLst>
+                                          <p:attrName>style.visibility</p:attrName>
+                                        </p:attrNameLst>
+                                      </p:cBhvr>
+                                      <p:to>
+                                        <p:strVal val="visible"/>
+                                      </p:to>
+                                    </p:set>
+                                    <p:animEffect transition="in" filter="fade">
+                                      <p:cBhvr>
+                                        <p:cTn id="52" dur="1000"/>
+                                        <p:tgtEl>
+                                          <p:spTgt spid="13"/>
+                                        </p:tgtEl>
+                                      </p:cBhvr>
+                                    </p:animEffect>
+                                    <p:anim calcmode="lin" valueType="num">
+                                      <p:cBhvr>
+                                        <p:cTn id="53" dur="1000" fill="hold"/>
+                                        <p:tgtEl>
+                                          <p:spTgt spid="13"/>
+                                        </p:tgtEl>
+                                        <p:attrNameLst>
+                                          <p:attrName>ppt_x</p:attrName>
+                                        </p:attrNameLst>
+                                      </p:cBhvr>
+                                      <p:tavLst>
+                                        <p:tav tm="0">
+                                          <p:val>
+                                            <p:strVal val="#ppt_x"/>
+                                          </p:val>
+                                        </p:tav>
+                                        <p:tav tm="100000">
+                                          <p:val>
+                                            <p:strVal val="#ppt_x"/>
+                                          </p:val>
+                                        </p:tav>
+                                      </p:tavLst>
+                                    </p:anim>
+                                    <p:anim calcmode="lin" valueType="num">
+                                      <p:cBhvr>
+                                        <p:cTn id="54" dur="1000" fill="hold"/>
+                                        <p:tgtEl>
+                                          <p:spTgt spid="13"/>
+                                        </p:tgtEl>
+                                        <p:attrNameLst>
+                                          <p:attrName>ppt_y</p:attrName>
+                                        </p:attrNameLst>
+                                      </p:cBhvr>
+                                      <p:tavLst>
+                                        <p:tav tm="0">
+                                          <p:val>
+                                            <p:strVal val="#ppt_y+.1"/>
+                                          </p:val>
+                                        </p:tav>
+                                        <p:tav tm="100000">
+                                          <p:val>
+                                            <p:strVal val="#ppt_y"/>
+                                          </p:val>
+                                        </p:tav>
+                                      </p:tavLst>
+                                    </p:anim>
+                                  </p:childTnLst>
+                                </p:cTn>
+                              </p:par>
+                              <p:par>
+                                <p:cTn id="55" presetID="42" presetClass="entr" presetSubtype="0" fill="hold" grpId="0" nodeType="withEffect">
+                                  <p:stCondLst>
+                                    <p:cond delay="0"/>
+                                  </p:stCondLst>
+                                  <p:childTnLst>
+                                    <p:set>
+                                      <p:cBhvr>
+                                        <p:cTn id="56" dur="1" fill="hold">
+                                          <p:stCondLst>
+                                            <p:cond delay="0"/>
+                                          </p:stCondLst>
+                                        </p:cTn>
+                                        <p:tgtEl>
+                                          <p:spTgt spid="19"/>
+                                        </p:tgtEl>
+                                        <p:attrNameLst>
+                                          <p:attrName>style.visibility</p:attrName>
+                                        </p:attrNameLst>
+                                      </p:cBhvr>
+                                      <p:to>
+                                        <p:strVal val="visible"/>
+                                      </p:to>
+                                    </p:set>
+                                    <p:animEffect transition="in" filter="fade">
+                                      <p:cBhvr>
+                                        <p:cTn id="57" dur="1000"/>
+                                        <p:tgtEl>
+                                          <p:spTgt spid="19"/>
+                                        </p:tgtEl>
+                                      </p:cBhvr>
+                                    </p:animEffect>
+                                    <p:anim calcmode="lin" valueType="num">
+                                      <p:cBhvr>
+                                        <p:cTn id="58" dur="1000" fill="hold"/>
+                                        <p:tgtEl>
+                                          <p:spTgt spid="19"/>
+                                        </p:tgtEl>
+                                        <p:attrNameLst>
+                                          <p:attrName>ppt_x</p:attrName>
+                                        </p:attrNameLst>
+                                      </p:cBhvr>
+                                      <p:tavLst>
+                                        <p:tav tm="0">
+                                          <p:val>
+                                            <p:strVal val="#ppt_x"/>
+                                          </p:val>
+                                        </p:tav>
+                                        <p:tav tm="100000">
+                                          <p:val>
+                                            <p:strVal val="#ppt_x"/>
+                                          </p:val>
+                                        </p:tav>
+                                      </p:tavLst>
+                                    </p:anim>
+                                    <p:anim calcmode="lin" valueType="num">
+                                      <p:cBhvr>
+                                        <p:cTn id="59" dur="1000" fill="hold"/>
+                                        <p:tgtEl>
+                                          <p:spTgt spid="19"/>
+                                        </p:tgtEl>
+                                        <p:attrNameLst>
+                                          <p:attrName>ppt_y</p:attrName>
+                                        </p:attrNameLst>
+                                      </p:cBhvr>
+                                      <p:tavLst>
+                                        <p:tav tm="0">
+                                          <p:val>
+                                            <p:strVal val="#ppt_y+.1"/>
+                                          </p:val>
+                                        </p:tav>
+                                        <p:tav tm="100000">
+                                          <p:val>
+                                            <p:strVal val="#ppt_y"/>
+                                          </p:val>
+                                        </p:tav>
+                                      </p:tavLst>
+                                    </p:anim>
+                                  </p:childTnLst>
+                                </p:cTn>
+                              </p:par>
+                            </p:childTnLst>
+                          </p:cTn>
+                        </p:par>
+                      </p:childTnLst>
+                    </p:cTn>
+                  </p:par>
+                  <p:par>
+                    <p:cTn id="60" fill="hold">
+                      <p:stCondLst>
+                        <p:cond delay="indefinite"/>
+                      </p:stCondLst>
+                      <p:childTnLst>
+                        <p:par>
+                          <p:cTn id="61" fill="hold">
+                            <p:stCondLst>
+                              <p:cond delay="0"/>
+                            </p:stCondLst>
+                            <p:childTnLst>
+                              <p:par>
+                                <p:cTn id="62" presetID="42" presetClass="entr" presetSubtype="0" fill="hold" nodeType="clickEffect">
+                                  <p:stCondLst>
+                                    <p:cond delay="0"/>
+                                  </p:stCondLst>
+                                  <p:childTnLst>
+                                    <p:set>
+                                      <p:cBhvr>
+                                        <p:cTn id="63" dur="1" fill="hold">
+                                          <p:stCondLst>
+                                            <p:cond delay="0"/>
+                                          </p:stCondLst>
+                                        </p:cTn>
+                                        <p:tgtEl>
+                                          <p:spTgt spid="20"/>
+                                        </p:tgtEl>
+                                        <p:attrNameLst>
+                                          <p:attrName>style.visibility</p:attrName>
+                                        </p:attrNameLst>
+                                      </p:cBhvr>
+                                      <p:to>
+                                        <p:strVal val="visible"/>
+                                      </p:to>
+                                    </p:set>
+                                    <p:animEffect transition="in" filter="fade">
+                                      <p:cBhvr>
+                                        <p:cTn id="64" dur="1000"/>
+                                        <p:tgtEl>
+                                          <p:spTgt spid="20"/>
+                                        </p:tgtEl>
+                                      </p:cBhvr>
+                                    </p:animEffect>
+                                    <p:anim calcmode="lin" valueType="num">
+                                      <p:cBhvr>
+                                        <p:cTn id="65" dur="1000" fill="hold"/>
+                                        <p:tgtEl>
+                                          <p:spTgt spid="20"/>
+                                        </p:tgtEl>
+                                        <p:attrNameLst>
+                                          <p:attrName>ppt_x</p:attrName>
+                                        </p:attrNameLst>
+                                      </p:cBhvr>
+                                      <p:tavLst>
+                                        <p:tav tm="0">
+                                          <p:val>
+                                            <p:strVal val="#ppt_x"/>
+                                          </p:val>
+                                        </p:tav>
+                                        <p:tav tm="100000">
+                                          <p:val>
+                                            <p:strVal val="#ppt_x"/>
+                                          </p:val>
+                                        </p:tav>
+                                      </p:tavLst>
+                                    </p:anim>
+                                    <p:anim calcmode="lin" valueType="num">
+                                      <p:cBhvr>
+                                        <p:cTn id="66" dur="1000" fill="hold"/>
+                                        <p:tgtEl>
+                                          <p:spTgt spid="20"/>
+                                        </p:tgtEl>
+                                        <p:attrNameLst>
+                                          <p:attrName>ppt_y</p:attrName>
+                                        </p:attrNameLst>
+                                      </p:cBhvr>
+                                      <p:tavLst>
+                                        <p:tav tm="0">
+                                          <p:val>
+                                            <p:strVal val="#ppt_y+.1"/>
+                                          </p:val>
+                                        </p:tav>
+                                        <p:tav tm="100000">
+                                          <p:val>
+                                            <p:strVal val="#ppt_y"/>
+                                          </p:val>
+                                        </p:tav>
+                                      </p:tavLst>
+                                    </p:anim>
+                                  </p:childTnLst>
+                                </p:cTn>
+                              </p:par>
+                              <p:par>
+                                <p:cTn id="67" presetID="42" presetClass="entr" presetSubtype="0" fill="hold" nodeType="withEffect">
+                                  <p:stCondLst>
+                                    <p:cond delay="0"/>
+                                  </p:stCondLst>
+                                  <p:childTnLst>
+                                    <p:set>
+                                      <p:cBhvr>
+                                        <p:cTn id="68" dur="1" fill="hold">
+                                          <p:stCondLst>
+                                            <p:cond delay="0"/>
+                                          </p:stCondLst>
+                                        </p:cTn>
+                                        <p:tgtEl>
+                                          <p:spTgt spid="21"/>
+                                        </p:tgtEl>
+                                        <p:attrNameLst>
+                                          <p:attrName>style.visibility</p:attrName>
+                                        </p:attrNameLst>
+                                      </p:cBhvr>
+                                      <p:to>
+                                        <p:strVal val="visible"/>
+                                      </p:to>
+                                    </p:set>
+                                    <p:animEffect transition="in" filter="fade">
+                                      <p:cBhvr>
+                                        <p:cTn id="69" dur="1000"/>
+                                        <p:tgtEl>
+                                          <p:spTgt spid="21"/>
+                                        </p:tgtEl>
+                                      </p:cBhvr>
+                                    </p:animEffect>
+                                    <p:anim calcmode="lin" valueType="num">
+                                      <p:cBhvr>
+                                        <p:cTn id="70" dur="1000" fill="hold"/>
+                                        <p:tgtEl>
+                                          <p:spTgt spid="21"/>
+                                        </p:tgtEl>
+                                        <p:attrNameLst>
+                                          <p:attrName>ppt_x</p:attrName>
+                                        </p:attrNameLst>
+                                      </p:cBhvr>
+                                      <p:tavLst>
+                                        <p:tav tm="0">
+                                          <p:val>
+                                            <p:strVal val="#ppt_x"/>
+                                          </p:val>
+                                        </p:tav>
+                                        <p:tav tm="100000">
+                                          <p:val>
+                                            <p:strVal val="#ppt_x"/>
+                                          </p:val>
+                                        </p:tav>
+                                      </p:tavLst>
+                                    </p:anim>
+                                    <p:anim calcmode="lin" valueType="num">
+                                      <p:cBhvr>
+                                        <p:cTn id="71" dur="1000" fill="hold"/>
+                                        <p:tgtEl>
+                                          <p:spTgt spid="21"/>
+                                        </p:tgtEl>
+                                        <p:attrNameLst>
+                                          <p:attrName>ppt_y</p:attrName>
+                                        </p:attrNameLst>
+                                      </p:cBhvr>
+                                      <p:tavLst>
+                                        <p:tav tm="0">
+                                          <p:val>
+                                            <p:strVal val="#ppt_y+.1"/>
+                                          </p:val>
+                                        </p:tav>
+                                        <p:tav tm="100000">
+                                          <p:val>
+                                            <p:strVal val="#ppt_y"/>
+                                          </p:val>
+                                        </p:tav>
+                                      </p:tavLst>
+                                    </p:anim>
+                                  </p:childTnLst>
+                                </p:cTn>
+                              </p:par>
+                              <p:par>
+                                <p:cTn id="72" presetID="42" presetClass="entr" presetSubtype="0" fill="hold" grpId="0" nodeType="withEffect">
+                                  <p:stCondLst>
+                                    <p:cond delay="0"/>
+                                  </p:stCondLst>
+                                  <p:childTnLst>
+                                    <p:set>
+                                      <p:cBhvr>
+                                        <p:cTn id="73" dur="1" fill="hold">
+                                          <p:stCondLst>
+                                            <p:cond delay="0"/>
+                                          </p:stCondLst>
+                                        </p:cTn>
+                                        <p:tgtEl>
+                                          <p:spTgt spid="24"/>
+                                        </p:tgtEl>
+                                        <p:attrNameLst>
+                                          <p:attrName>style.visibility</p:attrName>
+                                        </p:attrNameLst>
+                                      </p:cBhvr>
+                                      <p:to>
+                                        <p:strVal val="visible"/>
+                                      </p:to>
+                                    </p:set>
+                                    <p:animEffect transition="in" filter="fade">
+                                      <p:cBhvr>
+                                        <p:cTn id="74" dur="1000"/>
+                                        <p:tgtEl>
+                                          <p:spTgt spid="24"/>
+                                        </p:tgtEl>
+                                      </p:cBhvr>
+                                    </p:animEffect>
+                                    <p:anim calcmode="lin" valueType="num">
+                                      <p:cBhvr>
+                                        <p:cTn id="75" dur="1000" fill="hold"/>
+                                        <p:tgtEl>
+                                          <p:spTgt spid="24"/>
+                                        </p:tgtEl>
+                                        <p:attrNameLst>
+                                          <p:attrName>ppt_x</p:attrName>
+                                        </p:attrNameLst>
+                                      </p:cBhvr>
+                                      <p:tavLst>
+                                        <p:tav tm="0">
+                                          <p:val>
+                                            <p:strVal val="#ppt_x"/>
+                                          </p:val>
+                                        </p:tav>
+                                        <p:tav tm="100000">
+                                          <p:val>
+                                            <p:strVal val="#ppt_x"/>
+                                          </p:val>
+                                        </p:tav>
+                                      </p:tavLst>
+                                    </p:anim>
+                                    <p:anim calcmode="lin" valueType="num">
+                                      <p:cBhvr>
+                                        <p:cTn id="76" dur="1000" fill="hold"/>
+                                        <p:tgtEl>
+                                          <p:spTgt spid="24"/>
+                                        </p:tgtEl>
+                                        <p:attrNameLst>
+                                          <p:attrName>ppt_y</p:attrName>
+                                        </p:attrNameLst>
+                                      </p:cBhvr>
+                                      <p:tavLst>
+                                        <p:tav tm="0">
+                                          <p:val>
+                                            <p:strVal val="#ppt_y+.1"/>
+                                          </p:val>
+                                        </p:tav>
+                                        <p:tav tm="100000">
+                                          <p:val>
+                                            <p:strVal val="#ppt_y"/>
+                                          </p:val>
+                                        </p:tav>
+                                      </p:tavLst>
+                                    </p:anim>
+                                  </p:childTnLst>
+                                </p:cTn>
+                              </p:par>
+                            </p:childTnLst>
+                          </p:cTn>
+                        </p:par>
+                      </p:childTnLst>
+                    </p:cTn>
+                  </p:par>
+                  <p:par>
+                    <p:cTn id="77" fill="hold">
+                      <p:stCondLst>
+                        <p:cond delay="indefinite"/>
+                      </p:stCondLst>
+                      <p:childTnLst>
+                        <p:par>
+                          <p:cTn id="78" fill="hold">
+                            <p:stCondLst>
+                              <p:cond delay="0"/>
+                            </p:stCondLst>
+                            <p:childTnLst>
+                              <p:par>
+                                <p:cTn id="79" presetID="42" presetClass="entr" presetSubtype="0" fill="hold" nodeType="clickEffect">
+                                  <p:stCondLst>
+                                    <p:cond delay="0"/>
+                                  </p:stCondLst>
+                                  <p:childTnLst>
+                                    <p:set>
+                                      <p:cBhvr>
+                                        <p:cTn id="80" dur="1" fill="hold">
+                                          <p:stCondLst>
+                                            <p:cond delay="0"/>
+                                          </p:stCondLst>
+                                        </p:cTn>
+                                        <p:tgtEl>
+                                          <p:spTgt spid="25"/>
+                                        </p:tgtEl>
+                                        <p:attrNameLst>
+                                          <p:attrName>style.visibility</p:attrName>
+                                        </p:attrNameLst>
+                                      </p:cBhvr>
+                                      <p:to>
+                                        <p:strVal val="visible"/>
+                                      </p:to>
+                                    </p:set>
+                                    <p:animEffect transition="in" filter="fade">
+                                      <p:cBhvr>
+                                        <p:cTn id="81" dur="1000"/>
+                                        <p:tgtEl>
+                                          <p:spTgt spid="25"/>
+                                        </p:tgtEl>
+                                      </p:cBhvr>
+                                    </p:animEffect>
+                                    <p:anim calcmode="lin" valueType="num">
+                                      <p:cBhvr>
+                                        <p:cTn id="82" dur="1000" fill="hold"/>
+                                        <p:tgtEl>
+                                          <p:spTgt spid="25"/>
+                                        </p:tgtEl>
+                                        <p:attrNameLst>
+                                          <p:attrName>ppt_x</p:attrName>
+                                        </p:attrNameLst>
+                                      </p:cBhvr>
+                                      <p:tavLst>
+                                        <p:tav tm="0">
+                                          <p:val>
+                                            <p:strVal val="#ppt_x"/>
+                                          </p:val>
+                                        </p:tav>
+                                        <p:tav tm="100000">
+                                          <p:val>
+                                            <p:strVal val="#ppt_x"/>
+                                          </p:val>
+                                        </p:tav>
+                                      </p:tavLst>
+                                    </p:anim>
+                                    <p:anim calcmode="lin" valueType="num">
+                                      <p:cBhvr>
+                                        <p:cTn id="83" dur="1000" fill="hold"/>
+                                        <p:tgtEl>
+                                          <p:spTgt spid="25"/>
+                                        </p:tgtEl>
+                                        <p:attrNameLst>
+                                          <p:attrName>ppt_y</p:attrName>
+                                        </p:attrNameLst>
+                                      </p:cBhvr>
+                                      <p:tavLst>
+                                        <p:tav tm="0">
+                                          <p:val>
+                                            <p:strVal val="#ppt_y+.1"/>
+                                          </p:val>
+                                        </p:tav>
+                                        <p:tav tm="100000">
+                                          <p:val>
+                                            <p:strVal val="#ppt_y"/>
+                                          </p:val>
+                                        </p:tav>
+                                      </p:tavLst>
+                                    </p:anim>
+                                  </p:childTnLst>
+                                </p:cTn>
+                              </p:par>
+                              <p:par>
+                                <p:cTn id="84" presetID="42" presetClass="entr" presetSubtype="0" fill="hold" nodeType="withEffect">
+                                  <p:stCondLst>
+                                    <p:cond delay="0"/>
+                                  </p:stCondLst>
+                                  <p:childTnLst>
+                                    <p:set>
+                                      <p:cBhvr>
+                                        <p:cTn id="85" dur="1" fill="hold">
+                                          <p:stCondLst>
+                                            <p:cond delay="0"/>
+                                          </p:stCondLst>
+                                        </p:cTn>
+                                        <p:tgtEl>
+                                          <p:spTgt spid="26"/>
+                                        </p:tgtEl>
+                                        <p:attrNameLst>
+                                          <p:attrName>style.visibility</p:attrName>
+                                        </p:attrNameLst>
+                                      </p:cBhvr>
+                                      <p:to>
+                                        <p:strVal val="visible"/>
+                                      </p:to>
+                                    </p:set>
+                                    <p:animEffect transition="in" filter="fade">
+                                      <p:cBhvr>
+                                        <p:cTn id="86" dur="1000"/>
+                                        <p:tgtEl>
+                                          <p:spTgt spid="26"/>
+                                        </p:tgtEl>
+                                      </p:cBhvr>
+                                    </p:animEffect>
+                                    <p:anim calcmode="lin" valueType="num">
+                                      <p:cBhvr>
+                                        <p:cTn id="87" dur="1000" fill="hold"/>
+                                        <p:tgtEl>
+                                          <p:spTgt spid="26"/>
+                                        </p:tgtEl>
+                                        <p:attrNameLst>
+                                          <p:attrName>ppt_x</p:attrName>
+                                        </p:attrNameLst>
+                                      </p:cBhvr>
+                                      <p:tavLst>
+                                        <p:tav tm="0">
+                                          <p:val>
+                                            <p:strVal val="#ppt_x"/>
+                                          </p:val>
+                                        </p:tav>
+                                        <p:tav tm="100000">
+                                          <p:val>
+                                            <p:strVal val="#ppt_x"/>
+                                          </p:val>
+                                        </p:tav>
+                                      </p:tavLst>
+                                    </p:anim>
+                                    <p:anim calcmode="lin" valueType="num">
+                                      <p:cBhvr>
+                                        <p:cTn id="88" dur="1000" fill="hold"/>
+                                        <p:tgtEl>
+                                          <p:spTgt spid="26"/>
+                                        </p:tgtEl>
+                                        <p:attrNameLst>
+                                          <p:attrName>ppt_y</p:attrName>
+                                        </p:attrNameLst>
+                                      </p:cBhvr>
+                                      <p:tavLst>
+                                        <p:tav tm="0">
+                                          <p:val>
+                                            <p:strVal val="#ppt_y+.1"/>
+                                          </p:val>
+                                        </p:tav>
+                                        <p:tav tm="100000">
+                                          <p:val>
+                                            <p:strVal val="#ppt_y"/>
+                                          </p:val>
+                                        </p:tav>
+                                      </p:tavLst>
+                                    </p:anim>
+                                  </p:childTnLst>
+                                </p:cTn>
+                              </p:par>
+                              <p:par>
+                                <p:cTn id="89" presetID="42" presetClass="entr" presetSubtype="0" fill="hold" grpId="0" nodeType="withEffect">
+                                  <p:stCondLst>
+                                    <p:cond delay="0"/>
+                                  </p:stCondLst>
+                                  <p:childTnLst>
+                                    <p:set>
+                                      <p:cBhvr>
+                                        <p:cTn id="90" dur="1" fill="hold">
+                                          <p:stCondLst>
+                                            <p:cond delay="0"/>
+                                          </p:stCondLst>
+                                        </p:cTn>
+                                        <p:tgtEl>
+                                          <p:spTgt spid="27"/>
+                                        </p:tgtEl>
+                                        <p:attrNameLst>
+                                          <p:attrName>style.visibility</p:attrName>
+                                        </p:attrNameLst>
+                                      </p:cBhvr>
+                                      <p:to>
+                                        <p:strVal val="visible"/>
+                                      </p:to>
+                                    </p:set>
+                                    <p:animEffect transition="in" filter="fade">
+                                      <p:cBhvr>
+                                        <p:cTn id="91" dur="1000"/>
+                                        <p:tgtEl>
+                                          <p:spTgt spid="27"/>
+                                        </p:tgtEl>
+                                      </p:cBhvr>
+                                    </p:animEffect>
+                                    <p:anim calcmode="lin" valueType="num">
+                                      <p:cBhvr>
+                                        <p:cTn id="92" dur="1000" fill="hold"/>
+                                        <p:tgtEl>
+                                          <p:spTgt spid="27"/>
+                                        </p:tgtEl>
+                                        <p:attrNameLst>
+                                          <p:attrName>ppt_x</p:attrName>
+                                        </p:attrNameLst>
+                                      </p:cBhvr>
+                                      <p:tavLst>
+                                        <p:tav tm="0">
+                                          <p:val>
+                                            <p:strVal val="#ppt_x"/>
+                                          </p:val>
+                                        </p:tav>
+                                        <p:tav tm="100000">
+                                          <p:val>
+                                            <p:strVal val="#ppt_x"/>
+                                          </p:val>
+                                        </p:tav>
+                                      </p:tavLst>
+                                    </p:anim>
+                                    <p:anim calcmode="lin" valueType="num">
+                                      <p:cBhvr>
+                                        <p:cTn id="93" dur="1000" fill="hold"/>
+                                        <p:tgtEl>
+                                          <p:spTgt spid="27"/>
+                                        </p:tgtEl>
+                                        <p:attrNameLst>
+                                          <p:attrName>ppt_y</p:attrName>
+                                        </p:attrNameLst>
+                                      </p:cBhvr>
+                                      <p:tavLst>
+                                        <p:tav tm="0">
+                                          <p:val>
+                                            <p:strVal val="#ppt_y+.1"/>
+                                          </p:val>
+                                        </p:tav>
+                                        <p:tav tm="100000">
+                                          <p:val>
+                                            <p:strVal val="#ppt_y"/>
+                                          </p:val>
+                                        </p:tav>
+                                      </p:tavLst>
+                                    </p:anim>
+                                  </p:childTnLst>
+                                </p:cTn>
+                              </p:par>
+                            </p:childTnLst>
+                          </p:cTn>
+                        </p:par>
+                      </p:childTnLst>
+                    </p:cTn>
+                  </p:par>
+                </p:childTnLst>
+              </p:cTn>
+              <p:prevCondLst>
+                <p:cond evt="onPrev" delay="0">
+                  <p:tgtEl>
+                    <p:sldTgt/>
+                  </p:tgtEl>
+                </p:cond>
+              </p:prevCondLst>
+              <p:nextCondLst>
+                <p:cond evt="onNext" delay="0">
+                  <p:tgtEl>
+                    <p:sldTgt/>
+                  </p:tgtEl>
+                </p:cond>
+              </p:nextCondLst>
+            </p:seq>
+          </p:childTnLst>
+        </p:cTn>
       </p:par>
     </p:tnLst>
+    <p:bldLst>
+      <p:bldP spid="2" grpId="0" animBg="1"/>
+      <p:bldP spid="4" grpId="0" animBg="1"/>
+      <p:bldP spid="5" grpId="0" animBg="1"/>
+      <p:bldP spid="10" grpId="0"/>
+      <p:bldP spid="13" grpId="0"/>
+      <p:bldP spid="18" grpId="0"/>
+      <p:bldP spid="19" grpId="0"/>
+      <p:bldP spid="24" grpId="0"/>
+      <p:bldP spid="27" grpId="0"/>
+    </p:bldLst>
   </p:timing>
 </p:sld>
 </file>
@@ -4095,10 +6858,194 @@
           <a:bodyPr/>
           <a:lstStyle/>
           <a:p>
-            <a:endParaRPr lang="zh-CN" altLang="en-US"/>
+            <a:r>
+              <a:rPr lang="zh-CN" altLang="en-US" dirty="0" smtClean="0"/>
+              <a:t>每个人都可以为客户规划价值</a:t>
+            </a:r>
+            <a:endParaRPr lang="zh-CN" altLang="en-US" dirty="0"/>
           </a:p>
         </p:txBody>
       </p:sp>
+      <p:pic>
+        <p:nvPicPr>
+          <p:cNvPr id="2" name="图片 1"/>
+          <p:cNvPicPr>
+            <a:picLocks noChangeAspect="1"/>
+          </p:cNvPicPr>
+          <p:nvPr/>
+        </p:nvPicPr>
+        <p:blipFill>
+          <a:blip r:embed="rId2">
+            <a:extLst>
+              <a:ext uri="{28A0092B-C50C-407E-A947-70E740481C1C}">
+                <a14:useLocalDpi xmlns:a14="http://schemas.microsoft.com/office/drawing/2010/main" val="0"/>
+              </a:ext>
+            </a:extLst>
+          </a:blip>
+          <a:stretch>
+            <a:fillRect/>
+          </a:stretch>
+        </p:blipFill>
+        <p:spPr>
+          <a:xfrm>
+            <a:off x="1559496" y="1340768"/>
+            <a:ext cx="2428875" cy="1885950"/>
+          </a:xfrm>
+          <a:prstGeom prst="rect">
+            <a:avLst/>
+          </a:prstGeom>
+        </p:spPr>
+      </p:pic>
+      <p:pic>
+        <p:nvPicPr>
+          <p:cNvPr id="4" name="图片 3"/>
+          <p:cNvPicPr>
+            <a:picLocks noChangeAspect="1"/>
+          </p:cNvPicPr>
+          <p:nvPr/>
+        </p:nvPicPr>
+        <p:blipFill>
+          <a:blip r:embed="rId3">
+            <a:extLst>
+              <a:ext uri="{28A0092B-C50C-407E-A947-70E740481C1C}">
+                <a14:useLocalDpi xmlns:a14="http://schemas.microsoft.com/office/drawing/2010/main" val="0"/>
+              </a:ext>
+            </a:extLst>
+          </a:blip>
+          <a:stretch>
+            <a:fillRect/>
+          </a:stretch>
+        </p:blipFill>
+        <p:spPr>
+          <a:xfrm>
+            <a:off x="7824192" y="1340768"/>
+            <a:ext cx="1828800" cy="1828800"/>
+          </a:xfrm>
+          <a:prstGeom prst="rect">
+            <a:avLst/>
+          </a:prstGeom>
+        </p:spPr>
+      </p:pic>
+      <p:pic>
+        <p:nvPicPr>
+          <p:cNvPr id="5" name="图片 4"/>
+          <p:cNvPicPr>
+            <a:picLocks noChangeAspect="1"/>
+          </p:cNvPicPr>
+          <p:nvPr/>
+        </p:nvPicPr>
+        <p:blipFill>
+          <a:blip r:embed="rId4">
+            <a:extLst>
+              <a:ext uri="{28A0092B-C50C-407E-A947-70E740481C1C}">
+                <a14:useLocalDpi xmlns:a14="http://schemas.microsoft.com/office/drawing/2010/main" val="0"/>
+              </a:ext>
+            </a:extLst>
+          </a:blip>
+          <a:stretch>
+            <a:fillRect/>
+          </a:stretch>
+        </p:blipFill>
+        <p:spPr>
+          <a:xfrm>
+            <a:off x="1631504" y="4211538"/>
+            <a:ext cx="2533650" cy="1809750"/>
+          </a:xfrm>
+          <a:prstGeom prst="rect">
+            <a:avLst/>
+          </a:prstGeom>
+        </p:spPr>
+      </p:pic>
+      <p:pic>
+        <p:nvPicPr>
+          <p:cNvPr id="7" name="图片 6"/>
+          <p:cNvPicPr>
+            <a:picLocks noChangeAspect="1"/>
+          </p:cNvPicPr>
+          <p:nvPr/>
+        </p:nvPicPr>
+        <p:blipFill>
+          <a:blip r:embed="rId5" cstate="print">
+            <a:extLst>
+              <a:ext uri="{28A0092B-C50C-407E-A947-70E740481C1C}">
+                <a14:useLocalDpi xmlns:a14="http://schemas.microsoft.com/office/drawing/2010/main" val="0"/>
+              </a:ext>
+            </a:extLst>
+          </a:blip>
+          <a:stretch>
+            <a:fillRect/>
+          </a:stretch>
+        </p:blipFill>
+        <p:spPr>
+          <a:xfrm>
+            <a:off x="5441735" y="1889774"/>
+            <a:ext cx="929093" cy="730787"/>
+          </a:xfrm>
+          <a:prstGeom prst="rect">
+            <a:avLst/>
+          </a:prstGeom>
+        </p:spPr>
+      </p:pic>
+      <p:pic>
+        <p:nvPicPr>
+          <p:cNvPr id="8" name="图片 7"/>
+          <p:cNvPicPr>
+            <a:picLocks noChangeAspect="1"/>
+          </p:cNvPicPr>
+          <p:nvPr/>
+        </p:nvPicPr>
+        <p:blipFill>
+          <a:blip r:embed="rId5" cstate="print">
+            <a:extLst>
+              <a:ext uri="{28A0092B-C50C-407E-A947-70E740481C1C}">
+                <a14:useLocalDpi xmlns:a14="http://schemas.microsoft.com/office/drawing/2010/main" val="0"/>
+              </a:ext>
+            </a:extLst>
+          </a:blip>
+          <a:stretch>
+            <a:fillRect/>
+          </a:stretch>
+        </p:blipFill>
+        <p:spPr>
+          <a:xfrm>
+            <a:off x="5441734" y="4751019"/>
+            <a:ext cx="929093" cy="730787"/>
+          </a:xfrm>
+          <a:prstGeom prst="rect">
+            <a:avLst/>
+          </a:prstGeom>
+        </p:spPr>
+      </p:pic>
+      <p:pic>
+        <p:nvPicPr>
+          <p:cNvPr id="9" name="图片 8"/>
+          <p:cNvPicPr>
+            <a:picLocks noChangeAspect="1"/>
+          </p:cNvPicPr>
+          <p:nvPr/>
+        </p:nvPicPr>
+        <p:blipFill>
+          <a:blip r:embed="rId6">
+            <a:extLst>
+              <a:ext uri="{28A0092B-C50C-407E-A947-70E740481C1C}">
+                <a14:useLocalDpi xmlns:a14="http://schemas.microsoft.com/office/drawing/2010/main" val="0"/>
+              </a:ext>
+            </a:extLst>
+          </a:blip>
+          <a:stretch>
+            <a:fillRect/>
+          </a:stretch>
+        </p:blipFill>
+        <p:spPr>
+          <a:xfrm>
+            <a:off x="7464152" y="3819910"/>
+            <a:ext cx="2786653" cy="2503265"/>
+          </a:xfrm>
+          <a:prstGeom prst="rect">
+            <a:avLst/>
+          </a:prstGeom>
+        </p:spPr>
+      </p:pic>
     </p:spTree>
     <p:extLst>
       <p:ext uri="{BB962C8B-B14F-4D97-AF65-F5344CB8AC3E}">
@@ -4112,7 +7059,242 @@
   <p:timing>
     <p:tnLst>
       <p:par>
-        <p:cTn id="1" dur="indefinite" restart="never" nodeType="tmRoot"/>
+        <p:cTn id="1" dur="indefinite" restart="never" nodeType="tmRoot">
+          <p:childTnLst>
+            <p:seq concurrent="1" nextAc="seek">
+              <p:cTn id="2" dur="indefinite" nodeType="mainSeq">
+                <p:childTnLst>
+                  <p:par>
+                    <p:cTn id="3" fill="hold">
+                      <p:stCondLst>
+                        <p:cond delay="indefinite"/>
+                      </p:stCondLst>
+                      <p:childTnLst>
+                        <p:par>
+                          <p:cTn id="4" fill="hold">
+                            <p:stCondLst>
+                              <p:cond delay="0"/>
+                            </p:stCondLst>
+                            <p:childTnLst>
+                              <p:par>
+                                <p:cTn id="5" presetID="10" presetClass="entr" presetSubtype="0" fill="hold" nodeType="clickEffect">
+                                  <p:stCondLst>
+                                    <p:cond delay="0"/>
+                                  </p:stCondLst>
+                                  <p:childTnLst>
+                                    <p:set>
+                                      <p:cBhvr>
+                                        <p:cTn id="6" dur="1" fill="hold">
+                                          <p:stCondLst>
+                                            <p:cond delay="0"/>
+                                          </p:stCondLst>
+                                        </p:cTn>
+                                        <p:tgtEl>
+                                          <p:spTgt spid="2"/>
+                                        </p:tgtEl>
+                                        <p:attrNameLst>
+                                          <p:attrName>style.visibility</p:attrName>
+                                        </p:attrNameLst>
+                                      </p:cBhvr>
+                                      <p:to>
+                                        <p:strVal val="visible"/>
+                                      </p:to>
+                                    </p:set>
+                                    <p:animEffect transition="in" filter="fade">
+                                      <p:cBhvr>
+                                        <p:cTn id="7" dur="500"/>
+                                        <p:tgtEl>
+                                          <p:spTgt spid="2"/>
+                                        </p:tgtEl>
+                                      </p:cBhvr>
+                                    </p:animEffect>
+                                  </p:childTnLst>
+                                </p:cTn>
+                              </p:par>
+                            </p:childTnLst>
+                          </p:cTn>
+                        </p:par>
+                      </p:childTnLst>
+                    </p:cTn>
+                  </p:par>
+                  <p:par>
+                    <p:cTn id="8" fill="hold">
+                      <p:stCondLst>
+                        <p:cond delay="indefinite"/>
+                      </p:stCondLst>
+                      <p:childTnLst>
+                        <p:par>
+                          <p:cTn id="9" fill="hold">
+                            <p:stCondLst>
+                              <p:cond delay="0"/>
+                            </p:stCondLst>
+                            <p:childTnLst>
+                              <p:par>
+                                <p:cTn id="10" presetID="10" presetClass="entr" presetSubtype="0" fill="hold" nodeType="clickEffect">
+                                  <p:stCondLst>
+                                    <p:cond delay="0"/>
+                                  </p:stCondLst>
+                                  <p:childTnLst>
+                                    <p:set>
+                                      <p:cBhvr>
+                                        <p:cTn id="11" dur="1" fill="hold">
+                                          <p:stCondLst>
+                                            <p:cond delay="0"/>
+                                          </p:stCondLst>
+                                        </p:cTn>
+                                        <p:tgtEl>
+                                          <p:spTgt spid="4"/>
+                                        </p:tgtEl>
+                                        <p:attrNameLst>
+                                          <p:attrName>style.visibility</p:attrName>
+                                        </p:attrNameLst>
+                                      </p:cBhvr>
+                                      <p:to>
+                                        <p:strVal val="visible"/>
+                                      </p:to>
+                                    </p:set>
+                                    <p:animEffect transition="in" filter="fade">
+                                      <p:cBhvr>
+                                        <p:cTn id="12" dur="500"/>
+                                        <p:tgtEl>
+                                          <p:spTgt spid="4"/>
+                                        </p:tgtEl>
+                                      </p:cBhvr>
+                                    </p:animEffect>
+                                  </p:childTnLst>
+                                </p:cTn>
+                              </p:par>
+                            </p:childTnLst>
+                          </p:cTn>
+                        </p:par>
+                      </p:childTnLst>
+                    </p:cTn>
+                  </p:par>
+                  <p:par>
+                    <p:cTn id="13" fill="hold">
+                      <p:stCondLst>
+                        <p:cond delay="indefinite"/>
+                      </p:stCondLst>
+                      <p:childTnLst>
+                        <p:par>
+                          <p:cTn id="14" fill="hold">
+                            <p:stCondLst>
+                              <p:cond delay="0"/>
+                            </p:stCondLst>
+                            <p:childTnLst>
+                              <p:par>
+                                <p:cTn id="15" presetID="16" presetClass="entr" presetSubtype="21" fill="hold" nodeType="clickEffect">
+                                  <p:stCondLst>
+                                    <p:cond delay="0"/>
+                                  </p:stCondLst>
+                                  <p:childTnLst>
+                                    <p:set>
+                                      <p:cBhvr>
+                                        <p:cTn id="16" dur="1" fill="hold">
+                                          <p:stCondLst>
+                                            <p:cond delay="0"/>
+                                          </p:stCondLst>
+                                        </p:cTn>
+                                        <p:tgtEl>
+                                          <p:spTgt spid="5"/>
+                                        </p:tgtEl>
+                                        <p:attrNameLst>
+                                          <p:attrName>style.visibility</p:attrName>
+                                        </p:attrNameLst>
+                                      </p:cBhvr>
+                                      <p:to>
+                                        <p:strVal val="visible"/>
+                                      </p:to>
+                                    </p:set>
+                                    <p:animEffect transition="in" filter="barn(inVertical)">
+                                      <p:cBhvr>
+                                        <p:cTn id="17" dur="500"/>
+                                        <p:tgtEl>
+                                          <p:spTgt spid="5"/>
+                                        </p:tgtEl>
+                                      </p:cBhvr>
+                                    </p:animEffect>
+                                  </p:childTnLst>
+                                </p:cTn>
+                              </p:par>
+                            </p:childTnLst>
+                          </p:cTn>
+                        </p:par>
+                      </p:childTnLst>
+                    </p:cTn>
+                  </p:par>
+                  <p:par>
+                    <p:cTn id="18" fill="hold">
+                      <p:stCondLst>
+                        <p:cond delay="indefinite"/>
+                      </p:stCondLst>
+                      <p:childTnLst>
+                        <p:par>
+                          <p:cTn id="19" fill="hold">
+                            <p:stCondLst>
+                              <p:cond delay="0"/>
+                            </p:stCondLst>
+                            <p:childTnLst>
+                              <p:par>
+                                <p:cTn id="20" presetID="16" presetClass="entr" presetSubtype="21" fill="hold" nodeType="clickEffect">
+                                  <p:stCondLst>
+                                    <p:cond delay="0"/>
+                                  </p:stCondLst>
+                                  <p:childTnLst>
+                                    <p:set>
+                                      <p:cBhvr>
+                                        <p:cTn id="21" dur="1" fill="hold">
+                                          <p:stCondLst>
+                                            <p:cond delay="0"/>
+                                          </p:stCondLst>
+                                        </p:cTn>
+                                        <p:tgtEl>
+                                          <p:spTgt spid="9"/>
+                                        </p:tgtEl>
+                                        <p:attrNameLst>
+                                          <p:attrName>style.visibility</p:attrName>
+                                        </p:attrNameLst>
+                                      </p:cBhvr>
+                                      <p:to>
+                                        <p:strVal val="visible"/>
+                                      </p:to>
+                                    </p:set>
+                                    <p:animEffect transition="in" filter="barn(inVertical)">
+                                      <p:cBhvr>
+                                        <p:cTn id="22" dur="500"/>
+                                        <p:tgtEl>
+                                          <p:spTgt spid="9"/>
+                                        </p:tgtEl>
+                                      </p:cBhvr>
+                                    </p:animEffect>
+                                  </p:childTnLst>
+                                </p:cTn>
+                              </p:par>
+                            </p:childTnLst>
+                          </p:cTn>
+                        </p:par>
+                      </p:childTnLst>
+                    </p:cTn>
+                  </p:par>
+                </p:childTnLst>
+              </p:cTn>
+              <p:prevCondLst>
+                <p:cond evt="onPrev" delay="0">
+                  <p:tgtEl>
+                    <p:sldTgt/>
+                  </p:tgtEl>
+                </p:cond>
+              </p:prevCondLst>
+              <p:nextCondLst>
+                <p:cond evt="onNext" delay="0">
+                  <p:tgtEl>
+                    <p:sldTgt/>
+                  </p:tgtEl>
+                </p:cond>
+              </p:nextCondLst>
+            </p:seq>
+          </p:childTnLst>
+        </p:cTn>
       </p:par>
     </p:tnLst>
   </p:timing>
@@ -4136,22 +7318,90 @@
           <a:chExt cx="0" cy="0"/>
         </a:xfrm>
       </p:grpSpPr>
+      <p:pic>
+        <p:nvPicPr>
+          <p:cNvPr id="4" name="图片 3"/>
+          <p:cNvPicPr>
+            <a:picLocks noChangeAspect="1"/>
+          </p:cNvPicPr>
+          <p:nvPr/>
+        </p:nvPicPr>
+        <p:blipFill>
+          <a:blip r:embed="rId2">
+            <a:extLst>
+              <a:ext uri="{28A0092B-C50C-407E-A947-70E740481C1C}">
+                <a14:useLocalDpi xmlns:a14="http://schemas.microsoft.com/office/drawing/2010/main" val="0"/>
+              </a:ext>
+            </a:extLst>
+          </a:blip>
+          <a:stretch>
+            <a:fillRect/>
+          </a:stretch>
+        </p:blipFill>
+        <p:spPr>
+          <a:xfrm>
+            <a:off x="0" y="-3836"/>
+            <a:ext cx="12192000" cy="6861836"/>
+          </a:xfrm>
+          <a:prstGeom prst="rect">
+            <a:avLst/>
+          </a:prstGeom>
+        </p:spPr>
+      </p:pic>
       <p:sp>
         <p:nvSpPr>
-          <p:cNvPr id="3" name="标题 2"/>
-          <p:cNvSpPr>
-            <a:spLocks noGrp="1"/>
-          </p:cNvSpPr>
-          <p:nvPr>
-            <p:ph type="title"/>
-          </p:nvPr>
+          <p:cNvPr id="5" name="文本框 4"/>
+          <p:cNvSpPr txBox="1"/>
+          <p:nvPr/>
         </p:nvSpPr>
-        <p:spPr/>
+        <p:spPr>
+          <a:xfrm>
+            <a:off x="767408" y="3645024"/>
+            <a:ext cx="3744416" cy="1200329"/>
+          </a:xfrm>
+          <a:prstGeom prst="rect">
+            <a:avLst/>
+          </a:prstGeom>
+          <a:noFill/>
+        </p:spPr>
         <p:txBody>
-          <a:bodyPr/>
+          <a:bodyPr wrap="square" rtlCol="0">
+            <a:spAutoFit/>
+          </a:bodyPr>
           <a:lstStyle/>
           <a:p>
-            <a:endParaRPr lang="zh-CN" altLang="en-US"/>
+            <a:r>
+              <a:rPr lang="zh-CN" altLang="en-US" sz="3600" dirty="0" smtClean="0">
+                <a:solidFill>
+                  <a:schemeClr val="bg1"/>
+                </a:solidFill>
+                <a:latin typeface="Microsoft YaHei" charset="0"/>
+                <a:ea typeface="Microsoft YaHei" charset="0"/>
+                <a:cs typeface="Microsoft YaHei" charset="0"/>
+              </a:rPr>
+              <a:t>极尽繁华</a:t>
+            </a:r>
+            <a:endParaRPr lang="en-US" altLang="zh-CN" sz="3600" dirty="0" smtClean="0">
+              <a:solidFill>
+                <a:schemeClr val="bg1"/>
+              </a:solidFill>
+              <a:latin typeface="Microsoft YaHei" charset="0"/>
+              <a:ea typeface="Microsoft YaHei" charset="0"/>
+              <a:cs typeface="Microsoft YaHei" charset="0"/>
+            </a:endParaRPr>
+          </a:p>
+          <a:p>
+            <a:r>
+              <a:rPr lang="zh-CN" altLang="en-US" sz="3600" dirty="0" smtClean="0">
+                <a:solidFill>
+                  <a:schemeClr val="bg1"/>
+                </a:solidFill>
+                <a:latin typeface="Microsoft YaHei" charset="0"/>
+                <a:ea typeface="Microsoft YaHei" charset="0"/>
+                <a:cs typeface="Microsoft YaHei" charset="0"/>
+              </a:rPr>
+              <a:t>不过是一掬细沙</a:t>
+            </a:r>
           </a:p>
         </p:txBody>
       </p:sp>
@@ -4192,22 +7442,71 @@
           <a:chExt cx="0" cy="0"/>
         </a:xfrm>
       </p:grpSpPr>
+      <p:pic>
+        <p:nvPicPr>
+          <p:cNvPr id="2" name="图片 1"/>
+          <p:cNvPicPr>
+            <a:picLocks noChangeAspect="1"/>
+          </p:cNvPicPr>
+          <p:nvPr/>
+        </p:nvPicPr>
+        <p:blipFill>
+          <a:blip r:embed="rId2">
+            <a:extLst>
+              <a:ext uri="{28A0092B-C50C-407E-A947-70E740481C1C}">
+                <a14:useLocalDpi xmlns:a14="http://schemas.microsoft.com/office/drawing/2010/main" val="0"/>
+              </a:ext>
+            </a:extLst>
+          </a:blip>
+          <a:stretch>
+            <a:fillRect/>
+          </a:stretch>
+        </p:blipFill>
+        <p:spPr>
+          <a:xfrm>
+            <a:off x="3215680" y="-1"/>
+            <a:ext cx="8976320" cy="6858001"/>
+          </a:xfrm>
+          <a:prstGeom prst="rect">
+            <a:avLst/>
+          </a:prstGeom>
+        </p:spPr>
+      </p:pic>
       <p:sp>
         <p:nvSpPr>
-          <p:cNvPr id="3" name="标题 2"/>
-          <p:cNvSpPr>
-            <a:spLocks noGrp="1"/>
-          </p:cNvSpPr>
-          <p:nvPr>
-            <p:ph type="title"/>
-          </p:nvPr>
+          <p:cNvPr id="4" name="文本框 3"/>
+          <p:cNvSpPr txBox="1"/>
+          <p:nvPr/>
         </p:nvSpPr>
-        <p:spPr/>
+        <p:spPr>
+          <a:xfrm>
+            <a:off x="1343472" y="2168861"/>
+            <a:ext cx="738664" cy="2988331"/>
+          </a:xfrm>
+          <a:prstGeom prst="rect">
+            <a:avLst/>
+          </a:prstGeom>
+          <a:noFill/>
+        </p:spPr>
         <p:txBody>
-          <a:bodyPr/>
+          <a:bodyPr vert="eaVert" wrap="square" rtlCol="0">
+            <a:spAutoFit/>
+          </a:bodyPr>
           <a:lstStyle/>
           <a:p>
-            <a:endParaRPr lang="zh-CN" altLang="en-US"/>
+            <a:r>
+              <a:rPr lang="zh-CN" altLang="en-US" sz="3600" dirty="0" smtClean="0">
+                <a:solidFill>
+                  <a:schemeClr val="tx2">
+                    <a:lumMod val="75000"/>
+                  </a:schemeClr>
+                </a:solidFill>
+                <a:latin typeface="Microsoft YaHei" charset="0"/>
+                <a:ea typeface="Microsoft YaHei" charset="0"/>
+                <a:cs typeface="Microsoft YaHei" charset="0"/>
+              </a:rPr>
+              <a:t>潜心规划</a:t>
+            </a:r>
           </a:p>
         </p:txBody>
       </p:sp>
@@ -4248,22 +7547,84 @@
           <a:chExt cx="0" cy="0"/>
         </a:xfrm>
       </p:grpSpPr>
+      <p:pic>
+        <p:nvPicPr>
+          <p:cNvPr id="4" name="图片 3"/>
+          <p:cNvPicPr>
+            <a:picLocks noChangeAspect="1"/>
+          </p:cNvPicPr>
+          <p:nvPr/>
+        </p:nvPicPr>
+        <p:blipFill>
+          <a:blip r:embed="rId2">
+            <a:extLst>
+              <a:ext uri="{28A0092B-C50C-407E-A947-70E740481C1C}">
+                <a14:useLocalDpi xmlns:a14="http://schemas.microsoft.com/office/drawing/2010/main" val="0"/>
+              </a:ext>
+            </a:extLst>
+          </a:blip>
+          <a:stretch>
+            <a:fillRect/>
+          </a:stretch>
+        </p:blipFill>
+        <p:spPr>
+          <a:xfrm>
+            <a:off x="0" y="0"/>
+            <a:ext cx="9192344" cy="6858000"/>
+          </a:xfrm>
+          <a:prstGeom prst="rect">
+            <a:avLst/>
+          </a:prstGeom>
+        </p:spPr>
+      </p:pic>
       <p:sp>
         <p:nvSpPr>
-          <p:cNvPr id="3" name="标题 2"/>
-          <p:cNvSpPr>
-            <a:spLocks noGrp="1"/>
-          </p:cNvSpPr>
-          <p:nvPr>
-            <p:ph type="title"/>
-          </p:nvPr>
+          <p:cNvPr id="5" name="文本框 4"/>
+          <p:cNvSpPr txBox="1"/>
+          <p:nvPr/>
         </p:nvSpPr>
-        <p:spPr/>
+        <p:spPr>
+          <a:xfrm>
+            <a:off x="10128448" y="2348880"/>
+            <a:ext cx="738664" cy="2988331"/>
+          </a:xfrm>
+          <a:prstGeom prst="rect">
+            <a:avLst/>
+          </a:prstGeom>
+          <a:noFill/>
+        </p:spPr>
         <p:txBody>
-          <a:bodyPr/>
+          <a:bodyPr vert="eaVert" wrap="square" rtlCol="0">
+            <a:spAutoFit/>
+          </a:bodyPr>
           <a:lstStyle/>
           <a:p>
-            <a:endParaRPr lang="zh-CN" altLang="en-US"/>
+            <a:r>
+              <a:rPr lang="zh-CN" altLang="en-US" sz="3600" dirty="0">
+                <a:solidFill>
+                  <a:schemeClr val="tx2">
+                    <a:lumMod val="75000"/>
+                  </a:schemeClr>
+                </a:solidFill>
+                <a:latin typeface="Microsoft YaHei" charset="0"/>
+                <a:ea typeface="Microsoft YaHei" charset="0"/>
+                <a:cs typeface="Microsoft YaHei" charset="0"/>
+              </a:rPr>
+              <a:t>悉心</a:t>
+            </a:r>
+            <a:r>
+              <a:rPr lang="zh-CN" altLang="en-US" sz="3600" dirty="0" smtClean="0">
+                <a:solidFill>
+                  <a:schemeClr val="tx2">
+                    <a:lumMod val="75000"/>
+                  </a:schemeClr>
+                </a:solidFill>
+                <a:latin typeface="Microsoft YaHei" charset="0"/>
+                <a:ea typeface="Microsoft YaHei" charset="0"/>
+                <a:cs typeface="Microsoft YaHei" charset="0"/>
+              </a:rPr>
+              <a:t>协作</a:t>
+            </a:r>
           </a:p>
         </p:txBody>
       </p:sp>
@@ -4304,25 +7665,36 @@
           <a:chExt cx="0" cy="0"/>
         </a:xfrm>
       </p:grpSpPr>
-      <p:sp>
-        <p:nvSpPr>
-          <p:cNvPr id="3" name="标题 2"/>
-          <p:cNvSpPr>
-            <a:spLocks noGrp="1"/>
-          </p:cNvSpPr>
-          <p:nvPr>
-            <p:ph type="title"/>
-          </p:nvPr>
-        </p:nvSpPr>
-        <p:spPr/>
-        <p:txBody>
-          <a:bodyPr/>
-          <a:lstStyle/>
-          <a:p>
-            <a:endParaRPr lang="zh-CN" altLang="en-US"/>
-          </a:p>
-        </p:txBody>
-      </p:sp>
+      <p:pic>
+        <p:nvPicPr>
+          <p:cNvPr id="2" name="图片 1"/>
+          <p:cNvPicPr>
+            <a:picLocks noChangeAspect="1"/>
+          </p:cNvPicPr>
+          <p:nvPr/>
+        </p:nvPicPr>
+        <p:blipFill>
+          <a:blip r:embed="rId3">
+            <a:extLst>
+              <a:ext uri="{28A0092B-C50C-407E-A947-70E740481C1C}">
+                <a14:useLocalDpi xmlns:a14="http://schemas.microsoft.com/office/drawing/2010/main" val="0"/>
+              </a:ext>
+            </a:extLst>
+          </a:blip>
+          <a:stretch>
+            <a:fillRect/>
+          </a:stretch>
+        </p:blipFill>
+        <p:spPr>
+          <a:xfrm>
+            <a:off x="0" y="0"/>
+            <a:ext cx="12192000" cy="7677472"/>
+          </a:xfrm>
+          <a:prstGeom prst="rect">
+            <a:avLst/>
+          </a:prstGeom>
+        </p:spPr>
+      </p:pic>
     </p:spTree>
     <p:extLst>
       <p:ext uri="{BB962C8B-B14F-4D97-AF65-F5344CB8AC3E}">
@@ -4360,263 +7732,46 @@
           <a:chExt cx="0" cy="0"/>
         </a:xfrm>
       </p:grpSpPr>
-      <p:sp>
-        <p:nvSpPr>
-          <p:cNvPr id="3" name="标题 2"/>
-          <p:cNvSpPr>
-            <a:spLocks noGrp="1"/>
-          </p:cNvSpPr>
-          <p:nvPr>
-            <p:ph type="title"/>
-          </p:nvPr>
-        </p:nvSpPr>
-        <p:spPr/>
-        <p:txBody>
-          <a:bodyPr/>
-          <a:lstStyle/>
-          <a:p>
-            <a:r>
-              <a:rPr lang="zh-CN" altLang="en-US" dirty="0" smtClean="0"/>
-              <a:t>培训安排</a:t>
-            </a:r>
-            <a:endParaRPr lang="zh-CN" altLang="en-US" dirty="0"/>
-          </a:p>
-        </p:txBody>
-      </p:sp>
-      <p:sp>
-        <p:nvSpPr>
-          <p:cNvPr id="9" name="Rectangle 28"/>
-          <p:cNvSpPr/>
+      <p:pic>
+        <p:nvPicPr>
+          <p:cNvPr id="4" name="图片 3"/>
+          <p:cNvPicPr>
+            <a:picLocks noChangeAspect="1"/>
+          </p:cNvPicPr>
           <p:nvPr/>
-        </p:nvSpPr>
+        </p:nvPicPr>
+        <p:blipFill>
+          <a:blip r:embed="rId3">
+            <a:extLst>
+              <a:ext uri="{28A0092B-C50C-407E-A947-70E740481C1C}">
+                <a14:useLocalDpi xmlns:a14="http://schemas.microsoft.com/office/drawing/2010/main" val="0"/>
+              </a:ext>
+            </a:extLst>
+          </a:blip>
+          <a:stretch>
+            <a:fillRect/>
+          </a:stretch>
+        </p:blipFill>
         <p:spPr>
           <a:xfrm>
-            <a:off x="1415840" y="1124744"/>
-            <a:ext cx="3240000" cy="1584176"/>
+            <a:off x="0" y="1628800"/>
+            <a:ext cx="12192000" cy="5993904"/>
           </a:xfrm>
           <a:prstGeom prst="rect">
             <a:avLst/>
           </a:prstGeom>
-          <a:ln>
-            <a:solidFill>
-              <a:schemeClr val="tx1">
-                <a:lumMod val="75000"/>
-              </a:schemeClr>
-            </a:solidFill>
-          </a:ln>
         </p:spPr>
-        <p:style>
-          <a:lnRef idx="2">
-            <a:schemeClr val="dk1"/>
-          </a:lnRef>
-          <a:fillRef idx="1">
-            <a:schemeClr val="lt1"/>
-          </a:fillRef>
-          <a:effectRef idx="0">
-            <a:schemeClr val="dk1"/>
-          </a:effectRef>
-          <a:fontRef idx="minor">
-            <a:schemeClr val="dk1"/>
-          </a:fontRef>
-        </p:style>
-        <p:txBody>
-          <a:bodyPr rot="0" spcFirstLastPara="0" vertOverflow="overflow" horzOverflow="overflow" vert="horz" wrap="square" lIns="108000" tIns="36000" rIns="0" bIns="0" numCol="1" spcCol="0" rtlCol="0" fromWordArt="0" anchor="ctr" anchorCtr="0" forceAA="0" compatLnSpc="1">
-            <a:noAutofit/>
-          </a:bodyPr>
-          <a:lstStyle/>
-          <a:p>
-            <a:pPr algn="ctr"/>
-            <a:r>
-              <a:rPr lang="zh-CN" altLang="en-US" dirty="0" smtClean="0">
-                <a:solidFill>
-                  <a:schemeClr val="tx1">
-                    <a:lumMod val="75000"/>
-                  </a:schemeClr>
-                </a:solidFill>
-                <a:latin typeface="Microsoft YaHei" charset="0"/>
-                <a:ea typeface="Microsoft YaHei" charset="0"/>
-                <a:cs typeface="Microsoft YaHei" charset="0"/>
-              </a:rPr>
-              <a:t>为什么研发新一代云计算平台</a:t>
-            </a:r>
-            <a:r>
-              <a:rPr lang="en-US" altLang="zh-CN" dirty="0">
-                <a:solidFill>
-                  <a:schemeClr val="tx1">
-                    <a:lumMod val="75000"/>
-                  </a:schemeClr>
-                </a:solidFill>
-                <a:latin typeface="Microsoft YaHei" charset="0"/>
-                <a:ea typeface="Microsoft YaHei" charset="0"/>
-                <a:cs typeface="Microsoft YaHei" charset="0"/>
-              </a:rPr>
-              <a:t>(40min)</a:t>
-            </a:r>
-            <a:endParaRPr lang="en-US" altLang="zh-CN" dirty="0" smtClean="0">
-              <a:solidFill>
-                <a:schemeClr val="tx1">
-                  <a:lumMod val="75000"/>
-                </a:schemeClr>
-              </a:solidFill>
-              <a:latin typeface="Microsoft YaHei" charset="0"/>
-              <a:ea typeface="Microsoft YaHei" charset="0"/>
-              <a:cs typeface="Microsoft YaHei" charset="0"/>
-            </a:endParaRPr>
-          </a:p>
-          <a:p>
-            <a:pPr marL="342900" indent="-342900">
-              <a:buFont typeface="Arial" panose="020B0604020202020204" pitchFamily="34" charset="0"/>
-              <a:buChar char="•"/>
-            </a:pPr>
-            <a:r>
-              <a:rPr lang="zh-CN" altLang="en-US" sz="1400" dirty="0" smtClean="0">
-                <a:solidFill>
-                  <a:schemeClr val="tx1">
-                    <a:lumMod val="75000"/>
-                  </a:schemeClr>
-                </a:solidFill>
-                <a:latin typeface="Microsoft YaHei" charset="0"/>
-                <a:ea typeface="Microsoft YaHei" charset="0"/>
-                <a:cs typeface="Microsoft YaHei" charset="0"/>
-              </a:rPr>
-              <a:t>企业数字化转型趋势下，</a:t>
-            </a:r>
-            <a:r>
-              <a:rPr lang="en-US" altLang="zh-CN" sz="1400" dirty="0" smtClean="0">
-                <a:solidFill>
-                  <a:schemeClr val="tx1">
-                    <a:lumMod val="75000"/>
-                  </a:schemeClr>
-                </a:solidFill>
-                <a:latin typeface="Microsoft YaHei" charset="0"/>
-                <a:ea typeface="Microsoft YaHei" charset="0"/>
-                <a:cs typeface="Microsoft YaHei" charset="0"/>
-              </a:rPr>
-              <a:t>IT</a:t>
-            </a:r>
-            <a:r>
-              <a:rPr lang="zh-CN" altLang="en-US" sz="1400" dirty="0" smtClean="0">
-                <a:solidFill>
-                  <a:schemeClr val="tx1">
-                    <a:lumMod val="75000"/>
-                  </a:schemeClr>
-                </a:solidFill>
-                <a:latin typeface="Microsoft YaHei" charset="0"/>
-                <a:ea typeface="Microsoft YaHei" charset="0"/>
-                <a:cs typeface="Microsoft YaHei" charset="0"/>
-              </a:rPr>
-              <a:t>需要精益运营</a:t>
-            </a:r>
-            <a:endParaRPr lang="en-US" altLang="zh-CN" sz="1400" dirty="0" smtClean="0">
-              <a:solidFill>
-                <a:schemeClr val="tx1">
-                  <a:lumMod val="75000"/>
-                </a:schemeClr>
-              </a:solidFill>
-              <a:latin typeface="Microsoft YaHei" charset="0"/>
-              <a:ea typeface="Microsoft YaHei" charset="0"/>
-              <a:cs typeface="Microsoft YaHei" charset="0"/>
-            </a:endParaRPr>
-          </a:p>
-          <a:p>
-            <a:pPr marL="342900" indent="-342900">
-              <a:buFont typeface="Arial" panose="020B0604020202020204" pitchFamily="34" charset="0"/>
-              <a:buChar char="•"/>
-            </a:pPr>
-            <a:r>
-              <a:rPr lang="zh-CN" altLang="en-US" sz="1400" dirty="0" smtClean="0">
-                <a:solidFill>
-                  <a:schemeClr val="tx1">
-                    <a:lumMod val="75000"/>
-                  </a:schemeClr>
-                </a:solidFill>
-                <a:latin typeface="Microsoft YaHei" charset="0"/>
-                <a:ea typeface="Microsoft YaHei" charset="0"/>
-                <a:cs typeface="Microsoft YaHei" charset="0"/>
-              </a:rPr>
-              <a:t>新一代与新、老客户的关系</a:t>
-            </a:r>
-            <a:endParaRPr lang="en-US" altLang="zh-CN" sz="1400" dirty="0" smtClean="0">
-              <a:solidFill>
-                <a:schemeClr val="tx1">
-                  <a:lumMod val="75000"/>
-                </a:schemeClr>
-              </a:solidFill>
-              <a:latin typeface="Microsoft YaHei" charset="0"/>
-              <a:ea typeface="Microsoft YaHei" charset="0"/>
-              <a:cs typeface="Microsoft YaHei" charset="0"/>
-            </a:endParaRPr>
-          </a:p>
-          <a:p>
-            <a:pPr marL="342900" indent="-342900">
-              <a:buFont typeface="Arial" panose="020B0604020202020204" pitchFamily="34" charset="0"/>
-              <a:buChar char="•"/>
-            </a:pPr>
-            <a:r>
-              <a:rPr lang="zh-CN" altLang="en-US" sz="1400" dirty="0" smtClean="0">
-                <a:solidFill>
-                  <a:schemeClr val="tx1">
-                    <a:lumMod val="75000"/>
-                  </a:schemeClr>
-                </a:solidFill>
-                <a:latin typeface="Microsoft YaHei" charset="0"/>
-                <a:ea typeface="Microsoft YaHei" charset="0"/>
-                <a:cs typeface="Microsoft YaHei" charset="0"/>
-              </a:rPr>
-              <a:t>新一代与普元人的关系</a:t>
-            </a:r>
-            <a:endParaRPr lang="en-US" altLang="zh-CN" sz="1400" dirty="0" smtClean="0">
-              <a:solidFill>
-                <a:schemeClr val="tx1">
-                  <a:lumMod val="75000"/>
-                </a:schemeClr>
-              </a:solidFill>
-              <a:latin typeface="Microsoft YaHei" charset="0"/>
-              <a:ea typeface="Microsoft YaHei" charset="0"/>
-              <a:cs typeface="Microsoft YaHei" charset="0"/>
-            </a:endParaRPr>
-          </a:p>
-          <a:p>
-            <a:pPr marL="342900" indent="-342900">
-              <a:buFont typeface="Arial" panose="020B0604020202020204" pitchFamily="34" charset="0"/>
-              <a:buChar char="•"/>
-            </a:pPr>
-            <a:r>
-              <a:rPr lang="zh-CN" altLang="en-US" sz="1400" dirty="0" smtClean="0">
-                <a:solidFill>
-                  <a:schemeClr val="tx1">
-                    <a:lumMod val="75000"/>
-                  </a:schemeClr>
-                </a:solidFill>
-                <a:latin typeface="Microsoft YaHei" charset="0"/>
-                <a:ea typeface="Microsoft YaHei" charset="0"/>
-                <a:cs typeface="Microsoft YaHei" charset="0"/>
-              </a:rPr>
-              <a:t>新一代与现有产品的关系</a:t>
-            </a:r>
-            <a:endParaRPr lang="en-US" altLang="zh-CN" sz="1600" dirty="0" smtClean="0">
-              <a:solidFill>
-                <a:schemeClr val="tx1">
-                  <a:lumMod val="75000"/>
-                </a:schemeClr>
-              </a:solidFill>
-              <a:latin typeface="Microsoft YaHei" charset="0"/>
-              <a:ea typeface="Microsoft YaHei" charset="0"/>
-              <a:cs typeface="Microsoft YaHei" charset="0"/>
-            </a:endParaRPr>
-          </a:p>
-        </p:txBody>
-      </p:sp>
+      </p:pic>
       <p:sp>
         <p:nvSpPr>
-          <p:cNvPr id="11" name="文本框 10"/>
+          <p:cNvPr id="5" name="文本框 4"/>
           <p:cNvSpPr txBox="1"/>
           <p:nvPr/>
         </p:nvSpPr>
         <p:spPr>
           <a:xfrm>
-            <a:off x="4295800" y="2708920"/>
-            <a:ext cx="2729913" cy="1077218"/>
+            <a:off x="3899756" y="620688"/>
+            <a:ext cx="4392488" cy="646331"/>
           </a:xfrm>
           <a:prstGeom prst="rect">
             <a:avLst/>
@@ -4624,14 +7779,13 @@
           <a:noFill/>
         </p:spPr>
         <p:txBody>
-          <a:bodyPr wrap="square" rtlCol="0" anchor="t">
+          <a:bodyPr vert="horz" wrap="square" rtlCol="0">
             <a:spAutoFit/>
           </a:bodyPr>
           <a:lstStyle/>
           <a:p>
-            <a:pPr algn="ctr"/>
             <a:r>
-              <a:rPr lang="zh-CN" altLang="en-US" sz="1600" b="1" dirty="0" smtClean="0">
+              <a:rPr lang="zh-CN" altLang="en-US" sz="3600" dirty="0" smtClean="0">
                 <a:solidFill>
                   <a:schemeClr val="tx2">
                     <a:lumMod val="75000"/>
@@ -4641,1471 +7795,15 @@
                 <a:ea typeface="Microsoft YaHei" charset="0"/>
                 <a:cs typeface="Microsoft YaHei" charset="0"/>
               </a:rPr>
-              <a:t>讨论</a:t>
-            </a:r>
-            <a:r>
-              <a:rPr lang="en-US" altLang="zh-CN" sz="1600" b="1" dirty="0" smtClean="0">
-                <a:solidFill>
-                  <a:schemeClr val="tx2">
-                    <a:lumMod val="75000"/>
-                  </a:schemeClr>
-                </a:solidFill>
-                <a:latin typeface="Microsoft YaHei" charset="0"/>
-                <a:ea typeface="Microsoft YaHei" charset="0"/>
-                <a:cs typeface="Microsoft YaHei" charset="0"/>
-              </a:rPr>
-              <a:t>(60min)</a:t>
-            </a:r>
-            <a:r>
-              <a:rPr lang="zh-CN" altLang="en-US" sz="1600" b="1" dirty="0" smtClean="0">
-                <a:solidFill>
-                  <a:schemeClr val="tx2">
-                    <a:lumMod val="75000"/>
-                  </a:schemeClr>
-                </a:solidFill>
-                <a:latin typeface="Microsoft YaHei" charset="0"/>
-                <a:ea typeface="Microsoft YaHei" charset="0"/>
-                <a:cs typeface="Microsoft YaHei" charset="0"/>
-              </a:rPr>
-              <a:t>：</a:t>
-            </a:r>
-            <a:endParaRPr lang="zh-CN" altLang="en-US" sz="1600" b="1" dirty="0">
-              <a:solidFill>
-                <a:schemeClr val="tx2">
-                  <a:lumMod val="75000"/>
-                </a:schemeClr>
-              </a:solidFill>
-              <a:latin typeface="Microsoft YaHei" charset="0"/>
-              <a:ea typeface="Microsoft YaHei" charset="0"/>
-              <a:cs typeface="Microsoft YaHei" charset="0"/>
-            </a:endParaRPr>
-          </a:p>
-          <a:p>
-            <a:r>
-              <a:rPr lang="en-US" altLang="zh-CN" sz="1600" dirty="0" smtClean="0">
-                <a:solidFill>
-                  <a:schemeClr val="tx2">
-                    <a:lumMod val="75000"/>
-                  </a:schemeClr>
-                </a:solidFill>
-                <a:latin typeface="Microsoft YaHei" charset="0"/>
-                <a:ea typeface="Microsoft YaHei" charset="0"/>
-                <a:cs typeface="Microsoft YaHei" charset="0"/>
-              </a:rPr>
-              <a:t>1</a:t>
-            </a:r>
-            <a:r>
-              <a:rPr lang="zh-CN" altLang="en-US" sz="1600" dirty="0" smtClean="0">
-                <a:solidFill>
-                  <a:schemeClr val="tx2">
-                    <a:lumMod val="75000"/>
-                  </a:schemeClr>
-                </a:solidFill>
-                <a:latin typeface="Microsoft YaHei" charset="0"/>
-                <a:ea typeface="Microsoft YaHei" charset="0"/>
-                <a:cs typeface="Microsoft YaHei" charset="0"/>
-              </a:rPr>
-              <a:t>、企业数字化的案例</a:t>
-            </a:r>
-            <a:endParaRPr lang="en-US" altLang="zh-CN" sz="1600" dirty="0" smtClean="0">
-              <a:solidFill>
-                <a:schemeClr val="tx2">
-                  <a:lumMod val="75000"/>
-                </a:schemeClr>
-              </a:solidFill>
-              <a:latin typeface="Microsoft YaHei" charset="0"/>
-              <a:ea typeface="Microsoft YaHei" charset="0"/>
-              <a:cs typeface="Microsoft YaHei" charset="0"/>
-            </a:endParaRPr>
-          </a:p>
-          <a:p>
-            <a:r>
-              <a:rPr lang="en-US" altLang="zh-CN" sz="1600" dirty="0" smtClean="0">
-                <a:solidFill>
-                  <a:schemeClr val="tx2">
-                    <a:lumMod val="75000"/>
-                  </a:schemeClr>
-                </a:solidFill>
-                <a:latin typeface="Microsoft YaHei" charset="0"/>
-                <a:ea typeface="Microsoft YaHei" charset="0"/>
-                <a:cs typeface="Microsoft YaHei" charset="0"/>
-              </a:rPr>
-              <a:t>2</a:t>
-            </a:r>
-            <a:r>
-              <a:rPr lang="zh-CN" altLang="en-US" sz="1600" dirty="0" smtClean="0">
-                <a:solidFill>
-                  <a:schemeClr val="tx2">
-                    <a:lumMod val="75000"/>
-                  </a:schemeClr>
-                </a:solidFill>
-                <a:latin typeface="Microsoft YaHei" charset="0"/>
-                <a:ea typeface="Microsoft YaHei" charset="0"/>
-                <a:cs typeface="Microsoft YaHei" charset="0"/>
-              </a:rPr>
-              <a:t>、客户 </a:t>
-            </a:r>
-            <a:r>
-              <a:rPr lang="en-US" altLang="zh-CN" sz="1600" dirty="0" smtClean="0">
-                <a:solidFill>
-                  <a:schemeClr val="tx2">
-                    <a:lumMod val="75000"/>
-                  </a:schemeClr>
-                </a:solidFill>
-                <a:latin typeface="Microsoft YaHei" charset="0"/>
-                <a:ea typeface="Microsoft YaHei" charset="0"/>
-                <a:cs typeface="Microsoft YaHei" charset="0"/>
-              </a:rPr>
-              <a:t>IT </a:t>
-            </a:r>
-            <a:r>
-              <a:rPr lang="zh-CN" altLang="en-US" sz="1600" dirty="0" smtClean="0">
-                <a:solidFill>
-                  <a:schemeClr val="tx2">
-                    <a:lumMod val="75000"/>
-                  </a:schemeClr>
-                </a:solidFill>
-                <a:latin typeface="Microsoft YaHei" charset="0"/>
-                <a:ea typeface="Microsoft YaHei" charset="0"/>
-                <a:cs typeface="Microsoft YaHei" charset="0"/>
-              </a:rPr>
-              <a:t>精益运营的案例</a:t>
-            </a:r>
-            <a:endParaRPr lang="en-US" altLang="zh-CN" sz="1600" dirty="0" smtClean="0">
-              <a:solidFill>
-                <a:schemeClr val="tx2">
-                  <a:lumMod val="75000"/>
-                </a:schemeClr>
-              </a:solidFill>
-              <a:latin typeface="Microsoft YaHei" charset="0"/>
-              <a:ea typeface="Microsoft YaHei" charset="0"/>
-              <a:cs typeface="Microsoft YaHei" charset="0"/>
-            </a:endParaRPr>
-          </a:p>
-          <a:p>
-            <a:pPr algn="ctr"/>
-            <a:endParaRPr lang="zh-CN" altLang="en-US" sz="1600" dirty="0">
-              <a:solidFill>
-                <a:schemeClr val="tx2">
-                  <a:lumMod val="75000"/>
-                </a:schemeClr>
-              </a:solidFill>
-              <a:latin typeface="Microsoft YaHei" charset="0"/>
-              <a:ea typeface="Microsoft YaHei" charset="0"/>
-              <a:cs typeface="Microsoft YaHei" charset="0"/>
-            </a:endParaRPr>
-          </a:p>
-        </p:txBody>
-      </p:sp>
-      <p:sp>
-        <p:nvSpPr>
-          <p:cNvPr id="14" name="文本框 13"/>
-          <p:cNvSpPr txBox="1"/>
-          <p:nvPr/>
-        </p:nvSpPr>
-        <p:spPr>
-          <a:xfrm>
-            <a:off x="6312024" y="5661248"/>
-            <a:ext cx="2880320" cy="584775"/>
-          </a:xfrm>
-          <a:prstGeom prst="rect">
-            <a:avLst/>
-          </a:prstGeom>
-          <a:noFill/>
-        </p:spPr>
-        <p:txBody>
-          <a:bodyPr wrap="square" rtlCol="0" anchor="t">
-            <a:spAutoFit/>
-          </a:bodyPr>
-          <a:lstStyle/>
-          <a:p>
-            <a:pPr algn="ctr"/>
-            <a:r>
-              <a:rPr lang="zh-CN" altLang="en-US" sz="1600" b="1" dirty="0">
-                <a:solidFill>
-                  <a:schemeClr val="tx2">
-                    <a:lumMod val="75000"/>
-                  </a:schemeClr>
-                </a:solidFill>
-                <a:latin typeface="Microsoft YaHei" charset="0"/>
-                <a:ea typeface="Microsoft YaHei" charset="0"/>
-                <a:cs typeface="Microsoft YaHei" charset="0"/>
-              </a:rPr>
-              <a:t>讨论</a:t>
-            </a:r>
-            <a:r>
-              <a:rPr lang="en-US" altLang="zh-CN" sz="1600" b="1" dirty="0" smtClean="0">
-                <a:solidFill>
-                  <a:schemeClr val="tx2">
-                    <a:lumMod val="75000"/>
-                  </a:schemeClr>
-                </a:solidFill>
-                <a:latin typeface="Microsoft YaHei" charset="0"/>
-                <a:ea typeface="Microsoft YaHei" charset="0"/>
-                <a:cs typeface="Microsoft YaHei" charset="0"/>
-              </a:rPr>
-              <a:t>(60min</a:t>
-            </a:r>
-            <a:r>
-              <a:rPr lang="en-US" altLang="zh-CN" sz="1600" b="1" dirty="0">
-                <a:solidFill>
-                  <a:schemeClr val="tx2">
-                    <a:lumMod val="75000"/>
-                  </a:schemeClr>
-                </a:solidFill>
-                <a:latin typeface="Microsoft YaHei" charset="0"/>
-                <a:ea typeface="Microsoft YaHei" charset="0"/>
-                <a:cs typeface="Microsoft YaHei" charset="0"/>
-              </a:rPr>
-              <a:t>)</a:t>
-            </a:r>
-            <a:r>
-              <a:rPr lang="zh-CN" altLang="en-US" sz="1600" b="1" dirty="0">
-                <a:solidFill>
-                  <a:schemeClr val="tx2">
-                    <a:lumMod val="75000"/>
-                  </a:schemeClr>
-                </a:solidFill>
-                <a:latin typeface="Microsoft YaHei" charset="0"/>
-                <a:ea typeface="Microsoft YaHei" charset="0"/>
-                <a:cs typeface="Microsoft YaHei" charset="0"/>
-              </a:rPr>
-              <a:t>：</a:t>
-            </a:r>
-          </a:p>
-          <a:p>
-            <a:pPr algn="ctr"/>
-            <a:r>
-              <a:rPr lang="zh-CN" altLang="en-US" sz="1600" dirty="0" smtClean="0">
-                <a:solidFill>
-                  <a:schemeClr val="tx2">
-                    <a:lumMod val="75000"/>
-                  </a:schemeClr>
-                </a:solidFill>
-                <a:latin typeface="Microsoft YaHei" charset="0"/>
-                <a:ea typeface="Microsoft YaHei" charset="0"/>
-                <a:cs typeface="Microsoft YaHei" charset="0"/>
-              </a:rPr>
-              <a:t>以所在项目进行</a:t>
-            </a:r>
-            <a:r>
-              <a:rPr lang="zh-CN" altLang="en-US" sz="1600" dirty="0">
-                <a:solidFill>
-                  <a:schemeClr val="tx2">
-                    <a:lumMod val="75000"/>
-                  </a:schemeClr>
-                </a:solidFill>
-                <a:latin typeface="Microsoft YaHei" charset="0"/>
-                <a:ea typeface="Microsoft YaHei" charset="0"/>
-                <a:cs typeface="Microsoft YaHei" charset="0"/>
-              </a:rPr>
-              <a:t>客户价值</a:t>
-            </a:r>
-            <a:r>
-              <a:rPr lang="zh-CN" altLang="en-US" sz="1600" dirty="0" smtClean="0">
-                <a:solidFill>
-                  <a:schemeClr val="tx2">
-                    <a:lumMod val="75000"/>
-                  </a:schemeClr>
-                </a:solidFill>
-                <a:latin typeface="Microsoft YaHei" charset="0"/>
-                <a:ea typeface="Microsoft YaHei" charset="0"/>
-                <a:cs typeface="Microsoft YaHei" charset="0"/>
-              </a:rPr>
-              <a:t>规划</a:t>
-            </a:r>
-            <a:endParaRPr lang="zh-CN" altLang="en-US" sz="1600" dirty="0">
-              <a:solidFill>
-                <a:schemeClr val="tx2">
-                  <a:lumMod val="75000"/>
-                </a:schemeClr>
-              </a:solidFill>
-              <a:latin typeface="Microsoft YaHei" charset="0"/>
-              <a:ea typeface="Microsoft YaHei" charset="0"/>
-              <a:cs typeface="Microsoft YaHei" charset="0"/>
-            </a:endParaRPr>
-          </a:p>
-        </p:txBody>
-      </p:sp>
-      <p:cxnSp>
-        <p:nvCxnSpPr>
-          <p:cNvPr id="19" name="直接箭头连接符 18"/>
-          <p:cNvCxnSpPr>
-            <a:stCxn id="9" idx="3"/>
-            <a:endCxn id="18" idx="1"/>
-          </p:cNvCxnSpPr>
-          <p:nvPr/>
-        </p:nvCxnSpPr>
-        <p:spPr>
-          <a:xfrm>
-            <a:off x="4655840" y="1916832"/>
-            <a:ext cx="1872568" cy="0"/>
-          </a:xfrm>
-          <a:prstGeom prst="straightConnector1">
-            <a:avLst/>
-          </a:prstGeom>
-          <a:ln w="25400">
-            <a:solidFill>
-              <a:schemeClr val="tx1">
-                <a:lumMod val="75000"/>
-              </a:schemeClr>
-            </a:solidFill>
-            <a:tailEnd type="triangle"/>
-          </a:ln>
-        </p:spPr>
-        <p:style>
-          <a:lnRef idx="1">
-            <a:schemeClr val="accent1"/>
-          </a:lnRef>
-          <a:fillRef idx="0">
-            <a:schemeClr val="accent1"/>
-          </a:fillRef>
-          <a:effectRef idx="0">
-            <a:schemeClr val="accent1"/>
-          </a:effectRef>
-          <a:fontRef idx="minor">
-            <a:schemeClr val="tx1"/>
-          </a:fontRef>
-        </p:style>
-      </p:cxnSp>
-      <p:cxnSp>
-        <p:nvCxnSpPr>
-          <p:cNvPr id="24" name="肘形连接符 23"/>
-          <p:cNvCxnSpPr>
-            <a:stCxn id="18" idx="3"/>
-            <a:endCxn id="17" idx="3"/>
-          </p:cNvCxnSpPr>
-          <p:nvPr/>
-        </p:nvCxnSpPr>
-        <p:spPr>
-          <a:xfrm>
-            <a:off x="9768408" y="1916832"/>
-            <a:ext cx="1894787" cy="2822936"/>
-          </a:xfrm>
-          <a:prstGeom prst="bentConnector3">
-            <a:avLst>
-              <a:gd name="adj1" fmla="val 112065"/>
-            </a:avLst>
-          </a:prstGeom>
-          <a:ln w="25400">
-            <a:solidFill>
-              <a:schemeClr val="tx1">
-                <a:lumMod val="75000"/>
-              </a:schemeClr>
-            </a:solidFill>
-            <a:tailEnd type="triangle"/>
-          </a:ln>
-        </p:spPr>
-        <p:style>
-          <a:lnRef idx="1">
-            <a:schemeClr val="accent1"/>
-          </a:lnRef>
-          <a:fillRef idx="0">
-            <a:schemeClr val="accent1"/>
-          </a:fillRef>
-          <a:effectRef idx="0">
-            <a:schemeClr val="accent1"/>
-          </a:effectRef>
-          <a:fontRef idx="minor">
-            <a:schemeClr val="tx1"/>
-          </a:fontRef>
-        </p:style>
-      </p:cxnSp>
-      <p:sp>
-        <p:nvSpPr>
-          <p:cNvPr id="34" name="文本框 33"/>
-          <p:cNvSpPr txBox="1"/>
-          <p:nvPr/>
-        </p:nvSpPr>
-        <p:spPr>
-          <a:xfrm>
-            <a:off x="9192344" y="2780928"/>
-            <a:ext cx="3162018" cy="738664"/>
-          </a:xfrm>
-          <a:prstGeom prst="rect">
-            <a:avLst/>
-          </a:prstGeom>
-          <a:noFill/>
-        </p:spPr>
-        <p:txBody>
-          <a:bodyPr wrap="square" lIns="0" tIns="0" rIns="0" bIns="0" rtlCol="0" anchor="t">
-            <a:spAutoFit/>
-          </a:bodyPr>
-          <a:lstStyle/>
-          <a:p>
-            <a:pPr algn="ctr"/>
-            <a:r>
-              <a:rPr lang="zh-CN" altLang="en-US" sz="1600" b="1" dirty="0">
-                <a:solidFill>
-                  <a:schemeClr val="tx2">
-                    <a:lumMod val="75000"/>
-                  </a:schemeClr>
-                </a:solidFill>
-                <a:latin typeface="Microsoft YaHei" charset="0"/>
-                <a:ea typeface="Microsoft YaHei" charset="0"/>
-                <a:cs typeface="Microsoft YaHei" charset="0"/>
-              </a:rPr>
-              <a:t>讨论</a:t>
-            </a:r>
-            <a:r>
-              <a:rPr lang="zh-CN" altLang="en-US" sz="1600" b="1" dirty="0" smtClean="0">
-                <a:solidFill>
-                  <a:schemeClr val="tx2">
-                    <a:lumMod val="75000"/>
-                  </a:schemeClr>
-                </a:solidFill>
-                <a:latin typeface="Microsoft YaHei" charset="0"/>
-                <a:ea typeface="Microsoft YaHei" charset="0"/>
-                <a:cs typeface="Microsoft YaHei" charset="0"/>
-              </a:rPr>
-              <a:t> </a:t>
-            </a:r>
-            <a:r>
-              <a:rPr lang="en-US" altLang="zh-CN" sz="1600" b="1" dirty="0" smtClean="0">
-                <a:solidFill>
-                  <a:schemeClr val="tx2">
-                    <a:lumMod val="75000"/>
-                  </a:schemeClr>
-                </a:solidFill>
-                <a:latin typeface="Microsoft YaHei" charset="0"/>
-                <a:ea typeface="Microsoft YaHei" charset="0"/>
-                <a:cs typeface="Microsoft YaHei" charset="0"/>
-              </a:rPr>
-              <a:t>(60min)</a:t>
-            </a:r>
-            <a:r>
-              <a:rPr lang="zh-CN" altLang="en-US" sz="1600" b="1" dirty="0" smtClean="0">
-                <a:solidFill>
-                  <a:schemeClr val="tx2">
-                    <a:lumMod val="75000"/>
-                  </a:schemeClr>
-                </a:solidFill>
-                <a:latin typeface="Microsoft YaHei" charset="0"/>
-                <a:ea typeface="Microsoft YaHei" charset="0"/>
-                <a:cs typeface="Microsoft YaHei" charset="0"/>
-              </a:rPr>
-              <a:t>：</a:t>
-            </a:r>
-            <a:endParaRPr lang="zh-CN" altLang="en-US" sz="1600" b="1" dirty="0">
-              <a:solidFill>
-                <a:schemeClr val="tx2">
-                  <a:lumMod val="75000"/>
-                </a:schemeClr>
-              </a:solidFill>
-              <a:latin typeface="Microsoft YaHei" charset="0"/>
-              <a:ea typeface="Microsoft YaHei" charset="0"/>
-              <a:cs typeface="Microsoft YaHei" charset="0"/>
-            </a:endParaRPr>
-          </a:p>
-          <a:p>
-            <a:r>
-              <a:rPr lang="en-US" altLang="zh-CN" sz="1600" dirty="0" smtClean="0">
-                <a:solidFill>
-                  <a:schemeClr val="tx2">
-                    <a:lumMod val="75000"/>
-                  </a:schemeClr>
-                </a:solidFill>
-                <a:latin typeface="Microsoft YaHei" charset="0"/>
-                <a:ea typeface="Microsoft YaHei" charset="0"/>
-                <a:cs typeface="Microsoft YaHei" charset="0"/>
-              </a:rPr>
-              <a:t>1</a:t>
-            </a:r>
-            <a:r>
-              <a:rPr lang="zh-CN" altLang="en-US" sz="1600" dirty="0">
-                <a:solidFill>
-                  <a:schemeClr val="tx2">
-                    <a:lumMod val="75000"/>
-                  </a:schemeClr>
-                </a:solidFill>
-                <a:latin typeface="Microsoft YaHei" charset="0"/>
-                <a:ea typeface="Microsoft YaHei" charset="0"/>
-                <a:cs typeface="Microsoft YaHei" charset="0"/>
-              </a:rPr>
-              <a:t>、你如何理解</a:t>
-            </a:r>
-            <a:r>
-              <a:rPr lang="en-US" altLang="zh-CN" sz="1600" dirty="0" smtClean="0">
-                <a:solidFill>
-                  <a:schemeClr val="tx2">
-                    <a:lumMod val="75000"/>
-                  </a:schemeClr>
-                </a:solidFill>
-                <a:latin typeface="Microsoft YaHei" charset="0"/>
-                <a:ea typeface="Microsoft YaHei" charset="0"/>
-                <a:cs typeface="Microsoft YaHei" charset="0"/>
-              </a:rPr>
-              <a:t>DevOps</a:t>
-            </a:r>
-          </a:p>
-          <a:p>
-            <a:r>
-              <a:rPr lang="en-US" altLang="zh-CN" sz="1600" dirty="0" smtClean="0">
-                <a:solidFill>
-                  <a:schemeClr val="tx2">
-                    <a:lumMod val="75000"/>
-                  </a:schemeClr>
-                </a:solidFill>
-                <a:latin typeface="Microsoft YaHei" charset="0"/>
-                <a:ea typeface="Microsoft YaHei" charset="0"/>
-                <a:cs typeface="Microsoft YaHei" charset="0"/>
-              </a:rPr>
-              <a:t>2</a:t>
-            </a:r>
-            <a:r>
-              <a:rPr lang="zh-CN" altLang="en-US" sz="1600" dirty="0" smtClean="0">
-                <a:solidFill>
-                  <a:schemeClr val="tx2">
-                    <a:lumMod val="75000"/>
-                  </a:schemeClr>
-                </a:solidFill>
-                <a:latin typeface="Microsoft YaHei" charset="0"/>
-                <a:ea typeface="Microsoft YaHei" charset="0"/>
-                <a:cs typeface="Microsoft YaHei" charset="0"/>
-              </a:rPr>
-              <a:t>、如何在客户中应用 </a:t>
-            </a:r>
-            <a:r>
-              <a:rPr lang="en-US" altLang="zh-CN" sz="1600" dirty="0" smtClean="0">
-                <a:solidFill>
-                  <a:schemeClr val="tx2">
-                    <a:lumMod val="75000"/>
-                  </a:schemeClr>
-                </a:solidFill>
-                <a:latin typeface="Microsoft YaHei" charset="0"/>
-                <a:ea typeface="Microsoft YaHei" charset="0"/>
-                <a:cs typeface="Microsoft YaHei" charset="0"/>
-              </a:rPr>
-              <a:t>DevOps</a:t>
-            </a:r>
-            <a:endParaRPr lang="zh-CN" altLang="en-US" sz="1600" dirty="0">
-              <a:solidFill>
-                <a:schemeClr val="tx2">
-                  <a:lumMod val="75000"/>
-                </a:schemeClr>
-              </a:solidFill>
-              <a:latin typeface="Microsoft YaHei" charset="0"/>
-              <a:ea typeface="Microsoft YaHei" charset="0"/>
-              <a:cs typeface="Microsoft YaHei" charset="0"/>
-            </a:endParaRPr>
-          </a:p>
-        </p:txBody>
-      </p:sp>
-      <p:sp>
-        <p:nvSpPr>
-          <p:cNvPr id="36" name="Rectangle 28"/>
-          <p:cNvSpPr/>
-          <p:nvPr/>
-        </p:nvSpPr>
-        <p:spPr>
-          <a:xfrm>
-            <a:off x="142275" y="3933056"/>
-            <a:ext cx="2281317" cy="1584176"/>
-          </a:xfrm>
-          <a:prstGeom prst="rect">
-            <a:avLst/>
-          </a:prstGeom>
-          <a:ln>
-            <a:solidFill>
-              <a:schemeClr val="tx1">
-                <a:lumMod val="75000"/>
-              </a:schemeClr>
-            </a:solidFill>
-          </a:ln>
-        </p:spPr>
-        <p:style>
-          <a:lnRef idx="2">
-            <a:schemeClr val="dk1"/>
-          </a:lnRef>
-          <a:fillRef idx="1">
-            <a:schemeClr val="lt1"/>
-          </a:fillRef>
-          <a:effectRef idx="0">
-            <a:schemeClr val="dk1"/>
-          </a:effectRef>
-          <a:fontRef idx="minor">
-            <a:schemeClr val="dk1"/>
-          </a:fontRef>
-        </p:style>
-        <p:txBody>
-          <a:bodyPr rot="0" spcFirstLastPara="0" vertOverflow="overflow" horzOverflow="overflow" vert="horz" wrap="square" lIns="0" tIns="36000" rIns="0" bIns="0" numCol="1" spcCol="0" rtlCol="0" fromWordArt="0" anchor="ctr" anchorCtr="0" forceAA="0" compatLnSpc="1">
-            <a:noAutofit/>
-          </a:bodyPr>
-          <a:lstStyle/>
-          <a:p>
-            <a:pPr algn="ctr"/>
-            <a:r>
-              <a:rPr lang="zh-CN" altLang="en-US" dirty="0" smtClean="0">
-                <a:solidFill>
-                  <a:schemeClr val="tx1">
-                    <a:lumMod val="75000"/>
-                  </a:schemeClr>
-                </a:solidFill>
-                <a:latin typeface="Microsoft YaHei" charset="0"/>
-                <a:ea typeface="Microsoft YaHei" charset="0"/>
-                <a:cs typeface="Microsoft YaHei" charset="0"/>
-              </a:rPr>
-              <a:t>总结</a:t>
-            </a:r>
-            <a:endParaRPr lang="en-US" altLang="zh-CN" dirty="0" smtClean="0">
-              <a:solidFill>
-                <a:schemeClr val="tx1">
-                  <a:lumMod val="75000"/>
-                </a:schemeClr>
-              </a:solidFill>
-              <a:latin typeface="Microsoft YaHei" charset="0"/>
-              <a:ea typeface="Microsoft YaHei" charset="0"/>
-              <a:cs typeface="Microsoft YaHei" charset="0"/>
-            </a:endParaRPr>
-          </a:p>
-          <a:p>
-            <a:pPr algn="ctr"/>
-            <a:r>
-              <a:rPr lang="en-US" dirty="0" smtClean="0">
-                <a:solidFill>
-                  <a:schemeClr val="tx1">
-                    <a:lumMod val="75000"/>
-                  </a:schemeClr>
-                </a:solidFill>
-                <a:latin typeface="Microsoft YaHei" charset="0"/>
-                <a:ea typeface="Microsoft YaHei" charset="0"/>
-                <a:cs typeface="Microsoft YaHei" charset="0"/>
-              </a:rPr>
-              <a:t>(20min)</a:t>
+              <a:t>忘掉繁华，重新开始</a:t>
             </a:r>
           </a:p>
         </p:txBody>
       </p:sp>
-      <p:sp>
-        <p:nvSpPr>
-          <p:cNvPr id="40" name="文本框 39"/>
-          <p:cNvSpPr txBox="1"/>
-          <p:nvPr/>
-        </p:nvSpPr>
-        <p:spPr>
-          <a:xfrm>
-            <a:off x="1703512" y="5733256"/>
-            <a:ext cx="2880320" cy="584775"/>
-          </a:xfrm>
-          <a:prstGeom prst="rect">
-            <a:avLst/>
-          </a:prstGeom>
-          <a:noFill/>
-        </p:spPr>
-        <p:txBody>
-          <a:bodyPr wrap="square" rtlCol="0" anchor="t">
-            <a:spAutoFit/>
-          </a:bodyPr>
-          <a:lstStyle/>
-          <a:p>
-            <a:pPr algn="ctr"/>
-            <a:r>
-              <a:rPr lang="zh-CN" altLang="en-US" sz="1600" b="1" dirty="0" smtClean="0">
-                <a:solidFill>
-                  <a:schemeClr val="tx2">
-                    <a:lumMod val="75000"/>
-                  </a:schemeClr>
-                </a:solidFill>
-                <a:latin typeface="Microsoft YaHei" charset="0"/>
-                <a:ea typeface="Microsoft YaHei" charset="0"/>
-                <a:cs typeface="Microsoft YaHei" charset="0"/>
-              </a:rPr>
-              <a:t>讨论 </a:t>
-            </a:r>
-            <a:r>
-              <a:rPr lang="en-US" altLang="zh-CN" sz="1600" b="1" dirty="0">
-                <a:solidFill>
-                  <a:schemeClr val="tx2">
-                    <a:lumMod val="75000"/>
-                  </a:schemeClr>
-                </a:solidFill>
-                <a:latin typeface="Microsoft YaHei" charset="0"/>
-                <a:ea typeface="Microsoft YaHei" charset="0"/>
-                <a:cs typeface="Microsoft YaHei" charset="0"/>
-              </a:rPr>
-              <a:t>(60min)</a:t>
-            </a:r>
-            <a:r>
-              <a:rPr lang="zh-CN" altLang="en-US" sz="1600" b="1" dirty="0">
-                <a:solidFill>
-                  <a:schemeClr val="tx2">
-                    <a:lumMod val="75000"/>
-                  </a:schemeClr>
-                </a:solidFill>
-                <a:latin typeface="Microsoft YaHei" charset="0"/>
-                <a:ea typeface="Microsoft YaHei" charset="0"/>
-                <a:cs typeface="Microsoft YaHei" charset="0"/>
-              </a:rPr>
-              <a:t>：</a:t>
-            </a:r>
-          </a:p>
-          <a:p>
-            <a:pPr algn="ctr"/>
-            <a:r>
-              <a:rPr lang="zh-CN" altLang="en-US" sz="1600" dirty="0" smtClean="0">
-                <a:solidFill>
-                  <a:schemeClr val="tx2">
-                    <a:lumMod val="75000"/>
-                  </a:schemeClr>
-                </a:solidFill>
-                <a:latin typeface="Microsoft YaHei" charset="0"/>
-                <a:ea typeface="Microsoft YaHei" charset="0"/>
-                <a:cs typeface="Microsoft YaHei" charset="0"/>
-              </a:rPr>
-              <a:t>所在客户 </a:t>
-            </a:r>
-            <a:r>
-              <a:rPr lang="en-US" altLang="zh-CN" sz="1600" dirty="0" smtClean="0">
-                <a:solidFill>
-                  <a:schemeClr val="tx2">
-                    <a:lumMod val="75000"/>
-                  </a:schemeClr>
-                </a:solidFill>
-                <a:latin typeface="Microsoft YaHei" charset="0"/>
-                <a:ea typeface="Microsoft YaHei" charset="0"/>
-                <a:cs typeface="Microsoft YaHei" charset="0"/>
-              </a:rPr>
-              <a:t>IT </a:t>
-            </a:r>
-            <a:r>
-              <a:rPr lang="zh-CN" altLang="en-US" sz="1600" dirty="0" smtClean="0">
-                <a:solidFill>
-                  <a:schemeClr val="tx2">
-                    <a:lumMod val="75000"/>
-                  </a:schemeClr>
-                </a:solidFill>
-                <a:latin typeface="Microsoft YaHei" charset="0"/>
-                <a:ea typeface="Microsoft YaHei" charset="0"/>
-                <a:cs typeface="Microsoft YaHei" charset="0"/>
-              </a:rPr>
-              <a:t>能力评估</a:t>
-            </a:r>
-            <a:endParaRPr lang="zh-CN" altLang="en-US" sz="1600" dirty="0">
-              <a:solidFill>
-                <a:schemeClr val="tx2">
-                  <a:lumMod val="75000"/>
-                </a:schemeClr>
-              </a:solidFill>
-              <a:latin typeface="Microsoft YaHei" charset="0"/>
-              <a:ea typeface="Microsoft YaHei" charset="0"/>
-              <a:cs typeface="Microsoft YaHei" charset="0"/>
-            </a:endParaRPr>
-          </a:p>
-        </p:txBody>
-      </p:sp>
-      <p:sp>
-        <p:nvSpPr>
-          <p:cNvPr id="17" name="Rectangle 28"/>
-          <p:cNvSpPr/>
-          <p:nvPr/>
-        </p:nvSpPr>
-        <p:spPr>
-          <a:xfrm>
-            <a:off x="8423195" y="3947680"/>
-            <a:ext cx="3240000" cy="1584176"/>
-          </a:xfrm>
-          <a:prstGeom prst="rect">
-            <a:avLst/>
-          </a:prstGeom>
-          <a:ln>
-            <a:solidFill>
-              <a:schemeClr val="tx1">
-                <a:lumMod val="75000"/>
-              </a:schemeClr>
-            </a:solidFill>
-          </a:ln>
-        </p:spPr>
-        <p:style>
-          <a:lnRef idx="2">
-            <a:schemeClr val="dk1"/>
-          </a:lnRef>
-          <a:fillRef idx="1">
-            <a:schemeClr val="lt1"/>
-          </a:fillRef>
-          <a:effectRef idx="0">
-            <a:schemeClr val="dk1"/>
-          </a:effectRef>
-          <a:fontRef idx="minor">
-            <a:schemeClr val="dk1"/>
-          </a:fontRef>
-        </p:style>
-        <p:txBody>
-          <a:bodyPr rot="0" spcFirstLastPara="0" vertOverflow="overflow" horzOverflow="overflow" vert="horz" wrap="square" lIns="0" tIns="36000" rIns="0" bIns="0" numCol="1" spcCol="0" rtlCol="0" fromWordArt="0" anchor="ctr" anchorCtr="0" forceAA="0" compatLnSpc="1">
-            <a:noAutofit/>
-          </a:bodyPr>
-          <a:lstStyle/>
-          <a:p>
-            <a:pPr algn="ctr"/>
-            <a:r>
-              <a:rPr lang="zh-CN" altLang="en-US" dirty="0" smtClean="0">
-                <a:solidFill>
-                  <a:schemeClr val="tx1">
-                    <a:lumMod val="75000"/>
-                  </a:schemeClr>
-                </a:solidFill>
-                <a:latin typeface="Microsoft YaHei" charset="0"/>
-                <a:ea typeface="Microsoft YaHei" charset="0"/>
-                <a:cs typeface="Microsoft YaHei" charset="0"/>
-              </a:rPr>
-              <a:t>通过客户价值规划提高客户满意度，实现个人与团队的成长</a:t>
-            </a:r>
-            <a:r>
-              <a:rPr lang="en-US" altLang="zh-CN" dirty="0" smtClean="0">
-                <a:solidFill>
-                  <a:schemeClr val="tx1">
-                    <a:lumMod val="75000"/>
-                  </a:schemeClr>
-                </a:solidFill>
-                <a:latin typeface="Microsoft YaHei" charset="0"/>
-                <a:ea typeface="Microsoft YaHei" charset="0"/>
-                <a:cs typeface="Microsoft YaHei" charset="0"/>
-              </a:rPr>
-              <a:t>(40min)</a:t>
-            </a:r>
-            <a:endParaRPr lang="en-US" dirty="0" smtClean="0">
-              <a:solidFill>
-                <a:schemeClr val="tx1">
-                  <a:lumMod val="75000"/>
-                </a:schemeClr>
-              </a:solidFill>
-              <a:latin typeface="Microsoft YaHei" charset="0"/>
-              <a:ea typeface="Microsoft YaHei" charset="0"/>
-              <a:cs typeface="Microsoft YaHei" charset="0"/>
-            </a:endParaRPr>
-          </a:p>
-        </p:txBody>
-      </p:sp>
-      <p:sp>
-        <p:nvSpPr>
-          <p:cNvPr id="18" name="Rectangle 28"/>
-          <p:cNvSpPr/>
-          <p:nvPr/>
-        </p:nvSpPr>
-        <p:spPr>
-          <a:xfrm>
-            <a:off x="6528408" y="1124744"/>
-            <a:ext cx="3240000" cy="1584176"/>
-          </a:xfrm>
-          <a:prstGeom prst="rect">
-            <a:avLst/>
-          </a:prstGeom>
-          <a:ln>
-            <a:solidFill>
-              <a:schemeClr val="tx1">
-                <a:lumMod val="75000"/>
-              </a:schemeClr>
-            </a:solidFill>
-          </a:ln>
-        </p:spPr>
-        <p:style>
-          <a:lnRef idx="2">
-            <a:schemeClr val="dk1"/>
-          </a:lnRef>
-          <a:fillRef idx="1">
-            <a:schemeClr val="lt1"/>
-          </a:fillRef>
-          <a:effectRef idx="0">
-            <a:schemeClr val="dk1"/>
-          </a:effectRef>
-          <a:fontRef idx="minor">
-            <a:schemeClr val="dk1"/>
-          </a:fontRef>
-        </p:style>
-        <p:txBody>
-          <a:bodyPr rot="0" spcFirstLastPara="0" vertOverflow="overflow" horzOverflow="overflow" vert="horz" wrap="square" lIns="108000" tIns="36000" rIns="0" bIns="0" numCol="1" spcCol="0" rtlCol="0" fromWordArt="0" anchor="ctr" anchorCtr="0" forceAA="0" compatLnSpc="1">
-            <a:noAutofit/>
-          </a:bodyPr>
-          <a:lstStyle/>
-          <a:p>
-            <a:pPr algn="ctr"/>
-            <a:r>
-              <a:rPr lang="zh-CN" altLang="en-US" dirty="0" smtClean="0">
-                <a:solidFill>
-                  <a:schemeClr val="tx1">
-                    <a:lumMod val="75000"/>
-                  </a:schemeClr>
-                </a:solidFill>
-                <a:latin typeface="Microsoft YaHei" charset="0"/>
-                <a:ea typeface="Microsoft YaHei" charset="0"/>
-                <a:cs typeface="Microsoft YaHei" charset="0"/>
-              </a:rPr>
-              <a:t>数字化企业云平台的第一步</a:t>
-            </a:r>
-            <a:r>
-              <a:rPr lang="en-US" altLang="zh-CN" dirty="0">
-                <a:solidFill>
-                  <a:schemeClr val="tx1">
-                    <a:lumMod val="75000"/>
-                  </a:schemeClr>
-                </a:solidFill>
-                <a:latin typeface="Microsoft YaHei" charset="0"/>
-                <a:ea typeface="Microsoft YaHei" charset="0"/>
-                <a:cs typeface="Microsoft YaHei" charset="0"/>
-              </a:rPr>
-              <a:t>DevOps (60min</a:t>
-            </a:r>
-            <a:r>
-              <a:rPr lang="en-US" altLang="zh-CN" dirty="0" smtClean="0">
-                <a:solidFill>
-                  <a:schemeClr val="tx1">
-                    <a:lumMod val="75000"/>
-                  </a:schemeClr>
-                </a:solidFill>
-                <a:latin typeface="Microsoft YaHei" charset="0"/>
-                <a:ea typeface="Microsoft YaHei" charset="0"/>
-                <a:cs typeface="Microsoft YaHei" charset="0"/>
-              </a:rPr>
-              <a:t>)</a:t>
-            </a:r>
-          </a:p>
-          <a:p>
-            <a:pPr marL="342900" lvl="0" indent="-342900">
-              <a:buFont typeface="Arial" panose="020B0604020202020204" pitchFamily="34" charset="0"/>
-              <a:buChar char="•"/>
-            </a:pPr>
-            <a:r>
-              <a:rPr lang="zh-CN" altLang="en-US" sz="1400" dirty="0" smtClean="0">
-                <a:solidFill>
-                  <a:srgbClr val="011892">
-                    <a:lumMod val="75000"/>
-                  </a:srgbClr>
-                </a:solidFill>
-                <a:latin typeface="Microsoft YaHei" charset="0"/>
-                <a:ea typeface="Microsoft YaHei" charset="0"/>
-                <a:cs typeface="Microsoft YaHei" charset="0"/>
-              </a:rPr>
-              <a:t>数字化企业云平台核心架构</a:t>
-            </a:r>
-            <a:endParaRPr lang="en-US" altLang="zh-CN" sz="1400" dirty="0">
-              <a:solidFill>
-                <a:srgbClr val="011892">
-                  <a:lumMod val="75000"/>
-                </a:srgbClr>
-              </a:solidFill>
-              <a:latin typeface="Microsoft YaHei" charset="0"/>
-              <a:ea typeface="Microsoft YaHei" charset="0"/>
-              <a:cs typeface="Microsoft YaHei" charset="0"/>
-            </a:endParaRPr>
-          </a:p>
-          <a:p>
-            <a:pPr marL="342900" lvl="0" indent="-342900">
-              <a:buFont typeface="Arial" panose="020B0604020202020204" pitchFamily="34" charset="0"/>
-              <a:buChar char="•"/>
-            </a:pPr>
-            <a:r>
-              <a:rPr lang="zh-CN" altLang="en-US" sz="1400" dirty="0" smtClean="0">
-                <a:solidFill>
-                  <a:srgbClr val="011892">
-                    <a:lumMod val="75000"/>
-                  </a:srgbClr>
-                </a:solidFill>
-                <a:latin typeface="Microsoft YaHei" charset="0"/>
-                <a:ea typeface="Microsoft YaHei" charset="0"/>
-                <a:cs typeface="Microsoft YaHei" charset="0"/>
-              </a:rPr>
-              <a:t>实施云计算从 </a:t>
-            </a:r>
-            <a:r>
-              <a:rPr lang="en-US" altLang="zh-CN" sz="1400" dirty="0" smtClean="0">
-                <a:solidFill>
-                  <a:srgbClr val="011892">
-                    <a:lumMod val="75000"/>
-                  </a:srgbClr>
-                </a:solidFill>
-                <a:latin typeface="Microsoft YaHei" charset="0"/>
-                <a:ea typeface="Microsoft YaHei" charset="0"/>
-                <a:cs typeface="Microsoft YaHei" charset="0"/>
-              </a:rPr>
-              <a:t>DevOps </a:t>
-            </a:r>
-            <a:r>
-              <a:rPr lang="zh-CN" altLang="en-US" sz="1400" dirty="0" smtClean="0">
-                <a:solidFill>
-                  <a:srgbClr val="011892">
-                    <a:lumMod val="75000"/>
-                  </a:srgbClr>
-                </a:solidFill>
-                <a:latin typeface="Microsoft YaHei" charset="0"/>
-                <a:ea typeface="Microsoft YaHei" charset="0"/>
-                <a:cs typeface="Microsoft YaHei" charset="0"/>
-              </a:rPr>
-              <a:t>开始</a:t>
-            </a:r>
-            <a:endParaRPr lang="en-US" altLang="zh-CN" sz="1400" dirty="0">
-              <a:solidFill>
-                <a:srgbClr val="011892">
-                  <a:lumMod val="75000"/>
-                </a:srgbClr>
-              </a:solidFill>
-              <a:latin typeface="Microsoft YaHei" charset="0"/>
-              <a:ea typeface="Microsoft YaHei" charset="0"/>
-              <a:cs typeface="Microsoft YaHei" charset="0"/>
-            </a:endParaRPr>
-          </a:p>
-          <a:p>
-            <a:pPr marL="342900" lvl="0" indent="-342900">
-              <a:buFont typeface="Arial" panose="020B0604020202020204" pitchFamily="34" charset="0"/>
-              <a:buChar char="•"/>
-            </a:pPr>
-            <a:r>
-              <a:rPr lang="en-US" altLang="zh-CN" sz="1400" dirty="0" smtClean="0">
-                <a:solidFill>
-                  <a:srgbClr val="011892">
-                    <a:lumMod val="75000"/>
-                  </a:srgbClr>
-                </a:solidFill>
-                <a:latin typeface="Microsoft YaHei" charset="0"/>
-                <a:ea typeface="Microsoft YaHei" charset="0"/>
-                <a:cs typeface="Microsoft YaHei" charset="0"/>
-              </a:rPr>
-              <a:t>DevOps</a:t>
-            </a:r>
-            <a:r>
-              <a:rPr lang="zh-CN" altLang="en-US" sz="1400" dirty="0" smtClean="0">
-                <a:solidFill>
-                  <a:srgbClr val="011892">
-                    <a:lumMod val="75000"/>
-                  </a:srgbClr>
-                </a:solidFill>
-                <a:latin typeface="Microsoft YaHei" charset="0"/>
-                <a:ea typeface="Microsoft YaHei" charset="0"/>
-                <a:cs typeface="Microsoft YaHei" charset="0"/>
-              </a:rPr>
-              <a:t>基本概念</a:t>
-            </a:r>
-            <a:endParaRPr lang="en-US" altLang="zh-CN" sz="1400" dirty="0" smtClean="0">
-              <a:solidFill>
-                <a:srgbClr val="011892">
-                  <a:lumMod val="75000"/>
-                </a:srgbClr>
-              </a:solidFill>
-              <a:latin typeface="Microsoft YaHei" charset="0"/>
-              <a:ea typeface="Microsoft YaHei" charset="0"/>
-              <a:cs typeface="Microsoft YaHei" charset="0"/>
-            </a:endParaRPr>
-          </a:p>
-          <a:p>
-            <a:pPr marL="342900" lvl="0" indent="-342900">
-              <a:buFont typeface="Arial" panose="020B0604020202020204" pitchFamily="34" charset="0"/>
-              <a:buChar char="•"/>
-            </a:pPr>
-            <a:r>
-              <a:rPr lang="en-US" altLang="zh-CN" sz="1400" dirty="0" smtClean="0">
-                <a:solidFill>
-                  <a:srgbClr val="011892">
-                    <a:lumMod val="75000"/>
-                  </a:srgbClr>
-                </a:solidFill>
-                <a:latin typeface="Microsoft YaHei" charset="0"/>
-                <a:ea typeface="Microsoft YaHei" charset="0"/>
-                <a:cs typeface="Microsoft YaHei" charset="0"/>
-              </a:rPr>
-              <a:t>DevOps</a:t>
-            </a:r>
-            <a:r>
-              <a:rPr lang="zh-CN" altLang="en-US" sz="1400" dirty="0" smtClean="0">
-                <a:solidFill>
-                  <a:srgbClr val="011892">
-                    <a:lumMod val="75000"/>
-                  </a:srgbClr>
-                </a:solidFill>
-                <a:latin typeface="Microsoft YaHei" charset="0"/>
-                <a:ea typeface="Microsoft YaHei" charset="0"/>
-                <a:cs typeface="Microsoft YaHei" charset="0"/>
-              </a:rPr>
-              <a:t>功能与关键技术</a:t>
-            </a:r>
-            <a:endParaRPr lang="en-US" dirty="0" smtClean="0">
-              <a:solidFill>
-                <a:schemeClr val="tx1">
-                  <a:lumMod val="75000"/>
-                </a:schemeClr>
-              </a:solidFill>
-              <a:latin typeface="Microsoft YaHei" charset="0"/>
-              <a:ea typeface="Microsoft YaHei" charset="0"/>
-              <a:cs typeface="Microsoft YaHei" charset="0"/>
-            </a:endParaRPr>
-          </a:p>
-        </p:txBody>
-      </p:sp>
-      <p:sp>
-        <p:nvSpPr>
-          <p:cNvPr id="25" name="Rectangle 28"/>
-          <p:cNvSpPr/>
-          <p:nvPr/>
-        </p:nvSpPr>
-        <p:spPr>
-          <a:xfrm>
-            <a:off x="3791744" y="3933056"/>
-            <a:ext cx="3240000" cy="1584176"/>
-          </a:xfrm>
-          <a:prstGeom prst="rect">
-            <a:avLst/>
-          </a:prstGeom>
-          <a:ln>
-            <a:solidFill>
-              <a:schemeClr val="tx1">
-                <a:lumMod val="75000"/>
-              </a:schemeClr>
-            </a:solidFill>
-          </a:ln>
-        </p:spPr>
-        <p:style>
-          <a:lnRef idx="2">
-            <a:schemeClr val="dk1"/>
-          </a:lnRef>
-          <a:fillRef idx="1">
-            <a:schemeClr val="lt1"/>
-          </a:fillRef>
-          <a:effectRef idx="0">
-            <a:schemeClr val="dk1"/>
-          </a:effectRef>
-          <a:fontRef idx="minor">
-            <a:schemeClr val="dk1"/>
-          </a:fontRef>
-        </p:style>
-        <p:txBody>
-          <a:bodyPr rot="0" spcFirstLastPara="0" vertOverflow="overflow" horzOverflow="overflow" vert="horz" wrap="square" lIns="108000" tIns="36000" rIns="0" bIns="0" numCol="1" spcCol="0" rtlCol="0" fromWordArt="0" anchor="ctr" anchorCtr="0" forceAA="0" compatLnSpc="1">
-            <a:noAutofit/>
-          </a:bodyPr>
-          <a:lstStyle/>
-          <a:p>
-            <a:pPr algn="ctr"/>
-            <a:r>
-              <a:rPr lang="zh-CN" altLang="en-US" dirty="0" smtClean="0">
-                <a:solidFill>
-                  <a:schemeClr val="tx1">
-                    <a:lumMod val="75000"/>
-                  </a:schemeClr>
-                </a:solidFill>
-                <a:latin typeface="Microsoft YaHei" charset="0"/>
-                <a:ea typeface="Microsoft YaHei" charset="0"/>
-                <a:cs typeface="Microsoft YaHei" charset="0"/>
-              </a:rPr>
-              <a:t>从 </a:t>
-            </a:r>
-            <a:r>
-              <a:rPr lang="en-US" altLang="zh-CN" dirty="0" smtClean="0">
-                <a:solidFill>
-                  <a:schemeClr val="tx1">
-                    <a:lumMod val="75000"/>
-                  </a:schemeClr>
-                </a:solidFill>
-                <a:latin typeface="Microsoft YaHei" charset="0"/>
-                <a:ea typeface="Microsoft YaHei" charset="0"/>
-                <a:cs typeface="Microsoft YaHei" charset="0"/>
-              </a:rPr>
-              <a:t>IT </a:t>
-            </a:r>
-            <a:r>
-              <a:rPr lang="zh-CN" altLang="en-US" dirty="0" smtClean="0">
-                <a:solidFill>
-                  <a:schemeClr val="tx1">
-                    <a:lumMod val="75000"/>
-                  </a:schemeClr>
-                </a:solidFill>
-                <a:latin typeface="Microsoft YaHei" charset="0"/>
-                <a:ea typeface="Microsoft YaHei" charset="0"/>
-                <a:cs typeface="Microsoft YaHei" charset="0"/>
-              </a:rPr>
-              <a:t>能力看 </a:t>
-            </a:r>
-            <a:r>
-              <a:rPr lang="en-US" altLang="zh-CN" dirty="0" smtClean="0">
-                <a:solidFill>
-                  <a:schemeClr val="tx1">
-                    <a:lumMod val="75000"/>
-                  </a:schemeClr>
-                </a:solidFill>
-                <a:latin typeface="Microsoft YaHei" charset="0"/>
-                <a:ea typeface="Microsoft YaHei" charset="0"/>
-                <a:cs typeface="Microsoft YaHei" charset="0"/>
-              </a:rPr>
-              <a:t>IT </a:t>
-            </a:r>
-            <a:r>
-              <a:rPr lang="zh-CN" altLang="en-US" dirty="0" smtClean="0">
-                <a:solidFill>
-                  <a:schemeClr val="tx1">
-                    <a:lumMod val="75000"/>
-                  </a:schemeClr>
-                </a:solidFill>
-                <a:latin typeface="Microsoft YaHei" charset="0"/>
-                <a:ea typeface="Microsoft YaHei" charset="0"/>
-                <a:cs typeface="Microsoft YaHei" charset="0"/>
-              </a:rPr>
-              <a:t>的精益运营</a:t>
-            </a:r>
-            <a:r>
-              <a:rPr lang="en-US" altLang="zh-CN" dirty="0" smtClean="0">
-                <a:solidFill>
-                  <a:schemeClr val="tx1">
-                    <a:lumMod val="75000"/>
-                  </a:schemeClr>
-                </a:solidFill>
-                <a:latin typeface="Microsoft YaHei" charset="0"/>
-                <a:ea typeface="Microsoft YaHei" charset="0"/>
-                <a:cs typeface="Microsoft YaHei" charset="0"/>
-              </a:rPr>
-              <a:t>(40min)</a:t>
-            </a:r>
-          </a:p>
-          <a:p>
-            <a:pPr marL="342900" lvl="0" indent="-342900">
-              <a:buFont typeface="Arial" panose="020B0604020202020204" pitchFamily="34" charset="0"/>
-              <a:buChar char="•"/>
-            </a:pPr>
-            <a:r>
-              <a:rPr lang="zh-CN" altLang="en-US" sz="1400" dirty="0" smtClean="0">
-                <a:solidFill>
-                  <a:srgbClr val="011892">
-                    <a:lumMod val="75000"/>
-                  </a:srgbClr>
-                </a:solidFill>
-                <a:latin typeface="Microsoft YaHei" charset="0"/>
-                <a:ea typeface="Microsoft YaHei" charset="0"/>
-                <a:cs typeface="Microsoft YaHei" charset="0"/>
-              </a:rPr>
-              <a:t>什么是能力模型</a:t>
-            </a:r>
-            <a:endParaRPr lang="en-US" altLang="zh-CN" sz="1400" dirty="0" smtClean="0">
-              <a:solidFill>
-                <a:srgbClr val="011892">
-                  <a:lumMod val="75000"/>
-                </a:srgbClr>
-              </a:solidFill>
-              <a:latin typeface="Microsoft YaHei" charset="0"/>
-              <a:ea typeface="Microsoft YaHei" charset="0"/>
-              <a:cs typeface="Microsoft YaHei" charset="0"/>
-            </a:endParaRPr>
-          </a:p>
-          <a:p>
-            <a:pPr marL="342900" lvl="0" indent="-342900">
-              <a:buFont typeface="Arial" panose="020B0604020202020204" pitchFamily="34" charset="0"/>
-              <a:buChar char="•"/>
-            </a:pPr>
-            <a:r>
-              <a:rPr lang="zh-CN" altLang="en-US" sz="1400" dirty="0" smtClean="0">
-                <a:solidFill>
-                  <a:srgbClr val="011892">
-                    <a:lumMod val="75000"/>
-                  </a:srgbClr>
-                </a:solidFill>
-                <a:latin typeface="Microsoft YaHei" charset="0"/>
-                <a:ea typeface="Microsoft YaHei" charset="0"/>
-                <a:cs typeface="Microsoft YaHei" charset="0"/>
-              </a:rPr>
-              <a:t>管理 </a:t>
-            </a:r>
-            <a:r>
-              <a:rPr lang="en-US" altLang="zh-CN" sz="1400" dirty="0" smtClean="0">
-                <a:solidFill>
-                  <a:srgbClr val="011892">
-                    <a:lumMod val="75000"/>
-                  </a:srgbClr>
-                </a:solidFill>
-                <a:latin typeface="Microsoft YaHei" charset="0"/>
-                <a:ea typeface="Microsoft YaHei" charset="0"/>
-                <a:cs typeface="Microsoft YaHei" charset="0"/>
-              </a:rPr>
-              <a:t>IT </a:t>
-            </a:r>
-            <a:r>
-              <a:rPr lang="zh-CN" altLang="en-US" sz="1400" dirty="0" smtClean="0">
-                <a:solidFill>
-                  <a:srgbClr val="011892">
-                    <a:lumMod val="75000"/>
-                  </a:srgbClr>
-                </a:solidFill>
-                <a:latin typeface="Microsoft YaHei" charset="0"/>
-                <a:ea typeface="Microsoft YaHei" charset="0"/>
-                <a:cs typeface="Microsoft YaHei" charset="0"/>
-              </a:rPr>
-              <a:t>的基本能力模型</a:t>
-            </a:r>
-            <a:endParaRPr lang="en-US" altLang="zh-CN" sz="1400" dirty="0" smtClean="0">
-              <a:solidFill>
-                <a:srgbClr val="011892">
-                  <a:lumMod val="75000"/>
-                </a:srgbClr>
-              </a:solidFill>
-              <a:latin typeface="Microsoft YaHei" charset="0"/>
-              <a:ea typeface="Microsoft YaHei" charset="0"/>
-              <a:cs typeface="Microsoft YaHei" charset="0"/>
-            </a:endParaRPr>
-          </a:p>
-          <a:p>
-            <a:pPr marL="342900" lvl="0" indent="-342900">
-              <a:buFont typeface="Arial" panose="020B0604020202020204" pitchFamily="34" charset="0"/>
-              <a:buChar char="•"/>
-            </a:pPr>
-            <a:r>
-              <a:rPr lang="zh-CN" altLang="en-US" sz="1400" dirty="0" smtClean="0">
-                <a:solidFill>
-                  <a:srgbClr val="011892">
-                    <a:lumMod val="75000"/>
-                  </a:srgbClr>
-                </a:solidFill>
-                <a:latin typeface="Microsoft YaHei" charset="0"/>
-                <a:ea typeface="Microsoft YaHei" charset="0"/>
-                <a:cs typeface="Microsoft YaHei" charset="0"/>
-              </a:rPr>
-              <a:t>普元产品与企业 </a:t>
-            </a:r>
-            <a:r>
-              <a:rPr lang="en-US" altLang="zh-CN" sz="1400" dirty="0" smtClean="0">
-                <a:solidFill>
-                  <a:srgbClr val="011892">
-                    <a:lumMod val="75000"/>
-                  </a:srgbClr>
-                </a:solidFill>
-                <a:latin typeface="Microsoft YaHei" charset="0"/>
-                <a:ea typeface="Microsoft YaHei" charset="0"/>
-                <a:cs typeface="Microsoft YaHei" charset="0"/>
-              </a:rPr>
-              <a:t>IT </a:t>
-            </a:r>
-            <a:r>
-              <a:rPr lang="zh-CN" altLang="en-US" sz="1400" dirty="0" smtClean="0">
-                <a:solidFill>
-                  <a:srgbClr val="011892">
-                    <a:lumMod val="75000"/>
-                  </a:srgbClr>
-                </a:solidFill>
-                <a:latin typeface="Microsoft YaHei" charset="0"/>
-                <a:ea typeface="Microsoft YaHei" charset="0"/>
-                <a:cs typeface="Microsoft YaHei" charset="0"/>
-              </a:rPr>
-              <a:t>能力的关系</a:t>
-            </a:r>
-            <a:endParaRPr lang="en-US" altLang="zh-CN" sz="1400" dirty="0" smtClean="0">
-              <a:solidFill>
-                <a:srgbClr val="011892">
-                  <a:lumMod val="75000"/>
-                </a:srgbClr>
-              </a:solidFill>
-              <a:latin typeface="Microsoft YaHei" charset="0"/>
-              <a:ea typeface="Microsoft YaHei" charset="0"/>
-              <a:cs typeface="Microsoft YaHei" charset="0"/>
-            </a:endParaRPr>
-          </a:p>
-          <a:p>
-            <a:pPr marL="342900" lvl="0" indent="-342900">
-              <a:buFont typeface="Arial" panose="020B0604020202020204" pitchFamily="34" charset="0"/>
-              <a:buChar char="•"/>
-            </a:pPr>
-            <a:r>
-              <a:rPr lang="zh-CN" altLang="en-US" sz="1600" dirty="0" smtClean="0">
-                <a:solidFill>
-                  <a:srgbClr val="011892">
-                    <a:lumMod val="75000"/>
-                  </a:srgbClr>
-                </a:solidFill>
-                <a:latin typeface="Microsoft YaHei" charset="0"/>
-                <a:ea typeface="Microsoft YaHei" charset="0"/>
-                <a:cs typeface="Microsoft YaHei" charset="0"/>
-              </a:rPr>
-              <a:t>如何进行能力调研</a:t>
-            </a:r>
-            <a:endParaRPr lang="en-US" altLang="zh-CN" sz="1600" dirty="0">
-              <a:solidFill>
-                <a:srgbClr val="011892">
-                  <a:lumMod val="75000"/>
-                </a:srgbClr>
-              </a:solidFill>
-              <a:latin typeface="Microsoft YaHei" charset="0"/>
-              <a:ea typeface="Microsoft YaHei" charset="0"/>
-              <a:cs typeface="Microsoft YaHei" charset="0"/>
-            </a:endParaRPr>
-          </a:p>
-        </p:txBody>
-      </p:sp>
-      <p:cxnSp>
-        <p:nvCxnSpPr>
-          <p:cNvPr id="29" name="直接箭头连接符 28"/>
-          <p:cNvCxnSpPr>
-            <a:stCxn id="17" idx="1"/>
-            <a:endCxn id="25" idx="3"/>
-          </p:cNvCxnSpPr>
-          <p:nvPr/>
-        </p:nvCxnSpPr>
-        <p:spPr>
-          <a:xfrm flipH="1" flipV="1">
-            <a:off x="7031744" y="4725144"/>
-            <a:ext cx="1391451" cy="14624"/>
-          </a:xfrm>
-          <a:prstGeom prst="straightConnector1">
-            <a:avLst/>
-          </a:prstGeom>
-          <a:ln w="25400">
-            <a:solidFill>
-              <a:schemeClr val="tx1">
-                <a:lumMod val="75000"/>
-              </a:schemeClr>
-            </a:solidFill>
-            <a:tailEnd type="triangle"/>
-          </a:ln>
-        </p:spPr>
-        <p:style>
-          <a:lnRef idx="1">
-            <a:schemeClr val="accent1"/>
-          </a:lnRef>
-          <a:fillRef idx="0">
-            <a:schemeClr val="accent1"/>
-          </a:fillRef>
-          <a:effectRef idx="0">
-            <a:schemeClr val="accent1"/>
-          </a:effectRef>
-          <a:fontRef idx="minor">
-            <a:schemeClr val="tx1"/>
-          </a:fontRef>
-        </p:style>
-      </p:cxnSp>
-      <p:cxnSp>
-        <p:nvCxnSpPr>
-          <p:cNvPr id="38" name="直接箭头连接符 37"/>
-          <p:cNvCxnSpPr>
-            <a:stCxn id="25" idx="1"/>
-            <a:endCxn id="36" idx="3"/>
-          </p:cNvCxnSpPr>
-          <p:nvPr/>
-        </p:nvCxnSpPr>
-        <p:spPr>
-          <a:xfrm flipH="1">
-            <a:off x="2423592" y="4725144"/>
-            <a:ext cx="1368152" cy="0"/>
-          </a:xfrm>
-          <a:prstGeom prst="straightConnector1">
-            <a:avLst/>
-          </a:prstGeom>
-          <a:ln w="25400">
-            <a:solidFill>
-              <a:schemeClr val="tx1">
-                <a:lumMod val="75000"/>
-              </a:schemeClr>
-            </a:solidFill>
-            <a:tailEnd type="triangle"/>
-          </a:ln>
-        </p:spPr>
-        <p:style>
-          <a:lnRef idx="1">
-            <a:schemeClr val="accent1"/>
-          </a:lnRef>
-          <a:fillRef idx="0">
-            <a:schemeClr val="accent1"/>
-          </a:fillRef>
-          <a:effectRef idx="0">
-            <a:schemeClr val="accent1"/>
-          </a:effectRef>
-          <a:fontRef idx="minor">
-            <a:schemeClr val="tx1"/>
-          </a:fontRef>
-        </p:style>
-      </p:cxnSp>
     </p:spTree>
     <p:extLst>
       <p:ext uri="{BB962C8B-B14F-4D97-AF65-F5344CB8AC3E}">
-        <p14:creationId xmlns:p14="http://schemas.microsoft.com/office/powerpoint/2010/main" val="1630973753"/>
+        <p14:creationId xmlns:p14="http://schemas.microsoft.com/office/powerpoint/2010/main" val="3992167972"/>
       </p:ext>
     </p:extLst>
   </p:cSld>
@@ -6123,127 +7821,6 @@
 </file>
 
 <file path=ppt/slides/slide17.xml><?xml version="1.0" encoding="utf-8"?>
-<p:sld xmlns:a="http://schemas.openxmlformats.org/drawingml/2006/main" xmlns:r="http://schemas.openxmlformats.org/officeDocument/2006/relationships" xmlns:p="http://schemas.openxmlformats.org/presentationml/2006/main">
-  <p:cSld>
-    <p:spTree>
-      <p:nvGrpSpPr>
-        <p:cNvPr id="1" name=""/>
-        <p:cNvGrpSpPr/>
-        <p:nvPr/>
-      </p:nvGrpSpPr>
-      <p:grpSpPr>
-        <a:xfrm>
-          <a:off x="0" y="0"/>
-          <a:ext cx="0" cy="0"/>
-          <a:chOff x="0" y="0"/>
-          <a:chExt cx="0" cy="0"/>
-        </a:xfrm>
-      </p:grpSpPr>
-      <p:sp>
-        <p:nvSpPr>
-          <p:cNvPr id="2" name="内容占位符 1"/>
-          <p:cNvSpPr>
-            <a:spLocks noGrp="1"/>
-          </p:cNvSpPr>
-          <p:nvPr>
-            <p:ph idx="13"/>
-          </p:nvPr>
-        </p:nvSpPr>
-        <p:spPr/>
-        <p:txBody>
-          <a:bodyPr/>
-          <a:lstStyle/>
-          <a:p>
-            <a:r>
-              <a:rPr lang="zh-CN" altLang="en-US" dirty="0" smtClean="0"/>
-              <a:t>分组讨论，每组 </a:t>
-            </a:r>
-            <a:r>
-              <a:rPr lang="en-US" altLang="zh-CN" dirty="0" smtClean="0"/>
-              <a:t>7 </a:t>
-            </a:r>
-            <a:r>
-              <a:rPr lang="zh-CN" altLang="en-US" dirty="0" smtClean="0"/>
-              <a:t>人</a:t>
-            </a:r>
-            <a:endParaRPr lang="en-US" altLang="zh-CN" dirty="0" smtClean="0"/>
-          </a:p>
-          <a:p>
-            <a:pPr lvl="1"/>
-            <a:r>
-              <a:rPr lang="zh-CN" altLang="en-US" dirty="0" smtClean="0"/>
-              <a:t>由于讨论会涉及所在客户情况，按所在客户情况分组</a:t>
-            </a:r>
-            <a:endParaRPr lang="en-US" altLang="zh-CN" dirty="0" smtClean="0"/>
-          </a:p>
-          <a:p>
-            <a:r>
-              <a:rPr lang="zh-CN" altLang="en-US" dirty="0"/>
-              <a:t>讨论</a:t>
-            </a:r>
-            <a:r>
-              <a:rPr lang="zh-CN" altLang="en-US" dirty="0" smtClean="0"/>
-              <a:t>后陈述，每组陈述不超过 </a:t>
-            </a:r>
-            <a:r>
-              <a:rPr lang="en-US" altLang="zh-CN" dirty="0" smtClean="0"/>
-              <a:t>5 </a:t>
-            </a:r>
-            <a:r>
-              <a:rPr lang="zh-CN" altLang="en-US" dirty="0" smtClean="0"/>
-              <a:t>分钟</a:t>
-            </a:r>
-            <a:endParaRPr lang="en-US" altLang="zh-CN" dirty="0" smtClean="0"/>
-          </a:p>
-          <a:p>
-            <a:endParaRPr lang="zh-CN" altLang="en-US" dirty="0"/>
-          </a:p>
-        </p:txBody>
-      </p:sp>
-      <p:sp>
-        <p:nvSpPr>
-          <p:cNvPr id="3" name="标题 2"/>
-          <p:cNvSpPr>
-            <a:spLocks noGrp="1"/>
-          </p:cNvSpPr>
-          <p:nvPr>
-            <p:ph type="title"/>
-          </p:nvPr>
-        </p:nvSpPr>
-        <p:spPr/>
-        <p:txBody>
-          <a:bodyPr/>
-          <a:lstStyle/>
-          <a:p>
-            <a:r>
-              <a:rPr lang="zh-CN" altLang="en-US" dirty="0" smtClean="0"/>
-              <a:t>培训要求</a:t>
-            </a:r>
-            <a:endParaRPr lang="zh-CN" altLang="en-US" dirty="0"/>
-          </a:p>
-        </p:txBody>
-      </p:sp>
-    </p:spTree>
-    <p:extLst>
-      <p:ext uri="{BB962C8B-B14F-4D97-AF65-F5344CB8AC3E}">
-        <p14:creationId xmlns:p14="http://schemas.microsoft.com/office/powerpoint/2010/main" val="3231980765"/>
-      </p:ext>
-    </p:extLst>
-  </p:cSld>
-  <p:clrMapOvr>
-    <a:masterClrMapping/>
-  </p:clrMapOvr>
-  <p:timing>
-    <p:tnLst>
-      <p:par>
-        <p:cTn id="1" dur="indefinite" restart="never" nodeType="tmRoot"/>
-      </p:par>
-    </p:tnLst>
-  </p:timing>
-</p:sld>
-</file>
-
-<file path=ppt/slides/slide18.xml><?xml version="1.0" encoding="utf-8"?>
 <p:sld xmlns:a="http://schemas.openxmlformats.org/drawingml/2006/main" xmlns:r="http://schemas.openxmlformats.org/officeDocument/2006/relationships" xmlns:p="http://schemas.openxmlformats.org/presentationml/2006/main">
   <p:cSld>
     <p:spTree>
@@ -7824,7 +9401,7 @@
             <a:avLst/>
           </a:prstGeom>
           <a:solidFill>
-            <a:srgbClr val="4D5DB2"/>
+            <a:srgbClr val="FF0000"/>
           </a:solidFill>
           <a:ln>
             <a:noFill/>
@@ -7854,7 +9431,7 @@
           <a:lstStyle/>
           <a:p>
             <a:pPr algn="ctr"/>
-            <a:endParaRPr lang="zh-CN" altLang="en-US" sz="2000" dirty="0" smtClean="0">
+            <a:endParaRPr lang="zh-CN" altLang="en-US" sz="2000" dirty="0">
               <a:solidFill>
                 <a:schemeClr val="tx1">
                   <a:lumMod val="75000"/>
@@ -7882,7 +9459,7 @@
             <a:avLst/>
           </a:prstGeom>
           <a:solidFill>
-            <a:srgbClr val="4D5DB2"/>
+            <a:srgbClr val="FF0000"/>
           </a:solidFill>
           <a:ln>
             <a:noFill/>
@@ -7912,7 +9489,7 @@
           <a:lstStyle/>
           <a:p>
             <a:pPr algn="ctr"/>
-            <a:endParaRPr lang="zh-CN" altLang="en-US" sz="2000" dirty="0" smtClean="0">
+            <a:endParaRPr lang="zh-CN" altLang="en-US" sz="2000" dirty="0">
               <a:solidFill>
                 <a:schemeClr val="tx1">
                   <a:lumMod val="75000"/>
@@ -7940,7 +9517,7 @@
             <a:avLst/>
           </a:prstGeom>
           <a:solidFill>
-            <a:srgbClr val="FFFF00"/>
+            <a:srgbClr val="FF0000"/>
           </a:solidFill>
           <a:ln>
             <a:noFill/>
@@ -7970,7 +9547,7 @@
           <a:lstStyle/>
           <a:p>
             <a:pPr algn="ctr"/>
-            <a:endParaRPr lang="zh-CN" altLang="en-US" sz="2000" dirty="0" smtClean="0">
+            <a:endParaRPr lang="zh-CN" altLang="en-US" sz="2000" dirty="0">
               <a:solidFill>
                 <a:schemeClr val="tx1">
                   <a:lumMod val="75000"/>
@@ -7998,7 +9575,7 @@
             <a:avLst/>
           </a:prstGeom>
           <a:solidFill>
-            <a:srgbClr val="FFFF00"/>
+            <a:srgbClr val="FF0000"/>
           </a:solidFill>
           <a:ln>
             <a:noFill/>
@@ -8056,7 +9633,7 @@
             <a:avLst/>
           </a:prstGeom>
           <a:solidFill>
-            <a:srgbClr val="FFFF00"/>
+            <a:srgbClr val="FF0000"/>
           </a:solidFill>
           <a:ln>
             <a:noFill/>
@@ -8114,7 +9691,7 @@
             <a:avLst/>
           </a:prstGeom>
           <a:solidFill>
-            <a:srgbClr val="4D5DB2"/>
+            <a:srgbClr val="FF0000"/>
           </a:solidFill>
           <a:ln>
             <a:noFill/>
@@ -8172,7 +9749,7 @@
             <a:avLst/>
           </a:prstGeom>
           <a:solidFill>
-            <a:srgbClr val="4D5DB2"/>
+            <a:srgbClr val="FF0000"/>
           </a:solidFill>
           <a:ln>
             <a:noFill/>
@@ -8230,7 +9807,7 @@
             <a:avLst/>
           </a:prstGeom>
           <a:solidFill>
-            <a:srgbClr val="4D5DB2"/>
+            <a:srgbClr val="FF0000"/>
           </a:solidFill>
           <a:ln>
             <a:noFill/>
@@ -8288,7 +9865,7 @@
             <a:avLst/>
           </a:prstGeom>
           <a:solidFill>
-            <a:srgbClr val="4D5DB2"/>
+            <a:srgbClr val="FF0000"/>
           </a:solidFill>
           <a:ln>
             <a:noFill/>
@@ -8346,7 +9923,7 @@
             <a:avLst/>
           </a:prstGeom>
           <a:solidFill>
-            <a:srgbClr val="4D5DB2"/>
+            <a:srgbClr val="FF0000"/>
           </a:solidFill>
           <a:ln>
             <a:noFill/>
@@ -8404,7 +9981,7 @@
             <a:avLst/>
           </a:prstGeom>
           <a:solidFill>
-            <a:srgbClr val="4D5DB2"/>
+            <a:srgbClr val="FF0000"/>
           </a:solidFill>
           <a:ln>
             <a:noFill/>
@@ -8926,7 +10503,7 @@
             <a:avLst/>
           </a:prstGeom>
           <a:solidFill>
-            <a:srgbClr val="4D5DB2"/>
+            <a:srgbClr val="FF0000"/>
           </a:solidFill>
           <a:ln>
             <a:noFill/>
@@ -8984,7 +10561,7 @@
             <a:avLst/>
           </a:prstGeom>
           <a:solidFill>
-            <a:srgbClr val="4D5DB2"/>
+            <a:srgbClr val="FF0000"/>
           </a:solidFill>
           <a:ln>
             <a:noFill/>
@@ -9042,7 +10619,7 @@
             <a:avLst/>
           </a:prstGeom>
           <a:solidFill>
-            <a:srgbClr val="4D5DB2"/>
+            <a:srgbClr val="FF0000"/>
           </a:solidFill>
           <a:ln>
             <a:noFill/>
@@ -9267,7 +10844,7 @@
         </p:nvSpPr>
         <p:spPr>
           <a:xfrm>
-            <a:off x="9027475" y="2445985"/>
+            <a:off x="8861103" y="3694929"/>
             <a:ext cx="245913" cy="234516"/>
           </a:xfrm>
           <a:prstGeom prst="flowChartConnector">
@@ -14885,11 +16462,7 @@
           <a:p>
             <a:r>
               <a:rPr lang="zh-CN" altLang="en-US" dirty="0" smtClean="0"/>
-              <a:t>个人</a:t>
-            </a:r>
-            <a:r>
-              <a:rPr lang="zh-CN" altLang="en-US" dirty="0" smtClean="0"/>
-              <a:t>的</a:t>
+              <a:t>个人的</a:t>
             </a:r>
             <a:r>
               <a:rPr lang="zh-CN" altLang="en-US" dirty="0"/>
@@ -14897,11 +16470,7 @@
             </a:r>
             <a:r>
               <a:rPr lang="zh-CN" altLang="en-US" dirty="0" smtClean="0"/>
-              <a:t>需要</a:t>
-            </a:r>
-            <a:r>
-              <a:rPr lang="zh-CN" altLang="en-US" dirty="0" smtClean="0"/>
-              <a:t>建立在“利他”的基础之上</a:t>
+              <a:t>需要建立在“利他”的基础之上</a:t>
             </a:r>
             <a:endParaRPr lang="zh-CN" altLang="en-US" dirty="0"/>
           </a:p>
@@ -15520,7 +17089,7 @@
         <p:spPr>
           <a:xfrm>
             <a:off x="2602867" y="2420888"/>
-            <a:ext cx="6984776" cy="2372252"/>
+            <a:ext cx="6984776" cy="2492990"/>
           </a:xfrm>
           <a:prstGeom prst="rect">
             <a:avLst/>
@@ -15609,7 +17178,33 @@
                 <a:ea typeface="Microsoft YaHei" charset="0"/>
                 <a:cs typeface="Microsoft YaHei" charset="0"/>
               </a:rPr>
-              <a:t>在这个过程中得到个人成长，体现自我价值</a:t>
+              <a:t>在这个过程中得到个人成长，</a:t>
+            </a:r>
+            <a:r>
+              <a:rPr lang="zh-CN" altLang="en-US" sz="2600" dirty="0">
+                <a:solidFill>
+                  <a:schemeClr val="tx2">
+                    <a:lumMod val="75000"/>
+                  </a:schemeClr>
+                </a:solidFill>
+                <a:latin typeface="Microsoft YaHei" charset="0"/>
+                <a:ea typeface="Microsoft YaHei" charset="0"/>
+                <a:cs typeface="Microsoft YaHei" charset="0"/>
+              </a:rPr>
+              <a:t>实</a:t>
+            </a:r>
+            <a:r>
+              <a:rPr lang="zh-CN" altLang="en-US" sz="2600" dirty="0" smtClean="0">
+                <a:solidFill>
+                  <a:schemeClr val="tx2">
+                    <a:lumMod val="75000"/>
+                  </a:schemeClr>
+                </a:solidFill>
+                <a:latin typeface="Microsoft YaHei" charset="0"/>
+                <a:ea typeface="Microsoft YaHei" charset="0"/>
+                <a:cs typeface="Microsoft YaHei" charset="0"/>
+              </a:rPr>
+              <a:t>现自我价值</a:t>
             </a:r>
           </a:p>
         </p:txBody>
@@ -15666,7 +17261,171 @@
           <a:bodyPr/>
           <a:lstStyle/>
           <a:p>
-            <a:endParaRPr lang="zh-CN" altLang="en-US"/>
+            <a:r>
+              <a:rPr lang="zh-CN" altLang="en-US" dirty="0" smtClean="0"/>
+              <a:t>一个真实的客户案例</a:t>
+            </a:r>
+            <a:endParaRPr lang="zh-CN" altLang="en-US" dirty="0"/>
+          </a:p>
+        </p:txBody>
+      </p:sp>
+      <p:pic>
+        <p:nvPicPr>
+          <p:cNvPr id="3" name="Picture 1" descr="C:\Users\ASUS\Documents\Tencent Files\76431718\Image\C2C\EM_NRJO50C5W)$X`4TWNZRS.png"/>
+          <p:cNvPicPr>
+            <a:picLocks noChangeAspect="1" noChangeArrowheads="1"/>
+          </p:cNvPicPr>
+          <p:nvPr/>
+        </p:nvPicPr>
+        <p:blipFill>
+          <a:blip r:embed="rId3"/>
+          <a:srcRect/>
+          <a:stretch>
+            <a:fillRect/>
+          </a:stretch>
+        </p:blipFill>
+        <p:spPr bwMode="auto">
+          <a:xfrm>
+            <a:off x="2280467" y="1557687"/>
+            <a:ext cx="7629575" cy="2422088"/>
+          </a:xfrm>
+          <a:prstGeom prst="rect">
+            <a:avLst/>
+          </a:prstGeom>
+          <a:noFill/>
+        </p:spPr>
+      </p:pic>
+      <p:sp>
+        <p:nvSpPr>
+          <p:cNvPr id="5" name="文本框 4"/>
+          <p:cNvSpPr txBox="1"/>
+          <p:nvPr/>
+        </p:nvSpPr>
+        <p:spPr>
+          <a:xfrm>
+            <a:off x="2711624" y="4388911"/>
+            <a:ext cx="6768752" cy="1200329"/>
+          </a:xfrm>
+          <a:prstGeom prst="rect">
+            <a:avLst/>
+          </a:prstGeom>
+          <a:noFill/>
+          <a:ln>
+            <a:noFill/>
+          </a:ln>
+        </p:spPr>
+        <p:txBody>
+          <a:bodyPr wrap="square" rtlCol="0">
+            <a:spAutoFit/>
+          </a:bodyPr>
+          <a:lstStyle/>
+          <a:p>
+            <a:pPr marL="285750" indent="-285750">
+              <a:lnSpc>
+                <a:spcPct val="200000"/>
+              </a:lnSpc>
+              <a:buBlip>
+                <a:blip r:embed="rId4"/>
+              </a:buBlip>
+            </a:pPr>
+            <a:r>
+              <a:rPr lang="en-US" altLang="zh-CN" dirty="0" smtClean="0">
+                <a:solidFill>
+                  <a:schemeClr val="tx2">
+                    <a:lumMod val="75000"/>
+                  </a:schemeClr>
+                </a:solidFill>
+                <a:latin typeface="Microsoft YaHei" charset="0"/>
+                <a:ea typeface="Microsoft YaHei" charset="0"/>
+                <a:cs typeface="Microsoft YaHei" charset="0"/>
+              </a:rPr>
+              <a:t>2012-2015</a:t>
+            </a:r>
+            <a:r>
+              <a:rPr lang="zh-CN" altLang="en-US" dirty="0" smtClean="0">
+                <a:solidFill>
+                  <a:schemeClr val="tx2">
+                    <a:lumMod val="75000"/>
+                  </a:schemeClr>
+                </a:solidFill>
+                <a:latin typeface="Microsoft YaHei" charset="0"/>
+                <a:ea typeface="Microsoft YaHei" charset="0"/>
+                <a:cs typeface="Microsoft YaHei" charset="0"/>
+              </a:rPr>
+              <a:t>，保费收入增长</a:t>
+            </a:r>
+            <a:r>
+              <a:rPr lang="en-US" altLang="zh-CN" dirty="0" smtClean="0">
+                <a:solidFill>
+                  <a:schemeClr val="tx2">
+                    <a:lumMod val="75000"/>
+                  </a:schemeClr>
+                </a:solidFill>
+                <a:latin typeface="Microsoft YaHei" charset="0"/>
+                <a:ea typeface="Microsoft YaHei" charset="0"/>
+                <a:cs typeface="Microsoft YaHei" charset="0"/>
+              </a:rPr>
+              <a:t>20</a:t>
+            </a:r>
+            <a:r>
+              <a:rPr lang="zh-CN" altLang="en-US" dirty="0" smtClean="0">
+                <a:solidFill>
+                  <a:schemeClr val="tx2">
+                    <a:lumMod val="75000"/>
+                  </a:schemeClr>
+                </a:solidFill>
+                <a:latin typeface="Microsoft YaHei" charset="0"/>
+                <a:ea typeface="Microsoft YaHei" charset="0"/>
+                <a:cs typeface="Microsoft YaHei" charset="0"/>
+              </a:rPr>
+              <a:t>倍</a:t>
+            </a:r>
+            <a:endParaRPr lang="en-US" altLang="zh-CN" dirty="0" smtClean="0">
+              <a:solidFill>
+                <a:schemeClr val="tx2">
+                  <a:lumMod val="75000"/>
+                </a:schemeClr>
+              </a:solidFill>
+              <a:latin typeface="Microsoft YaHei" charset="0"/>
+              <a:ea typeface="Microsoft YaHei" charset="0"/>
+              <a:cs typeface="Microsoft YaHei" charset="0"/>
+            </a:endParaRPr>
+          </a:p>
+          <a:p>
+            <a:pPr marL="285750" indent="-285750">
+              <a:lnSpc>
+                <a:spcPct val="200000"/>
+              </a:lnSpc>
+              <a:buBlip>
+                <a:blip r:embed="rId4"/>
+              </a:buBlip>
+            </a:pPr>
+            <a:r>
+              <a:rPr lang="en-US" altLang="zh-CN" dirty="0" smtClean="0">
+                <a:solidFill>
+                  <a:schemeClr val="tx2">
+                    <a:lumMod val="75000"/>
+                  </a:schemeClr>
+                </a:solidFill>
+                <a:latin typeface="Microsoft YaHei" charset="0"/>
+                <a:ea typeface="Microsoft YaHei" charset="0"/>
+                <a:cs typeface="Microsoft YaHei" charset="0"/>
+              </a:rPr>
+              <a:t>2015</a:t>
+            </a:r>
+            <a:r>
+              <a:rPr lang="zh-CN" altLang="en-US" dirty="0" smtClean="0">
+                <a:solidFill>
+                  <a:schemeClr val="tx2">
+                    <a:lumMod val="75000"/>
+                  </a:schemeClr>
+                </a:solidFill>
+                <a:latin typeface="Microsoft YaHei" charset="0"/>
+                <a:ea typeface="Microsoft YaHei" charset="0"/>
+                <a:cs typeface="Microsoft YaHei" charset="0"/>
+              </a:rPr>
+              <a:t>年，行业排名第四</a:t>
+            </a:r>
           </a:p>
         </p:txBody>
       </p:sp>
@@ -15707,22 +17466,1163 @@
           <a:chExt cx="0" cy="0"/>
         </a:xfrm>
       </p:grpSpPr>
+      <p:cxnSp>
+        <p:nvCxnSpPr>
+          <p:cNvPr id="4" name="直接连接符 3"/>
+          <p:cNvCxnSpPr/>
+          <p:nvPr/>
+        </p:nvCxnSpPr>
+        <p:spPr>
+          <a:xfrm>
+            <a:off x="1343472" y="3308323"/>
+            <a:ext cx="9217024" cy="0"/>
+          </a:xfrm>
+          <a:prstGeom prst="line">
+            <a:avLst/>
+          </a:prstGeom>
+          <a:ln w="25400">
+            <a:solidFill>
+              <a:schemeClr val="tx1">
+                <a:lumMod val="75000"/>
+              </a:schemeClr>
+            </a:solidFill>
+          </a:ln>
+        </p:spPr>
+        <p:style>
+          <a:lnRef idx="1">
+            <a:schemeClr val="accent1"/>
+          </a:lnRef>
+          <a:fillRef idx="0">
+            <a:schemeClr val="accent1"/>
+          </a:fillRef>
+          <a:effectRef idx="0">
+            <a:schemeClr val="accent1"/>
+          </a:effectRef>
+          <a:fontRef idx="minor">
+            <a:schemeClr val="tx1"/>
+          </a:fontRef>
+        </p:style>
+      </p:cxnSp>
+      <p:grpSp>
+        <p:nvGrpSpPr>
+          <p:cNvPr id="11" name="组合 10"/>
+          <p:cNvGrpSpPr/>
+          <p:nvPr/>
+        </p:nvGrpSpPr>
+        <p:grpSpPr>
+          <a:xfrm>
+            <a:off x="2200367" y="1916832"/>
+            <a:ext cx="79209" cy="1391491"/>
+            <a:chOff x="1932524" y="2492896"/>
+            <a:chExt cx="79209" cy="1391491"/>
+          </a:xfrm>
+        </p:grpSpPr>
+        <p:sp>
+          <p:nvSpPr>
+            <p:cNvPr id="6" name="流程图: 联系 5"/>
+            <p:cNvSpPr/>
+            <p:nvPr/>
+          </p:nvSpPr>
+          <p:spPr>
+            <a:xfrm>
+              <a:off x="1932524" y="2492896"/>
+              <a:ext cx="79209" cy="79209"/>
+            </a:xfrm>
+            <a:prstGeom prst="flowChartConnector">
+              <a:avLst/>
+            </a:prstGeom>
+            <a:ln>
+              <a:solidFill>
+                <a:schemeClr val="tx1">
+                  <a:lumMod val="75000"/>
+                </a:schemeClr>
+              </a:solidFill>
+            </a:ln>
+          </p:spPr>
+          <p:style>
+            <a:lnRef idx="2">
+              <a:schemeClr val="dk1"/>
+            </a:lnRef>
+            <a:fillRef idx="1">
+              <a:schemeClr val="lt1"/>
+            </a:fillRef>
+            <a:effectRef idx="0">
+              <a:schemeClr val="dk1"/>
+            </a:effectRef>
+            <a:fontRef idx="minor">
+              <a:schemeClr val="dk1"/>
+            </a:fontRef>
+          </p:style>
+          <p:txBody>
+            <a:bodyPr rot="0" spcFirstLastPara="0" vertOverflow="overflow" horzOverflow="overflow" vert="horz" wrap="square" lIns="91440" tIns="45720" rIns="91440" bIns="45720" numCol="1" spcCol="0" rtlCol="0" fromWordArt="0" anchor="ctr" anchorCtr="0" forceAA="0" compatLnSpc="1">
+              <a:prstTxWarp prst="textNoShape">
+                <a:avLst/>
+              </a:prstTxWarp>
+              <a:noAutofit/>
+            </a:bodyPr>
+            <a:lstStyle/>
+            <a:p>
+              <a:pPr algn="ctr"/>
+              <a:endParaRPr lang="zh-CN" altLang="en-US" sz="2000" dirty="0" smtClean="0">
+                <a:solidFill>
+                  <a:schemeClr val="tx1">
+                    <a:lumMod val="75000"/>
+                  </a:schemeClr>
+                </a:solidFill>
+                <a:latin typeface="Microsoft YaHei" charset="0"/>
+                <a:ea typeface="Microsoft YaHei" charset="0"/>
+                <a:cs typeface="Microsoft YaHei" charset="0"/>
+              </a:endParaRPr>
+            </a:p>
+          </p:txBody>
+        </p:sp>
+        <p:cxnSp>
+          <p:nvCxnSpPr>
+            <p:cNvPr id="8" name="直接连接符 7"/>
+            <p:cNvCxnSpPr>
+              <a:stCxn id="6" idx="4"/>
+            </p:cNvCxnSpPr>
+            <p:nvPr/>
+          </p:nvCxnSpPr>
+          <p:spPr>
+            <a:xfrm>
+              <a:off x="1972129" y="2572105"/>
+              <a:ext cx="0" cy="1312282"/>
+            </a:xfrm>
+            <a:prstGeom prst="line">
+              <a:avLst/>
+            </a:prstGeom>
+            <a:ln w="25400">
+              <a:solidFill>
+                <a:schemeClr val="tx1">
+                  <a:lumMod val="75000"/>
+                </a:schemeClr>
+              </a:solidFill>
+            </a:ln>
+          </p:spPr>
+          <p:style>
+            <a:lnRef idx="1">
+              <a:schemeClr val="accent1"/>
+            </a:lnRef>
+            <a:fillRef idx="0">
+              <a:schemeClr val="accent1"/>
+            </a:fillRef>
+            <a:effectRef idx="0">
+              <a:schemeClr val="accent1"/>
+            </a:effectRef>
+            <a:fontRef idx="minor">
+              <a:schemeClr val="tx1"/>
+            </a:fontRef>
+          </p:style>
+        </p:cxnSp>
+      </p:grpSp>
       <p:sp>
         <p:nvSpPr>
-          <p:cNvPr id="2" name="标题 1"/>
-          <p:cNvSpPr>
-            <a:spLocks noGrp="1"/>
-          </p:cNvSpPr>
-          <p:nvPr>
-            <p:ph type="title"/>
-          </p:nvPr>
+          <p:cNvPr id="12" name="文本框 11"/>
+          <p:cNvSpPr txBox="1"/>
+          <p:nvPr/>
         </p:nvSpPr>
-        <p:spPr/>
+        <p:spPr>
+          <a:xfrm>
+            <a:off x="1955540" y="1507896"/>
+            <a:ext cx="648072" cy="369332"/>
+          </a:xfrm>
+          <a:prstGeom prst="rect">
+            <a:avLst/>
+          </a:prstGeom>
+          <a:noFill/>
+        </p:spPr>
         <p:txBody>
-          <a:bodyPr/>
+          <a:bodyPr wrap="square" rtlCol="0">
+            <a:spAutoFit/>
+          </a:bodyPr>
           <a:lstStyle/>
           <a:p>
-            <a:endParaRPr lang="zh-CN" altLang="en-US"/>
+            <a:r>
+              <a:rPr lang="en-US" altLang="zh-CN" dirty="0" smtClean="0">
+                <a:solidFill>
+                  <a:schemeClr val="tx2">
+                    <a:lumMod val="75000"/>
+                  </a:schemeClr>
+                </a:solidFill>
+                <a:latin typeface="Microsoft YaHei" charset="0"/>
+                <a:ea typeface="Microsoft YaHei" charset="0"/>
+                <a:cs typeface="Microsoft YaHei" charset="0"/>
+              </a:rPr>
+              <a:t>ESB</a:t>
+            </a:r>
+            <a:endParaRPr lang="zh-CN" altLang="en-US" dirty="0" smtClean="0">
+              <a:solidFill>
+                <a:schemeClr val="tx2">
+                  <a:lumMod val="75000"/>
+                </a:schemeClr>
+              </a:solidFill>
+              <a:latin typeface="Microsoft YaHei" charset="0"/>
+              <a:ea typeface="Microsoft YaHei" charset="0"/>
+              <a:cs typeface="Microsoft YaHei" charset="0"/>
+            </a:endParaRPr>
+          </a:p>
+        </p:txBody>
+      </p:sp>
+      <p:grpSp>
+        <p:nvGrpSpPr>
+          <p:cNvPr id="13" name="组合 12"/>
+          <p:cNvGrpSpPr/>
+          <p:nvPr/>
+        </p:nvGrpSpPr>
+        <p:grpSpPr>
+          <a:xfrm rot="10800000">
+            <a:off x="3134456" y="3298839"/>
+            <a:ext cx="79209" cy="1391491"/>
+            <a:chOff x="1932524" y="2492896"/>
+            <a:chExt cx="79209" cy="1391491"/>
+          </a:xfrm>
+        </p:grpSpPr>
+        <p:sp>
+          <p:nvSpPr>
+            <p:cNvPr id="14" name="流程图: 联系 13"/>
+            <p:cNvSpPr/>
+            <p:nvPr/>
+          </p:nvSpPr>
+          <p:spPr>
+            <a:xfrm>
+              <a:off x="1932524" y="2492896"/>
+              <a:ext cx="79209" cy="79209"/>
+            </a:xfrm>
+            <a:prstGeom prst="flowChartConnector">
+              <a:avLst/>
+            </a:prstGeom>
+            <a:ln>
+              <a:solidFill>
+                <a:schemeClr val="tx1">
+                  <a:lumMod val="75000"/>
+                </a:schemeClr>
+              </a:solidFill>
+            </a:ln>
+          </p:spPr>
+          <p:style>
+            <a:lnRef idx="2">
+              <a:schemeClr val="dk1"/>
+            </a:lnRef>
+            <a:fillRef idx="1">
+              <a:schemeClr val="lt1"/>
+            </a:fillRef>
+            <a:effectRef idx="0">
+              <a:schemeClr val="dk1"/>
+            </a:effectRef>
+            <a:fontRef idx="minor">
+              <a:schemeClr val="dk1"/>
+            </a:fontRef>
+          </p:style>
+          <p:txBody>
+            <a:bodyPr rot="0" spcFirstLastPara="0" vertOverflow="overflow" horzOverflow="overflow" vert="horz" wrap="square" lIns="91440" tIns="45720" rIns="91440" bIns="45720" numCol="1" spcCol="0" rtlCol="0" fromWordArt="0" anchor="ctr" anchorCtr="0" forceAA="0" compatLnSpc="1">
+              <a:prstTxWarp prst="textNoShape">
+                <a:avLst/>
+              </a:prstTxWarp>
+              <a:noAutofit/>
+            </a:bodyPr>
+            <a:lstStyle/>
+            <a:p>
+              <a:pPr algn="ctr"/>
+              <a:endParaRPr lang="zh-CN" altLang="en-US" sz="2000" dirty="0" smtClean="0">
+                <a:solidFill>
+                  <a:schemeClr val="tx1">
+                    <a:lumMod val="75000"/>
+                  </a:schemeClr>
+                </a:solidFill>
+                <a:latin typeface="Microsoft YaHei" charset="0"/>
+                <a:ea typeface="Microsoft YaHei" charset="0"/>
+                <a:cs typeface="Microsoft YaHei" charset="0"/>
+              </a:endParaRPr>
+            </a:p>
+          </p:txBody>
+        </p:sp>
+        <p:cxnSp>
+          <p:nvCxnSpPr>
+            <p:cNvPr id="15" name="直接连接符 14"/>
+            <p:cNvCxnSpPr>
+              <a:stCxn id="14" idx="4"/>
+            </p:cNvCxnSpPr>
+            <p:nvPr/>
+          </p:nvCxnSpPr>
+          <p:spPr>
+            <a:xfrm>
+              <a:off x="1972129" y="2572105"/>
+              <a:ext cx="0" cy="1312282"/>
+            </a:xfrm>
+            <a:prstGeom prst="line">
+              <a:avLst/>
+            </a:prstGeom>
+            <a:ln w="25400">
+              <a:solidFill>
+                <a:schemeClr val="tx1">
+                  <a:lumMod val="75000"/>
+                </a:schemeClr>
+              </a:solidFill>
+            </a:ln>
+          </p:spPr>
+          <p:style>
+            <a:lnRef idx="1">
+              <a:schemeClr val="accent1"/>
+            </a:lnRef>
+            <a:fillRef idx="0">
+              <a:schemeClr val="accent1"/>
+            </a:fillRef>
+            <a:effectRef idx="0">
+              <a:schemeClr val="accent1"/>
+            </a:effectRef>
+            <a:fontRef idx="minor">
+              <a:schemeClr val="tx1"/>
+            </a:fontRef>
+          </p:style>
+        </p:cxnSp>
+      </p:grpSp>
+      <p:sp>
+        <p:nvSpPr>
+          <p:cNvPr id="16" name="文本框 15"/>
+          <p:cNvSpPr txBox="1"/>
+          <p:nvPr/>
+        </p:nvSpPr>
+        <p:spPr>
+          <a:xfrm>
+            <a:off x="2639616" y="4725564"/>
+            <a:ext cx="1148099" cy="646331"/>
+          </a:xfrm>
+          <a:prstGeom prst="rect">
+            <a:avLst/>
+          </a:prstGeom>
+          <a:noFill/>
+        </p:spPr>
+        <p:txBody>
+          <a:bodyPr wrap="square" rtlCol="0">
+            <a:spAutoFit/>
+          </a:bodyPr>
+          <a:lstStyle/>
+          <a:p>
+            <a:r>
+              <a:rPr lang="zh-CN" altLang="en-US" dirty="0">
+                <a:solidFill>
+                  <a:schemeClr val="tx2">
+                    <a:lumMod val="75000"/>
+                  </a:schemeClr>
+                </a:solidFill>
+                <a:latin typeface="Microsoft YaHei" charset="0"/>
+                <a:ea typeface="Microsoft YaHei" charset="0"/>
+                <a:cs typeface="Microsoft YaHei" charset="0"/>
+              </a:rPr>
+              <a:t>质量管理</a:t>
+            </a:r>
+            <a:endParaRPr lang="zh-CN" altLang="en-US" dirty="0" smtClean="0">
+              <a:solidFill>
+                <a:schemeClr val="tx2">
+                  <a:lumMod val="75000"/>
+                </a:schemeClr>
+              </a:solidFill>
+              <a:latin typeface="Microsoft YaHei" charset="0"/>
+              <a:ea typeface="Microsoft YaHei" charset="0"/>
+              <a:cs typeface="Microsoft YaHei" charset="0"/>
+            </a:endParaRPr>
+          </a:p>
+        </p:txBody>
+      </p:sp>
+      <p:grpSp>
+        <p:nvGrpSpPr>
+          <p:cNvPr id="17" name="组合 16"/>
+          <p:cNvGrpSpPr/>
+          <p:nvPr/>
+        </p:nvGrpSpPr>
+        <p:grpSpPr>
+          <a:xfrm>
+            <a:off x="4756651" y="1921430"/>
+            <a:ext cx="79209" cy="1391491"/>
+            <a:chOff x="1932524" y="2492896"/>
+            <a:chExt cx="79209" cy="1391491"/>
+          </a:xfrm>
+        </p:grpSpPr>
+        <p:sp>
+          <p:nvSpPr>
+            <p:cNvPr id="18" name="流程图: 联系 17"/>
+            <p:cNvSpPr/>
+            <p:nvPr/>
+          </p:nvSpPr>
+          <p:spPr>
+            <a:xfrm>
+              <a:off x="1932524" y="2492896"/>
+              <a:ext cx="79209" cy="79209"/>
+            </a:xfrm>
+            <a:prstGeom prst="flowChartConnector">
+              <a:avLst/>
+            </a:prstGeom>
+            <a:ln>
+              <a:solidFill>
+                <a:schemeClr val="tx1">
+                  <a:lumMod val="75000"/>
+                </a:schemeClr>
+              </a:solidFill>
+            </a:ln>
+          </p:spPr>
+          <p:style>
+            <a:lnRef idx="2">
+              <a:schemeClr val="dk1"/>
+            </a:lnRef>
+            <a:fillRef idx="1">
+              <a:schemeClr val="lt1"/>
+            </a:fillRef>
+            <a:effectRef idx="0">
+              <a:schemeClr val="dk1"/>
+            </a:effectRef>
+            <a:fontRef idx="minor">
+              <a:schemeClr val="dk1"/>
+            </a:fontRef>
+          </p:style>
+          <p:txBody>
+            <a:bodyPr rot="0" spcFirstLastPara="0" vertOverflow="overflow" horzOverflow="overflow" vert="horz" wrap="square" lIns="91440" tIns="45720" rIns="91440" bIns="45720" numCol="1" spcCol="0" rtlCol="0" fromWordArt="0" anchor="ctr" anchorCtr="0" forceAA="0" compatLnSpc="1">
+              <a:prstTxWarp prst="textNoShape">
+                <a:avLst/>
+              </a:prstTxWarp>
+              <a:noAutofit/>
+            </a:bodyPr>
+            <a:lstStyle/>
+            <a:p>
+              <a:pPr algn="ctr"/>
+              <a:endParaRPr lang="zh-CN" altLang="en-US" sz="2000" dirty="0" smtClean="0">
+                <a:solidFill>
+                  <a:schemeClr val="tx1">
+                    <a:lumMod val="75000"/>
+                  </a:schemeClr>
+                </a:solidFill>
+                <a:latin typeface="Microsoft YaHei" charset="0"/>
+                <a:ea typeface="Microsoft YaHei" charset="0"/>
+                <a:cs typeface="Microsoft YaHei" charset="0"/>
+              </a:endParaRPr>
+            </a:p>
+          </p:txBody>
+        </p:sp>
+        <p:cxnSp>
+          <p:nvCxnSpPr>
+            <p:cNvPr id="19" name="直接连接符 18"/>
+            <p:cNvCxnSpPr>
+              <a:stCxn id="18" idx="4"/>
+            </p:cNvCxnSpPr>
+            <p:nvPr/>
+          </p:nvCxnSpPr>
+          <p:spPr>
+            <a:xfrm>
+              <a:off x="1972129" y="2572105"/>
+              <a:ext cx="0" cy="1312282"/>
+            </a:xfrm>
+            <a:prstGeom prst="line">
+              <a:avLst/>
+            </a:prstGeom>
+            <a:ln w="25400">
+              <a:solidFill>
+                <a:schemeClr val="tx1">
+                  <a:lumMod val="75000"/>
+                </a:schemeClr>
+              </a:solidFill>
+            </a:ln>
+          </p:spPr>
+          <p:style>
+            <a:lnRef idx="1">
+              <a:schemeClr val="accent1"/>
+            </a:lnRef>
+            <a:fillRef idx="0">
+              <a:schemeClr val="accent1"/>
+            </a:fillRef>
+            <a:effectRef idx="0">
+              <a:schemeClr val="accent1"/>
+            </a:effectRef>
+            <a:fontRef idx="minor">
+              <a:schemeClr val="tx1"/>
+            </a:fontRef>
+          </p:style>
+        </p:cxnSp>
+      </p:grpSp>
+      <p:sp>
+        <p:nvSpPr>
+          <p:cNvPr id="20" name="文本框 19"/>
+          <p:cNvSpPr txBox="1"/>
+          <p:nvPr/>
+        </p:nvSpPr>
+        <p:spPr>
+          <a:xfrm>
+            <a:off x="4511824" y="1512494"/>
+            <a:ext cx="648072" cy="369332"/>
+          </a:xfrm>
+          <a:prstGeom prst="rect">
+            <a:avLst/>
+          </a:prstGeom>
+          <a:noFill/>
+        </p:spPr>
+        <p:txBody>
+          <a:bodyPr wrap="square" rtlCol="0">
+            <a:spAutoFit/>
+          </a:bodyPr>
+          <a:lstStyle/>
+          <a:p>
+            <a:r>
+              <a:rPr lang="zh-CN" altLang="en-US" dirty="0">
+                <a:solidFill>
+                  <a:schemeClr val="tx2">
+                    <a:lumMod val="75000"/>
+                  </a:schemeClr>
+                </a:solidFill>
+                <a:latin typeface="Microsoft YaHei" charset="0"/>
+                <a:ea typeface="Microsoft YaHei" charset="0"/>
+                <a:cs typeface="Microsoft YaHei" charset="0"/>
+              </a:rPr>
+              <a:t>天池</a:t>
+            </a:r>
+            <a:endParaRPr lang="zh-CN" altLang="en-US" dirty="0" smtClean="0">
+              <a:solidFill>
+                <a:schemeClr val="tx2">
+                  <a:lumMod val="75000"/>
+                </a:schemeClr>
+              </a:solidFill>
+              <a:latin typeface="Microsoft YaHei" charset="0"/>
+              <a:ea typeface="Microsoft YaHei" charset="0"/>
+              <a:cs typeface="Microsoft YaHei" charset="0"/>
+            </a:endParaRPr>
+          </a:p>
+        </p:txBody>
+      </p:sp>
+      <p:grpSp>
+        <p:nvGrpSpPr>
+          <p:cNvPr id="21" name="组合 20"/>
+          <p:cNvGrpSpPr/>
+          <p:nvPr/>
+        </p:nvGrpSpPr>
+        <p:grpSpPr>
+          <a:xfrm rot="10800000">
+            <a:off x="6378845" y="3298839"/>
+            <a:ext cx="79209" cy="1391491"/>
+            <a:chOff x="1932524" y="2492896"/>
+            <a:chExt cx="79209" cy="1391491"/>
+          </a:xfrm>
+        </p:grpSpPr>
+        <p:sp>
+          <p:nvSpPr>
+            <p:cNvPr id="22" name="流程图: 联系 21"/>
+            <p:cNvSpPr/>
+            <p:nvPr/>
+          </p:nvSpPr>
+          <p:spPr>
+            <a:xfrm>
+              <a:off x="1932524" y="2492896"/>
+              <a:ext cx="79209" cy="79209"/>
+            </a:xfrm>
+            <a:prstGeom prst="flowChartConnector">
+              <a:avLst/>
+            </a:prstGeom>
+            <a:ln>
+              <a:solidFill>
+                <a:schemeClr val="tx1">
+                  <a:lumMod val="75000"/>
+                </a:schemeClr>
+              </a:solidFill>
+            </a:ln>
+          </p:spPr>
+          <p:style>
+            <a:lnRef idx="2">
+              <a:schemeClr val="dk1"/>
+            </a:lnRef>
+            <a:fillRef idx="1">
+              <a:schemeClr val="lt1"/>
+            </a:fillRef>
+            <a:effectRef idx="0">
+              <a:schemeClr val="dk1"/>
+            </a:effectRef>
+            <a:fontRef idx="minor">
+              <a:schemeClr val="dk1"/>
+            </a:fontRef>
+          </p:style>
+          <p:txBody>
+            <a:bodyPr rot="0" spcFirstLastPara="0" vertOverflow="overflow" horzOverflow="overflow" vert="horz" wrap="square" lIns="91440" tIns="45720" rIns="91440" bIns="45720" numCol="1" spcCol="0" rtlCol="0" fromWordArt="0" anchor="ctr" anchorCtr="0" forceAA="0" compatLnSpc="1">
+              <a:prstTxWarp prst="textNoShape">
+                <a:avLst/>
+              </a:prstTxWarp>
+              <a:noAutofit/>
+            </a:bodyPr>
+            <a:lstStyle/>
+            <a:p>
+              <a:pPr algn="ctr"/>
+              <a:endParaRPr lang="zh-CN" altLang="en-US" sz="2000" dirty="0" smtClean="0">
+                <a:solidFill>
+                  <a:schemeClr val="tx1">
+                    <a:lumMod val="75000"/>
+                  </a:schemeClr>
+                </a:solidFill>
+                <a:latin typeface="Microsoft YaHei" charset="0"/>
+                <a:ea typeface="Microsoft YaHei" charset="0"/>
+                <a:cs typeface="Microsoft YaHei" charset="0"/>
+              </a:endParaRPr>
+            </a:p>
+          </p:txBody>
+        </p:sp>
+        <p:cxnSp>
+          <p:nvCxnSpPr>
+            <p:cNvPr id="23" name="直接连接符 22"/>
+            <p:cNvCxnSpPr>
+              <a:stCxn id="22" idx="4"/>
+            </p:cNvCxnSpPr>
+            <p:nvPr/>
+          </p:nvCxnSpPr>
+          <p:spPr>
+            <a:xfrm>
+              <a:off x="1972129" y="2572105"/>
+              <a:ext cx="0" cy="1312282"/>
+            </a:xfrm>
+            <a:prstGeom prst="line">
+              <a:avLst/>
+            </a:prstGeom>
+            <a:ln w="25400">
+              <a:solidFill>
+                <a:schemeClr val="tx1">
+                  <a:lumMod val="75000"/>
+                </a:schemeClr>
+              </a:solidFill>
+            </a:ln>
+          </p:spPr>
+          <p:style>
+            <a:lnRef idx="1">
+              <a:schemeClr val="accent1"/>
+            </a:lnRef>
+            <a:fillRef idx="0">
+              <a:schemeClr val="accent1"/>
+            </a:fillRef>
+            <a:effectRef idx="0">
+              <a:schemeClr val="accent1"/>
+            </a:effectRef>
+            <a:fontRef idx="minor">
+              <a:schemeClr val="tx1"/>
+            </a:fontRef>
+          </p:style>
+        </p:cxnSp>
+      </p:grpSp>
+      <p:sp>
+        <p:nvSpPr>
+          <p:cNvPr id="24" name="文本框 23"/>
+          <p:cNvSpPr txBox="1"/>
+          <p:nvPr/>
+        </p:nvSpPr>
+        <p:spPr>
+          <a:xfrm>
+            <a:off x="5533542" y="4725564"/>
+            <a:ext cx="1849025" cy="646331"/>
+          </a:xfrm>
+          <a:prstGeom prst="rect">
+            <a:avLst/>
+          </a:prstGeom>
+          <a:noFill/>
+        </p:spPr>
+        <p:txBody>
+          <a:bodyPr wrap="square" rtlCol="0">
+            <a:spAutoFit/>
+          </a:bodyPr>
+          <a:lstStyle/>
+          <a:p>
+            <a:r>
+              <a:rPr lang="zh-CN" altLang="en-US" dirty="0" smtClean="0">
+                <a:solidFill>
+                  <a:schemeClr val="tx2">
+                    <a:lumMod val="75000"/>
+                  </a:schemeClr>
+                </a:solidFill>
+                <a:latin typeface="Microsoft YaHei" charset="0"/>
+                <a:ea typeface="Microsoft YaHei" charset="0"/>
+                <a:cs typeface="Microsoft YaHei" charset="0"/>
+              </a:rPr>
+              <a:t>互联网接入平台</a:t>
+            </a:r>
+          </a:p>
+        </p:txBody>
+      </p:sp>
+      <p:grpSp>
+        <p:nvGrpSpPr>
+          <p:cNvPr id="25" name="组合 24"/>
+          <p:cNvGrpSpPr/>
+          <p:nvPr/>
+        </p:nvGrpSpPr>
+        <p:grpSpPr>
+          <a:xfrm>
+            <a:off x="8081393" y="1921203"/>
+            <a:ext cx="79209" cy="1391491"/>
+            <a:chOff x="1932524" y="2492896"/>
+            <a:chExt cx="79209" cy="1391491"/>
+          </a:xfrm>
+        </p:grpSpPr>
+        <p:sp>
+          <p:nvSpPr>
+            <p:cNvPr id="26" name="流程图: 联系 25"/>
+            <p:cNvSpPr/>
+            <p:nvPr/>
+          </p:nvSpPr>
+          <p:spPr>
+            <a:xfrm>
+              <a:off x="1932524" y="2492896"/>
+              <a:ext cx="79209" cy="79209"/>
+            </a:xfrm>
+            <a:prstGeom prst="flowChartConnector">
+              <a:avLst/>
+            </a:prstGeom>
+            <a:ln>
+              <a:solidFill>
+                <a:schemeClr val="tx1">
+                  <a:lumMod val="75000"/>
+                </a:schemeClr>
+              </a:solidFill>
+            </a:ln>
+          </p:spPr>
+          <p:style>
+            <a:lnRef idx="2">
+              <a:schemeClr val="dk1"/>
+            </a:lnRef>
+            <a:fillRef idx="1">
+              <a:schemeClr val="lt1"/>
+            </a:fillRef>
+            <a:effectRef idx="0">
+              <a:schemeClr val="dk1"/>
+            </a:effectRef>
+            <a:fontRef idx="minor">
+              <a:schemeClr val="dk1"/>
+            </a:fontRef>
+          </p:style>
+          <p:txBody>
+            <a:bodyPr rot="0" spcFirstLastPara="0" vertOverflow="overflow" horzOverflow="overflow" vert="horz" wrap="square" lIns="91440" tIns="45720" rIns="91440" bIns="45720" numCol="1" spcCol="0" rtlCol="0" fromWordArt="0" anchor="ctr" anchorCtr="0" forceAA="0" compatLnSpc="1">
+              <a:prstTxWarp prst="textNoShape">
+                <a:avLst/>
+              </a:prstTxWarp>
+              <a:noAutofit/>
+            </a:bodyPr>
+            <a:lstStyle/>
+            <a:p>
+              <a:pPr algn="ctr"/>
+              <a:endParaRPr lang="zh-CN" altLang="en-US" sz="2000" dirty="0" smtClean="0">
+                <a:solidFill>
+                  <a:schemeClr val="tx1">
+                    <a:lumMod val="75000"/>
+                  </a:schemeClr>
+                </a:solidFill>
+                <a:latin typeface="Microsoft YaHei" charset="0"/>
+                <a:ea typeface="Microsoft YaHei" charset="0"/>
+                <a:cs typeface="Microsoft YaHei" charset="0"/>
+              </a:endParaRPr>
+            </a:p>
+          </p:txBody>
+        </p:sp>
+        <p:cxnSp>
+          <p:nvCxnSpPr>
+            <p:cNvPr id="27" name="直接连接符 26"/>
+            <p:cNvCxnSpPr>
+              <a:stCxn id="26" idx="4"/>
+            </p:cNvCxnSpPr>
+            <p:nvPr/>
+          </p:nvCxnSpPr>
+          <p:spPr>
+            <a:xfrm>
+              <a:off x="1972129" y="2572105"/>
+              <a:ext cx="0" cy="1312282"/>
+            </a:xfrm>
+            <a:prstGeom prst="line">
+              <a:avLst/>
+            </a:prstGeom>
+            <a:ln w="25400">
+              <a:solidFill>
+                <a:schemeClr val="tx1">
+                  <a:lumMod val="75000"/>
+                </a:schemeClr>
+              </a:solidFill>
+            </a:ln>
+          </p:spPr>
+          <p:style>
+            <a:lnRef idx="1">
+              <a:schemeClr val="accent1"/>
+            </a:lnRef>
+            <a:fillRef idx="0">
+              <a:schemeClr val="accent1"/>
+            </a:fillRef>
+            <a:effectRef idx="0">
+              <a:schemeClr val="accent1"/>
+            </a:effectRef>
+            <a:fontRef idx="minor">
+              <a:schemeClr val="tx1"/>
+            </a:fontRef>
+          </p:style>
+        </p:cxnSp>
+      </p:grpSp>
+      <p:sp>
+        <p:nvSpPr>
+          <p:cNvPr id="28" name="文本框 27"/>
+          <p:cNvSpPr txBox="1"/>
+          <p:nvPr/>
+        </p:nvSpPr>
+        <p:spPr>
+          <a:xfrm>
+            <a:off x="7320136" y="1512267"/>
+            <a:ext cx="1680932" cy="923330"/>
+          </a:xfrm>
+          <a:prstGeom prst="rect">
+            <a:avLst/>
+          </a:prstGeom>
+          <a:noFill/>
+        </p:spPr>
+        <p:txBody>
+          <a:bodyPr wrap="square" rtlCol="0">
+            <a:spAutoFit/>
+          </a:bodyPr>
+          <a:lstStyle/>
+          <a:p>
+            <a:r>
+              <a:rPr lang="zh-CN" altLang="en-US" dirty="0">
+                <a:solidFill>
+                  <a:schemeClr val="tx2">
+                    <a:lumMod val="75000"/>
+                  </a:schemeClr>
+                </a:solidFill>
+                <a:latin typeface="Microsoft YaHei" charset="0"/>
+                <a:ea typeface="Microsoft YaHei" charset="0"/>
+                <a:cs typeface="Microsoft YaHei" charset="0"/>
+              </a:rPr>
+              <a:t>精</a:t>
+            </a:r>
+            <a:r>
+              <a:rPr lang="zh-CN" altLang="en-US" dirty="0" smtClean="0">
+                <a:solidFill>
+                  <a:schemeClr val="tx2">
+                    <a:lumMod val="75000"/>
+                  </a:schemeClr>
+                </a:solidFill>
+                <a:latin typeface="Microsoft YaHei" charset="0"/>
+                <a:ea typeface="Microsoft YaHei" charset="0"/>
+                <a:cs typeface="Microsoft YaHei" charset="0"/>
+              </a:rPr>
+              <a:t>益过程管理</a:t>
+            </a:r>
+          </a:p>
+        </p:txBody>
+      </p:sp>
+      <p:grpSp>
+        <p:nvGrpSpPr>
+          <p:cNvPr id="29" name="组合 28"/>
+          <p:cNvGrpSpPr/>
+          <p:nvPr/>
+        </p:nvGrpSpPr>
+        <p:grpSpPr>
+          <a:xfrm rot="10800000">
+            <a:off x="9700790" y="3300160"/>
+            <a:ext cx="79209" cy="1391491"/>
+            <a:chOff x="1932524" y="2492896"/>
+            <a:chExt cx="79209" cy="1391491"/>
+          </a:xfrm>
+        </p:grpSpPr>
+        <p:sp>
+          <p:nvSpPr>
+            <p:cNvPr id="30" name="流程图: 联系 29"/>
+            <p:cNvSpPr/>
+            <p:nvPr/>
+          </p:nvSpPr>
+          <p:spPr>
+            <a:xfrm>
+              <a:off x="1932524" y="2492896"/>
+              <a:ext cx="79209" cy="79209"/>
+            </a:xfrm>
+            <a:prstGeom prst="flowChartConnector">
+              <a:avLst/>
+            </a:prstGeom>
+            <a:ln>
+              <a:solidFill>
+                <a:schemeClr val="tx1">
+                  <a:lumMod val="75000"/>
+                </a:schemeClr>
+              </a:solidFill>
+            </a:ln>
+          </p:spPr>
+          <p:style>
+            <a:lnRef idx="2">
+              <a:schemeClr val="dk1"/>
+            </a:lnRef>
+            <a:fillRef idx="1">
+              <a:schemeClr val="lt1"/>
+            </a:fillRef>
+            <a:effectRef idx="0">
+              <a:schemeClr val="dk1"/>
+            </a:effectRef>
+            <a:fontRef idx="minor">
+              <a:schemeClr val="dk1"/>
+            </a:fontRef>
+          </p:style>
+          <p:txBody>
+            <a:bodyPr rot="0" spcFirstLastPara="0" vertOverflow="overflow" horzOverflow="overflow" vert="horz" wrap="square" lIns="91440" tIns="45720" rIns="91440" bIns="45720" numCol="1" spcCol="0" rtlCol="0" fromWordArt="0" anchor="ctr" anchorCtr="0" forceAA="0" compatLnSpc="1">
+              <a:prstTxWarp prst="textNoShape">
+                <a:avLst/>
+              </a:prstTxWarp>
+              <a:noAutofit/>
+            </a:bodyPr>
+            <a:lstStyle/>
+            <a:p>
+              <a:pPr algn="ctr"/>
+              <a:endParaRPr lang="zh-CN" altLang="en-US" sz="2000" dirty="0" smtClean="0">
+                <a:solidFill>
+                  <a:schemeClr val="tx1">
+                    <a:lumMod val="75000"/>
+                  </a:schemeClr>
+                </a:solidFill>
+                <a:latin typeface="Microsoft YaHei" charset="0"/>
+                <a:ea typeface="Microsoft YaHei" charset="0"/>
+                <a:cs typeface="Microsoft YaHei" charset="0"/>
+              </a:endParaRPr>
+            </a:p>
+          </p:txBody>
+        </p:sp>
+        <p:cxnSp>
+          <p:nvCxnSpPr>
+            <p:cNvPr id="31" name="直接连接符 30"/>
+            <p:cNvCxnSpPr>
+              <a:stCxn id="30" idx="4"/>
+            </p:cNvCxnSpPr>
+            <p:nvPr/>
+          </p:nvCxnSpPr>
+          <p:spPr>
+            <a:xfrm>
+              <a:off x="1972129" y="2572105"/>
+              <a:ext cx="0" cy="1312282"/>
+            </a:xfrm>
+            <a:prstGeom prst="line">
+              <a:avLst/>
+            </a:prstGeom>
+            <a:ln w="25400">
+              <a:solidFill>
+                <a:schemeClr val="tx1">
+                  <a:lumMod val="75000"/>
+                </a:schemeClr>
+              </a:solidFill>
+            </a:ln>
+          </p:spPr>
+          <p:style>
+            <a:lnRef idx="1">
+              <a:schemeClr val="accent1"/>
+            </a:lnRef>
+            <a:fillRef idx="0">
+              <a:schemeClr val="accent1"/>
+            </a:fillRef>
+            <a:effectRef idx="0">
+              <a:schemeClr val="accent1"/>
+            </a:effectRef>
+            <a:fontRef idx="minor">
+              <a:schemeClr val="tx1"/>
+            </a:fontRef>
+          </p:style>
+        </p:cxnSp>
+      </p:grpSp>
+      <p:sp>
+        <p:nvSpPr>
+          <p:cNvPr id="32" name="文本框 31"/>
+          <p:cNvSpPr txBox="1"/>
+          <p:nvPr/>
+        </p:nvSpPr>
+        <p:spPr>
+          <a:xfrm>
+            <a:off x="9258136" y="4726885"/>
+            <a:ext cx="1043726" cy="369332"/>
+          </a:xfrm>
+          <a:prstGeom prst="rect">
+            <a:avLst/>
+          </a:prstGeom>
+          <a:noFill/>
+        </p:spPr>
+        <p:txBody>
+          <a:bodyPr wrap="square" rtlCol="0">
+            <a:spAutoFit/>
+          </a:bodyPr>
+          <a:lstStyle/>
+          <a:p>
+            <a:r>
+              <a:rPr lang="zh-CN" altLang="en-US" dirty="0" smtClean="0">
+                <a:solidFill>
+                  <a:schemeClr val="tx2">
+                    <a:lumMod val="75000"/>
+                  </a:schemeClr>
+                </a:solidFill>
+                <a:latin typeface="Microsoft YaHei" charset="0"/>
+                <a:ea typeface="Microsoft YaHei" charset="0"/>
+                <a:cs typeface="Microsoft YaHei" charset="0"/>
+              </a:rPr>
+              <a:t>小华</a:t>
+            </a:r>
+            <a:r>
+              <a:rPr lang="en-US" altLang="zh-CN" dirty="0" smtClean="0">
+                <a:solidFill>
+                  <a:schemeClr val="tx2">
+                    <a:lumMod val="75000"/>
+                  </a:schemeClr>
+                </a:solidFill>
+                <a:latin typeface="Microsoft YaHei" charset="0"/>
+                <a:ea typeface="Microsoft YaHei" charset="0"/>
+                <a:cs typeface="Microsoft YaHei" charset="0"/>
+              </a:rPr>
+              <a:t>e</a:t>
+            </a:r>
+            <a:r>
+              <a:rPr lang="zh-CN" altLang="en-US" dirty="0" smtClean="0">
+                <a:solidFill>
+                  <a:schemeClr val="tx2">
+                    <a:lumMod val="75000"/>
+                  </a:schemeClr>
+                </a:solidFill>
+                <a:latin typeface="Microsoft YaHei" charset="0"/>
+                <a:ea typeface="Microsoft YaHei" charset="0"/>
+                <a:cs typeface="Microsoft YaHei" charset="0"/>
+              </a:rPr>
+              <a:t>家</a:t>
+            </a:r>
+          </a:p>
+        </p:txBody>
+      </p:sp>
+      <p:sp>
+        <p:nvSpPr>
+          <p:cNvPr id="33" name="文本框 32"/>
+          <p:cNvSpPr txBox="1"/>
+          <p:nvPr/>
+        </p:nvSpPr>
+        <p:spPr>
+          <a:xfrm>
+            <a:off x="2239971" y="2943589"/>
+            <a:ext cx="1580215" cy="369332"/>
+          </a:xfrm>
+          <a:prstGeom prst="rect">
+            <a:avLst/>
+          </a:prstGeom>
+          <a:noFill/>
+        </p:spPr>
+        <p:txBody>
+          <a:bodyPr wrap="square" rtlCol="0">
+            <a:spAutoFit/>
+          </a:bodyPr>
+          <a:lstStyle/>
+          <a:p>
+            <a:r>
+              <a:rPr lang="en-US" altLang="zh-CN" dirty="0" smtClean="0">
+                <a:solidFill>
+                  <a:schemeClr val="tx2">
+                    <a:lumMod val="75000"/>
+                  </a:schemeClr>
+                </a:solidFill>
+                <a:latin typeface="Microsoft YaHei" charset="0"/>
+                <a:ea typeface="Microsoft YaHei" charset="0"/>
+                <a:cs typeface="Microsoft YaHei" charset="0"/>
+              </a:rPr>
+              <a:t>2014</a:t>
+            </a:r>
+            <a:r>
+              <a:rPr lang="zh-CN" altLang="en-US" dirty="0" smtClean="0">
+                <a:solidFill>
+                  <a:schemeClr val="tx2">
+                    <a:lumMod val="75000"/>
+                  </a:schemeClr>
+                </a:solidFill>
+                <a:latin typeface="Microsoft YaHei" charset="0"/>
+                <a:ea typeface="Microsoft YaHei" charset="0"/>
+                <a:cs typeface="Microsoft YaHei" charset="0"/>
+              </a:rPr>
+              <a:t>～</a:t>
+            </a:r>
+            <a:r>
+              <a:rPr lang="en-US" altLang="zh-CN" dirty="0" smtClean="0">
+                <a:solidFill>
+                  <a:schemeClr val="tx2">
+                    <a:lumMod val="75000"/>
+                  </a:schemeClr>
+                </a:solidFill>
+                <a:latin typeface="Microsoft YaHei" charset="0"/>
+                <a:ea typeface="Microsoft YaHei" charset="0"/>
+                <a:cs typeface="Microsoft YaHei" charset="0"/>
+              </a:rPr>
+              <a:t>2015</a:t>
+            </a:r>
+            <a:endParaRPr lang="zh-CN" altLang="en-US" dirty="0" smtClean="0">
+              <a:solidFill>
+                <a:schemeClr val="tx2">
+                  <a:lumMod val="75000"/>
+                </a:schemeClr>
+              </a:solidFill>
+              <a:latin typeface="Microsoft YaHei" charset="0"/>
+              <a:ea typeface="Microsoft YaHei" charset="0"/>
+              <a:cs typeface="Microsoft YaHei" charset="0"/>
+            </a:endParaRPr>
+          </a:p>
+        </p:txBody>
+      </p:sp>
+      <p:sp>
+        <p:nvSpPr>
+          <p:cNvPr id="34" name="文本框 33"/>
+          <p:cNvSpPr txBox="1"/>
+          <p:nvPr/>
+        </p:nvSpPr>
+        <p:spPr>
+          <a:xfrm>
+            <a:off x="4804776" y="2943589"/>
+            <a:ext cx="1580215" cy="369332"/>
+          </a:xfrm>
+          <a:prstGeom prst="rect">
+            <a:avLst/>
+          </a:prstGeom>
+          <a:noFill/>
+        </p:spPr>
+        <p:txBody>
+          <a:bodyPr wrap="square" rtlCol="0">
+            <a:spAutoFit/>
+          </a:bodyPr>
+          <a:lstStyle/>
+          <a:p>
+            <a:r>
+              <a:rPr lang="en-US" altLang="zh-CN" dirty="0" smtClean="0">
+                <a:solidFill>
+                  <a:schemeClr val="tx2">
+                    <a:lumMod val="75000"/>
+                  </a:schemeClr>
+                </a:solidFill>
+                <a:latin typeface="Microsoft YaHei" charset="0"/>
+                <a:ea typeface="Microsoft YaHei" charset="0"/>
+                <a:cs typeface="Microsoft YaHei" charset="0"/>
+              </a:rPr>
+              <a:t>2016</a:t>
+            </a:r>
+            <a:r>
+              <a:rPr lang="zh-CN" altLang="en-US" dirty="0" smtClean="0">
+                <a:solidFill>
+                  <a:schemeClr val="tx2">
+                    <a:lumMod val="75000"/>
+                  </a:schemeClr>
+                </a:solidFill>
+                <a:latin typeface="Microsoft YaHei" charset="0"/>
+                <a:ea typeface="Microsoft YaHei" charset="0"/>
+                <a:cs typeface="Microsoft YaHei" charset="0"/>
+              </a:rPr>
+              <a:t>～</a:t>
+            </a:r>
+            <a:r>
+              <a:rPr lang="en-US" altLang="zh-CN" dirty="0" smtClean="0">
+                <a:solidFill>
+                  <a:schemeClr val="tx2">
+                    <a:lumMod val="75000"/>
+                  </a:schemeClr>
+                </a:solidFill>
+                <a:latin typeface="Microsoft YaHei" charset="0"/>
+                <a:ea typeface="Microsoft YaHei" charset="0"/>
+                <a:cs typeface="Microsoft YaHei" charset="0"/>
+              </a:rPr>
+              <a:t>   </a:t>
+            </a:r>
+            <a:endParaRPr lang="zh-CN" altLang="en-US" dirty="0" smtClean="0">
+              <a:solidFill>
+                <a:schemeClr val="tx2">
+                  <a:lumMod val="75000"/>
+                </a:schemeClr>
+              </a:solidFill>
+              <a:latin typeface="Microsoft YaHei" charset="0"/>
+              <a:ea typeface="Microsoft YaHei" charset="0"/>
+              <a:cs typeface="Microsoft YaHei" charset="0"/>
+            </a:endParaRPr>
           </a:p>
         </p:txBody>
       </p:sp>
@@ -15736,6 +18636,590 @@
   <p:clrMapOvr>
     <a:masterClrMapping/>
   </p:clrMapOvr>
+  <p:timing>
+    <p:tnLst>
+      <p:par>
+        <p:cTn id="1" dur="indefinite" restart="never" nodeType="tmRoot">
+          <p:childTnLst>
+            <p:seq concurrent="1" nextAc="seek">
+              <p:cTn id="2" dur="indefinite" nodeType="mainSeq">
+                <p:childTnLst>
+                  <p:par>
+                    <p:cTn id="3" fill="hold">
+                      <p:stCondLst>
+                        <p:cond delay="indefinite"/>
+                      </p:stCondLst>
+                      <p:childTnLst>
+                        <p:par>
+                          <p:cTn id="4" fill="hold">
+                            <p:stCondLst>
+                              <p:cond delay="0"/>
+                            </p:stCondLst>
+                            <p:childTnLst>
+                              <p:par>
+                                <p:cTn id="5" presetID="16" presetClass="entr" presetSubtype="21" fill="hold" nodeType="clickEffect">
+                                  <p:stCondLst>
+                                    <p:cond delay="0"/>
+                                  </p:stCondLst>
+                                  <p:childTnLst>
+                                    <p:set>
+                                      <p:cBhvr>
+                                        <p:cTn id="6" dur="1" fill="hold">
+                                          <p:stCondLst>
+                                            <p:cond delay="0"/>
+                                          </p:stCondLst>
+                                        </p:cTn>
+                                        <p:tgtEl>
+                                          <p:spTgt spid="11"/>
+                                        </p:tgtEl>
+                                        <p:attrNameLst>
+                                          <p:attrName>style.visibility</p:attrName>
+                                        </p:attrNameLst>
+                                      </p:cBhvr>
+                                      <p:to>
+                                        <p:strVal val="visible"/>
+                                      </p:to>
+                                    </p:set>
+                                    <p:animEffect transition="in" filter="barn(inVertical)">
+                                      <p:cBhvr>
+                                        <p:cTn id="7" dur="500"/>
+                                        <p:tgtEl>
+                                          <p:spTgt spid="11"/>
+                                        </p:tgtEl>
+                                      </p:cBhvr>
+                                    </p:animEffect>
+                                  </p:childTnLst>
+                                </p:cTn>
+                              </p:par>
+                              <p:par>
+                                <p:cTn id="8" presetID="16" presetClass="entr" presetSubtype="21" fill="hold" grpId="0" nodeType="withEffect">
+                                  <p:stCondLst>
+                                    <p:cond delay="0"/>
+                                  </p:stCondLst>
+                                  <p:childTnLst>
+                                    <p:set>
+                                      <p:cBhvr>
+                                        <p:cTn id="9" dur="1" fill="hold">
+                                          <p:stCondLst>
+                                            <p:cond delay="0"/>
+                                          </p:stCondLst>
+                                        </p:cTn>
+                                        <p:tgtEl>
+                                          <p:spTgt spid="12"/>
+                                        </p:tgtEl>
+                                        <p:attrNameLst>
+                                          <p:attrName>style.visibility</p:attrName>
+                                        </p:attrNameLst>
+                                      </p:cBhvr>
+                                      <p:to>
+                                        <p:strVal val="visible"/>
+                                      </p:to>
+                                    </p:set>
+                                    <p:animEffect transition="in" filter="barn(inVertical)">
+                                      <p:cBhvr>
+                                        <p:cTn id="10" dur="500"/>
+                                        <p:tgtEl>
+                                          <p:spTgt spid="12"/>
+                                        </p:tgtEl>
+                                      </p:cBhvr>
+                                    </p:animEffect>
+                                  </p:childTnLst>
+                                </p:cTn>
+                              </p:par>
+                              <p:par>
+                                <p:cTn id="11" presetID="16" presetClass="entr" presetSubtype="21" fill="hold" nodeType="withEffect">
+                                  <p:stCondLst>
+                                    <p:cond delay="0"/>
+                                  </p:stCondLst>
+                                  <p:childTnLst>
+                                    <p:set>
+                                      <p:cBhvr>
+                                        <p:cTn id="12" dur="1" fill="hold">
+                                          <p:stCondLst>
+                                            <p:cond delay="0"/>
+                                          </p:stCondLst>
+                                        </p:cTn>
+                                        <p:tgtEl>
+                                          <p:spTgt spid="13"/>
+                                        </p:tgtEl>
+                                        <p:attrNameLst>
+                                          <p:attrName>style.visibility</p:attrName>
+                                        </p:attrNameLst>
+                                      </p:cBhvr>
+                                      <p:to>
+                                        <p:strVal val="visible"/>
+                                      </p:to>
+                                    </p:set>
+                                    <p:animEffect transition="in" filter="barn(inVertical)">
+                                      <p:cBhvr>
+                                        <p:cTn id="13" dur="500"/>
+                                        <p:tgtEl>
+                                          <p:spTgt spid="13"/>
+                                        </p:tgtEl>
+                                      </p:cBhvr>
+                                    </p:animEffect>
+                                  </p:childTnLst>
+                                </p:cTn>
+                              </p:par>
+                              <p:par>
+                                <p:cTn id="14" presetID="16" presetClass="entr" presetSubtype="21" fill="hold" grpId="0" nodeType="withEffect">
+                                  <p:stCondLst>
+                                    <p:cond delay="0"/>
+                                  </p:stCondLst>
+                                  <p:childTnLst>
+                                    <p:set>
+                                      <p:cBhvr>
+                                        <p:cTn id="15" dur="1" fill="hold">
+                                          <p:stCondLst>
+                                            <p:cond delay="0"/>
+                                          </p:stCondLst>
+                                        </p:cTn>
+                                        <p:tgtEl>
+                                          <p:spTgt spid="33"/>
+                                        </p:tgtEl>
+                                        <p:attrNameLst>
+                                          <p:attrName>style.visibility</p:attrName>
+                                        </p:attrNameLst>
+                                      </p:cBhvr>
+                                      <p:to>
+                                        <p:strVal val="visible"/>
+                                      </p:to>
+                                    </p:set>
+                                    <p:animEffect transition="in" filter="barn(inVertical)">
+                                      <p:cBhvr>
+                                        <p:cTn id="16" dur="500"/>
+                                        <p:tgtEl>
+                                          <p:spTgt spid="33"/>
+                                        </p:tgtEl>
+                                      </p:cBhvr>
+                                    </p:animEffect>
+                                  </p:childTnLst>
+                                </p:cTn>
+                              </p:par>
+                              <p:par>
+                                <p:cTn id="17" presetID="16" presetClass="entr" presetSubtype="21" fill="hold" grpId="0" nodeType="withEffect">
+                                  <p:stCondLst>
+                                    <p:cond delay="0"/>
+                                  </p:stCondLst>
+                                  <p:childTnLst>
+                                    <p:set>
+                                      <p:cBhvr>
+                                        <p:cTn id="18" dur="1" fill="hold">
+                                          <p:stCondLst>
+                                            <p:cond delay="0"/>
+                                          </p:stCondLst>
+                                        </p:cTn>
+                                        <p:tgtEl>
+                                          <p:spTgt spid="16"/>
+                                        </p:tgtEl>
+                                        <p:attrNameLst>
+                                          <p:attrName>style.visibility</p:attrName>
+                                        </p:attrNameLst>
+                                      </p:cBhvr>
+                                      <p:to>
+                                        <p:strVal val="visible"/>
+                                      </p:to>
+                                    </p:set>
+                                    <p:animEffect transition="in" filter="barn(inVertical)">
+                                      <p:cBhvr>
+                                        <p:cTn id="19" dur="500"/>
+                                        <p:tgtEl>
+                                          <p:spTgt spid="16"/>
+                                        </p:tgtEl>
+                                      </p:cBhvr>
+                                    </p:animEffect>
+                                  </p:childTnLst>
+                                </p:cTn>
+                              </p:par>
+                            </p:childTnLst>
+                          </p:cTn>
+                        </p:par>
+                      </p:childTnLst>
+                    </p:cTn>
+                  </p:par>
+                  <p:par>
+                    <p:cTn id="20" fill="hold">
+                      <p:stCondLst>
+                        <p:cond delay="indefinite"/>
+                      </p:stCondLst>
+                      <p:childTnLst>
+                        <p:par>
+                          <p:cTn id="21" fill="hold">
+                            <p:stCondLst>
+                              <p:cond delay="0"/>
+                            </p:stCondLst>
+                            <p:childTnLst>
+                              <p:par>
+                                <p:cTn id="22" presetID="16" presetClass="entr" presetSubtype="21" fill="hold" grpId="0" nodeType="clickEffect">
+                                  <p:stCondLst>
+                                    <p:cond delay="0"/>
+                                  </p:stCondLst>
+                                  <p:childTnLst>
+                                    <p:set>
+                                      <p:cBhvr>
+                                        <p:cTn id="23" dur="1" fill="hold">
+                                          <p:stCondLst>
+                                            <p:cond delay="0"/>
+                                          </p:stCondLst>
+                                        </p:cTn>
+                                        <p:tgtEl>
+                                          <p:spTgt spid="34"/>
+                                        </p:tgtEl>
+                                        <p:attrNameLst>
+                                          <p:attrName>style.visibility</p:attrName>
+                                        </p:attrNameLst>
+                                      </p:cBhvr>
+                                      <p:to>
+                                        <p:strVal val="visible"/>
+                                      </p:to>
+                                    </p:set>
+                                    <p:animEffect transition="in" filter="barn(inVertical)">
+                                      <p:cBhvr>
+                                        <p:cTn id="24" dur="500"/>
+                                        <p:tgtEl>
+                                          <p:spTgt spid="34"/>
+                                        </p:tgtEl>
+                                      </p:cBhvr>
+                                    </p:animEffect>
+                                  </p:childTnLst>
+                                </p:cTn>
+                              </p:par>
+                              <p:par>
+                                <p:cTn id="25" presetID="16" presetClass="entr" presetSubtype="21" fill="hold" nodeType="withEffect">
+                                  <p:stCondLst>
+                                    <p:cond delay="0"/>
+                                  </p:stCondLst>
+                                  <p:childTnLst>
+                                    <p:set>
+                                      <p:cBhvr>
+                                        <p:cTn id="26" dur="1" fill="hold">
+                                          <p:stCondLst>
+                                            <p:cond delay="0"/>
+                                          </p:stCondLst>
+                                        </p:cTn>
+                                        <p:tgtEl>
+                                          <p:spTgt spid="17"/>
+                                        </p:tgtEl>
+                                        <p:attrNameLst>
+                                          <p:attrName>style.visibility</p:attrName>
+                                        </p:attrNameLst>
+                                      </p:cBhvr>
+                                      <p:to>
+                                        <p:strVal val="visible"/>
+                                      </p:to>
+                                    </p:set>
+                                    <p:animEffect transition="in" filter="barn(inVertical)">
+                                      <p:cBhvr>
+                                        <p:cTn id="27" dur="500"/>
+                                        <p:tgtEl>
+                                          <p:spTgt spid="17"/>
+                                        </p:tgtEl>
+                                      </p:cBhvr>
+                                    </p:animEffect>
+                                  </p:childTnLst>
+                                </p:cTn>
+                              </p:par>
+                              <p:par>
+                                <p:cTn id="28" presetID="16" presetClass="entr" presetSubtype="21" fill="hold" grpId="0" nodeType="withEffect">
+                                  <p:stCondLst>
+                                    <p:cond delay="0"/>
+                                  </p:stCondLst>
+                                  <p:childTnLst>
+                                    <p:set>
+                                      <p:cBhvr>
+                                        <p:cTn id="29" dur="1" fill="hold">
+                                          <p:stCondLst>
+                                            <p:cond delay="0"/>
+                                          </p:stCondLst>
+                                        </p:cTn>
+                                        <p:tgtEl>
+                                          <p:spTgt spid="20"/>
+                                        </p:tgtEl>
+                                        <p:attrNameLst>
+                                          <p:attrName>style.visibility</p:attrName>
+                                        </p:attrNameLst>
+                                      </p:cBhvr>
+                                      <p:to>
+                                        <p:strVal val="visible"/>
+                                      </p:to>
+                                    </p:set>
+                                    <p:animEffect transition="in" filter="barn(inVertical)">
+                                      <p:cBhvr>
+                                        <p:cTn id="30" dur="500"/>
+                                        <p:tgtEl>
+                                          <p:spTgt spid="20"/>
+                                        </p:tgtEl>
+                                      </p:cBhvr>
+                                    </p:animEffect>
+                                  </p:childTnLst>
+                                </p:cTn>
+                              </p:par>
+                              <p:par>
+                                <p:cTn id="31" presetID="16" presetClass="entr" presetSubtype="21" fill="hold" nodeType="withEffect">
+                                  <p:stCondLst>
+                                    <p:cond delay="0"/>
+                                  </p:stCondLst>
+                                  <p:childTnLst>
+                                    <p:set>
+                                      <p:cBhvr>
+                                        <p:cTn id="32" dur="1" fill="hold">
+                                          <p:stCondLst>
+                                            <p:cond delay="0"/>
+                                          </p:stCondLst>
+                                        </p:cTn>
+                                        <p:tgtEl>
+                                          <p:spTgt spid="21"/>
+                                        </p:tgtEl>
+                                        <p:attrNameLst>
+                                          <p:attrName>style.visibility</p:attrName>
+                                        </p:attrNameLst>
+                                      </p:cBhvr>
+                                      <p:to>
+                                        <p:strVal val="visible"/>
+                                      </p:to>
+                                    </p:set>
+                                    <p:animEffect transition="in" filter="barn(inVertical)">
+                                      <p:cBhvr>
+                                        <p:cTn id="33" dur="500"/>
+                                        <p:tgtEl>
+                                          <p:spTgt spid="21"/>
+                                        </p:tgtEl>
+                                      </p:cBhvr>
+                                    </p:animEffect>
+                                  </p:childTnLst>
+                                </p:cTn>
+                              </p:par>
+                              <p:par>
+                                <p:cTn id="34" presetID="16" presetClass="entr" presetSubtype="21" fill="hold" grpId="0" nodeType="withEffect">
+                                  <p:stCondLst>
+                                    <p:cond delay="0"/>
+                                  </p:stCondLst>
+                                  <p:childTnLst>
+                                    <p:set>
+                                      <p:cBhvr>
+                                        <p:cTn id="35" dur="1" fill="hold">
+                                          <p:stCondLst>
+                                            <p:cond delay="0"/>
+                                          </p:stCondLst>
+                                        </p:cTn>
+                                        <p:tgtEl>
+                                          <p:spTgt spid="24"/>
+                                        </p:tgtEl>
+                                        <p:attrNameLst>
+                                          <p:attrName>style.visibility</p:attrName>
+                                        </p:attrNameLst>
+                                      </p:cBhvr>
+                                      <p:to>
+                                        <p:strVal val="visible"/>
+                                      </p:to>
+                                    </p:set>
+                                    <p:animEffect transition="in" filter="barn(inVertical)">
+                                      <p:cBhvr>
+                                        <p:cTn id="36" dur="500"/>
+                                        <p:tgtEl>
+                                          <p:spTgt spid="24"/>
+                                        </p:tgtEl>
+                                      </p:cBhvr>
+                                    </p:animEffect>
+                                  </p:childTnLst>
+                                </p:cTn>
+                              </p:par>
+                            </p:childTnLst>
+                          </p:cTn>
+                        </p:par>
+                      </p:childTnLst>
+                    </p:cTn>
+                  </p:par>
+                  <p:par>
+                    <p:cTn id="37" fill="hold">
+                      <p:stCondLst>
+                        <p:cond delay="indefinite"/>
+                      </p:stCondLst>
+                      <p:childTnLst>
+                        <p:par>
+                          <p:cTn id="38" fill="hold">
+                            <p:stCondLst>
+                              <p:cond delay="0"/>
+                            </p:stCondLst>
+                            <p:childTnLst>
+                              <p:par>
+                                <p:cTn id="39" presetID="16" presetClass="entr" presetSubtype="21" fill="hold" nodeType="clickEffect">
+                                  <p:stCondLst>
+                                    <p:cond delay="0"/>
+                                  </p:stCondLst>
+                                  <p:childTnLst>
+                                    <p:set>
+                                      <p:cBhvr>
+                                        <p:cTn id="40" dur="1" fill="hold">
+                                          <p:stCondLst>
+                                            <p:cond delay="0"/>
+                                          </p:stCondLst>
+                                        </p:cTn>
+                                        <p:tgtEl>
+                                          <p:spTgt spid="25"/>
+                                        </p:tgtEl>
+                                        <p:attrNameLst>
+                                          <p:attrName>style.visibility</p:attrName>
+                                        </p:attrNameLst>
+                                      </p:cBhvr>
+                                      <p:to>
+                                        <p:strVal val="visible"/>
+                                      </p:to>
+                                    </p:set>
+                                    <p:animEffect transition="in" filter="barn(inVertical)">
+                                      <p:cBhvr>
+                                        <p:cTn id="41" dur="500"/>
+                                        <p:tgtEl>
+                                          <p:spTgt spid="25"/>
+                                        </p:tgtEl>
+                                      </p:cBhvr>
+                                    </p:animEffect>
+                                  </p:childTnLst>
+                                </p:cTn>
+                              </p:par>
+                              <p:par>
+                                <p:cTn id="42" presetID="16" presetClass="entr" presetSubtype="21" fill="hold" grpId="0" nodeType="withEffect">
+                                  <p:stCondLst>
+                                    <p:cond delay="0"/>
+                                  </p:stCondLst>
+                                  <p:childTnLst>
+                                    <p:set>
+                                      <p:cBhvr>
+                                        <p:cTn id="43" dur="1" fill="hold">
+                                          <p:stCondLst>
+                                            <p:cond delay="0"/>
+                                          </p:stCondLst>
+                                        </p:cTn>
+                                        <p:tgtEl>
+                                          <p:spTgt spid="28"/>
+                                        </p:tgtEl>
+                                        <p:attrNameLst>
+                                          <p:attrName>style.visibility</p:attrName>
+                                        </p:attrNameLst>
+                                      </p:cBhvr>
+                                      <p:to>
+                                        <p:strVal val="visible"/>
+                                      </p:to>
+                                    </p:set>
+                                    <p:animEffect transition="in" filter="barn(inVertical)">
+                                      <p:cBhvr>
+                                        <p:cTn id="44" dur="500"/>
+                                        <p:tgtEl>
+                                          <p:spTgt spid="28"/>
+                                        </p:tgtEl>
+                                      </p:cBhvr>
+                                    </p:animEffect>
+                                  </p:childTnLst>
+                                </p:cTn>
+                              </p:par>
+                              <p:par>
+                                <p:cTn id="45" presetID="16" presetClass="entr" presetSubtype="21" fill="hold" nodeType="withEffect">
+                                  <p:stCondLst>
+                                    <p:cond delay="0"/>
+                                  </p:stCondLst>
+                                  <p:childTnLst>
+                                    <p:set>
+                                      <p:cBhvr>
+                                        <p:cTn id="46" dur="1" fill="hold">
+                                          <p:stCondLst>
+                                            <p:cond delay="0"/>
+                                          </p:stCondLst>
+                                        </p:cTn>
+                                        <p:tgtEl>
+                                          <p:spTgt spid="29"/>
+                                        </p:tgtEl>
+                                        <p:attrNameLst>
+                                          <p:attrName>style.visibility</p:attrName>
+                                        </p:attrNameLst>
+                                      </p:cBhvr>
+                                      <p:to>
+                                        <p:strVal val="visible"/>
+                                      </p:to>
+                                    </p:set>
+                                    <p:animEffect transition="in" filter="barn(inVertical)">
+                                      <p:cBhvr>
+                                        <p:cTn id="47" dur="500"/>
+                                        <p:tgtEl>
+                                          <p:spTgt spid="29"/>
+                                        </p:tgtEl>
+                                      </p:cBhvr>
+                                    </p:animEffect>
+                                  </p:childTnLst>
+                                </p:cTn>
+                              </p:par>
+                              <p:par>
+                                <p:cTn id="48" presetID="16" presetClass="entr" presetSubtype="21" fill="hold" grpId="0" nodeType="withEffect">
+                                  <p:stCondLst>
+                                    <p:cond delay="0"/>
+                                  </p:stCondLst>
+                                  <p:childTnLst>
+                                    <p:set>
+                                      <p:cBhvr>
+                                        <p:cTn id="49" dur="1" fill="hold">
+                                          <p:stCondLst>
+                                            <p:cond delay="0"/>
+                                          </p:stCondLst>
+                                        </p:cTn>
+                                        <p:tgtEl>
+                                          <p:spTgt spid="32"/>
+                                        </p:tgtEl>
+                                        <p:attrNameLst>
+                                          <p:attrName>style.visibility</p:attrName>
+                                        </p:attrNameLst>
+                                      </p:cBhvr>
+                                      <p:to>
+                                        <p:strVal val="visible"/>
+                                      </p:to>
+                                    </p:set>
+                                    <p:animEffect transition="in" filter="barn(inVertical)">
+                                      <p:cBhvr>
+                                        <p:cTn id="50" dur="500"/>
+                                        <p:tgtEl>
+                                          <p:spTgt spid="32"/>
+                                        </p:tgtEl>
+                                      </p:cBhvr>
+                                    </p:animEffect>
+                                  </p:childTnLst>
+                                </p:cTn>
+                              </p:par>
+                            </p:childTnLst>
+                          </p:cTn>
+                        </p:par>
+                      </p:childTnLst>
+                    </p:cTn>
+                  </p:par>
+                </p:childTnLst>
+              </p:cTn>
+              <p:prevCondLst>
+                <p:cond evt="onPrev" delay="0">
+                  <p:tgtEl>
+                    <p:sldTgt/>
+                  </p:tgtEl>
+                </p:cond>
+              </p:prevCondLst>
+              <p:nextCondLst>
+                <p:cond evt="onNext" delay="0">
+                  <p:tgtEl>
+                    <p:sldTgt/>
+                  </p:tgtEl>
+                </p:cond>
+              </p:nextCondLst>
+            </p:seq>
+          </p:childTnLst>
+        </p:cTn>
+      </p:par>
+    </p:tnLst>
+    <p:bldLst>
+      <p:bldP spid="12" grpId="0"/>
+      <p:bldP spid="16" grpId="0"/>
+      <p:bldP spid="20" grpId="0"/>
+      <p:bldP spid="24" grpId="0"/>
+      <p:bldP spid="28" grpId="0"/>
+      <p:bldP spid="32" grpId="0"/>
+      <p:bldP spid="33" grpId="0"/>
+      <p:bldP spid="34" grpId="0"/>
+    </p:bldLst>
+  </p:timing>
 </p:sld>
 </file>
 

--- a/经验技巧总结/演讲：客户价值规划/客户价值规划.pptx
+++ b/经验技巧总结/演讲：客户价值规划/客户价值规划.pptx
@@ -4532,14 +4532,6 @@
               </a:rPr>
               <a:t>客户</a:t>
             </a:r>
-            <a:endParaRPr lang="zh-CN" altLang="en-US" sz="2400" b="1" dirty="0" smtClean="0">
-              <a:solidFill>
-                <a:schemeClr val="bg1"/>
-              </a:solidFill>
-              <a:latin typeface="Microsoft YaHei" charset="0"/>
-              <a:ea typeface="Microsoft YaHei" charset="0"/>
-              <a:cs typeface="Microsoft YaHei" charset="0"/>
-            </a:endParaRPr>
           </a:p>
         </p:txBody>
       </p:sp>
@@ -4599,14 +4591,6 @@
               </a:rPr>
               <a:t>公司</a:t>
             </a:r>
-            <a:endParaRPr lang="zh-CN" altLang="en-US" sz="2400" b="1" dirty="0" smtClean="0">
-              <a:solidFill>
-                <a:schemeClr val="bg1"/>
-              </a:solidFill>
-              <a:latin typeface="Microsoft YaHei" charset="0"/>
-              <a:ea typeface="Microsoft YaHei" charset="0"/>
-              <a:cs typeface="Microsoft YaHei" charset="0"/>
-            </a:endParaRPr>
           </a:p>
         </p:txBody>
       </p:sp>
@@ -4786,14 +4770,6 @@
               </a:rPr>
               <a:t>企业</a:t>
             </a:r>
-            <a:endParaRPr lang="zh-CN" altLang="en-US" dirty="0" smtClean="0">
-              <a:solidFill>
-                <a:srgbClr val="C00000"/>
-              </a:solidFill>
-              <a:latin typeface="Microsoft YaHei" charset="0"/>
-              <a:ea typeface="Microsoft YaHei" charset="0"/>
-              <a:cs typeface="Microsoft YaHei" charset="0"/>
-            </a:endParaRPr>
           </a:p>
         </p:txBody>
       </p:sp>
@@ -4963,20 +4939,7 @@
                 <a:ea typeface="Microsoft YaHei" charset="0"/>
                 <a:cs typeface="Microsoft YaHei" charset="0"/>
               </a:rPr>
-              <a:t>引领</a:t>
-            </a:r>
-            <a:r>
-              <a:rPr lang="zh-CN" altLang="en-US" dirty="0" smtClean="0">
-                <a:solidFill>
-                  <a:schemeClr val="tx2">
-                    <a:lumMod val="75000"/>
-                  </a:schemeClr>
-                </a:solidFill>
-                <a:latin typeface="Microsoft YaHei" charset="0"/>
-                <a:ea typeface="Microsoft YaHei" charset="0"/>
-                <a:cs typeface="Microsoft YaHei" charset="0"/>
-              </a:rPr>
-              <a:t>业务发展</a:t>
+              <a:t>引领业务发展</a:t>
             </a:r>
             <a:endParaRPr lang="en-US" altLang="zh-CN" dirty="0" smtClean="0">
               <a:solidFill>
@@ -5041,16 +5004,6 @@
               </a:rPr>
               <a:t>提升企业运营效率</a:t>
             </a:r>
-            <a:endParaRPr lang="zh-CN" altLang="en-US" dirty="0" smtClean="0">
-              <a:solidFill>
-                <a:schemeClr val="tx2">
-                  <a:lumMod val="75000"/>
-                </a:schemeClr>
-              </a:solidFill>
-              <a:latin typeface="Microsoft YaHei" charset="0"/>
-              <a:ea typeface="Microsoft YaHei" charset="0"/>
-              <a:cs typeface="Microsoft YaHei" charset="0"/>
-            </a:endParaRPr>
           </a:p>
         </p:txBody>
       </p:sp>
@@ -5114,16 +5067,6 @@
               </a:rPr>
               <a:t>个人视野的开拓</a:t>
             </a:r>
-            <a:endParaRPr lang="zh-CN" altLang="en-US" dirty="0" smtClean="0">
-              <a:solidFill>
-                <a:schemeClr val="tx2">
-                  <a:lumMod val="75000"/>
-                </a:schemeClr>
-              </a:solidFill>
-              <a:latin typeface="Microsoft YaHei" charset="0"/>
-              <a:ea typeface="Microsoft YaHei" charset="0"/>
-              <a:cs typeface="Microsoft YaHei" charset="0"/>
-            </a:endParaRPr>
           </a:p>
         </p:txBody>
       </p:sp>
@@ -5263,16 +5206,6 @@
               </a:rPr>
               <a:t>人才培养基地</a:t>
             </a:r>
-            <a:endParaRPr lang="zh-CN" altLang="en-US" dirty="0" smtClean="0">
-              <a:solidFill>
-                <a:schemeClr val="tx2">
-                  <a:lumMod val="75000"/>
-                </a:schemeClr>
-              </a:solidFill>
-              <a:latin typeface="Microsoft YaHei" charset="0"/>
-              <a:ea typeface="Microsoft YaHei" charset="0"/>
-              <a:cs typeface="Microsoft YaHei" charset="0"/>
-            </a:endParaRPr>
           </a:p>
         </p:txBody>
       </p:sp>
@@ -5412,16 +5345,6 @@
               </a:rPr>
               <a:t>个人价值体现</a:t>
             </a:r>
-            <a:endParaRPr lang="zh-CN" altLang="en-US" dirty="0" smtClean="0">
-              <a:solidFill>
-                <a:schemeClr val="tx2">
-                  <a:lumMod val="75000"/>
-                </a:schemeClr>
-              </a:solidFill>
-              <a:latin typeface="Microsoft YaHei" charset="0"/>
-              <a:ea typeface="Microsoft YaHei" charset="0"/>
-              <a:cs typeface="Microsoft YaHei" charset="0"/>
-            </a:endParaRPr>
           </a:p>
         </p:txBody>
       </p:sp>
@@ -8450,19 +8373,16 @@
           <a:lstStyle/>
           <a:p>
             <a:pPr algn="ctr"/>
-            <a:r>
-              <a:rPr lang="zh-CN" altLang="en-US" sz="2000" dirty="0" smtClean="0">
-                <a:solidFill>
-                  <a:schemeClr val="tx1">
-                    <a:lumMod val="75000"/>
-                  </a:schemeClr>
-                </a:solidFill>
-                <a:latin typeface="Microsoft YaHei" charset="0"/>
-                <a:ea typeface="Microsoft YaHei" charset="0"/>
-                <a:cs typeface="Microsoft YaHei" charset="0"/>
-              </a:rPr>
-              <a:t>公司平台</a:t>
-            </a:r>
+            <a:endParaRPr lang="zh-CN" altLang="en-US" sz="2000" dirty="0" smtClean="0">
+              <a:solidFill>
+                <a:schemeClr val="tx1">
+                  <a:lumMod val="75000"/>
+                </a:schemeClr>
+              </a:solidFill>
+              <a:latin typeface="Microsoft YaHei" charset="0"/>
+              <a:ea typeface="Microsoft YaHei" charset="0"/>
+              <a:cs typeface="Microsoft YaHei" charset="0"/>
+            </a:endParaRPr>
           </a:p>
         </p:txBody>
       </p:sp>
@@ -8513,19 +8433,16 @@
           <a:lstStyle/>
           <a:p>
             <a:pPr algn="ctr"/>
-            <a:r>
-              <a:rPr lang="zh-CN" altLang="en-US" sz="2000" dirty="0" smtClean="0">
-                <a:solidFill>
-                  <a:schemeClr val="tx1">
-                    <a:lumMod val="75000"/>
-                  </a:schemeClr>
-                </a:solidFill>
-                <a:latin typeface="Microsoft YaHei" charset="0"/>
-                <a:ea typeface="Microsoft YaHei" charset="0"/>
-                <a:cs typeface="Microsoft YaHei" charset="0"/>
-              </a:rPr>
-              <a:t>薪资激励</a:t>
-            </a:r>
+            <a:endParaRPr lang="zh-CN" altLang="en-US" sz="2000" dirty="0" smtClean="0">
+              <a:solidFill>
+                <a:schemeClr val="tx1">
+                  <a:lumMod val="75000"/>
+                </a:schemeClr>
+              </a:solidFill>
+              <a:latin typeface="Microsoft YaHei" charset="0"/>
+              <a:ea typeface="Microsoft YaHei" charset="0"/>
+              <a:cs typeface="Microsoft YaHei" charset="0"/>
+            </a:endParaRPr>
           </a:p>
         </p:txBody>
       </p:sp>
@@ -8576,19 +8493,16 @@
           <a:lstStyle/>
           <a:p>
             <a:pPr algn="ctr"/>
-            <a:r>
-              <a:rPr lang="zh-CN" altLang="en-US" sz="2000" dirty="0" smtClean="0">
-                <a:solidFill>
-                  <a:schemeClr val="tx1">
-                    <a:lumMod val="75000"/>
-                  </a:schemeClr>
-                </a:solidFill>
-                <a:latin typeface="Microsoft YaHei" charset="0"/>
-                <a:ea typeface="Microsoft YaHei" charset="0"/>
-                <a:cs typeface="Microsoft YaHei" charset="0"/>
-              </a:rPr>
-              <a:t>个人成长</a:t>
-            </a:r>
+            <a:endParaRPr lang="zh-CN" altLang="en-US" sz="2000" dirty="0" smtClean="0">
+              <a:solidFill>
+                <a:schemeClr val="tx1">
+                  <a:lumMod val="75000"/>
+                </a:schemeClr>
+              </a:solidFill>
+              <a:latin typeface="Microsoft YaHei" charset="0"/>
+              <a:ea typeface="Microsoft YaHei" charset="0"/>
+              <a:cs typeface="Microsoft YaHei" charset="0"/>
+            </a:endParaRPr>
           </a:p>
         </p:txBody>
       </p:sp>
@@ -10271,7 +10185,7 @@
             <a:avLst/>
           </a:prstGeom>
           <a:solidFill>
-            <a:srgbClr val="FFFF00"/>
+            <a:srgbClr val="FF0000"/>
           </a:solidFill>
           <a:ln>
             <a:noFill/>
@@ -10329,7 +10243,7 @@
             <a:avLst/>
           </a:prstGeom>
           <a:solidFill>
-            <a:srgbClr val="FFFF00"/>
+            <a:srgbClr val="FF0000"/>
           </a:solidFill>
           <a:ln>
             <a:noFill/>
@@ -10387,7 +10301,7 @@
             <a:avLst/>
           </a:prstGeom>
           <a:solidFill>
-            <a:srgbClr val="FFFF00"/>
+            <a:srgbClr val="FF0000"/>
           </a:solidFill>
           <a:ln>
             <a:noFill/>
@@ -10445,7 +10359,7 @@
             <a:avLst/>
           </a:prstGeom>
           <a:solidFill>
-            <a:srgbClr val="FFFF00"/>
+            <a:srgbClr val="FF0000"/>
           </a:solidFill>
           <a:ln>
             <a:noFill/>
@@ -10952,6 +10866,150 @@
           </a:p>
         </p:txBody>
       </p:sp>
+      <p:sp>
+        <p:nvSpPr>
+          <p:cNvPr id="2" name="文本框 1"/>
+          <p:cNvSpPr txBox="1"/>
+          <p:nvPr/>
+        </p:nvSpPr>
+        <p:spPr>
+          <a:xfrm>
+            <a:off x="664957" y="2123661"/>
+            <a:ext cx="1440160" cy="369332"/>
+          </a:xfrm>
+          <a:prstGeom prst="rect">
+            <a:avLst/>
+          </a:prstGeom>
+          <a:noFill/>
+        </p:spPr>
+        <p:txBody>
+          <a:bodyPr wrap="square" rtlCol="0">
+            <a:spAutoFit/>
+          </a:bodyPr>
+          <a:lstStyle/>
+          <a:p>
+            <a:r>
+              <a:rPr lang="zh-CN" altLang="en-US" dirty="0" smtClean="0">
+                <a:solidFill>
+                  <a:schemeClr val="tx2">
+                    <a:lumMod val="75000"/>
+                  </a:schemeClr>
+                </a:solidFill>
+                <a:latin typeface="Microsoft YaHei" charset="0"/>
+                <a:ea typeface="Microsoft YaHei" charset="0"/>
+                <a:cs typeface="Microsoft YaHei" charset="0"/>
+              </a:rPr>
+              <a:t>个人成长</a:t>
+            </a:r>
+            <a:endParaRPr lang="zh-CN" altLang="en-US" dirty="0" smtClean="0">
+              <a:solidFill>
+                <a:schemeClr val="tx2">
+                  <a:lumMod val="75000"/>
+                </a:schemeClr>
+              </a:solidFill>
+              <a:latin typeface="Microsoft YaHei" charset="0"/>
+              <a:ea typeface="Microsoft YaHei" charset="0"/>
+              <a:cs typeface="Microsoft YaHei" charset="0"/>
+            </a:endParaRPr>
+          </a:p>
+        </p:txBody>
+      </p:sp>
+      <p:sp>
+        <p:nvSpPr>
+          <p:cNvPr id="73" name="文本框 72"/>
+          <p:cNvSpPr txBox="1"/>
+          <p:nvPr/>
+        </p:nvSpPr>
+        <p:spPr>
+          <a:xfrm>
+            <a:off x="650010" y="3390900"/>
+            <a:ext cx="1440160" cy="369332"/>
+          </a:xfrm>
+          <a:prstGeom prst="rect">
+            <a:avLst/>
+          </a:prstGeom>
+          <a:noFill/>
+        </p:spPr>
+        <p:txBody>
+          <a:bodyPr wrap="square" rtlCol="0">
+            <a:spAutoFit/>
+          </a:bodyPr>
+          <a:lstStyle/>
+          <a:p>
+            <a:r>
+              <a:rPr lang="zh-CN" altLang="en-US" dirty="0" smtClean="0">
+                <a:solidFill>
+                  <a:schemeClr val="tx2">
+                    <a:lumMod val="75000"/>
+                  </a:schemeClr>
+                </a:solidFill>
+                <a:latin typeface="Microsoft YaHei" charset="0"/>
+                <a:ea typeface="Microsoft YaHei" charset="0"/>
+                <a:cs typeface="Microsoft YaHei" charset="0"/>
+              </a:rPr>
+              <a:t>薪资激励</a:t>
+            </a:r>
+            <a:endParaRPr lang="zh-CN" altLang="en-US" dirty="0" smtClean="0">
+              <a:solidFill>
+                <a:schemeClr val="tx2">
+                  <a:lumMod val="75000"/>
+                </a:schemeClr>
+              </a:solidFill>
+              <a:latin typeface="Microsoft YaHei" charset="0"/>
+              <a:ea typeface="Microsoft YaHei" charset="0"/>
+              <a:cs typeface="Microsoft YaHei" charset="0"/>
+            </a:endParaRPr>
+          </a:p>
+        </p:txBody>
+      </p:sp>
+      <p:sp>
+        <p:nvSpPr>
+          <p:cNvPr id="74" name="文本框 73"/>
+          <p:cNvSpPr txBox="1"/>
+          <p:nvPr/>
+        </p:nvSpPr>
+        <p:spPr>
+          <a:xfrm>
+            <a:off x="650010" y="4660900"/>
+            <a:ext cx="1440160" cy="369332"/>
+          </a:xfrm>
+          <a:prstGeom prst="rect">
+            <a:avLst/>
+          </a:prstGeom>
+          <a:noFill/>
+        </p:spPr>
+        <p:txBody>
+          <a:bodyPr wrap="square" rtlCol="0">
+            <a:spAutoFit/>
+          </a:bodyPr>
+          <a:lstStyle/>
+          <a:p>
+            <a:r>
+              <a:rPr lang="zh-CN" altLang="en-US" dirty="0" smtClean="0">
+                <a:solidFill>
+                  <a:schemeClr val="tx2">
+                    <a:lumMod val="75000"/>
+                  </a:schemeClr>
+                </a:solidFill>
+                <a:latin typeface="Microsoft YaHei" charset="0"/>
+                <a:ea typeface="Microsoft YaHei" charset="0"/>
+                <a:cs typeface="Microsoft YaHei" charset="0"/>
+              </a:rPr>
+              <a:t>公司平台</a:t>
+            </a:r>
+            <a:endParaRPr lang="zh-CN" altLang="en-US" dirty="0" smtClean="0">
+              <a:solidFill>
+                <a:schemeClr val="tx2">
+                  <a:lumMod val="75000"/>
+                </a:schemeClr>
+              </a:solidFill>
+              <a:latin typeface="Microsoft YaHei" charset="0"/>
+              <a:ea typeface="Microsoft YaHei" charset="0"/>
+              <a:cs typeface="Microsoft YaHei" charset="0"/>
+            </a:endParaRPr>
+          </a:p>
+        </p:txBody>
+      </p:sp>
     </p:spTree>
     <p:extLst>
       <p:ext uri="{BB962C8B-B14F-4D97-AF65-F5344CB8AC3E}">
@@ -11157,6 +11215,111 @@
                                   </p:childTnLst>
                                 </p:cTn>
                               </p:par>
+                              <p:par>
+                                <p:cTn id="20" presetID="10" presetClass="entr" presetSubtype="0" fill="hold" grpId="0" nodeType="withEffect">
+                                  <p:stCondLst>
+                                    <p:cond delay="0"/>
+                                  </p:stCondLst>
+                                  <p:childTnLst>
+                                    <p:set>
+                                      <p:cBhvr>
+                                        <p:cTn id="21" dur="1" fill="hold">
+                                          <p:stCondLst>
+                                            <p:cond delay="0"/>
+                                          </p:stCondLst>
+                                        </p:cTn>
+                                        <p:tgtEl>
+                                          <p:spTgt spid="2"/>
+                                        </p:tgtEl>
+                                        <p:attrNameLst>
+                                          <p:attrName>style.visibility</p:attrName>
+                                        </p:attrNameLst>
+                                      </p:cBhvr>
+                                      <p:to>
+                                        <p:strVal val="visible"/>
+                                      </p:to>
+                                    </p:set>
+                                    <p:animEffect transition="in" filter="fade">
+                                      <p:cBhvr>
+                                        <p:cTn id="22" dur="500"/>
+                                        <p:tgtEl>
+                                          <p:spTgt spid="2"/>
+                                        </p:tgtEl>
+                                      </p:cBhvr>
+                                    </p:animEffect>
+                                  </p:childTnLst>
+                                </p:cTn>
+                              </p:par>
+                              <p:par>
+                                <p:cTn id="23" presetID="10" presetClass="entr" presetSubtype="0" fill="hold" grpId="0" nodeType="withEffect">
+                                  <p:stCondLst>
+                                    <p:cond delay="0"/>
+                                  </p:stCondLst>
+                                  <p:childTnLst>
+                                    <p:set>
+                                      <p:cBhvr>
+                                        <p:cTn id="24" dur="1" fill="hold">
+                                          <p:stCondLst>
+                                            <p:cond delay="0"/>
+                                          </p:stCondLst>
+                                        </p:cTn>
+                                        <p:tgtEl>
+                                          <p:spTgt spid="73"/>
+                                        </p:tgtEl>
+                                        <p:attrNameLst>
+                                          <p:attrName>style.visibility</p:attrName>
+                                        </p:attrNameLst>
+                                      </p:cBhvr>
+                                      <p:to>
+                                        <p:strVal val="visible"/>
+                                      </p:to>
+                                    </p:set>
+                                    <p:animEffect transition="in" filter="fade">
+                                      <p:cBhvr>
+                                        <p:cTn id="25" dur="500"/>
+                                        <p:tgtEl>
+                                          <p:spTgt spid="73"/>
+                                        </p:tgtEl>
+                                      </p:cBhvr>
+                                    </p:animEffect>
+                                  </p:childTnLst>
+                                </p:cTn>
+                              </p:par>
+                              <p:par>
+                                <p:cTn id="26" presetID="10" presetClass="entr" presetSubtype="0" fill="hold" grpId="0" nodeType="withEffect">
+                                  <p:stCondLst>
+                                    <p:cond delay="0"/>
+                                  </p:stCondLst>
+                                  <p:childTnLst>
+                                    <p:set>
+                                      <p:cBhvr>
+                                        <p:cTn id="27" dur="1" fill="hold">
+                                          <p:stCondLst>
+                                            <p:cond delay="0"/>
+                                          </p:stCondLst>
+                                        </p:cTn>
+                                        <p:tgtEl>
+                                          <p:spTgt spid="74"/>
+                                        </p:tgtEl>
+                                        <p:attrNameLst>
+                                          <p:attrName>style.visibility</p:attrName>
+                                        </p:attrNameLst>
+                                      </p:cBhvr>
+                                      <p:to>
+                                        <p:strVal val="visible"/>
+                                      </p:to>
+                                    </p:set>
+                                    <p:animEffect transition="in" filter="fade">
+                                      <p:cBhvr>
+                                        <p:cTn id="28" dur="500"/>
+                                        <p:tgtEl>
+                                          <p:spTgt spid="74"/>
+                                        </p:tgtEl>
+                                      </p:cBhvr>
+                                    </p:animEffect>
+                                  </p:childTnLst>
+                                </p:cTn>
+                              </p:par>
                             </p:childTnLst>
                           </p:cTn>
                         </p:par>
@@ -11164,26 +11327,26 @@
                     </p:cTn>
                   </p:par>
                   <p:par>
-                    <p:cTn id="20" fill="hold">
+                    <p:cTn id="29" fill="hold">
                       <p:stCondLst>
                         <p:cond delay="indefinite"/>
                       </p:stCondLst>
                       <p:childTnLst>
                         <p:par>
-                          <p:cTn id="21" fill="hold">
+                          <p:cTn id="30" fill="hold">
                             <p:stCondLst>
                               <p:cond delay="0"/>
                             </p:stCondLst>
                             <p:childTnLst>
                               <p:par>
-                                <p:cTn id="22" presetID="42" presetClass="entr" presetSubtype="0" fill="hold" nodeType="clickEffect">
+                                <p:cTn id="31" presetID="42" presetClass="entr" presetSubtype="0" fill="hold" nodeType="clickEffect">
                                   <p:stCondLst>
                                     <p:cond delay="0"/>
                                   </p:stCondLst>
                                   <p:childTnLst>
                                     <p:set>
                                       <p:cBhvr>
-                                        <p:cTn id="23" dur="1" fill="hold">
+                                        <p:cTn id="32" dur="1" fill="hold">
                                           <p:stCondLst>
                                             <p:cond delay="0"/>
                                           </p:stCondLst>
@@ -11201,7 +11364,7 @@
                                     </p:set>
                                     <p:animEffect transition="in" filter="fade">
                                       <p:cBhvr>
-                                        <p:cTn id="24" dur="1000"/>
+                                        <p:cTn id="33" dur="1000"/>
                                         <p:tgtEl>
                                           <p:spTgt spid="33"/>
                                         </p:tgtEl>
@@ -11209,7 +11372,7 @@
                                     </p:animEffect>
                                     <p:anim calcmode="lin" valueType="num">
                                       <p:cBhvr>
-                                        <p:cTn id="25" dur="1000" fill="hold"/>
+                                        <p:cTn id="34" dur="1000" fill="hold"/>
                                         <p:tgtEl>
                                           <p:spTgt spid="33"/>
                                         </p:tgtEl>
@@ -11232,7 +11395,7 @@
                                     </p:anim>
                                     <p:anim calcmode="lin" valueType="num">
                                       <p:cBhvr>
-                                        <p:cTn id="26" dur="1000" fill="hold"/>
+                                        <p:cTn id="35" dur="1000" fill="hold"/>
                                         <p:tgtEl>
                                           <p:spTgt spid="33"/>
                                         </p:tgtEl>
@@ -11257,14 +11420,14 @@
                                 </p:cTn>
                               </p:par>
                               <p:par>
-                                <p:cTn id="27" presetID="42" presetClass="entr" presetSubtype="0" fill="hold" grpId="0" nodeType="withEffect">
+                                <p:cTn id="36" presetID="42" presetClass="entr" presetSubtype="0" fill="hold" grpId="0" nodeType="withEffect">
                                   <p:stCondLst>
                                     <p:cond delay="0"/>
                                   </p:stCondLst>
                                   <p:childTnLst>
                                     <p:set>
                                       <p:cBhvr>
-                                        <p:cTn id="28" dur="1" fill="hold">
+                                        <p:cTn id="37" dur="1" fill="hold">
                                           <p:stCondLst>
                                             <p:cond delay="0"/>
                                           </p:stCondLst>
@@ -11282,7 +11445,7 @@
                                     </p:set>
                                     <p:animEffect transition="in" filter="fade">
                                       <p:cBhvr>
-                                        <p:cTn id="29" dur="1000"/>
+                                        <p:cTn id="38" dur="1000"/>
                                         <p:tgtEl>
                                           <p:spTgt spid="37"/>
                                         </p:tgtEl>
@@ -11290,7 +11453,7 @@
                                     </p:animEffect>
                                     <p:anim calcmode="lin" valueType="num">
                                       <p:cBhvr>
-                                        <p:cTn id="30" dur="1000" fill="hold"/>
+                                        <p:cTn id="39" dur="1000" fill="hold"/>
                                         <p:tgtEl>
                                           <p:spTgt spid="37"/>
                                         </p:tgtEl>
@@ -11313,7 +11476,7 @@
                                     </p:anim>
                                     <p:anim calcmode="lin" valueType="num">
                                       <p:cBhvr>
-                                        <p:cTn id="31" dur="1000" fill="hold"/>
+                                        <p:cTn id="40" dur="1000" fill="hold"/>
                                         <p:tgtEl>
                                           <p:spTgt spid="37"/>
                                         </p:tgtEl>
@@ -11338,14 +11501,14 @@
                                 </p:cTn>
                               </p:par>
                               <p:par>
-                                <p:cTn id="32" presetID="42" presetClass="entr" presetSubtype="0" fill="hold" grpId="0" nodeType="withEffect">
+                                <p:cTn id="41" presetID="42" presetClass="entr" presetSubtype="0" fill="hold" grpId="0" nodeType="withEffect">
                                   <p:stCondLst>
                                     <p:cond delay="0"/>
                                   </p:stCondLst>
                                   <p:childTnLst>
                                     <p:set>
                                       <p:cBhvr>
-                                        <p:cTn id="33" dur="1" fill="hold">
+                                        <p:cTn id="42" dur="1" fill="hold">
                                           <p:stCondLst>
                                             <p:cond delay="0"/>
                                           </p:stCondLst>
@@ -11363,7 +11526,7 @@
                                     </p:set>
                                     <p:animEffect transition="in" filter="fade">
                                       <p:cBhvr>
-                                        <p:cTn id="34" dur="1000"/>
+                                        <p:cTn id="43" dur="1000"/>
                                         <p:tgtEl>
                                           <p:spTgt spid="40"/>
                                         </p:tgtEl>
@@ -11371,7 +11534,7 @@
                                     </p:animEffect>
                                     <p:anim calcmode="lin" valueType="num">
                                       <p:cBhvr>
-                                        <p:cTn id="35" dur="1000" fill="hold"/>
+                                        <p:cTn id="44" dur="1000" fill="hold"/>
                                         <p:tgtEl>
                                           <p:spTgt spid="40"/>
                                         </p:tgtEl>
@@ -11394,7 +11557,7 @@
                                     </p:anim>
                                     <p:anim calcmode="lin" valueType="num">
                                       <p:cBhvr>
-                                        <p:cTn id="36" dur="1000" fill="hold"/>
+                                        <p:cTn id="45" dur="1000" fill="hold"/>
                                         <p:tgtEl>
                                           <p:spTgt spid="40"/>
                                         </p:tgtEl>
@@ -11419,14 +11582,14 @@
                                 </p:cTn>
                               </p:par>
                               <p:par>
-                                <p:cTn id="37" presetID="42" presetClass="entr" presetSubtype="0" fill="hold" grpId="0" nodeType="withEffect">
+                                <p:cTn id="46" presetID="42" presetClass="entr" presetSubtype="0" fill="hold" grpId="0" nodeType="withEffect">
                                   <p:stCondLst>
                                     <p:cond delay="0"/>
                                   </p:stCondLst>
                                   <p:childTnLst>
                                     <p:set>
                                       <p:cBhvr>
-                                        <p:cTn id="38" dur="1" fill="hold">
+                                        <p:cTn id="47" dur="1" fill="hold">
                                           <p:stCondLst>
                                             <p:cond delay="0"/>
                                           </p:stCondLst>
@@ -11444,7 +11607,7 @@
                                     </p:set>
                                     <p:animEffect transition="in" filter="fade">
                                       <p:cBhvr>
-                                        <p:cTn id="39" dur="1000"/>
+                                        <p:cTn id="48" dur="1000"/>
                                         <p:tgtEl>
                                           <p:spTgt spid="41"/>
                                         </p:tgtEl>
@@ -11452,7 +11615,7 @@
                                     </p:animEffect>
                                     <p:anim calcmode="lin" valueType="num">
                                       <p:cBhvr>
-                                        <p:cTn id="40" dur="1000" fill="hold"/>
+                                        <p:cTn id="49" dur="1000" fill="hold"/>
                                         <p:tgtEl>
                                           <p:spTgt spid="41"/>
                                         </p:tgtEl>
@@ -11475,7 +11638,7 @@
                                     </p:anim>
                                     <p:anim calcmode="lin" valueType="num">
                                       <p:cBhvr>
-                                        <p:cTn id="41" dur="1000" fill="hold"/>
+                                        <p:cTn id="50" dur="1000" fill="hold"/>
                                         <p:tgtEl>
                                           <p:spTgt spid="41"/>
                                         </p:tgtEl>
@@ -11500,14 +11663,14 @@
                                 </p:cTn>
                               </p:par>
                               <p:par>
-                                <p:cTn id="42" presetID="42" presetClass="entr" presetSubtype="0" fill="hold" grpId="0" nodeType="withEffect">
+                                <p:cTn id="51" presetID="42" presetClass="entr" presetSubtype="0" fill="hold" grpId="0" nodeType="withEffect">
                                   <p:stCondLst>
                                     <p:cond delay="0"/>
                                   </p:stCondLst>
                                   <p:childTnLst>
                                     <p:set>
                                       <p:cBhvr>
-                                        <p:cTn id="43" dur="1" fill="hold">
+                                        <p:cTn id="52" dur="1" fill="hold">
                                           <p:stCondLst>
                                             <p:cond delay="0"/>
                                           </p:stCondLst>
@@ -11525,7 +11688,7 @@
                                     </p:set>
                                     <p:animEffect transition="in" filter="fade">
                                       <p:cBhvr>
-                                        <p:cTn id="44" dur="1000"/>
+                                        <p:cTn id="53" dur="1000"/>
                                         <p:tgtEl>
                                           <p:spTgt spid="42"/>
                                         </p:tgtEl>
@@ -11533,7 +11696,7 @@
                                     </p:animEffect>
                                     <p:anim calcmode="lin" valueType="num">
                                       <p:cBhvr>
-                                        <p:cTn id="45" dur="1000" fill="hold"/>
+                                        <p:cTn id="54" dur="1000" fill="hold"/>
                                         <p:tgtEl>
                                           <p:spTgt spid="42"/>
                                         </p:tgtEl>
@@ -11556,7 +11719,7 @@
                                     </p:anim>
                                     <p:anim calcmode="lin" valueType="num">
                                       <p:cBhvr>
-                                        <p:cTn id="46" dur="1000" fill="hold"/>
+                                        <p:cTn id="55" dur="1000" fill="hold"/>
                                         <p:tgtEl>
                                           <p:spTgt spid="42"/>
                                         </p:tgtEl>
@@ -11581,14 +11744,14 @@
                                 </p:cTn>
                               </p:par>
                               <p:par>
-                                <p:cTn id="47" presetID="42" presetClass="entr" presetSubtype="0" fill="hold" grpId="0" nodeType="withEffect">
+                                <p:cTn id="56" presetID="42" presetClass="entr" presetSubtype="0" fill="hold" grpId="0" nodeType="withEffect">
                                   <p:stCondLst>
                                     <p:cond delay="0"/>
                                   </p:stCondLst>
                                   <p:childTnLst>
                                     <p:set>
                                       <p:cBhvr>
-                                        <p:cTn id="48" dur="1" fill="hold">
+                                        <p:cTn id="57" dur="1" fill="hold">
                                           <p:stCondLst>
                                             <p:cond delay="0"/>
                                           </p:stCondLst>
@@ -11606,7 +11769,7 @@
                                     </p:set>
                                     <p:animEffect transition="in" filter="fade">
                                       <p:cBhvr>
-                                        <p:cTn id="49" dur="1000"/>
+                                        <p:cTn id="58" dur="1000"/>
                                         <p:tgtEl>
                                           <p:spTgt spid="43"/>
                                         </p:tgtEl>
@@ -11614,7 +11777,7 @@
                                     </p:animEffect>
                                     <p:anim calcmode="lin" valueType="num">
                                       <p:cBhvr>
-                                        <p:cTn id="50" dur="1000" fill="hold"/>
+                                        <p:cTn id="59" dur="1000" fill="hold"/>
                                         <p:tgtEl>
                                           <p:spTgt spid="43"/>
                                         </p:tgtEl>
@@ -11637,7 +11800,7 @@
                                     </p:anim>
                                     <p:anim calcmode="lin" valueType="num">
                                       <p:cBhvr>
-                                        <p:cTn id="51" dur="1000" fill="hold"/>
+                                        <p:cTn id="60" dur="1000" fill="hold"/>
                                         <p:tgtEl>
                                           <p:spTgt spid="43"/>
                                         </p:tgtEl>
@@ -11662,14 +11825,14 @@
                                 </p:cTn>
                               </p:par>
                               <p:par>
-                                <p:cTn id="52" presetID="42" presetClass="entr" presetSubtype="0" fill="hold" grpId="0" nodeType="withEffect">
+                                <p:cTn id="61" presetID="42" presetClass="entr" presetSubtype="0" fill="hold" grpId="0" nodeType="withEffect">
                                   <p:stCondLst>
                                     <p:cond delay="0"/>
                                   </p:stCondLst>
                                   <p:childTnLst>
                                     <p:set>
                                       <p:cBhvr>
-                                        <p:cTn id="53" dur="1" fill="hold">
+                                        <p:cTn id="62" dur="1" fill="hold">
                                           <p:stCondLst>
                                             <p:cond delay="0"/>
                                           </p:stCondLst>
@@ -11687,7 +11850,7 @@
                                     </p:set>
                                     <p:animEffect transition="in" filter="fade">
                                       <p:cBhvr>
-                                        <p:cTn id="54" dur="1000"/>
+                                        <p:cTn id="63" dur="1000"/>
                                         <p:tgtEl>
                                           <p:spTgt spid="44"/>
                                         </p:tgtEl>
@@ -11695,7 +11858,7 @@
                                     </p:animEffect>
                                     <p:anim calcmode="lin" valueType="num">
                                       <p:cBhvr>
-                                        <p:cTn id="55" dur="1000" fill="hold"/>
+                                        <p:cTn id="64" dur="1000" fill="hold"/>
                                         <p:tgtEl>
                                           <p:spTgt spid="44"/>
                                         </p:tgtEl>
@@ -11718,7 +11881,7 @@
                                     </p:anim>
                                     <p:anim calcmode="lin" valueType="num">
                                       <p:cBhvr>
-                                        <p:cTn id="56" dur="1000" fill="hold"/>
+                                        <p:cTn id="65" dur="1000" fill="hold"/>
                                         <p:tgtEl>
                                           <p:spTgt spid="44"/>
                                         </p:tgtEl>
@@ -11743,14 +11906,14 @@
                                 </p:cTn>
                               </p:par>
                               <p:par>
-                                <p:cTn id="57" presetID="42" presetClass="entr" presetSubtype="0" fill="hold" grpId="0" nodeType="withEffect">
+                                <p:cTn id="66" presetID="42" presetClass="entr" presetSubtype="0" fill="hold" grpId="0" nodeType="withEffect">
                                   <p:stCondLst>
                                     <p:cond delay="0"/>
                                   </p:stCondLst>
                                   <p:childTnLst>
                                     <p:set>
                                       <p:cBhvr>
-                                        <p:cTn id="58" dur="1" fill="hold">
+                                        <p:cTn id="67" dur="1" fill="hold">
                                           <p:stCondLst>
                                             <p:cond delay="0"/>
                                           </p:stCondLst>
@@ -11768,7 +11931,7 @@
                                     </p:set>
                                     <p:animEffect transition="in" filter="fade">
                                       <p:cBhvr>
-                                        <p:cTn id="59" dur="1000"/>
+                                        <p:cTn id="68" dur="1000"/>
                                         <p:tgtEl>
                                           <p:spTgt spid="45"/>
                                         </p:tgtEl>
@@ -11776,7 +11939,7 @@
                                     </p:animEffect>
                                     <p:anim calcmode="lin" valueType="num">
                                       <p:cBhvr>
-                                        <p:cTn id="60" dur="1000" fill="hold"/>
+                                        <p:cTn id="69" dur="1000" fill="hold"/>
                                         <p:tgtEl>
                                           <p:spTgt spid="45"/>
                                         </p:tgtEl>
@@ -11799,7 +11962,7 @@
                                     </p:anim>
                                     <p:anim calcmode="lin" valueType="num">
                                       <p:cBhvr>
-                                        <p:cTn id="61" dur="1000" fill="hold"/>
+                                        <p:cTn id="70" dur="1000" fill="hold"/>
                                         <p:tgtEl>
                                           <p:spTgt spid="45"/>
                                         </p:tgtEl>
@@ -11824,14 +11987,14 @@
                                 </p:cTn>
                               </p:par>
                               <p:par>
-                                <p:cTn id="62" presetID="42" presetClass="entr" presetSubtype="0" fill="hold" grpId="0" nodeType="withEffect">
+                                <p:cTn id="71" presetID="42" presetClass="entr" presetSubtype="0" fill="hold" grpId="0" nodeType="withEffect">
                                   <p:stCondLst>
                                     <p:cond delay="0"/>
                                   </p:stCondLst>
                                   <p:childTnLst>
                                     <p:set>
                                       <p:cBhvr>
-                                        <p:cTn id="63" dur="1" fill="hold">
+                                        <p:cTn id="72" dur="1" fill="hold">
                                           <p:stCondLst>
                                             <p:cond delay="0"/>
                                           </p:stCondLst>
@@ -11849,7 +12012,7 @@
                                     </p:set>
                                     <p:animEffect transition="in" filter="fade">
                                       <p:cBhvr>
-                                        <p:cTn id="64" dur="1000"/>
+                                        <p:cTn id="73" dur="1000"/>
                                         <p:tgtEl>
                                           <p:spTgt spid="46"/>
                                         </p:tgtEl>
@@ -11857,7 +12020,7 @@
                                     </p:animEffect>
                                     <p:anim calcmode="lin" valueType="num">
                                       <p:cBhvr>
-                                        <p:cTn id="65" dur="1000" fill="hold"/>
+                                        <p:cTn id="74" dur="1000" fill="hold"/>
                                         <p:tgtEl>
                                           <p:spTgt spid="46"/>
                                         </p:tgtEl>
@@ -11880,7 +12043,7 @@
                                     </p:anim>
                                     <p:anim calcmode="lin" valueType="num">
                                       <p:cBhvr>
-                                        <p:cTn id="66" dur="1000" fill="hold"/>
+                                        <p:cTn id="75" dur="1000" fill="hold"/>
                                         <p:tgtEl>
                                           <p:spTgt spid="46"/>
                                         </p:tgtEl>
@@ -11905,14 +12068,14 @@
                                 </p:cTn>
                               </p:par>
                               <p:par>
-                                <p:cTn id="67" presetID="42" presetClass="entr" presetSubtype="0" fill="hold" grpId="0" nodeType="withEffect">
+                                <p:cTn id="76" presetID="42" presetClass="entr" presetSubtype="0" fill="hold" grpId="0" nodeType="withEffect">
                                   <p:stCondLst>
                                     <p:cond delay="0"/>
                                   </p:stCondLst>
                                   <p:childTnLst>
                                     <p:set>
                                       <p:cBhvr>
-                                        <p:cTn id="68" dur="1" fill="hold">
+                                        <p:cTn id="77" dur="1" fill="hold">
                                           <p:stCondLst>
                                             <p:cond delay="0"/>
                                           </p:stCondLst>
@@ -11930,7 +12093,7 @@
                                     </p:set>
                                     <p:animEffect transition="in" filter="fade">
                                       <p:cBhvr>
-                                        <p:cTn id="69" dur="1000"/>
+                                        <p:cTn id="78" dur="1000"/>
                                         <p:tgtEl>
                                           <p:spTgt spid="47"/>
                                         </p:tgtEl>
@@ -11938,7 +12101,7 @@
                                     </p:animEffect>
                                     <p:anim calcmode="lin" valueType="num">
                                       <p:cBhvr>
-                                        <p:cTn id="70" dur="1000" fill="hold"/>
+                                        <p:cTn id="79" dur="1000" fill="hold"/>
                                         <p:tgtEl>
                                           <p:spTgt spid="47"/>
                                         </p:tgtEl>
@@ -11961,7 +12124,7 @@
                                     </p:anim>
                                     <p:anim calcmode="lin" valueType="num">
                                       <p:cBhvr>
-                                        <p:cTn id="71" dur="1000" fill="hold"/>
+                                        <p:cTn id="80" dur="1000" fill="hold"/>
                                         <p:tgtEl>
                                           <p:spTgt spid="47"/>
                                         </p:tgtEl>
@@ -11986,14 +12149,14 @@
                                 </p:cTn>
                               </p:par>
                               <p:par>
-                                <p:cTn id="72" presetID="42" presetClass="entr" presetSubtype="0" fill="hold" grpId="0" nodeType="withEffect">
+                                <p:cTn id="81" presetID="42" presetClass="entr" presetSubtype="0" fill="hold" grpId="0" nodeType="withEffect">
                                   <p:stCondLst>
                                     <p:cond delay="0"/>
                                   </p:stCondLst>
                                   <p:childTnLst>
                                     <p:set>
                                       <p:cBhvr>
-                                        <p:cTn id="73" dur="1" fill="hold">
+                                        <p:cTn id="82" dur="1" fill="hold">
                                           <p:stCondLst>
                                             <p:cond delay="0"/>
                                           </p:stCondLst>
@@ -12011,7 +12174,7 @@
                                     </p:set>
                                     <p:animEffect transition="in" filter="fade">
                                       <p:cBhvr>
-                                        <p:cTn id="74" dur="1000"/>
+                                        <p:cTn id="83" dur="1000"/>
                                         <p:tgtEl>
                                           <p:spTgt spid="48"/>
                                         </p:tgtEl>
@@ -12019,7 +12182,7 @@
                                     </p:animEffect>
                                     <p:anim calcmode="lin" valueType="num">
                                       <p:cBhvr>
-                                        <p:cTn id="75" dur="1000" fill="hold"/>
+                                        <p:cTn id="84" dur="1000" fill="hold"/>
                                         <p:tgtEl>
                                           <p:spTgt spid="48"/>
                                         </p:tgtEl>
@@ -12042,7 +12205,7 @@
                                     </p:anim>
                                     <p:anim calcmode="lin" valueType="num">
                                       <p:cBhvr>
-                                        <p:cTn id="76" dur="1000" fill="hold"/>
+                                        <p:cTn id="85" dur="1000" fill="hold"/>
                                         <p:tgtEl>
                                           <p:spTgt spid="48"/>
                                         </p:tgtEl>
@@ -12073,26 +12236,26 @@
                     </p:cTn>
                   </p:par>
                   <p:par>
-                    <p:cTn id="77" fill="hold">
+                    <p:cTn id="86" fill="hold">
                       <p:stCondLst>
                         <p:cond delay="indefinite"/>
                       </p:stCondLst>
                       <p:childTnLst>
                         <p:par>
-                          <p:cTn id="78" fill="hold">
+                          <p:cTn id="87" fill="hold">
                             <p:stCondLst>
                               <p:cond delay="0"/>
                             </p:stCondLst>
                             <p:childTnLst>
                               <p:par>
-                                <p:cTn id="79" presetID="42" presetClass="entr" presetSubtype="0" fill="hold" nodeType="clickEffect">
+                                <p:cTn id="88" presetID="42" presetClass="entr" presetSubtype="0" fill="hold" nodeType="clickEffect">
                                   <p:stCondLst>
                                     <p:cond delay="0"/>
                                   </p:stCondLst>
                                   <p:childTnLst>
                                     <p:set>
                                       <p:cBhvr>
-                                        <p:cTn id="80" dur="1" fill="hold">
+                                        <p:cTn id="89" dur="1" fill="hold">
                                           <p:stCondLst>
                                             <p:cond delay="0"/>
                                           </p:stCondLst>
@@ -12110,7 +12273,7 @@
                                     </p:set>
                                     <p:animEffect transition="in" filter="fade">
                                       <p:cBhvr>
-                                        <p:cTn id="81" dur="1000"/>
+                                        <p:cTn id="90" dur="1000"/>
                                         <p:tgtEl>
                                           <p:spTgt spid="34"/>
                                         </p:tgtEl>
@@ -12118,7 +12281,7 @@
                                     </p:animEffect>
                                     <p:anim calcmode="lin" valueType="num">
                                       <p:cBhvr>
-                                        <p:cTn id="82" dur="1000" fill="hold"/>
+                                        <p:cTn id="91" dur="1000" fill="hold"/>
                                         <p:tgtEl>
                                           <p:spTgt spid="34"/>
                                         </p:tgtEl>
@@ -12141,7 +12304,7 @@
                                     </p:anim>
                                     <p:anim calcmode="lin" valueType="num">
                                       <p:cBhvr>
-                                        <p:cTn id="83" dur="1000" fill="hold"/>
+                                        <p:cTn id="92" dur="1000" fill="hold"/>
                                         <p:tgtEl>
                                           <p:spTgt spid="34"/>
                                         </p:tgtEl>
@@ -12166,14 +12329,14 @@
                                 </p:cTn>
                               </p:par>
                               <p:par>
-                                <p:cTn id="84" presetID="42" presetClass="entr" presetSubtype="0" fill="hold" grpId="0" nodeType="withEffect">
+                                <p:cTn id="93" presetID="42" presetClass="entr" presetSubtype="0" fill="hold" grpId="0" nodeType="withEffect">
                                   <p:stCondLst>
                                     <p:cond delay="0"/>
                                   </p:stCondLst>
                                   <p:childTnLst>
                                     <p:set>
                                       <p:cBhvr>
-                                        <p:cTn id="85" dur="1" fill="hold">
+                                        <p:cTn id="94" dur="1" fill="hold">
                                           <p:stCondLst>
                                             <p:cond delay="0"/>
                                           </p:stCondLst>
@@ -12191,7 +12354,7 @@
                                     </p:set>
                                     <p:animEffect transition="in" filter="fade">
                                       <p:cBhvr>
-                                        <p:cTn id="86" dur="1000"/>
+                                        <p:cTn id="95" dur="1000"/>
                                         <p:tgtEl>
                                           <p:spTgt spid="38"/>
                                         </p:tgtEl>
@@ -12199,7 +12362,7 @@
                                     </p:animEffect>
                                     <p:anim calcmode="lin" valueType="num">
                                       <p:cBhvr>
-                                        <p:cTn id="87" dur="1000" fill="hold"/>
+                                        <p:cTn id="96" dur="1000" fill="hold"/>
                                         <p:tgtEl>
                                           <p:spTgt spid="38"/>
                                         </p:tgtEl>
@@ -12222,7 +12385,7 @@
                                     </p:anim>
                                     <p:anim calcmode="lin" valueType="num">
                                       <p:cBhvr>
-                                        <p:cTn id="88" dur="1000" fill="hold"/>
+                                        <p:cTn id="97" dur="1000" fill="hold"/>
                                         <p:tgtEl>
                                           <p:spTgt spid="38"/>
                                         </p:tgtEl>
@@ -12247,14 +12410,14 @@
                                 </p:cTn>
                               </p:par>
                               <p:par>
-                                <p:cTn id="89" presetID="42" presetClass="entr" presetSubtype="0" fill="hold" grpId="0" nodeType="withEffect">
+                                <p:cTn id="98" presetID="42" presetClass="entr" presetSubtype="0" fill="hold" grpId="0" nodeType="withEffect">
                                   <p:stCondLst>
                                     <p:cond delay="0"/>
                                   </p:stCondLst>
                                   <p:childTnLst>
                                     <p:set>
                                       <p:cBhvr>
-                                        <p:cTn id="90" dur="1" fill="hold">
+                                        <p:cTn id="99" dur="1" fill="hold">
                                           <p:stCondLst>
                                             <p:cond delay="0"/>
                                           </p:stCondLst>
@@ -12272,7 +12435,7 @@
                                     </p:set>
                                     <p:animEffect transition="in" filter="fade">
                                       <p:cBhvr>
-                                        <p:cTn id="91" dur="1000"/>
+                                        <p:cTn id="100" dur="1000"/>
                                         <p:tgtEl>
                                           <p:spTgt spid="49"/>
                                         </p:tgtEl>
@@ -12280,7 +12443,7 @@
                                     </p:animEffect>
                                     <p:anim calcmode="lin" valueType="num">
                                       <p:cBhvr>
-                                        <p:cTn id="92" dur="1000" fill="hold"/>
+                                        <p:cTn id="101" dur="1000" fill="hold"/>
                                         <p:tgtEl>
                                           <p:spTgt spid="49"/>
                                         </p:tgtEl>
@@ -12303,7 +12466,7 @@
                                     </p:anim>
                                     <p:anim calcmode="lin" valueType="num">
                                       <p:cBhvr>
-                                        <p:cTn id="93" dur="1000" fill="hold"/>
+                                        <p:cTn id="102" dur="1000" fill="hold"/>
                                         <p:tgtEl>
                                           <p:spTgt spid="49"/>
                                         </p:tgtEl>
@@ -12328,14 +12491,14 @@
                                 </p:cTn>
                               </p:par>
                               <p:par>
-                                <p:cTn id="94" presetID="42" presetClass="entr" presetSubtype="0" fill="hold" grpId="0" nodeType="withEffect">
+                                <p:cTn id="103" presetID="42" presetClass="entr" presetSubtype="0" fill="hold" grpId="0" nodeType="withEffect">
                                   <p:stCondLst>
                                     <p:cond delay="0"/>
                                   </p:stCondLst>
                                   <p:childTnLst>
                                     <p:set>
                                       <p:cBhvr>
-                                        <p:cTn id="95" dur="1" fill="hold">
+                                        <p:cTn id="104" dur="1" fill="hold">
                                           <p:stCondLst>
                                             <p:cond delay="0"/>
                                           </p:stCondLst>
@@ -12353,7 +12516,7 @@
                                     </p:set>
                                     <p:animEffect transition="in" filter="fade">
                                       <p:cBhvr>
-                                        <p:cTn id="96" dur="1000"/>
+                                        <p:cTn id="105" dur="1000"/>
                                         <p:tgtEl>
                                           <p:spTgt spid="50"/>
                                         </p:tgtEl>
@@ -12361,7 +12524,7 @@
                                     </p:animEffect>
                                     <p:anim calcmode="lin" valueType="num">
                                       <p:cBhvr>
-                                        <p:cTn id="97" dur="1000" fill="hold"/>
+                                        <p:cTn id="106" dur="1000" fill="hold"/>
                                         <p:tgtEl>
                                           <p:spTgt spid="50"/>
                                         </p:tgtEl>
@@ -12384,7 +12547,7 @@
                                     </p:anim>
                                     <p:anim calcmode="lin" valueType="num">
                                       <p:cBhvr>
-                                        <p:cTn id="98" dur="1000" fill="hold"/>
+                                        <p:cTn id="107" dur="1000" fill="hold"/>
                                         <p:tgtEl>
                                           <p:spTgt spid="50"/>
                                         </p:tgtEl>
@@ -12409,14 +12572,14 @@
                                 </p:cTn>
                               </p:par>
                               <p:par>
-                                <p:cTn id="99" presetID="42" presetClass="entr" presetSubtype="0" fill="hold" grpId="0" nodeType="withEffect">
+                                <p:cTn id="108" presetID="42" presetClass="entr" presetSubtype="0" fill="hold" grpId="0" nodeType="withEffect">
                                   <p:stCondLst>
                                     <p:cond delay="0"/>
                                   </p:stCondLst>
                                   <p:childTnLst>
                                     <p:set>
                                       <p:cBhvr>
-                                        <p:cTn id="100" dur="1" fill="hold">
+                                        <p:cTn id="109" dur="1" fill="hold">
                                           <p:stCondLst>
                                             <p:cond delay="0"/>
                                           </p:stCondLst>
@@ -12434,7 +12597,7 @@
                                     </p:set>
                                     <p:animEffect transition="in" filter="fade">
                                       <p:cBhvr>
-                                        <p:cTn id="101" dur="1000"/>
+                                        <p:cTn id="110" dur="1000"/>
                                         <p:tgtEl>
                                           <p:spTgt spid="51"/>
                                         </p:tgtEl>
@@ -12442,7 +12605,7 @@
                                     </p:animEffect>
                                     <p:anim calcmode="lin" valueType="num">
                                       <p:cBhvr>
-                                        <p:cTn id="102" dur="1000" fill="hold"/>
+                                        <p:cTn id="111" dur="1000" fill="hold"/>
                                         <p:tgtEl>
                                           <p:spTgt spid="51"/>
                                         </p:tgtEl>
@@ -12465,7 +12628,7 @@
                                     </p:anim>
                                     <p:anim calcmode="lin" valueType="num">
                                       <p:cBhvr>
-                                        <p:cTn id="103" dur="1000" fill="hold"/>
+                                        <p:cTn id="112" dur="1000" fill="hold"/>
                                         <p:tgtEl>
                                           <p:spTgt spid="51"/>
                                         </p:tgtEl>
@@ -12490,14 +12653,14 @@
                                 </p:cTn>
                               </p:par>
                               <p:par>
-                                <p:cTn id="104" presetID="42" presetClass="entr" presetSubtype="0" fill="hold" grpId="0" nodeType="withEffect">
+                                <p:cTn id="113" presetID="42" presetClass="entr" presetSubtype="0" fill="hold" grpId="0" nodeType="withEffect">
                                   <p:stCondLst>
                                     <p:cond delay="0"/>
                                   </p:stCondLst>
                                   <p:childTnLst>
                                     <p:set>
                                       <p:cBhvr>
-                                        <p:cTn id="105" dur="1" fill="hold">
+                                        <p:cTn id="114" dur="1" fill="hold">
                                           <p:stCondLst>
                                             <p:cond delay="0"/>
                                           </p:stCondLst>
@@ -12515,7 +12678,7 @@
                                     </p:set>
                                     <p:animEffect transition="in" filter="fade">
                                       <p:cBhvr>
-                                        <p:cTn id="106" dur="1000"/>
+                                        <p:cTn id="115" dur="1000"/>
                                         <p:tgtEl>
                                           <p:spTgt spid="52"/>
                                         </p:tgtEl>
@@ -12523,7 +12686,7 @@
                                     </p:animEffect>
                                     <p:anim calcmode="lin" valueType="num">
                                       <p:cBhvr>
-                                        <p:cTn id="107" dur="1000" fill="hold"/>
+                                        <p:cTn id="116" dur="1000" fill="hold"/>
                                         <p:tgtEl>
                                           <p:spTgt spid="52"/>
                                         </p:tgtEl>
@@ -12546,7 +12709,7 @@
                                     </p:anim>
                                     <p:anim calcmode="lin" valueType="num">
                                       <p:cBhvr>
-                                        <p:cTn id="108" dur="1000" fill="hold"/>
+                                        <p:cTn id="117" dur="1000" fill="hold"/>
                                         <p:tgtEl>
                                           <p:spTgt spid="52"/>
                                         </p:tgtEl>
@@ -12571,14 +12734,14 @@
                                 </p:cTn>
                               </p:par>
                               <p:par>
-                                <p:cTn id="109" presetID="42" presetClass="entr" presetSubtype="0" fill="hold" grpId="0" nodeType="withEffect">
+                                <p:cTn id="118" presetID="42" presetClass="entr" presetSubtype="0" fill="hold" grpId="0" nodeType="withEffect">
                                   <p:stCondLst>
                                     <p:cond delay="0"/>
                                   </p:stCondLst>
                                   <p:childTnLst>
                                     <p:set>
                                       <p:cBhvr>
-                                        <p:cTn id="110" dur="1" fill="hold">
+                                        <p:cTn id="119" dur="1" fill="hold">
                                           <p:stCondLst>
                                             <p:cond delay="0"/>
                                           </p:stCondLst>
@@ -12596,7 +12759,7 @@
                                     </p:set>
                                     <p:animEffect transition="in" filter="fade">
                                       <p:cBhvr>
-                                        <p:cTn id="111" dur="1000"/>
+                                        <p:cTn id="120" dur="1000"/>
                                         <p:tgtEl>
                                           <p:spTgt spid="53"/>
                                         </p:tgtEl>
@@ -12604,7 +12767,7 @@
                                     </p:animEffect>
                                     <p:anim calcmode="lin" valueType="num">
                                       <p:cBhvr>
-                                        <p:cTn id="112" dur="1000" fill="hold"/>
+                                        <p:cTn id="121" dur="1000" fill="hold"/>
                                         <p:tgtEl>
                                           <p:spTgt spid="53"/>
                                         </p:tgtEl>
@@ -12627,7 +12790,7 @@
                                     </p:anim>
                                     <p:anim calcmode="lin" valueType="num">
                                       <p:cBhvr>
-                                        <p:cTn id="113" dur="1000" fill="hold"/>
+                                        <p:cTn id="122" dur="1000" fill="hold"/>
                                         <p:tgtEl>
                                           <p:spTgt spid="53"/>
                                         </p:tgtEl>
@@ -12652,14 +12815,14 @@
                                 </p:cTn>
                               </p:par>
                               <p:par>
-                                <p:cTn id="114" presetID="42" presetClass="entr" presetSubtype="0" fill="hold" grpId="0" nodeType="withEffect">
+                                <p:cTn id="123" presetID="42" presetClass="entr" presetSubtype="0" fill="hold" grpId="0" nodeType="withEffect">
                                   <p:stCondLst>
                                     <p:cond delay="0"/>
                                   </p:stCondLst>
                                   <p:childTnLst>
                                     <p:set>
                                       <p:cBhvr>
-                                        <p:cTn id="115" dur="1" fill="hold">
+                                        <p:cTn id="124" dur="1" fill="hold">
                                           <p:stCondLst>
                                             <p:cond delay="0"/>
                                           </p:stCondLst>
@@ -12677,7 +12840,7 @@
                                     </p:set>
                                     <p:animEffect transition="in" filter="fade">
                                       <p:cBhvr>
-                                        <p:cTn id="116" dur="1000"/>
+                                        <p:cTn id="125" dur="1000"/>
                                         <p:tgtEl>
                                           <p:spTgt spid="54"/>
                                         </p:tgtEl>
@@ -12685,7 +12848,7 @@
                                     </p:animEffect>
                                     <p:anim calcmode="lin" valueType="num">
                                       <p:cBhvr>
-                                        <p:cTn id="117" dur="1000" fill="hold"/>
+                                        <p:cTn id="126" dur="1000" fill="hold"/>
                                         <p:tgtEl>
                                           <p:spTgt spid="54"/>
                                         </p:tgtEl>
@@ -12708,7 +12871,7 @@
                                     </p:anim>
                                     <p:anim calcmode="lin" valueType="num">
                                       <p:cBhvr>
-                                        <p:cTn id="118" dur="1000" fill="hold"/>
+                                        <p:cTn id="127" dur="1000" fill="hold"/>
                                         <p:tgtEl>
                                           <p:spTgt spid="54"/>
                                         </p:tgtEl>
@@ -12733,14 +12896,14 @@
                                 </p:cTn>
                               </p:par>
                               <p:par>
-                                <p:cTn id="119" presetID="42" presetClass="entr" presetSubtype="0" fill="hold" grpId="0" nodeType="withEffect">
+                                <p:cTn id="128" presetID="42" presetClass="entr" presetSubtype="0" fill="hold" grpId="0" nodeType="withEffect">
                                   <p:stCondLst>
                                     <p:cond delay="0"/>
                                   </p:stCondLst>
                                   <p:childTnLst>
                                     <p:set>
                                       <p:cBhvr>
-                                        <p:cTn id="120" dur="1" fill="hold">
+                                        <p:cTn id="129" dur="1" fill="hold">
                                           <p:stCondLst>
                                             <p:cond delay="0"/>
                                           </p:stCondLst>
@@ -12758,7 +12921,7 @@
                                     </p:set>
                                     <p:animEffect transition="in" filter="fade">
                                       <p:cBhvr>
-                                        <p:cTn id="121" dur="1000"/>
+                                        <p:cTn id="130" dur="1000"/>
                                         <p:tgtEl>
                                           <p:spTgt spid="55"/>
                                         </p:tgtEl>
@@ -12766,7 +12929,7 @@
                                     </p:animEffect>
                                     <p:anim calcmode="lin" valueType="num">
                                       <p:cBhvr>
-                                        <p:cTn id="122" dur="1000" fill="hold"/>
+                                        <p:cTn id="131" dur="1000" fill="hold"/>
                                         <p:tgtEl>
                                           <p:spTgt spid="55"/>
                                         </p:tgtEl>
@@ -12789,7 +12952,7 @@
                                     </p:anim>
                                     <p:anim calcmode="lin" valueType="num">
                                       <p:cBhvr>
-                                        <p:cTn id="123" dur="1000" fill="hold"/>
+                                        <p:cTn id="132" dur="1000" fill="hold"/>
                                         <p:tgtEl>
                                           <p:spTgt spid="55"/>
                                         </p:tgtEl>
@@ -12814,14 +12977,14 @@
                                 </p:cTn>
                               </p:par>
                               <p:par>
-                                <p:cTn id="124" presetID="42" presetClass="entr" presetSubtype="0" fill="hold" grpId="0" nodeType="withEffect">
+                                <p:cTn id="133" presetID="42" presetClass="entr" presetSubtype="0" fill="hold" grpId="0" nodeType="withEffect">
                                   <p:stCondLst>
                                     <p:cond delay="0"/>
                                   </p:stCondLst>
                                   <p:childTnLst>
                                     <p:set>
                                       <p:cBhvr>
-                                        <p:cTn id="125" dur="1" fill="hold">
+                                        <p:cTn id="134" dur="1" fill="hold">
                                           <p:stCondLst>
                                             <p:cond delay="0"/>
                                           </p:stCondLst>
@@ -12839,7 +13002,7 @@
                                     </p:set>
                                     <p:animEffect transition="in" filter="fade">
                                       <p:cBhvr>
-                                        <p:cTn id="126" dur="1000"/>
+                                        <p:cTn id="135" dur="1000"/>
                                         <p:tgtEl>
                                           <p:spTgt spid="56"/>
                                         </p:tgtEl>
@@ -12847,7 +13010,7 @@
                                     </p:animEffect>
                                     <p:anim calcmode="lin" valueType="num">
                                       <p:cBhvr>
-                                        <p:cTn id="127" dur="1000" fill="hold"/>
+                                        <p:cTn id="136" dur="1000" fill="hold"/>
                                         <p:tgtEl>
                                           <p:spTgt spid="56"/>
                                         </p:tgtEl>
@@ -12870,7 +13033,7 @@
                                     </p:anim>
                                     <p:anim calcmode="lin" valueType="num">
                                       <p:cBhvr>
-                                        <p:cTn id="128" dur="1000" fill="hold"/>
+                                        <p:cTn id="137" dur="1000" fill="hold"/>
                                         <p:tgtEl>
                                           <p:spTgt spid="56"/>
                                         </p:tgtEl>
@@ -12895,14 +13058,14 @@
                                 </p:cTn>
                               </p:par>
                               <p:par>
-                                <p:cTn id="129" presetID="42" presetClass="entr" presetSubtype="0" fill="hold" grpId="0" nodeType="withEffect">
+                                <p:cTn id="138" presetID="42" presetClass="entr" presetSubtype="0" fill="hold" grpId="0" nodeType="withEffect">
                                   <p:stCondLst>
                                     <p:cond delay="0"/>
                                   </p:stCondLst>
                                   <p:childTnLst>
                                     <p:set>
                                       <p:cBhvr>
-                                        <p:cTn id="130" dur="1" fill="hold">
+                                        <p:cTn id="139" dur="1" fill="hold">
                                           <p:stCondLst>
                                             <p:cond delay="0"/>
                                           </p:stCondLst>
@@ -12920,7 +13083,7 @@
                                     </p:set>
                                     <p:animEffect transition="in" filter="fade">
                                       <p:cBhvr>
-                                        <p:cTn id="131" dur="1000"/>
+                                        <p:cTn id="140" dur="1000"/>
                                         <p:tgtEl>
                                           <p:spTgt spid="57"/>
                                         </p:tgtEl>
@@ -12928,7 +13091,7 @@
                                     </p:animEffect>
                                     <p:anim calcmode="lin" valueType="num">
                                       <p:cBhvr>
-                                        <p:cTn id="132" dur="1000" fill="hold"/>
+                                        <p:cTn id="141" dur="1000" fill="hold"/>
                                         <p:tgtEl>
                                           <p:spTgt spid="57"/>
                                         </p:tgtEl>
@@ -12951,7 +13114,7 @@
                                     </p:anim>
                                     <p:anim calcmode="lin" valueType="num">
                                       <p:cBhvr>
-                                        <p:cTn id="133" dur="1000" fill="hold"/>
+                                        <p:cTn id="142" dur="1000" fill="hold"/>
                                         <p:tgtEl>
                                           <p:spTgt spid="57"/>
                                         </p:tgtEl>
@@ -12976,14 +13139,14 @@
                                 </p:cTn>
                               </p:par>
                               <p:par>
-                                <p:cTn id="134" presetID="42" presetClass="entr" presetSubtype="0" fill="hold" grpId="0" nodeType="withEffect">
+                                <p:cTn id="143" presetID="42" presetClass="entr" presetSubtype="0" fill="hold" grpId="0" nodeType="withEffect">
                                   <p:stCondLst>
                                     <p:cond delay="0"/>
                                   </p:stCondLst>
                                   <p:childTnLst>
                                     <p:set>
                                       <p:cBhvr>
-                                        <p:cTn id="135" dur="1" fill="hold">
+                                        <p:cTn id="144" dur="1" fill="hold">
                                           <p:stCondLst>
                                             <p:cond delay="0"/>
                                           </p:stCondLst>
@@ -13001,7 +13164,7 @@
                                     </p:set>
                                     <p:animEffect transition="in" filter="fade">
                                       <p:cBhvr>
-                                        <p:cTn id="136" dur="1000"/>
+                                        <p:cTn id="145" dur="1000"/>
                                         <p:tgtEl>
                                           <p:spTgt spid="58"/>
                                         </p:tgtEl>
@@ -13009,7 +13172,7 @@
                                     </p:animEffect>
                                     <p:anim calcmode="lin" valueType="num">
                                       <p:cBhvr>
-                                        <p:cTn id="137" dur="1000" fill="hold"/>
+                                        <p:cTn id="146" dur="1000" fill="hold"/>
                                         <p:tgtEl>
                                           <p:spTgt spid="58"/>
                                         </p:tgtEl>
@@ -13032,7 +13195,7 @@
                                     </p:anim>
                                     <p:anim calcmode="lin" valueType="num">
                                       <p:cBhvr>
-                                        <p:cTn id="138" dur="1000" fill="hold"/>
+                                        <p:cTn id="147" dur="1000" fill="hold"/>
                                         <p:tgtEl>
                                           <p:spTgt spid="58"/>
                                         </p:tgtEl>
@@ -13057,14 +13220,14 @@
                                 </p:cTn>
                               </p:par>
                               <p:par>
-                                <p:cTn id="139" presetID="42" presetClass="entr" presetSubtype="0" fill="hold" grpId="0" nodeType="withEffect">
+                                <p:cTn id="148" presetID="42" presetClass="entr" presetSubtype="0" fill="hold" grpId="0" nodeType="withEffect">
                                   <p:stCondLst>
                                     <p:cond delay="0"/>
                                   </p:stCondLst>
                                   <p:childTnLst>
                                     <p:set>
                                       <p:cBhvr>
-                                        <p:cTn id="140" dur="1" fill="hold">
+                                        <p:cTn id="149" dur="1" fill="hold">
                                           <p:stCondLst>
                                             <p:cond delay="0"/>
                                           </p:stCondLst>
@@ -13082,7 +13245,7 @@
                                     </p:set>
                                     <p:animEffect transition="in" filter="fade">
                                       <p:cBhvr>
-                                        <p:cTn id="141" dur="1000"/>
+                                        <p:cTn id="150" dur="1000"/>
                                         <p:tgtEl>
                                           <p:spTgt spid="59"/>
                                         </p:tgtEl>
@@ -13090,7 +13253,7 @@
                                     </p:animEffect>
                                     <p:anim calcmode="lin" valueType="num">
                                       <p:cBhvr>
-                                        <p:cTn id="142" dur="1000" fill="hold"/>
+                                        <p:cTn id="151" dur="1000" fill="hold"/>
                                         <p:tgtEl>
                                           <p:spTgt spid="59"/>
                                         </p:tgtEl>
@@ -13113,7 +13276,7 @@
                                     </p:anim>
                                     <p:anim calcmode="lin" valueType="num">
                                       <p:cBhvr>
-                                        <p:cTn id="143" dur="1000" fill="hold"/>
+                                        <p:cTn id="152" dur="1000" fill="hold"/>
                                         <p:tgtEl>
                                           <p:spTgt spid="59"/>
                                         </p:tgtEl>
@@ -13138,14 +13301,14 @@
                                 </p:cTn>
                               </p:par>
                               <p:par>
-                                <p:cTn id="144" presetID="42" presetClass="entr" presetSubtype="0" fill="hold" grpId="0" nodeType="withEffect">
+                                <p:cTn id="153" presetID="42" presetClass="entr" presetSubtype="0" fill="hold" grpId="0" nodeType="withEffect">
                                   <p:stCondLst>
                                     <p:cond delay="0"/>
                                   </p:stCondLst>
                                   <p:childTnLst>
                                     <p:set>
                                       <p:cBhvr>
-                                        <p:cTn id="145" dur="1" fill="hold">
+                                        <p:cTn id="154" dur="1" fill="hold">
                                           <p:stCondLst>
                                             <p:cond delay="0"/>
                                           </p:stCondLst>
@@ -13163,7 +13326,7 @@
                                     </p:set>
                                     <p:animEffect transition="in" filter="fade">
                                       <p:cBhvr>
-                                        <p:cTn id="146" dur="1000"/>
+                                        <p:cTn id="155" dur="1000"/>
                                         <p:tgtEl>
                                           <p:spTgt spid="60"/>
                                         </p:tgtEl>
@@ -13171,7 +13334,7 @@
                                     </p:animEffect>
                                     <p:anim calcmode="lin" valueType="num">
                                       <p:cBhvr>
-                                        <p:cTn id="147" dur="1000" fill="hold"/>
+                                        <p:cTn id="156" dur="1000" fill="hold"/>
                                         <p:tgtEl>
                                           <p:spTgt spid="60"/>
                                         </p:tgtEl>
@@ -13194,7 +13357,7 @@
                                     </p:anim>
                                     <p:anim calcmode="lin" valueType="num">
                                       <p:cBhvr>
-                                        <p:cTn id="148" dur="1000" fill="hold"/>
+                                        <p:cTn id="157" dur="1000" fill="hold"/>
                                         <p:tgtEl>
                                           <p:spTgt spid="60"/>
                                         </p:tgtEl>
@@ -13225,26 +13388,26 @@
                     </p:cTn>
                   </p:par>
                   <p:par>
-                    <p:cTn id="149" fill="hold">
+                    <p:cTn id="158" fill="hold">
                       <p:stCondLst>
                         <p:cond delay="indefinite"/>
                       </p:stCondLst>
                       <p:childTnLst>
                         <p:par>
-                          <p:cTn id="150" fill="hold">
+                          <p:cTn id="159" fill="hold">
                             <p:stCondLst>
                               <p:cond delay="0"/>
                             </p:stCondLst>
                             <p:childTnLst>
                               <p:par>
-                                <p:cTn id="151" presetID="42" presetClass="entr" presetSubtype="0" fill="hold" grpId="0" nodeType="clickEffect">
+                                <p:cTn id="160" presetID="42" presetClass="entr" presetSubtype="0" fill="hold" grpId="0" nodeType="clickEffect">
                                   <p:stCondLst>
                                     <p:cond delay="0"/>
                                   </p:stCondLst>
                                   <p:childTnLst>
                                     <p:set>
                                       <p:cBhvr>
-                                        <p:cTn id="152" dur="1" fill="hold">
+                                        <p:cTn id="161" dur="1" fill="hold">
                                           <p:stCondLst>
                                             <p:cond delay="0"/>
                                           </p:stCondLst>
@@ -13262,7 +13425,7 @@
                                     </p:set>
                                     <p:animEffect transition="in" filter="fade">
                                       <p:cBhvr>
-                                        <p:cTn id="153" dur="1000"/>
+                                        <p:cTn id="162" dur="1000"/>
                                         <p:tgtEl>
                                           <p:spTgt spid="39"/>
                                         </p:tgtEl>
@@ -13270,7 +13433,7 @@
                                     </p:animEffect>
                                     <p:anim calcmode="lin" valueType="num">
                                       <p:cBhvr>
-                                        <p:cTn id="154" dur="1000" fill="hold"/>
+                                        <p:cTn id="163" dur="1000" fill="hold"/>
                                         <p:tgtEl>
                                           <p:spTgt spid="39"/>
                                         </p:tgtEl>
@@ -13293,7 +13456,7 @@
                                     </p:anim>
                                     <p:anim calcmode="lin" valueType="num">
                                       <p:cBhvr>
-                                        <p:cTn id="155" dur="1000" fill="hold"/>
+                                        <p:cTn id="164" dur="1000" fill="hold"/>
                                         <p:tgtEl>
                                           <p:spTgt spid="39"/>
                                         </p:tgtEl>
@@ -13318,14 +13481,14 @@
                                 </p:cTn>
                               </p:par>
                               <p:par>
-                                <p:cTn id="156" presetID="42" presetClass="entr" presetSubtype="0" fill="hold" grpId="0" nodeType="withEffect">
+                                <p:cTn id="165" presetID="42" presetClass="entr" presetSubtype="0" fill="hold" grpId="0" nodeType="withEffect">
                                   <p:stCondLst>
                                     <p:cond delay="0"/>
                                   </p:stCondLst>
                                   <p:childTnLst>
                                     <p:set>
                                       <p:cBhvr>
-                                        <p:cTn id="157" dur="1" fill="hold">
+                                        <p:cTn id="166" dur="1" fill="hold">
                                           <p:stCondLst>
                                             <p:cond delay="0"/>
                                           </p:stCondLst>
@@ -13343,7 +13506,7 @@
                                     </p:set>
                                     <p:animEffect transition="in" filter="fade">
                                       <p:cBhvr>
-                                        <p:cTn id="158" dur="1000"/>
+                                        <p:cTn id="167" dur="1000"/>
                                         <p:tgtEl>
                                           <p:spTgt spid="61"/>
                                         </p:tgtEl>
@@ -13351,7 +13514,7 @@
                                     </p:animEffect>
                                     <p:anim calcmode="lin" valueType="num">
                                       <p:cBhvr>
-                                        <p:cTn id="159" dur="1000" fill="hold"/>
+                                        <p:cTn id="168" dur="1000" fill="hold"/>
                                         <p:tgtEl>
                                           <p:spTgt spid="61"/>
                                         </p:tgtEl>
@@ -13374,7 +13537,7 @@
                                     </p:anim>
                                     <p:anim calcmode="lin" valueType="num">
                                       <p:cBhvr>
-                                        <p:cTn id="160" dur="1000" fill="hold"/>
+                                        <p:cTn id="169" dur="1000" fill="hold"/>
                                         <p:tgtEl>
                                           <p:spTgt spid="61"/>
                                         </p:tgtEl>
@@ -13399,14 +13562,14 @@
                                 </p:cTn>
                               </p:par>
                               <p:par>
-                                <p:cTn id="161" presetID="42" presetClass="entr" presetSubtype="0" fill="hold" grpId="0" nodeType="withEffect">
+                                <p:cTn id="170" presetID="42" presetClass="entr" presetSubtype="0" fill="hold" grpId="0" nodeType="withEffect">
                                   <p:stCondLst>
                                     <p:cond delay="0"/>
                                   </p:stCondLst>
                                   <p:childTnLst>
                                     <p:set>
                                       <p:cBhvr>
-                                        <p:cTn id="162" dur="1" fill="hold">
+                                        <p:cTn id="171" dur="1" fill="hold">
                                           <p:stCondLst>
                                             <p:cond delay="0"/>
                                           </p:stCondLst>
@@ -13424,7 +13587,7 @@
                                     </p:set>
                                     <p:animEffect transition="in" filter="fade">
                                       <p:cBhvr>
-                                        <p:cTn id="163" dur="1000"/>
+                                        <p:cTn id="172" dur="1000"/>
                                         <p:tgtEl>
                                           <p:spTgt spid="62"/>
                                         </p:tgtEl>
@@ -13432,7 +13595,7 @@
                                     </p:animEffect>
                                     <p:anim calcmode="lin" valueType="num">
                                       <p:cBhvr>
-                                        <p:cTn id="164" dur="1000" fill="hold"/>
+                                        <p:cTn id="173" dur="1000" fill="hold"/>
                                         <p:tgtEl>
                                           <p:spTgt spid="62"/>
                                         </p:tgtEl>
@@ -13455,7 +13618,7 @@
                                     </p:anim>
                                     <p:anim calcmode="lin" valueType="num">
                                       <p:cBhvr>
-                                        <p:cTn id="165" dur="1000" fill="hold"/>
+                                        <p:cTn id="174" dur="1000" fill="hold"/>
                                         <p:tgtEl>
                                           <p:spTgt spid="62"/>
                                         </p:tgtEl>
@@ -13480,14 +13643,14 @@
                                 </p:cTn>
                               </p:par>
                               <p:par>
-                                <p:cTn id="166" presetID="42" presetClass="entr" presetSubtype="0" fill="hold" grpId="0" nodeType="withEffect">
+                                <p:cTn id="175" presetID="42" presetClass="entr" presetSubtype="0" fill="hold" grpId="0" nodeType="withEffect">
                                   <p:stCondLst>
                                     <p:cond delay="0"/>
                                   </p:stCondLst>
                                   <p:childTnLst>
                                     <p:set>
                                       <p:cBhvr>
-                                        <p:cTn id="167" dur="1" fill="hold">
+                                        <p:cTn id="176" dur="1" fill="hold">
                                           <p:stCondLst>
                                             <p:cond delay="0"/>
                                           </p:stCondLst>
@@ -13505,7 +13668,7 @@
                                     </p:set>
                                     <p:animEffect transition="in" filter="fade">
                                       <p:cBhvr>
-                                        <p:cTn id="168" dur="1000"/>
+                                        <p:cTn id="177" dur="1000"/>
                                         <p:tgtEl>
                                           <p:spTgt spid="63"/>
                                         </p:tgtEl>
@@ -13513,7 +13676,7 @@
                                     </p:animEffect>
                                     <p:anim calcmode="lin" valueType="num">
                                       <p:cBhvr>
-                                        <p:cTn id="169" dur="1000" fill="hold"/>
+                                        <p:cTn id="178" dur="1000" fill="hold"/>
                                         <p:tgtEl>
                                           <p:spTgt spid="63"/>
                                         </p:tgtEl>
@@ -13536,7 +13699,7 @@
                                     </p:anim>
                                     <p:anim calcmode="lin" valueType="num">
                                       <p:cBhvr>
-                                        <p:cTn id="170" dur="1000" fill="hold"/>
+                                        <p:cTn id="179" dur="1000" fill="hold"/>
                                         <p:tgtEl>
                                           <p:spTgt spid="63"/>
                                         </p:tgtEl>
@@ -13561,14 +13724,14 @@
                                 </p:cTn>
                               </p:par>
                               <p:par>
-                                <p:cTn id="171" presetID="42" presetClass="entr" presetSubtype="0" fill="hold" grpId="0" nodeType="withEffect">
+                                <p:cTn id="180" presetID="42" presetClass="entr" presetSubtype="0" fill="hold" grpId="0" nodeType="withEffect">
                                   <p:stCondLst>
                                     <p:cond delay="0"/>
                                   </p:stCondLst>
                                   <p:childTnLst>
                                     <p:set>
                                       <p:cBhvr>
-                                        <p:cTn id="172" dur="1" fill="hold">
+                                        <p:cTn id="181" dur="1" fill="hold">
                                           <p:stCondLst>
                                             <p:cond delay="0"/>
                                           </p:stCondLst>
@@ -13586,7 +13749,7 @@
                                     </p:set>
                                     <p:animEffect transition="in" filter="fade">
                                       <p:cBhvr>
-                                        <p:cTn id="173" dur="1000"/>
+                                        <p:cTn id="182" dur="1000"/>
                                         <p:tgtEl>
                                           <p:spTgt spid="64"/>
                                         </p:tgtEl>
@@ -13594,7 +13757,7 @@
                                     </p:animEffect>
                                     <p:anim calcmode="lin" valueType="num">
                                       <p:cBhvr>
-                                        <p:cTn id="174" dur="1000" fill="hold"/>
+                                        <p:cTn id="183" dur="1000" fill="hold"/>
                                         <p:tgtEl>
                                           <p:spTgt spid="64"/>
                                         </p:tgtEl>
@@ -13617,7 +13780,7 @@
                                     </p:anim>
                                     <p:anim calcmode="lin" valueType="num">
                                       <p:cBhvr>
-                                        <p:cTn id="175" dur="1000" fill="hold"/>
+                                        <p:cTn id="184" dur="1000" fill="hold"/>
                                         <p:tgtEl>
                                           <p:spTgt spid="64"/>
                                         </p:tgtEl>
@@ -13642,14 +13805,14 @@
                                 </p:cTn>
                               </p:par>
                               <p:par>
-                                <p:cTn id="176" presetID="42" presetClass="entr" presetSubtype="0" fill="hold" grpId="0" nodeType="withEffect">
+                                <p:cTn id="185" presetID="42" presetClass="entr" presetSubtype="0" fill="hold" grpId="0" nodeType="withEffect">
                                   <p:stCondLst>
                                     <p:cond delay="0"/>
                                   </p:stCondLst>
                                   <p:childTnLst>
                                     <p:set>
                                       <p:cBhvr>
-                                        <p:cTn id="177" dur="1" fill="hold">
+                                        <p:cTn id="186" dur="1" fill="hold">
                                           <p:stCondLst>
                                             <p:cond delay="0"/>
                                           </p:stCondLst>
@@ -13667,7 +13830,7 @@
                                     </p:set>
                                     <p:animEffect transition="in" filter="fade">
                                       <p:cBhvr>
-                                        <p:cTn id="178" dur="1000"/>
+                                        <p:cTn id="187" dur="1000"/>
                                         <p:tgtEl>
                                           <p:spTgt spid="65"/>
                                         </p:tgtEl>
@@ -13675,7 +13838,7 @@
                                     </p:animEffect>
                                     <p:anim calcmode="lin" valueType="num">
                                       <p:cBhvr>
-                                        <p:cTn id="179" dur="1000" fill="hold"/>
+                                        <p:cTn id="188" dur="1000" fill="hold"/>
                                         <p:tgtEl>
                                           <p:spTgt spid="65"/>
                                         </p:tgtEl>
@@ -13698,7 +13861,7 @@
                                     </p:anim>
                                     <p:anim calcmode="lin" valueType="num">
                                       <p:cBhvr>
-                                        <p:cTn id="180" dur="1000" fill="hold"/>
+                                        <p:cTn id="189" dur="1000" fill="hold"/>
                                         <p:tgtEl>
                                           <p:spTgt spid="65"/>
                                         </p:tgtEl>
@@ -13723,14 +13886,14 @@
                                 </p:cTn>
                               </p:par>
                               <p:par>
-                                <p:cTn id="181" presetID="42" presetClass="entr" presetSubtype="0" fill="hold" grpId="0" nodeType="withEffect">
+                                <p:cTn id="190" presetID="42" presetClass="entr" presetSubtype="0" fill="hold" grpId="0" nodeType="withEffect">
                                   <p:stCondLst>
                                     <p:cond delay="0"/>
                                   </p:stCondLst>
                                   <p:childTnLst>
                                     <p:set>
                                       <p:cBhvr>
-                                        <p:cTn id="182" dur="1" fill="hold">
+                                        <p:cTn id="191" dur="1" fill="hold">
                                           <p:stCondLst>
                                             <p:cond delay="0"/>
                                           </p:stCondLst>
@@ -13748,7 +13911,7 @@
                                     </p:set>
                                     <p:animEffect transition="in" filter="fade">
                                       <p:cBhvr>
-                                        <p:cTn id="183" dur="1000"/>
+                                        <p:cTn id="192" dur="1000"/>
                                         <p:tgtEl>
                                           <p:spTgt spid="66"/>
                                         </p:tgtEl>
@@ -13756,7 +13919,7 @@
                                     </p:animEffect>
                                     <p:anim calcmode="lin" valueType="num">
                                       <p:cBhvr>
-                                        <p:cTn id="184" dur="1000" fill="hold"/>
+                                        <p:cTn id="193" dur="1000" fill="hold"/>
                                         <p:tgtEl>
                                           <p:spTgt spid="66"/>
                                         </p:tgtEl>
@@ -13779,7 +13942,7 @@
                                     </p:anim>
                                     <p:anim calcmode="lin" valueType="num">
                                       <p:cBhvr>
-                                        <p:cTn id="185" dur="1000" fill="hold"/>
+                                        <p:cTn id="194" dur="1000" fill="hold"/>
                                         <p:tgtEl>
                                           <p:spTgt spid="66"/>
                                         </p:tgtEl>
@@ -13804,14 +13967,14 @@
                                 </p:cTn>
                               </p:par>
                               <p:par>
-                                <p:cTn id="186" presetID="42" presetClass="entr" presetSubtype="0" fill="hold" grpId="0" nodeType="withEffect">
+                                <p:cTn id="195" presetID="42" presetClass="entr" presetSubtype="0" fill="hold" grpId="0" nodeType="withEffect">
                                   <p:stCondLst>
                                     <p:cond delay="0"/>
                                   </p:stCondLst>
                                   <p:childTnLst>
                                     <p:set>
                                       <p:cBhvr>
-                                        <p:cTn id="187" dur="1" fill="hold">
+                                        <p:cTn id="196" dur="1" fill="hold">
                                           <p:stCondLst>
                                             <p:cond delay="0"/>
                                           </p:stCondLst>
@@ -13829,7 +13992,7 @@
                                     </p:set>
                                     <p:animEffect transition="in" filter="fade">
                                       <p:cBhvr>
-                                        <p:cTn id="188" dur="1000"/>
+                                        <p:cTn id="197" dur="1000"/>
                                         <p:tgtEl>
                                           <p:spTgt spid="67"/>
                                         </p:tgtEl>
@@ -13837,7 +14000,7 @@
                                     </p:animEffect>
                                     <p:anim calcmode="lin" valueType="num">
                                       <p:cBhvr>
-                                        <p:cTn id="189" dur="1000" fill="hold"/>
+                                        <p:cTn id="198" dur="1000" fill="hold"/>
                                         <p:tgtEl>
                                           <p:spTgt spid="67"/>
                                         </p:tgtEl>
@@ -13860,7 +14023,7 @@
                                     </p:anim>
                                     <p:anim calcmode="lin" valueType="num">
                                       <p:cBhvr>
-                                        <p:cTn id="190" dur="1000" fill="hold"/>
+                                        <p:cTn id="199" dur="1000" fill="hold"/>
                                         <p:tgtEl>
                                           <p:spTgt spid="67"/>
                                         </p:tgtEl>
@@ -13885,14 +14048,14 @@
                                 </p:cTn>
                               </p:par>
                               <p:par>
-                                <p:cTn id="191" presetID="42" presetClass="entr" presetSubtype="0" fill="hold" grpId="0" nodeType="withEffect">
+                                <p:cTn id="200" presetID="42" presetClass="entr" presetSubtype="0" fill="hold" grpId="0" nodeType="withEffect">
                                   <p:stCondLst>
                                     <p:cond delay="0"/>
                                   </p:stCondLst>
                                   <p:childTnLst>
                                     <p:set>
                                       <p:cBhvr>
-                                        <p:cTn id="192" dur="1" fill="hold">
+                                        <p:cTn id="201" dur="1" fill="hold">
                                           <p:stCondLst>
                                             <p:cond delay="0"/>
                                           </p:stCondLst>
@@ -13910,7 +14073,7 @@
                                     </p:set>
                                     <p:animEffect transition="in" filter="fade">
                                       <p:cBhvr>
-                                        <p:cTn id="193" dur="1000"/>
+                                        <p:cTn id="202" dur="1000"/>
                                         <p:tgtEl>
                                           <p:spTgt spid="68"/>
                                         </p:tgtEl>
@@ -13918,7 +14081,7 @@
                                     </p:animEffect>
                                     <p:anim calcmode="lin" valueType="num">
                                       <p:cBhvr>
-                                        <p:cTn id="194" dur="1000" fill="hold"/>
+                                        <p:cTn id="203" dur="1000" fill="hold"/>
                                         <p:tgtEl>
                                           <p:spTgt spid="68"/>
                                         </p:tgtEl>
@@ -13941,7 +14104,7 @@
                                     </p:anim>
                                     <p:anim calcmode="lin" valueType="num">
                                       <p:cBhvr>
-                                        <p:cTn id="195" dur="1000" fill="hold"/>
+                                        <p:cTn id="204" dur="1000" fill="hold"/>
                                         <p:tgtEl>
                                           <p:spTgt spid="68"/>
                                         </p:tgtEl>
@@ -13966,14 +14129,14 @@
                                 </p:cTn>
                               </p:par>
                               <p:par>
-                                <p:cTn id="196" presetID="42" presetClass="entr" presetSubtype="0" fill="hold" grpId="0" nodeType="withEffect">
+                                <p:cTn id="205" presetID="42" presetClass="entr" presetSubtype="0" fill="hold" grpId="0" nodeType="withEffect">
                                   <p:stCondLst>
                                     <p:cond delay="0"/>
                                   </p:stCondLst>
                                   <p:childTnLst>
                                     <p:set>
                                       <p:cBhvr>
-                                        <p:cTn id="197" dur="1" fill="hold">
+                                        <p:cTn id="206" dur="1" fill="hold">
                                           <p:stCondLst>
                                             <p:cond delay="0"/>
                                           </p:stCondLst>
@@ -13991,7 +14154,7 @@
                                     </p:set>
                                     <p:animEffect transition="in" filter="fade">
                                       <p:cBhvr>
-                                        <p:cTn id="198" dur="1000"/>
+                                        <p:cTn id="207" dur="1000"/>
                                         <p:tgtEl>
                                           <p:spTgt spid="69"/>
                                         </p:tgtEl>
@@ -13999,7 +14162,7 @@
                                     </p:animEffect>
                                     <p:anim calcmode="lin" valueType="num">
                                       <p:cBhvr>
-                                        <p:cTn id="199" dur="1000" fill="hold"/>
+                                        <p:cTn id="208" dur="1000" fill="hold"/>
                                         <p:tgtEl>
                                           <p:spTgt spid="69"/>
                                         </p:tgtEl>
@@ -14022,7 +14185,7 @@
                                     </p:anim>
                                     <p:anim calcmode="lin" valueType="num">
                                       <p:cBhvr>
-                                        <p:cTn id="200" dur="1000" fill="hold"/>
+                                        <p:cTn id="209" dur="1000" fill="hold"/>
                                         <p:tgtEl>
                                           <p:spTgt spid="69"/>
                                         </p:tgtEl>
@@ -14047,14 +14210,14 @@
                                 </p:cTn>
                               </p:par>
                               <p:par>
-                                <p:cTn id="201" presetID="42" presetClass="entr" presetSubtype="0" fill="hold" grpId="0" nodeType="withEffect">
+                                <p:cTn id="210" presetID="42" presetClass="entr" presetSubtype="0" fill="hold" grpId="0" nodeType="withEffect">
                                   <p:stCondLst>
                                     <p:cond delay="0"/>
                                   </p:stCondLst>
                                   <p:childTnLst>
                                     <p:set>
                                       <p:cBhvr>
-                                        <p:cTn id="202" dur="1" fill="hold">
+                                        <p:cTn id="211" dur="1" fill="hold">
                                           <p:stCondLst>
                                             <p:cond delay="0"/>
                                           </p:stCondLst>
@@ -14072,7 +14235,7 @@
                                     </p:set>
                                     <p:animEffect transition="in" filter="fade">
                                       <p:cBhvr>
-                                        <p:cTn id="203" dur="1000"/>
+                                        <p:cTn id="212" dur="1000"/>
                                         <p:tgtEl>
                                           <p:spTgt spid="70"/>
                                         </p:tgtEl>
@@ -14080,7 +14243,7 @@
                                     </p:animEffect>
                                     <p:anim calcmode="lin" valueType="num">
                                       <p:cBhvr>
-                                        <p:cTn id="204" dur="1000" fill="hold"/>
+                                        <p:cTn id="213" dur="1000" fill="hold"/>
                                         <p:tgtEl>
                                           <p:spTgt spid="70"/>
                                         </p:tgtEl>
@@ -14103,7 +14266,7 @@
                                     </p:anim>
                                     <p:anim calcmode="lin" valueType="num">
                                       <p:cBhvr>
-                                        <p:cTn id="205" dur="1000" fill="hold"/>
+                                        <p:cTn id="214" dur="1000" fill="hold"/>
                                         <p:tgtEl>
                                           <p:spTgt spid="70"/>
                                         </p:tgtEl>
@@ -14128,14 +14291,14 @@
                                 </p:cTn>
                               </p:par>
                               <p:par>
-                                <p:cTn id="206" presetID="42" presetClass="entr" presetSubtype="0" fill="hold" grpId="0" nodeType="withEffect">
+                                <p:cTn id="215" presetID="42" presetClass="entr" presetSubtype="0" fill="hold" grpId="0" nodeType="withEffect">
                                   <p:stCondLst>
                                     <p:cond delay="0"/>
                                   </p:stCondLst>
                                   <p:childTnLst>
                                     <p:set>
                                       <p:cBhvr>
-                                        <p:cTn id="207" dur="1" fill="hold">
+                                        <p:cTn id="216" dur="1" fill="hold">
                                           <p:stCondLst>
                                             <p:cond delay="0"/>
                                           </p:stCondLst>
@@ -14153,7 +14316,7 @@
                                     </p:set>
                                     <p:animEffect transition="in" filter="fade">
                                       <p:cBhvr>
-                                        <p:cTn id="208" dur="1000"/>
+                                        <p:cTn id="217" dur="1000"/>
                                         <p:tgtEl>
                                           <p:spTgt spid="71"/>
                                         </p:tgtEl>
@@ -14161,7 +14324,7 @@
                                     </p:animEffect>
                                     <p:anim calcmode="lin" valueType="num">
                                       <p:cBhvr>
-                                        <p:cTn id="209" dur="1000" fill="hold"/>
+                                        <p:cTn id="218" dur="1000" fill="hold"/>
                                         <p:tgtEl>
                                           <p:spTgt spid="71"/>
                                         </p:tgtEl>
@@ -14184,7 +14347,7 @@
                                     </p:anim>
                                     <p:anim calcmode="lin" valueType="num">
                                       <p:cBhvr>
-                                        <p:cTn id="210" dur="1000" fill="hold"/>
+                                        <p:cTn id="219" dur="1000" fill="hold"/>
                                         <p:tgtEl>
                                           <p:spTgt spid="71"/>
                                         </p:tgtEl>
@@ -14209,14 +14372,14 @@
                                 </p:cTn>
                               </p:par>
                               <p:par>
-                                <p:cTn id="211" presetID="42" presetClass="entr" presetSubtype="0" fill="hold" grpId="0" nodeType="withEffect">
+                                <p:cTn id="220" presetID="42" presetClass="entr" presetSubtype="0" fill="hold" grpId="0" nodeType="withEffect">
                                   <p:stCondLst>
                                     <p:cond delay="0"/>
                                   </p:stCondLst>
                                   <p:childTnLst>
                                     <p:set>
                                       <p:cBhvr>
-                                        <p:cTn id="212" dur="1" fill="hold">
+                                        <p:cTn id="221" dur="1" fill="hold">
                                           <p:stCondLst>
                                             <p:cond delay="0"/>
                                           </p:stCondLst>
@@ -14234,7 +14397,7 @@
                                     </p:set>
                                     <p:animEffect transition="in" filter="fade">
                                       <p:cBhvr>
-                                        <p:cTn id="213" dur="1000"/>
+                                        <p:cTn id="222" dur="1000"/>
                                         <p:tgtEl>
                                           <p:spTgt spid="72"/>
                                         </p:tgtEl>
@@ -14242,7 +14405,7 @@
                                     </p:animEffect>
                                     <p:anim calcmode="lin" valueType="num">
                                       <p:cBhvr>
-                                        <p:cTn id="214" dur="1000" fill="hold"/>
+                                        <p:cTn id="223" dur="1000" fill="hold"/>
                                         <p:tgtEl>
                                           <p:spTgt spid="72"/>
                                         </p:tgtEl>
@@ -14265,7 +14428,7 @@
                                     </p:anim>
                                     <p:anim calcmode="lin" valueType="num">
                                       <p:cBhvr>
-                                        <p:cTn id="215" dur="1000" fill="hold"/>
+                                        <p:cTn id="224" dur="1000" fill="hold"/>
                                         <p:tgtEl>
                                           <p:spTgt spid="72"/>
                                         </p:tgtEl>
@@ -14296,133 +14459,28 @@
                     </p:cTn>
                   </p:par>
                   <p:par>
-                    <p:cTn id="216" fill="hold">
+                    <p:cTn id="225" fill="hold">
                       <p:stCondLst>
                         <p:cond delay="indefinite"/>
                       </p:stCondLst>
                       <p:childTnLst>
                         <p:par>
-                          <p:cTn id="217" fill="hold">
+                          <p:cTn id="226" fill="hold">
                             <p:stCondLst>
                               <p:cond delay="0"/>
                             </p:stCondLst>
                             <p:childTnLst>
                               <p:par>
-                                <p:cTn id="218" presetID="10" presetClass="exit" presetSubtype="0" fill="hold" grpId="1" nodeType="clickEffect">
+                                <p:cTn id="227" presetID="10" presetClass="exit" presetSubtype="0" fill="hold" grpId="1" nodeType="clickEffect">
                                   <p:stCondLst>
                                     <p:cond delay="0"/>
                                   </p:stCondLst>
                                   <p:childTnLst>
                                     <p:animEffect transition="out" filter="fade">
                                       <p:cBhvr>
-                                        <p:cTn id="219" dur="500"/>
+                                        <p:cTn id="228" dur="500"/>
                                         <p:tgtEl>
                                           <p:spTgt spid="40"/>
-                                        </p:tgtEl>
-                                      </p:cBhvr>
-                                    </p:animEffect>
-                                    <p:set>
-                                      <p:cBhvr>
-                                        <p:cTn id="220" dur="1" fill="hold">
-                                          <p:stCondLst>
-                                            <p:cond delay="499"/>
-                                          </p:stCondLst>
-                                        </p:cTn>
-                                        <p:tgtEl>
-                                          <p:spTgt spid="40"/>
-                                        </p:tgtEl>
-                                        <p:attrNameLst>
-                                          <p:attrName>style.visibility</p:attrName>
-                                        </p:attrNameLst>
-                                      </p:cBhvr>
-                                      <p:to>
-                                        <p:strVal val="hidden"/>
-                                      </p:to>
-                                    </p:set>
-                                  </p:childTnLst>
-                                </p:cTn>
-                              </p:par>
-                              <p:par>
-                                <p:cTn id="221" presetID="10" presetClass="exit" presetSubtype="0" fill="hold" grpId="1" nodeType="withEffect">
-                                  <p:stCondLst>
-                                    <p:cond delay="0"/>
-                                  </p:stCondLst>
-                                  <p:childTnLst>
-                                    <p:animEffect transition="out" filter="fade">
-                                      <p:cBhvr>
-                                        <p:cTn id="222" dur="500"/>
-                                        <p:tgtEl>
-                                          <p:spTgt spid="41"/>
-                                        </p:tgtEl>
-                                      </p:cBhvr>
-                                    </p:animEffect>
-                                    <p:set>
-                                      <p:cBhvr>
-                                        <p:cTn id="223" dur="1" fill="hold">
-                                          <p:stCondLst>
-                                            <p:cond delay="499"/>
-                                          </p:stCondLst>
-                                        </p:cTn>
-                                        <p:tgtEl>
-                                          <p:spTgt spid="41"/>
-                                        </p:tgtEl>
-                                        <p:attrNameLst>
-                                          <p:attrName>style.visibility</p:attrName>
-                                        </p:attrNameLst>
-                                      </p:cBhvr>
-                                      <p:to>
-                                        <p:strVal val="hidden"/>
-                                      </p:to>
-                                    </p:set>
-                                  </p:childTnLst>
-                                </p:cTn>
-                              </p:par>
-                              <p:par>
-                                <p:cTn id="224" presetID="10" presetClass="exit" presetSubtype="0" fill="hold" grpId="1" nodeType="withEffect">
-                                  <p:stCondLst>
-                                    <p:cond delay="0"/>
-                                  </p:stCondLst>
-                                  <p:childTnLst>
-                                    <p:animEffect transition="out" filter="fade">
-                                      <p:cBhvr>
-                                        <p:cTn id="225" dur="500"/>
-                                        <p:tgtEl>
-                                          <p:spTgt spid="42"/>
-                                        </p:tgtEl>
-                                      </p:cBhvr>
-                                    </p:animEffect>
-                                    <p:set>
-                                      <p:cBhvr>
-                                        <p:cTn id="226" dur="1" fill="hold">
-                                          <p:stCondLst>
-                                            <p:cond delay="499"/>
-                                          </p:stCondLst>
-                                        </p:cTn>
-                                        <p:tgtEl>
-                                          <p:spTgt spid="42"/>
-                                        </p:tgtEl>
-                                        <p:attrNameLst>
-                                          <p:attrName>style.visibility</p:attrName>
-                                        </p:attrNameLst>
-                                      </p:cBhvr>
-                                      <p:to>
-                                        <p:strVal val="hidden"/>
-                                      </p:to>
-                                    </p:set>
-                                  </p:childTnLst>
-                                </p:cTn>
-                              </p:par>
-                              <p:par>
-                                <p:cTn id="227" presetID="10" presetClass="exit" presetSubtype="0" fill="hold" grpId="1" nodeType="withEffect">
-                                  <p:stCondLst>
-                                    <p:cond delay="0"/>
-                                  </p:stCondLst>
-                                  <p:childTnLst>
-                                    <p:animEffect transition="out" filter="fade">
-                                      <p:cBhvr>
-                                        <p:cTn id="228" dur="500"/>
-                                        <p:tgtEl>
-                                          <p:spTgt spid="43"/>
                                         </p:tgtEl>
                                       </p:cBhvr>
                                     </p:animEffect>
@@ -14434,7 +14492,7 @@
                                           </p:stCondLst>
                                         </p:cTn>
                                         <p:tgtEl>
-                                          <p:spTgt spid="43"/>
+                                          <p:spTgt spid="40"/>
                                         </p:tgtEl>
                                         <p:attrNameLst>
                                           <p:attrName>style.visibility</p:attrName>
@@ -14457,7 +14515,7 @@
                                       <p:cBhvr>
                                         <p:cTn id="231" dur="500"/>
                                         <p:tgtEl>
-                                          <p:spTgt spid="44"/>
+                                          <p:spTgt spid="41"/>
                                         </p:tgtEl>
                                       </p:cBhvr>
                                     </p:animEffect>
@@ -14469,7 +14527,7 @@
                                           </p:stCondLst>
                                         </p:cTn>
                                         <p:tgtEl>
-                                          <p:spTgt spid="44"/>
+                                          <p:spTgt spid="41"/>
                                         </p:tgtEl>
                                         <p:attrNameLst>
                                           <p:attrName>style.visibility</p:attrName>
@@ -14492,7 +14550,7 @@
                                       <p:cBhvr>
                                         <p:cTn id="234" dur="500"/>
                                         <p:tgtEl>
-                                          <p:spTgt spid="45"/>
+                                          <p:spTgt spid="42"/>
                                         </p:tgtEl>
                                       </p:cBhvr>
                                     </p:animEffect>
@@ -14504,7 +14562,7 @@
                                           </p:stCondLst>
                                         </p:cTn>
                                         <p:tgtEl>
-                                          <p:spTgt spid="45"/>
+                                          <p:spTgt spid="42"/>
                                         </p:tgtEl>
                                         <p:attrNameLst>
                                           <p:attrName>style.visibility</p:attrName>
@@ -14527,7 +14585,7 @@
                                       <p:cBhvr>
                                         <p:cTn id="237" dur="500"/>
                                         <p:tgtEl>
-                                          <p:spTgt spid="46"/>
+                                          <p:spTgt spid="43"/>
                                         </p:tgtEl>
                                       </p:cBhvr>
                                     </p:animEffect>
@@ -14539,7 +14597,7 @@
                                           </p:stCondLst>
                                         </p:cTn>
                                         <p:tgtEl>
-                                          <p:spTgt spid="46"/>
+                                          <p:spTgt spid="43"/>
                                         </p:tgtEl>
                                         <p:attrNameLst>
                                           <p:attrName>style.visibility</p:attrName>
@@ -14562,7 +14620,7 @@
                                       <p:cBhvr>
                                         <p:cTn id="240" dur="500"/>
                                         <p:tgtEl>
-                                          <p:spTgt spid="47"/>
+                                          <p:spTgt spid="44"/>
                                         </p:tgtEl>
                                       </p:cBhvr>
                                     </p:animEffect>
@@ -14574,7 +14632,7 @@
                                           </p:stCondLst>
                                         </p:cTn>
                                         <p:tgtEl>
-                                          <p:spTgt spid="47"/>
+                                          <p:spTgt spid="44"/>
                                         </p:tgtEl>
                                         <p:attrNameLst>
                                           <p:attrName>style.visibility</p:attrName>
@@ -14597,7 +14655,7 @@
                                       <p:cBhvr>
                                         <p:cTn id="243" dur="500"/>
                                         <p:tgtEl>
-                                          <p:spTgt spid="48"/>
+                                          <p:spTgt spid="45"/>
                                         </p:tgtEl>
                                       </p:cBhvr>
                                     </p:animEffect>
@@ -14609,7 +14667,7 @@
                                           </p:stCondLst>
                                         </p:cTn>
                                         <p:tgtEl>
-                                          <p:spTgt spid="48"/>
+                                          <p:spTgt spid="45"/>
                                         </p:tgtEl>
                                         <p:attrNameLst>
                                           <p:attrName>style.visibility</p:attrName>
@@ -14632,7 +14690,7 @@
                                       <p:cBhvr>
                                         <p:cTn id="246" dur="500"/>
                                         <p:tgtEl>
-                                          <p:spTgt spid="49"/>
+                                          <p:spTgt spid="46"/>
                                         </p:tgtEl>
                                       </p:cBhvr>
                                     </p:animEffect>
@@ -14644,7 +14702,7 @@
                                           </p:stCondLst>
                                         </p:cTn>
                                         <p:tgtEl>
-                                          <p:spTgt spid="49"/>
+                                          <p:spTgt spid="46"/>
                                         </p:tgtEl>
                                         <p:attrNameLst>
                                           <p:attrName>style.visibility</p:attrName>
@@ -14667,7 +14725,7 @@
                                       <p:cBhvr>
                                         <p:cTn id="249" dur="500"/>
                                         <p:tgtEl>
-                                          <p:spTgt spid="50"/>
+                                          <p:spTgt spid="47"/>
                                         </p:tgtEl>
                                       </p:cBhvr>
                                     </p:animEffect>
@@ -14679,7 +14737,7 @@
                                           </p:stCondLst>
                                         </p:cTn>
                                         <p:tgtEl>
-                                          <p:spTgt spid="50"/>
+                                          <p:spTgt spid="47"/>
                                         </p:tgtEl>
                                         <p:attrNameLst>
                                           <p:attrName>style.visibility</p:attrName>
@@ -14702,7 +14760,7 @@
                                       <p:cBhvr>
                                         <p:cTn id="252" dur="500"/>
                                         <p:tgtEl>
-                                          <p:spTgt spid="51"/>
+                                          <p:spTgt spid="48"/>
                                         </p:tgtEl>
                                       </p:cBhvr>
                                     </p:animEffect>
@@ -14714,7 +14772,7 @@
                                           </p:stCondLst>
                                         </p:cTn>
                                         <p:tgtEl>
-                                          <p:spTgt spid="51"/>
+                                          <p:spTgt spid="48"/>
                                         </p:tgtEl>
                                         <p:attrNameLst>
                                           <p:attrName>style.visibility</p:attrName>
@@ -14737,7 +14795,7 @@
                                       <p:cBhvr>
                                         <p:cTn id="255" dur="500"/>
                                         <p:tgtEl>
-                                          <p:spTgt spid="52"/>
+                                          <p:spTgt spid="49"/>
                                         </p:tgtEl>
                                       </p:cBhvr>
                                     </p:animEffect>
@@ -14749,7 +14807,7 @@
                                           </p:stCondLst>
                                         </p:cTn>
                                         <p:tgtEl>
-                                          <p:spTgt spid="52"/>
+                                          <p:spTgt spid="49"/>
                                         </p:tgtEl>
                                         <p:attrNameLst>
                                           <p:attrName>style.visibility</p:attrName>
@@ -14772,7 +14830,7 @@
                                       <p:cBhvr>
                                         <p:cTn id="258" dur="500"/>
                                         <p:tgtEl>
-                                          <p:spTgt spid="53"/>
+                                          <p:spTgt spid="50"/>
                                         </p:tgtEl>
                                       </p:cBhvr>
                                     </p:animEffect>
@@ -14784,7 +14842,7 @@
                                           </p:stCondLst>
                                         </p:cTn>
                                         <p:tgtEl>
-                                          <p:spTgt spid="53"/>
+                                          <p:spTgt spid="50"/>
                                         </p:tgtEl>
                                         <p:attrNameLst>
                                           <p:attrName>style.visibility</p:attrName>
@@ -14807,7 +14865,7 @@
                                       <p:cBhvr>
                                         <p:cTn id="261" dur="500"/>
                                         <p:tgtEl>
-                                          <p:spTgt spid="54"/>
+                                          <p:spTgt spid="51"/>
                                         </p:tgtEl>
                                       </p:cBhvr>
                                     </p:animEffect>
@@ -14819,7 +14877,7 @@
                                           </p:stCondLst>
                                         </p:cTn>
                                         <p:tgtEl>
-                                          <p:spTgt spid="54"/>
+                                          <p:spTgt spid="51"/>
                                         </p:tgtEl>
                                         <p:attrNameLst>
                                           <p:attrName>style.visibility</p:attrName>
@@ -14842,7 +14900,7 @@
                                       <p:cBhvr>
                                         <p:cTn id="264" dur="500"/>
                                         <p:tgtEl>
-                                          <p:spTgt spid="55"/>
+                                          <p:spTgt spid="52"/>
                                         </p:tgtEl>
                                       </p:cBhvr>
                                     </p:animEffect>
@@ -14854,7 +14912,7 @@
                                           </p:stCondLst>
                                         </p:cTn>
                                         <p:tgtEl>
-                                          <p:spTgt spid="55"/>
+                                          <p:spTgt spid="52"/>
                                         </p:tgtEl>
                                         <p:attrNameLst>
                                           <p:attrName>style.visibility</p:attrName>
@@ -14877,7 +14935,7 @@
                                       <p:cBhvr>
                                         <p:cTn id="267" dur="500"/>
                                         <p:tgtEl>
-                                          <p:spTgt spid="56"/>
+                                          <p:spTgt spid="53"/>
                                         </p:tgtEl>
                                       </p:cBhvr>
                                     </p:animEffect>
@@ -14889,7 +14947,7 @@
                                           </p:stCondLst>
                                         </p:cTn>
                                         <p:tgtEl>
-                                          <p:spTgt spid="56"/>
+                                          <p:spTgt spid="53"/>
                                         </p:tgtEl>
                                         <p:attrNameLst>
                                           <p:attrName>style.visibility</p:attrName>
@@ -14912,7 +14970,7 @@
                                       <p:cBhvr>
                                         <p:cTn id="270" dur="500"/>
                                         <p:tgtEl>
-                                          <p:spTgt spid="57"/>
+                                          <p:spTgt spid="54"/>
                                         </p:tgtEl>
                                       </p:cBhvr>
                                     </p:animEffect>
@@ -14924,7 +14982,7 @@
                                           </p:stCondLst>
                                         </p:cTn>
                                         <p:tgtEl>
-                                          <p:spTgt spid="57"/>
+                                          <p:spTgt spid="54"/>
                                         </p:tgtEl>
                                         <p:attrNameLst>
                                           <p:attrName>style.visibility</p:attrName>
@@ -14947,7 +15005,7 @@
                                       <p:cBhvr>
                                         <p:cTn id="273" dur="500"/>
                                         <p:tgtEl>
-                                          <p:spTgt spid="58"/>
+                                          <p:spTgt spid="55"/>
                                         </p:tgtEl>
                                       </p:cBhvr>
                                     </p:animEffect>
@@ -14959,7 +15017,7 @@
                                           </p:stCondLst>
                                         </p:cTn>
                                         <p:tgtEl>
-                                          <p:spTgt spid="58"/>
+                                          <p:spTgt spid="55"/>
                                         </p:tgtEl>
                                         <p:attrNameLst>
                                           <p:attrName>style.visibility</p:attrName>
@@ -14982,7 +15040,7 @@
                                       <p:cBhvr>
                                         <p:cTn id="276" dur="500"/>
                                         <p:tgtEl>
-                                          <p:spTgt spid="59"/>
+                                          <p:spTgt spid="56"/>
                                         </p:tgtEl>
                                       </p:cBhvr>
                                     </p:animEffect>
@@ -14994,7 +15052,7 @@
                                           </p:stCondLst>
                                         </p:cTn>
                                         <p:tgtEl>
-                                          <p:spTgt spid="59"/>
+                                          <p:spTgt spid="56"/>
                                         </p:tgtEl>
                                         <p:attrNameLst>
                                           <p:attrName>style.visibility</p:attrName>
@@ -15017,7 +15075,7 @@
                                       <p:cBhvr>
                                         <p:cTn id="279" dur="500"/>
                                         <p:tgtEl>
-                                          <p:spTgt spid="60"/>
+                                          <p:spTgt spid="57"/>
                                         </p:tgtEl>
                                       </p:cBhvr>
                                     </p:animEffect>
@@ -15029,7 +15087,7 @@
                                           </p:stCondLst>
                                         </p:cTn>
                                         <p:tgtEl>
-                                          <p:spTgt spid="60"/>
+                                          <p:spTgt spid="57"/>
                                         </p:tgtEl>
                                         <p:attrNameLst>
                                           <p:attrName>style.visibility</p:attrName>
@@ -15052,7 +15110,7 @@
                                       <p:cBhvr>
                                         <p:cTn id="282" dur="500"/>
                                         <p:tgtEl>
-                                          <p:spTgt spid="61"/>
+                                          <p:spTgt spid="58"/>
                                         </p:tgtEl>
                                       </p:cBhvr>
                                     </p:animEffect>
@@ -15064,7 +15122,7 @@
                                           </p:stCondLst>
                                         </p:cTn>
                                         <p:tgtEl>
-                                          <p:spTgt spid="61"/>
+                                          <p:spTgt spid="58"/>
                                         </p:tgtEl>
                                         <p:attrNameLst>
                                           <p:attrName>style.visibility</p:attrName>
@@ -15087,7 +15145,7 @@
                                       <p:cBhvr>
                                         <p:cTn id="285" dur="500"/>
                                         <p:tgtEl>
-                                          <p:spTgt spid="62"/>
+                                          <p:spTgt spid="59"/>
                                         </p:tgtEl>
                                       </p:cBhvr>
                                     </p:animEffect>
@@ -15099,7 +15157,7 @@
                                           </p:stCondLst>
                                         </p:cTn>
                                         <p:tgtEl>
-                                          <p:spTgt spid="62"/>
+                                          <p:spTgt spid="59"/>
                                         </p:tgtEl>
                                         <p:attrNameLst>
                                           <p:attrName>style.visibility</p:attrName>
@@ -15122,7 +15180,7 @@
                                       <p:cBhvr>
                                         <p:cTn id="288" dur="500"/>
                                         <p:tgtEl>
-                                          <p:spTgt spid="63"/>
+                                          <p:spTgt spid="60"/>
                                         </p:tgtEl>
                                       </p:cBhvr>
                                     </p:animEffect>
@@ -15134,7 +15192,7 @@
                                           </p:stCondLst>
                                         </p:cTn>
                                         <p:tgtEl>
-                                          <p:spTgt spid="63"/>
+                                          <p:spTgt spid="60"/>
                                         </p:tgtEl>
                                         <p:attrNameLst>
                                           <p:attrName>style.visibility</p:attrName>
@@ -15157,7 +15215,7 @@
                                       <p:cBhvr>
                                         <p:cTn id="291" dur="500"/>
                                         <p:tgtEl>
-                                          <p:spTgt spid="64"/>
+                                          <p:spTgt spid="61"/>
                                         </p:tgtEl>
                                       </p:cBhvr>
                                     </p:animEffect>
@@ -15169,7 +15227,7 @@
                                           </p:stCondLst>
                                         </p:cTn>
                                         <p:tgtEl>
-                                          <p:spTgt spid="64"/>
+                                          <p:spTgt spid="61"/>
                                         </p:tgtEl>
                                         <p:attrNameLst>
                                           <p:attrName>style.visibility</p:attrName>
@@ -15192,7 +15250,7 @@
                                       <p:cBhvr>
                                         <p:cTn id="294" dur="500"/>
                                         <p:tgtEl>
-                                          <p:spTgt spid="65"/>
+                                          <p:spTgt spid="62"/>
                                         </p:tgtEl>
                                       </p:cBhvr>
                                     </p:animEffect>
@@ -15204,7 +15262,7 @@
                                           </p:stCondLst>
                                         </p:cTn>
                                         <p:tgtEl>
-                                          <p:spTgt spid="65"/>
+                                          <p:spTgt spid="62"/>
                                         </p:tgtEl>
                                         <p:attrNameLst>
                                           <p:attrName>style.visibility</p:attrName>
@@ -15227,7 +15285,7 @@
                                       <p:cBhvr>
                                         <p:cTn id="297" dur="500"/>
                                         <p:tgtEl>
-                                          <p:spTgt spid="66"/>
+                                          <p:spTgt spid="63"/>
                                         </p:tgtEl>
                                       </p:cBhvr>
                                     </p:animEffect>
@@ -15239,7 +15297,7 @@
                                           </p:stCondLst>
                                         </p:cTn>
                                         <p:tgtEl>
-                                          <p:spTgt spid="66"/>
+                                          <p:spTgt spid="63"/>
                                         </p:tgtEl>
                                         <p:attrNameLst>
                                           <p:attrName>style.visibility</p:attrName>
@@ -15262,7 +15320,7 @@
                                       <p:cBhvr>
                                         <p:cTn id="300" dur="500"/>
                                         <p:tgtEl>
-                                          <p:spTgt spid="67"/>
+                                          <p:spTgt spid="64"/>
                                         </p:tgtEl>
                                       </p:cBhvr>
                                     </p:animEffect>
@@ -15274,7 +15332,7 @@
                                           </p:stCondLst>
                                         </p:cTn>
                                         <p:tgtEl>
-                                          <p:spTgt spid="67"/>
+                                          <p:spTgt spid="64"/>
                                         </p:tgtEl>
                                         <p:attrNameLst>
                                           <p:attrName>style.visibility</p:attrName>
@@ -15297,7 +15355,7 @@
                                       <p:cBhvr>
                                         <p:cTn id="303" dur="500"/>
                                         <p:tgtEl>
-                                          <p:spTgt spid="68"/>
+                                          <p:spTgt spid="65"/>
                                         </p:tgtEl>
                                       </p:cBhvr>
                                     </p:animEffect>
@@ -15309,7 +15367,7 @@
                                           </p:stCondLst>
                                         </p:cTn>
                                         <p:tgtEl>
-                                          <p:spTgt spid="68"/>
+                                          <p:spTgt spid="65"/>
                                         </p:tgtEl>
                                         <p:attrNameLst>
                                           <p:attrName>style.visibility</p:attrName>
@@ -15332,7 +15390,7 @@
                                       <p:cBhvr>
                                         <p:cTn id="306" dur="500"/>
                                         <p:tgtEl>
-                                          <p:spTgt spid="69"/>
+                                          <p:spTgt spid="66"/>
                                         </p:tgtEl>
                                       </p:cBhvr>
                                     </p:animEffect>
@@ -15344,7 +15402,7 @@
                                           </p:stCondLst>
                                         </p:cTn>
                                         <p:tgtEl>
-                                          <p:spTgt spid="69"/>
+                                          <p:spTgt spid="66"/>
                                         </p:tgtEl>
                                         <p:attrNameLst>
                                           <p:attrName>style.visibility</p:attrName>
@@ -15367,7 +15425,7 @@
                                       <p:cBhvr>
                                         <p:cTn id="309" dur="500"/>
                                         <p:tgtEl>
-                                          <p:spTgt spid="70"/>
+                                          <p:spTgt spid="67"/>
                                         </p:tgtEl>
                                       </p:cBhvr>
                                     </p:animEffect>
@@ -15379,7 +15437,7 @@
                                           </p:stCondLst>
                                         </p:cTn>
                                         <p:tgtEl>
-                                          <p:spTgt spid="70"/>
+                                          <p:spTgt spid="67"/>
                                         </p:tgtEl>
                                         <p:attrNameLst>
                                           <p:attrName>style.visibility</p:attrName>
@@ -15402,7 +15460,7 @@
                                       <p:cBhvr>
                                         <p:cTn id="312" dur="500"/>
                                         <p:tgtEl>
-                                          <p:spTgt spid="71"/>
+                                          <p:spTgt spid="68"/>
                                         </p:tgtEl>
                                       </p:cBhvr>
                                     </p:animEffect>
@@ -15414,7 +15472,7 @@
                                           </p:stCondLst>
                                         </p:cTn>
                                         <p:tgtEl>
-                                          <p:spTgt spid="71"/>
+                                          <p:spTgt spid="68"/>
                                         </p:tgtEl>
                                         <p:attrNameLst>
                                           <p:attrName>style.visibility</p:attrName>
@@ -15437,13 +15495,118 @@
                                       <p:cBhvr>
                                         <p:cTn id="315" dur="500"/>
                                         <p:tgtEl>
-                                          <p:spTgt spid="72"/>
+                                          <p:spTgt spid="69"/>
                                         </p:tgtEl>
                                       </p:cBhvr>
                                     </p:animEffect>
                                     <p:set>
                                       <p:cBhvr>
                                         <p:cTn id="316" dur="1" fill="hold">
+                                          <p:stCondLst>
+                                            <p:cond delay="499"/>
+                                          </p:stCondLst>
+                                        </p:cTn>
+                                        <p:tgtEl>
+                                          <p:spTgt spid="69"/>
+                                        </p:tgtEl>
+                                        <p:attrNameLst>
+                                          <p:attrName>style.visibility</p:attrName>
+                                        </p:attrNameLst>
+                                      </p:cBhvr>
+                                      <p:to>
+                                        <p:strVal val="hidden"/>
+                                      </p:to>
+                                    </p:set>
+                                  </p:childTnLst>
+                                </p:cTn>
+                              </p:par>
+                              <p:par>
+                                <p:cTn id="317" presetID="10" presetClass="exit" presetSubtype="0" fill="hold" grpId="1" nodeType="withEffect">
+                                  <p:stCondLst>
+                                    <p:cond delay="0"/>
+                                  </p:stCondLst>
+                                  <p:childTnLst>
+                                    <p:animEffect transition="out" filter="fade">
+                                      <p:cBhvr>
+                                        <p:cTn id="318" dur="500"/>
+                                        <p:tgtEl>
+                                          <p:spTgt spid="70"/>
+                                        </p:tgtEl>
+                                      </p:cBhvr>
+                                    </p:animEffect>
+                                    <p:set>
+                                      <p:cBhvr>
+                                        <p:cTn id="319" dur="1" fill="hold">
+                                          <p:stCondLst>
+                                            <p:cond delay="499"/>
+                                          </p:stCondLst>
+                                        </p:cTn>
+                                        <p:tgtEl>
+                                          <p:spTgt spid="70"/>
+                                        </p:tgtEl>
+                                        <p:attrNameLst>
+                                          <p:attrName>style.visibility</p:attrName>
+                                        </p:attrNameLst>
+                                      </p:cBhvr>
+                                      <p:to>
+                                        <p:strVal val="hidden"/>
+                                      </p:to>
+                                    </p:set>
+                                  </p:childTnLst>
+                                </p:cTn>
+                              </p:par>
+                              <p:par>
+                                <p:cTn id="320" presetID="10" presetClass="exit" presetSubtype="0" fill="hold" grpId="1" nodeType="withEffect">
+                                  <p:stCondLst>
+                                    <p:cond delay="0"/>
+                                  </p:stCondLst>
+                                  <p:childTnLst>
+                                    <p:animEffect transition="out" filter="fade">
+                                      <p:cBhvr>
+                                        <p:cTn id="321" dur="500"/>
+                                        <p:tgtEl>
+                                          <p:spTgt spid="71"/>
+                                        </p:tgtEl>
+                                      </p:cBhvr>
+                                    </p:animEffect>
+                                    <p:set>
+                                      <p:cBhvr>
+                                        <p:cTn id="322" dur="1" fill="hold">
+                                          <p:stCondLst>
+                                            <p:cond delay="499"/>
+                                          </p:stCondLst>
+                                        </p:cTn>
+                                        <p:tgtEl>
+                                          <p:spTgt spid="71"/>
+                                        </p:tgtEl>
+                                        <p:attrNameLst>
+                                          <p:attrName>style.visibility</p:attrName>
+                                        </p:attrNameLst>
+                                      </p:cBhvr>
+                                      <p:to>
+                                        <p:strVal val="hidden"/>
+                                      </p:to>
+                                    </p:set>
+                                  </p:childTnLst>
+                                </p:cTn>
+                              </p:par>
+                              <p:par>
+                                <p:cTn id="323" presetID="10" presetClass="exit" presetSubtype="0" fill="hold" grpId="1" nodeType="withEffect">
+                                  <p:stCondLst>
+                                    <p:cond delay="0"/>
+                                  </p:stCondLst>
+                                  <p:childTnLst>
+                                    <p:animEffect transition="out" filter="fade">
+                                      <p:cBhvr>
+                                        <p:cTn id="324" dur="500"/>
+                                        <p:tgtEl>
+                                          <p:spTgt spid="72"/>
+                                        </p:tgtEl>
+                                      </p:cBhvr>
+                                    </p:animEffect>
+                                    <p:set>
+                                      <p:cBhvr>
+                                        <p:cTn id="325" dur="1" fill="hold">
                                           <p:stCondLst>
                                             <p:cond delay="499"/>
                                           </p:stCondLst>
@@ -15466,20 +15629,20 @@
                           </p:cTn>
                         </p:par>
                         <p:par>
-                          <p:cTn id="317" fill="hold">
+                          <p:cTn id="326" fill="hold">
                             <p:stCondLst>
                               <p:cond delay="500"/>
                             </p:stCondLst>
                             <p:childTnLst>
                               <p:par>
-                                <p:cTn id="318" presetID="42" presetClass="entr" presetSubtype="0" fill="hold" nodeType="afterEffect">
+                                <p:cTn id="327" presetID="42" presetClass="entr" presetSubtype="0" fill="hold" nodeType="afterEffect">
                                   <p:stCondLst>
                                     <p:cond delay="0"/>
                                   </p:stCondLst>
                                   <p:childTnLst>
                                     <p:set>
                                       <p:cBhvr>
-                                        <p:cTn id="319" dur="1" fill="hold">
+                                        <p:cTn id="328" dur="1" fill="hold">
                                           <p:stCondLst>
                                             <p:cond delay="0"/>
                                           </p:stCondLst>
@@ -15497,7 +15660,7 @@
                                     </p:set>
                                     <p:animEffect transition="in" filter="fade">
                                       <p:cBhvr>
-                                        <p:cTn id="320" dur="1000"/>
+                                        <p:cTn id="329" dur="1000"/>
                                         <p:tgtEl>
                                           <p:spTgt spid="23"/>
                                         </p:tgtEl>
@@ -15505,7 +15668,7 @@
                                     </p:animEffect>
                                     <p:anim calcmode="lin" valueType="num">
                                       <p:cBhvr>
-                                        <p:cTn id="321" dur="1000" fill="hold"/>
+                                        <p:cTn id="330" dur="1000" fill="hold"/>
                                         <p:tgtEl>
                                           <p:spTgt spid="23"/>
                                         </p:tgtEl>
@@ -15528,7 +15691,7 @@
                                     </p:anim>
                                     <p:anim calcmode="lin" valueType="num">
                                       <p:cBhvr>
-                                        <p:cTn id="322" dur="1000" fill="hold"/>
+                                        <p:cTn id="331" dur="1000" fill="hold"/>
                                         <p:tgtEl>
                                           <p:spTgt spid="23"/>
                                         </p:tgtEl>
@@ -15553,14 +15716,14 @@
                                 </p:cTn>
                               </p:par>
                               <p:par>
-                                <p:cTn id="323" presetID="42" presetClass="entr" presetSubtype="0" fill="hold" nodeType="withEffect">
+                                <p:cTn id="332" presetID="42" presetClass="entr" presetSubtype="0" fill="hold" nodeType="withEffect">
                                   <p:stCondLst>
                                     <p:cond delay="0"/>
                                   </p:stCondLst>
                                   <p:childTnLst>
                                     <p:set>
                                       <p:cBhvr>
-                                        <p:cTn id="324" dur="1" fill="hold">
+                                        <p:cTn id="333" dur="1" fill="hold">
                                           <p:stCondLst>
                                             <p:cond delay="0"/>
                                           </p:stCondLst>
@@ -15578,7 +15741,7 @@
                                     </p:set>
                                     <p:animEffect transition="in" filter="fade">
                                       <p:cBhvr>
-                                        <p:cTn id="325" dur="1000"/>
+                                        <p:cTn id="334" dur="1000"/>
                                         <p:tgtEl>
                                           <p:spTgt spid="21"/>
                                         </p:tgtEl>
@@ -15586,7 +15749,7 @@
                                     </p:animEffect>
                                     <p:anim calcmode="lin" valueType="num">
                                       <p:cBhvr>
-                                        <p:cTn id="326" dur="1000" fill="hold"/>
+                                        <p:cTn id="335" dur="1000" fill="hold"/>
                                         <p:tgtEl>
                                           <p:spTgt spid="21"/>
                                         </p:tgtEl>
@@ -15609,7 +15772,7 @@
                                     </p:anim>
                                     <p:anim calcmode="lin" valueType="num">
                                       <p:cBhvr>
-                                        <p:cTn id="327" dur="1000" fill="hold"/>
+                                        <p:cTn id="336" dur="1000" fill="hold"/>
                                         <p:tgtEl>
                                           <p:spTgt spid="21"/>
                                         </p:tgtEl>
@@ -15634,14 +15797,14 @@
                                 </p:cTn>
                               </p:par>
                               <p:par>
-                                <p:cTn id="328" presetID="42" presetClass="entr" presetSubtype="0" fill="hold" nodeType="withEffect">
+                                <p:cTn id="337" presetID="42" presetClass="entr" presetSubtype="0" fill="hold" nodeType="withEffect">
                                   <p:stCondLst>
                                     <p:cond delay="0"/>
                                   </p:stCondLst>
                                   <p:childTnLst>
                                     <p:set>
                                       <p:cBhvr>
-                                        <p:cTn id="329" dur="1" fill="hold">
+                                        <p:cTn id="338" dur="1" fill="hold">
                                           <p:stCondLst>
                                             <p:cond delay="0"/>
                                           </p:stCondLst>
@@ -15659,7 +15822,7 @@
                                     </p:set>
                                     <p:animEffect transition="in" filter="fade">
                                       <p:cBhvr>
-                                        <p:cTn id="330" dur="1000"/>
+                                        <p:cTn id="339" dur="1000"/>
                                         <p:tgtEl>
                                           <p:spTgt spid="25"/>
                                         </p:tgtEl>
@@ -15667,7 +15830,7 @@
                                     </p:animEffect>
                                     <p:anim calcmode="lin" valueType="num">
                                       <p:cBhvr>
-                                        <p:cTn id="331" dur="1000" fill="hold"/>
+                                        <p:cTn id="340" dur="1000" fill="hold"/>
                                         <p:tgtEl>
                                           <p:spTgt spid="25"/>
                                         </p:tgtEl>
@@ -15690,7 +15853,7 @@
                                     </p:anim>
                                     <p:anim calcmode="lin" valueType="num">
                                       <p:cBhvr>
-                                        <p:cTn id="332" dur="1000" fill="hold"/>
+                                        <p:cTn id="341" dur="1000" fill="hold"/>
                                         <p:tgtEl>
                                           <p:spTgt spid="25"/>
                                         </p:tgtEl>
@@ -15814,6 +15977,9 @@
       <p:bldP spid="71" grpId="1" animBg="1"/>
       <p:bldP spid="72" grpId="0" animBg="1"/>
       <p:bldP spid="72" grpId="1" animBg="1"/>
+      <p:bldP spid="2" grpId="0"/>
+      <p:bldP spid="73" grpId="0"/>
+      <p:bldP spid="74" grpId="0"/>
     </p:bldLst>
   </p:timing>
 </p:sld>

--- a/经验技巧总结/演讲：客户价值规划/客户价值规划.pptx
+++ b/经验技巧总结/演讲：客户价值规划/客户价值规划.pptx
@@ -5,10 +5,10 @@
     <p:sldMasterId id="2147483648" r:id="rId1"/>
   </p:sldMasterIdLst>
   <p:notesMasterIdLst>
-    <p:notesMasterId r:id="rId19"/>
+    <p:notesMasterId r:id="rId20"/>
   </p:notesMasterIdLst>
   <p:handoutMasterIdLst>
-    <p:handoutMasterId r:id="rId20"/>
+    <p:handoutMasterId r:id="rId21"/>
   </p:handoutMasterIdLst>
   <p:sldIdLst>
     <p:sldId id="624" r:id="rId2"/>
@@ -20,14 +20,15 @@
     <p:sldId id="641" r:id="rId8"/>
     <p:sldId id="642" r:id="rId9"/>
     <p:sldId id="649" r:id="rId10"/>
-    <p:sldId id="643" r:id="rId11"/>
-    <p:sldId id="644" r:id="rId12"/>
-    <p:sldId id="645" r:id="rId13"/>
-    <p:sldId id="646" r:id="rId14"/>
-    <p:sldId id="647" r:id="rId15"/>
-    <p:sldId id="640" r:id="rId16"/>
-    <p:sldId id="650" r:id="rId17"/>
-    <p:sldId id="597" r:id="rId18"/>
+    <p:sldId id="651" r:id="rId11"/>
+    <p:sldId id="643" r:id="rId12"/>
+    <p:sldId id="644" r:id="rId13"/>
+    <p:sldId id="645" r:id="rId14"/>
+    <p:sldId id="646" r:id="rId15"/>
+    <p:sldId id="647" r:id="rId16"/>
+    <p:sldId id="640" r:id="rId17"/>
+    <p:sldId id="650" r:id="rId18"/>
+    <p:sldId id="597" r:id="rId19"/>
   </p:sldIdLst>
   <p:sldSz cx="12192000" cy="6858000"/>
   <p:notesSz cx="6858000" cy="9144000"/>
@@ -250,7 +251,7 @@
             <a:fld id="{43434051-BEF0-7D4C-9196-86755A91DC50}" type="datetimeFigureOut">
               <a:rPr kumimoji="1" lang="zh-CN" altLang="en-US" smtClean="0"/>
               <a:pPr/>
-              <a:t>2016-05-13</a:t>
+              <a:t>2016-05-20</a:t>
             </a:fld>
             <a:endParaRPr kumimoji="1" lang="zh-CN" altLang="en-US"/>
           </a:p>
@@ -417,7 +418,7 @@
             <a:fld id="{74E5CB33-C662-8F41-8A71-5104D135C80E}" type="datetimeFigureOut">
               <a:rPr kumimoji="1" lang="zh-CN" altLang="en-US" smtClean="0"/>
               <a:pPr/>
-              <a:t>2016-05-13</a:t>
+              <a:t>2016-05-20</a:t>
             </a:fld>
             <a:endParaRPr kumimoji="1" lang="zh-CN" altLang="en-US"/>
           </a:p>
@@ -840,7 +841,7 @@
             <a:fld id="{62863DDE-E268-D241-A46D-5F7888E658E3}" type="slidenum">
               <a:rPr kumimoji="1" lang="zh-CN" altLang="en-US" smtClean="0"/>
               <a:pPr/>
-              <a:t>15</a:t>
+              <a:t>16</a:t>
             </a:fld>
             <a:endParaRPr kumimoji="1" lang="zh-CN" altLang="en-US"/>
           </a:p>
@@ -937,7 +938,7 @@
             <a:fld id="{62863DDE-E268-D241-A46D-5F7888E658E3}" type="slidenum">
               <a:rPr kumimoji="1" lang="zh-CN" altLang="en-US" smtClean="0"/>
               <a:pPr/>
-              <a:t>16</a:t>
+              <a:t>17</a:t>
             </a:fld>
             <a:endParaRPr kumimoji="1" lang="zh-CN" altLang="en-US"/>
           </a:p>
@@ -1838,7 +1839,7 @@
             <a:fld id="{62863DDE-E268-D241-A46D-5F7888E658E3}" type="slidenum">
               <a:rPr kumimoji="1" lang="zh-CN" altLang="en-US" smtClean="0"/>
               <a:pPr/>
-              <a:t>10</a:t>
+              <a:t>11</a:t>
             </a:fld>
             <a:endParaRPr kumimoji="1" lang="zh-CN" altLang="en-US"/>
           </a:p>
@@ -3810,7 +3811,7 @@
             <a:fld id="{120C7143-BB4D-47C6-9008-44C955299D49}" type="datetimeFigureOut">
               <a:rPr lang="zh-CN" altLang="en-US" smtClean="0"/>
               <a:pPr/>
-              <a:t>2016-05-13</a:t>
+              <a:t>2016-05-20</a:t>
             </a:fld>
             <a:endParaRPr lang="zh-CN" altLang="en-US"/>
           </a:p>
@@ -4429,6 +4430,133 @@
 </file>
 
 <file path=ppt/slides/slide10.xml><?xml version="1.0" encoding="utf-8"?>
+<p:sld xmlns:a="http://schemas.openxmlformats.org/drawingml/2006/main" xmlns:r="http://schemas.openxmlformats.org/officeDocument/2006/relationships" xmlns:p="http://schemas.openxmlformats.org/presentationml/2006/main">
+  <p:cSld>
+    <p:spTree>
+      <p:nvGrpSpPr>
+        <p:cNvPr id="1" name=""/>
+        <p:cNvGrpSpPr/>
+        <p:nvPr/>
+      </p:nvGrpSpPr>
+      <p:grpSpPr>
+        <a:xfrm>
+          <a:off x="0" y="0"/>
+          <a:ext cx="0" cy="0"/>
+          <a:chOff x="0" y="0"/>
+          <a:chExt cx="0" cy="0"/>
+        </a:xfrm>
+      </p:grpSpPr>
+      <p:pic>
+        <p:nvPicPr>
+          <p:cNvPr id="2" name="图片 1"/>
+          <p:cNvPicPr>
+            <a:picLocks noChangeAspect="1"/>
+          </p:cNvPicPr>
+          <p:nvPr/>
+        </p:nvPicPr>
+        <p:blipFill>
+          <a:blip r:embed="rId2">
+            <a:extLst>
+              <a:ext uri="{28A0092B-C50C-407E-A947-70E740481C1C}">
+                <a14:useLocalDpi xmlns:a14="http://schemas.microsoft.com/office/drawing/2010/main" val="0"/>
+              </a:ext>
+            </a:extLst>
+          </a:blip>
+          <a:stretch>
+            <a:fillRect/>
+          </a:stretch>
+        </p:blipFill>
+        <p:spPr>
+          <a:xfrm>
+            <a:off x="4169867" y="-27353"/>
+            <a:ext cx="3852267" cy="6858000"/>
+          </a:xfrm>
+          <a:prstGeom prst="rect">
+            <a:avLst/>
+          </a:prstGeom>
+        </p:spPr>
+      </p:pic>
+      <p:pic>
+        <p:nvPicPr>
+          <p:cNvPr id="3" name="图片 2"/>
+          <p:cNvPicPr>
+            <a:picLocks noChangeAspect="1"/>
+          </p:cNvPicPr>
+          <p:nvPr/>
+        </p:nvPicPr>
+        <p:blipFill>
+          <a:blip r:embed="rId3">
+            <a:extLst>
+              <a:ext uri="{28A0092B-C50C-407E-A947-70E740481C1C}">
+                <a14:useLocalDpi xmlns:a14="http://schemas.microsoft.com/office/drawing/2010/main" val="0"/>
+              </a:ext>
+            </a:extLst>
+          </a:blip>
+          <a:stretch>
+            <a:fillRect/>
+          </a:stretch>
+        </p:blipFill>
+        <p:spPr>
+          <a:xfrm>
+            <a:off x="0" y="0"/>
+            <a:ext cx="3852267" cy="6858000"/>
+          </a:xfrm>
+          <a:prstGeom prst="rect">
+            <a:avLst/>
+          </a:prstGeom>
+        </p:spPr>
+      </p:pic>
+      <p:pic>
+        <p:nvPicPr>
+          <p:cNvPr id="4" name="图片 3"/>
+          <p:cNvPicPr>
+            <a:picLocks noChangeAspect="1"/>
+          </p:cNvPicPr>
+          <p:nvPr/>
+        </p:nvPicPr>
+        <p:blipFill>
+          <a:blip r:embed="rId4">
+            <a:extLst>
+              <a:ext uri="{28A0092B-C50C-407E-A947-70E740481C1C}">
+                <a14:useLocalDpi xmlns:a14="http://schemas.microsoft.com/office/drawing/2010/main" val="0"/>
+              </a:ext>
+            </a:extLst>
+          </a:blip>
+          <a:stretch>
+            <a:fillRect/>
+          </a:stretch>
+        </p:blipFill>
+        <p:spPr>
+          <a:xfrm>
+            <a:off x="8339733" y="0"/>
+            <a:ext cx="3852267" cy="6858000"/>
+          </a:xfrm>
+          <a:prstGeom prst="rect">
+            <a:avLst/>
+          </a:prstGeom>
+        </p:spPr>
+      </p:pic>
+    </p:spTree>
+    <p:extLst>
+      <p:ext uri="{BB962C8B-B14F-4D97-AF65-F5344CB8AC3E}">
+        <p14:creationId xmlns:p14="http://schemas.microsoft.com/office/powerpoint/2010/main" val="2381679425"/>
+      </p:ext>
+    </p:extLst>
+  </p:cSld>
+  <p:clrMapOvr>
+    <a:masterClrMapping/>
+  </p:clrMapOvr>
+  <p:timing>
+    <p:tnLst>
+      <p:par>
+        <p:cTn id="1" dur="indefinite" restart="never" nodeType="tmRoot"/>
+      </p:par>
+    </p:tnLst>
+  </p:timing>
+</p:sld>
+</file>
+
+<file path=ppt/slides/slide11.xml><?xml version="1.0" encoding="utf-8"?>
 <p:sld xmlns:a="http://schemas.openxmlformats.org/drawingml/2006/main" xmlns:r="http://schemas.openxmlformats.org/officeDocument/2006/relationships" xmlns:p="http://schemas.openxmlformats.org/presentationml/2006/main">
   <p:cSld>
     <p:bg>
@@ -6749,7 +6877,7 @@
 </p:sld>
 </file>
 
-<file path=ppt/slides/slide11.xml><?xml version="1.0" encoding="utf-8"?>
+<file path=ppt/slides/slide12.xml><?xml version="1.0" encoding="utf-8"?>
 <p:sld xmlns:a="http://schemas.openxmlformats.org/drawingml/2006/main" xmlns:r="http://schemas.openxmlformats.org/officeDocument/2006/relationships" xmlns:p="http://schemas.openxmlformats.org/presentationml/2006/main">
   <p:cSld>
     <p:spTree>
@@ -7224,7 +7352,7 @@
 </p:sld>
 </file>
 
-<file path=ppt/slides/slide12.xml><?xml version="1.0" encoding="utf-8"?>
+<file path=ppt/slides/slide13.xml><?xml version="1.0" encoding="utf-8"?>
 <p:sld xmlns:a="http://schemas.openxmlformats.org/drawingml/2006/main" xmlns:r="http://schemas.openxmlformats.org/officeDocument/2006/relationships" xmlns:p="http://schemas.openxmlformats.org/presentationml/2006/main">
   <p:cSld>
     <p:spTree>
@@ -7348,7 +7476,7 @@
 </p:sld>
 </file>
 
-<file path=ppt/slides/slide13.xml><?xml version="1.0" encoding="utf-8"?>
+<file path=ppt/slides/slide14.xml><?xml version="1.0" encoding="utf-8"?>
 <p:sld xmlns:a="http://schemas.openxmlformats.org/drawingml/2006/main" xmlns:r="http://schemas.openxmlformats.org/officeDocument/2006/relationships" xmlns:p="http://schemas.openxmlformats.org/presentationml/2006/main">
   <p:cSld>
     <p:spTree>
@@ -7453,7 +7581,7 @@
 </p:sld>
 </file>
 
-<file path=ppt/slides/slide14.xml><?xml version="1.0" encoding="utf-8"?>
+<file path=ppt/slides/slide15.xml><?xml version="1.0" encoding="utf-8"?>
 <p:sld xmlns:a="http://schemas.openxmlformats.org/drawingml/2006/main" xmlns:r="http://schemas.openxmlformats.org/officeDocument/2006/relationships" xmlns:p="http://schemas.openxmlformats.org/presentationml/2006/main">
   <p:cSld>
     <p:spTree>
@@ -7571,7 +7699,7 @@
 </p:sld>
 </file>
 
-<file path=ppt/slides/slide15.xml><?xml version="1.0" encoding="utf-8"?>
+<file path=ppt/slides/slide16.xml><?xml version="1.0" encoding="utf-8"?>
 <p:sld xmlns:a="http://schemas.openxmlformats.org/drawingml/2006/main" xmlns:r="http://schemas.openxmlformats.org/officeDocument/2006/relationships" xmlns:p="http://schemas.openxmlformats.org/presentationml/2006/main">
   <p:cSld>
     <p:spTree>
@@ -7638,7 +7766,7 @@
 </p:sld>
 </file>
 
-<file path=ppt/slides/slide16.xml><?xml version="1.0" encoding="utf-8"?>
+<file path=ppt/slides/slide17.xml><?xml version="1.0" encoding="utf-8"?>
 <p:sld xmlns:a="http://schemas.openxmlformats.org/drawingml/2006/main" xmlns:r="http://schemas.openxmlformats.org/officeDocument/2006/relationships" xmlns:p="http://schemas.openxmlformats.org/presentationml/2006/main">
   <p:cSld>
     <p:spTree>
@@ -7743,7 +7871,7 @@
 </p:sld>
 </file>
 
-<file path=ppt/slides/slide17.xml><?xml version="1.0" encoding="utf-8"?>
+<file path=ppt/slides/slide18.xml><?xml version="1.0" encoding="utf-8"?>
 <p:sld xmlns:a="http://schemas.openxmlformats.org/drawingml/2006/main" xmlns:r="http://schemas.openxmlformats.org/officeDocument/2006/relationships" xmlns:p="http://schemas.openxmlformats.org/presentationml/2006/main">
   <p:cSld>
     <p:spTree>
@@ -10901,16 +11029,6 @@
               </a:rPr>
               <a:t>个人成长</a:t>
             </a:r>
-            <a:endParaRPr lang="zh-CN" altLang="en-US" dirty="0" smtClean="0">
-              <a:solidFill>
-                <a:schemeClr val="tx2">
-                  <a:lumMod val="75000"/>
-                </a:schemeClr>
-              </a:solidFill>
-              <a:latin typeface="Microsoft YaHei" charset="0"/>
-              <a:ea typeface="Microsoft YaHei" charset="0"/>
-              <a:cs typeface="Microsoft YaHei" charset="0"/>
-            </a:endParaRPr>
           </a:p>
         </p:txBody>
       </p:sp>
@@ -10949,16 +11067,6 @@
               </a:rPr>
               <a:t>薪资激励</a:t>
             </a:r>
-            <a:endParaRPr lang="zh-CN" altLang="en-US" dirty="0" smtClean="0">
-              <a:solidFill>
-                <a:schemeClr val="tx2">
-                  <a:lumMod val="75000"/>
-                </a:schemeClr>
-              </a:solidFill>
-              <a:latin typeface="Microsoft YaHei" charset="0"/>
-              <a:ea typeface="Microsoft YaHei" charset="0"/>
-              <a:cs typeface="Microsoft YaHei" charset="0"/>
-            </a:endParaRPr>
           </a:p>
         </p:txBody>
       </p:sp>
@@ -10997,16 +11105,6 @@
               </a:rPr>
               <a:t>公司平台</a:t>
             </a:r>
-            <a:endParaRPr lang="zh-CN" altLang="en-US" dirty="0" smtClean="0">
-              <a:solidFill>
-                <a:schemeClr val="tx2">
-                  <a:lumMod val="75000"/>
-                </a:schemeClr>
-              </a:solidFill>
-              <a:latin typeface="Microsoft YaHei" charset="0"/>
-              <a:ea typeface="Microsoft YaHei" charset="0"/>
-              <a:cs typeface="Microsoft YaHei" charset="0"/>
-            </a:endParaRPr>
           </a:p>
         </p:txBody>
       </p:sp>
@@ -17634,13 +17732,13 @@
       </p:grpSpPr>
       <p:cxnSp>
         <p:nvCxnSpPr>
-          <p:cNvPr id="4" name="直接连接符 3"/>
+          <p:cNvPr id="35" name="直接连接符 34"/>
           <p:cNvCxnSpPr/>
           <p:nvPr/>
         </p:nvCxnSpPr>
         <p:spPr>
           <a:xfrm>
-            <a:off x="1343472" y="3308323"/>
+            <a:off x="1232632" y="3308323"/>
             <a:ext cx="9217024" cy="0"/>
           </a:xfrm>
           <a:prstGeom prst="line">
@@ -17671,13 +17769,13 @@
       </p:cxnSp>
       <p:grpSp>
         <p:nvGrpSpPr>
-          <p:cNvPr id="11" name="组合 10"/>
+          <p:cNvPr id="36" name="组合 35"/>
           <p:cNvGrpSpPr/>
           <p:nvPr/>
         </p:nvGrpSpPr>
         <p:grpSpPr>
           <a:xfrm>
-            <a:off x="2200367" y="1916832"/>
+            <a:off x="2089527" y="1916832"/>
             <a:ext cx="79209" cy="1391491"/>
             <a:chOff x="1932524" y="2492896"/>
             <a:chExt cx="79209" cy="1391491"/>
@@ -17685,7 +17783,7 @@
         </p:grpSpPr>
         <p:sp>
           <p:nvSpPr>
-            <p:cNvPr id="6" name="流程图: 联系 5"/>
+            <p:cNvPr id="37" name="流程图: 联系 36"/>
             <p:cNvSpPr/>
             <p:nvPr/>
           </p:nvSpPr>
@@ -17744,9 +17842,9 @@
         </p:sp>
         <p:cxnSp>
           <p:nvCxnSpPr>
-            <p:cNvPr id="8" name="直接连接符 7"/>
+            <p:cNvPr id="38" name="直接连接符 37"/>
             <p:cNvCxnSpPr>
-              <a:stCxn id="6" idx="4"/>
+              <a:stCxn id="37" idx="4"/>
             </p:cNvCxnSpPr>
             <p:nvPr/>
           </p:nvCxnSpPr>
@@ -17784,13 +17882,13 @@
       </p:grpSp>
       <p:sp>
         <p:nvSpPr>
-          <p:cNvPr id="12" name="文本框 11"/>
+          <p:cNvPr id="39" name="文本框 38"/>
           <p:cNvSpPr txBox="1"/>
           <p:nvPr/>
         </p:nvSpPr>
         <p:spPr>
           <a:xfrm>
-            <a:off x="1955540" y="1507896"/>
+            <a:off x="1844700" y="1507896"/>
             <a:ext cx="648072" cy="369332"/>
           </a:xfrm>
           <a:prstGeom prst="rect">
@@ -17832,13 +17930,13 @@
       </p:sp>
       <p:grpSp>
         <p:nvGrpSpPr>
-          <p:cNvPr id="13" name="组合 12"/>
+          <p:cNvPr id="40" name="组合 39"/>
           <p:cNvGrpSpPr/>
           <p:nvPr/>
         </p:nvGrpSpPr>
         <p:grpSpPr>
           <a:xfrm rot="10800000">
-            <a:off x="3134456" y="3298839"/>
+            <a:off x="3023616" y="3298839"/>
             <a:ext cx="79209" cy="1391491"/>
             <a:chOff x="1932524" y="2492896"/>
             <a:chExt cx="79209" cy="1391491"/>
@@ -17846,7 +17944,7 @@
         </p:grpSpPr>
         <p:sp>
           <p:nvSpPr>
-            <p:cNvPr id="14" name="流程图: 联系 13"/>
+            <p:cNvPr id="41" name="流程图: 联系 40"/>
             <p:cNvSpPr/>
             <p:nvPr/>
           </p:nvSpPr>
@@ -17905,9 +18003,9 @@
         </p:sp>
         <p:cxnSp>
           <p:nvCxnSpPr>
-            <p:cNvPr id="15" name="直接连接符 14"/>
+            <p:cNvPr id="42" name="直接连接符 41"/>
             <p:cNvCxnSpPr>
-              <a:stCxn id="14" idx="4"/>
+              <a:stCxn id="41" idx="4"/>
             </p:cNvCxnSpPr>
             <p:nvPr/>
           </p:nvCxnSpPr>
@@ -17945,13 +18043,13 @@
       </p:grpSp>
       <p:sp>
         <p:nvSpPr>
-          <p:cNvPr id="16" name="文本框 15"/>
+          <p:cNvPr id="43" name="文本框 42"/>
           <p:cNvSpPr txBox="1"/>
           <p:nvPr/>
         </p:nvSpPr>
         <p:spPr>
           <a:xfrm>
-            <a:off x="2639616" y="4725564"/>
+            <a:off x="2528776" y="4725564"/>
             <a:ext cx="1148099" cy="646331"/>
           </a:xfrm>
           <a:prstGeom prst="rect">
@@ -17993,13 +18091,13 @@
       </p:sp>
       <p:grpSp>
         <p:nvGrpSpPr>
-          <p:cNvPr id="17" name="组合 16"/>
+          <p:cNvPr id="44" name="组合 43"/>
           <p:cNvGrpSpPr/>
           <p:nvPr/>
         </p:nvGrpSpPr>
         <p:grpSpPr>
           <a:xfrm>
-            <a:off x="4756651" y="1921430"/>
+            <a:off x="4645811" y="1921430"/>
             <a:ext cx="79209" cy="1391491"/>
             <a:chOff x="1932524" y="2492896"/>
             <a:chExt cx="79209" cy="1391491"/>
@@ -18007,7 +18105,7 @@
         </p:grpSpPr>
         <p:sp>
           <p:nvSpPr>
-            <p:cNvPr id="18" name="流程图: 联系 17"/>
+            <p:cNvPr id="45" name="流程图: 联系 44"/>
             <p:cNvSpPr/>
             <p:nvPr/>
           </p:nvSpPr>
@@ -18066,9 +18164,9 @@
         </p:sp>
         <p:cxnSp>
           <p:nvCxnSpPr>
-            <p:cNvPr id="19" name="直接连接符 18"/>
+            <p:cNvPr id="46" name="直接连接符 45"/>
             <p:cNvCxnSpPr>
-              <a:stCxn id="18" idx="4"/>
+              <a:stCxn id="45" idx="4"/>
             </p:cNvCxnSpPr>
             <p:nvPr/>
           </p:nvCxnSpPr>
@@ -18106,13 +18204,13 @@
       </p:grpSp>
       <p:sp>
         <p:nvSpPr>
-          <p:cNvPr id="20" name="文本框 19"/>
+          <p:cNvPr id="47" name="文本框 46"/>
           <p:cNvSpPr txBox="1"/>
           <p:nvPr/>
         </p:nvSpPr>
         <p:spPr>
           <a:xfrm>
-            <a:off x="4511824" y="1512494"/>
+            <a:off x="4400984" y="1512494"/>
             <a:ext cx="648072" cy="369332"/>
           </a:xfrm>
           <a:prstGeom prst="rect">
@@ -18154,13 +18252,13 @@
       </p:sp>
       <p:grpSp>
         <p:nvGrpSpPr>
-          <p:cNvPr id="21" name="组合 20"/>
+          <p:cNvPr id="48" name="组合 47"/>
           <p:cNvGrpSpPr/>
           <p:nvPr/>
         </p:nvGrpSpPr>
         <p:grpSpPr>
           <a:xfrm rot="10800000">
-            <a:off x="6378845" y="3298839"/>
+            <a:off x="6268005" y="3298839"/>
             <a:ext cx="79209" cy="1391491"/>
             <a:chOff x="1932524" y="2492896"/>
             <a:chExt cx="79209" cy="1391491"/>
@@ -18168,7 +18266,7 @@
         </p:grpSpPr>
         <p:sp>
           <p:nvSpPr>
-            <p:cNvPr id="22" name="流程图: 联系 21"/>
+            <p:cNvPr id="49" name="流程图: 联系 48"/>
             <p:cNvSpPr/>
             <p:nvPr/>
           </p:nvSpPr>
@@ -18227,9 +18325,9 @@
         </p:sp>
         <p:cxnSp>
           <p:nvCxnSpPr>
-            <p:cNvPr id="23" name="直接连接符 22"/>
+            <p:cNvPr id="50" name="直接连接符 49"/>
             <p:cNvCxnSpPr>
-              <a:stCxn id="22" idx="4"/>
+              <a:stCxn id="49" idx="4"/>
             </p:cNvCxnSpPr>
             <p:nvPr/>
           </p:nvCxnSpPr>
@@ -18267,13 +18365,13 @@
       </p:grpSp>
       <p:sp>
         <p:nvSpPr>
-          <p:cNvPr id="24" name="文本框 23"/>
+          <p:cNvPr id="51" name="文本框 50"/>
           <p:cNvSpPr txBox="1"/>
           <p:nvPr/>
         </p:nvSpPr>
         <p:spPr>
           <a:xfrm>
-            <a:off x="5533542" y="4725564"/>
+            <a:off x="5422702" y="4725564"/>
             <a:ext cx="1849025" cy="646331"/>
           </a:xfrm>
           <a:prstGeom prst="rect">
@@ -18305,13 +18403,13 @@
       </p:sp>
       <p:grpSp>
         <p:nvGrpSpPr>
-          <p:cNvPr id="25" name="组合 24"/>
+          <p:cNvPr id="52" name="组合 51"/>
           <p:cNvGrpSpPr/>
           <p:nvPr/>
         </p:nvGrpSpPr>
         <p:grpSpPr>
           <a:xfrm>
-            <a:off x="8081393" y="1921203"/>
+            <a:off x="7970553" y="1921203"/>
             <a:ext cx="79209" cy="1391491"/>
             <a:chOff x="1932524" y="2492896"/>
             <a:chExt cx="79209" cy="1391491"/>
@@ -18319,7 +18417,7 @@
         </p:grpSpPr>
         <p:sp>
           <p:nvSpPr>
-            <p:cNvPr id="26" name="流程图: 联系 25"/>
+            <p:cNvPr id="53" name="流程图: 联系 52"/>
             <p:cNvSpPr/>
             <p:nvPr/>
           </p:nvSpPr>
@@ -18378,9 +18476,9 @@
         </p:sp>
         <p:cxnSp>
           <p:nvCxnSpPr>
-            <p:cNvPr id="27" name="直接连接符 26"/>
+            <p:cNvPr id="54" name="直接连接符 53"/>
             <p:cNvCxnSpPr>
-              <a:stCxn id="26" idx="4"/>
+              <a:stCxn id="53" idx="4"/>
             </p:cNvCxnSpPr>
             <p:nvPr/>
           </p:nvCxnSpPr>
@@ -18418,13 +18516,13 @@
       </p:grpSp>
       <p:sp>
         <p:nvSpPr>
-          <p:cNvPr id="28" name="文本框 27"/>
+          <p:cNvPr id="55" name="文本框 54"/>
           <p:cNvSpPr txBox="1"/>
           <p:nvPr/>
         </p:nvSpPr>
         <p:spPr>
           <a:xfrm>
-            <a:off x="7320136" y="1512267"/>
+            <a:off x="7209296" y="1512267"/>
             <a:ext cx="1680932" cy="923330"/>
           </a:xfrm>
           <a:prstGeom prst="rect">
@@ -18469,13 +18567,13 @@
       </p:sp>
       <p:grpSp>
         <p:nvGrpSpPr>
-          <p:cNvPr id="29" name="组合 28"/>
+          <p:cNvPr id="56" name="组合 55"/>
           <p:cNvGrpSpPr/>
           <p:nvPr/>
         </p:nvGrpSpPr>
         <p:grpSpPr>
           <a:xfrm rot="10800000">
-            <a:off x="9700790" y="3300160"/>
+            <a:off x="9589950" y="3300160"/>
             <a:ext cx="79209" cy="1391491"/>
             <a:chOff x="1932524" y="2492896"/>
             <a:chExt cx="79209" cy="1391491"/>
@@ -18483,7 +18581,7 @@
         </p:grpSpPr>
         <p:sp>
           <p:nvSpPr>
-            <p:cNvPr id="30" name="流程图: 联系 29"/>
+            <p:cNvPr id="57" name="流程图: 联系 56"/>
             <p:cNvSpPr/>
             <p:nvPr/>
           </p:nvSpPr>
@@ -18542,9 +18640,9 @@
         </p:sp>
         <p:cxnSp>
           <p:nvCxnSpPr>
-            <p:cNvPr id="31" name="直接连接符 30"/>
+            <p:cNvPr id="58" name="直接连接符 57"/>
             <p:cNvCxnSpPr>
-              <a:stCxn id="30" idx="4"/>
+              <a:stCxn id="57" idx="4"/>
             </p:cNvCxnSpPr>
             <p:nvPr/>
           </p:nvCxnSpPr>
@@ -18582,13 +18680,13 @@
       </p:grpSp>
       <p:sp>
         <p:nvSpPr>
-          <p:cNvPr id="32" name="文本框 31"/>
+          <p:cNvPr id="59" name="文本框 58"/>
           <p:cNvSpPr txBox="1"/>
           <p:nvPr/>
         </p:nvSpPr>
         <p:spPr>
           <a:xfrm>
-            <a:off x="9258136" y="4726885"/>
+            <a:off x="9147296" y="4726885"/>
             <a:ext cx="1043726" cy="369332"/>
           </a:xfrm>
           <a:prstGeom prst="rect">
@@ -18646,14 +18744,162 @@
       </p:sp>
       <p:sp>
         <p:nvSpPr>
-          <p:cNvPr id="33" name="文本框 32"/>
+          <p:cNvPr id="60" name="文本框 59"/>
           <p:cNvSpPr txBox="1"/>
           <p:nvPr/>
         </p:nvSpPr>
         <p:spPr>
           <a:xfrm>
-            <a:off x="2239971" y="2943589"/>
+            <a:off x="2104494" y="1945044"/>
+            <a:ext cx="1619397" cy="369332"/>
+          </a:xfrm>
+          <a:prstGeom prst="rect">
+            <a:avLst/>
+          </a:prstGeom>
+          <a:noFill/>
+        </p:spPr>
+        <p:txBody>
+          <a:bodyPr wrap="square" rtlCol="0">
+            <a:spAutoFit/>
+          </a:bodyPr>
+          <a:lstStyle/>
+          <a:p>
+            <a:r>
+              <a:rPr lang="en-US" altLang="zh-CN" dirty="0" smtClean="0">
+                <a:solidFill>
+                  <a:schemeClr val="tx2">
+                    <a:lumMod val="75000"/>
+                  </a:schemeClr>
+                </a:solidFill>
+                <a:latin typeface="Microsoft YaHei" charset="0"/>
+                <a:ea typeface="Microsoft YaHei" charset="0"/>
+                <a:cs typeface="Microsoft YaHei" charset="0"/>
+              </a:rPr>
+              <a:t>2013</a:t>
+            </a:r>
+            <a:r>
+              <a:rPr lang="en-US" altLang="zh-CN" dirty="0" smtClean="0">
+                <a:solidFill>
+                  <a:schemeClr val="tx2">
+                    <a:lumMod val="75000"/>
+                  </a:schemeClr>
+                </a:solidFill>
+                <a:latin typeface="Microsoft YaHei" charset="0"/>
+                <a:ea typeface="Microsoft YaHei" charset="0"/>
+                <a:cs typeface="Microsoft YaHei" charset="0"/>
+              </a:rPr>
+              <a:t>.11</a:t>
+            </a:r>
+            <a:r>
+              <a:rPr lang="zh-CN" altLang="en-US" dirty="0" smtClean="0">
+                <a:solidFill>
+                  <a:schemeClr val="tx2">
+                    <a:lumMod val="75000"/>
+                  </a:schemeClr>
+                </a:solidFill>
+                <a:latin typeface="Microsoft YaHei" charset="0"/>
+                <a:ea typeface="Microsoft YaHei" charset="0"/>
+                <a:cs typeface="Microsoft YaHei" charset="0"/>
+              </a:rPr>
+              <a:t>至今</a:t>
+            </a:r>
+            <a:endParaRPr lang="zh-CN" altLang="en-US" dirty="0" smtClean="0">
+              <a:solidFill>
+                <a:schemeClr val="tx2">
+                  <a:lumMod val="75000"/>
+                </a:schemeClr>
+              </a:solidFill>
+              <a:latin typeface="Microsoft YaHei" charset="0"/>
+              <a:ea typeface="Microsoft YaHei" charset="0"/>
+              <a:cs typeface="Microsoft YaHei" charset="0"/>
+            </a:endParaRPr>
+          </a:p>
+        </p:txBody>
+      </p:sp>
+      <p:sp>
+        <p:nvSpPr>
+          <p:cNvPr id="61" name="文本框 60"/>
+          <p:cNvSpPr txBox="1"/>
+          <p:nvPr/>
+        </p:nvSpPr>
+        <p:spPr>
+          <a:xfrm>
+            <a:off x="4667555" y="1945044"/>
             <a:ext cx="1580215" cy="369332"/>
+          </a:xfrm>
+          <a:prstGeom prst="rect">
+            <a:avLst/>
+          </a:prstGeom>
+          <a:noFill/>
+        </p:spPr>
+        <p:txBody>
+          <a:bodyPr wrap="square" rtlCol="0">
+            <a:spAutoFit/>
+          </a:bodyPr>
+          <a:lstStyle/>
+          <a:p>
+            <a:r>
+              <a:rPr lang="en-US" altLang="zh-CN" dirty="0" smtClean="0">
+                <a:solidFill>
+                  <a:schemeClr val="tx2">
+                    <a:lumMod val="75000"/>
+                  </a:schemeClr>
+                </a:solidFill>
+                <a:latin typeface="Microsoft YaHei" charset="0"/>
+                <a:ea typeface="Microsoft YaHei" charset="0"/>
+                <a:cs typeface="Microsoft YaHei" charset="0"/>
+              </a:rPr>
+              <a:t>2016.01</a:t>
+            </a:r>
+            <a:r>
+              <a:rPr lang="zh-CN" altLang="en-US" dirty="0" smtClean="0">
+                <a:solidFill>
+                  <a:schemeClr val="tx2">
+                    <a:lumMod val="75000"/>
+                  </a:schemeClr>
+                </a:solidFill>
+                <a:latin typeface="Microsoft YaHei" charset="0"/>
+                <a:ea typeface="Microsoft YaHei" charset="0"/>
+                <a:cs typeface="Microsoft YaHei" charset="0"/>
+              </a:rPr>
+              <a:t>至今</a:t>
+            </a:r>
+            <a:r>
+              <a:rPr lang="en-US" altLang="zh-CN" dirty="0" smtClean="0">
+                <a:solidFill>
+                  <a:schemeClr val="tx2">
+                    <a:lumMod val="75000"/>
+                  </a:schemeClr>
+                </a:solidFill>
+                <a:latin typeface="Microsoft YaHei" charset="0"/>
+                <a:ea typeface="Microsoft YaHei" charset="0"/>
+                <a:cs typeface="Microsoft YaHei" charset="0"/>
+              </a:rPr>
+              <a:t>   </a:t>
+            </a:r>
+            <a:endParaRPr lang="zh-CN" altLang="en-US" dirty="0" smtClean="0">
+              <a:solidFill>
+                <a:schemeClr val="tx2">
+                  <a:lumMod val="75000"/>
+                </a:schemeClr>
+              </a:solidFill>
+              <a:latin typeface="Microsoft YaHei" charset="0"/>
+              <a:ea typeface="Microsoft YaHei" charset="0"/>
+              <a:cs typeface="Microsoft YaHei" charset="0"/>
+            </a:endParaRPr>
+          </a:p>
+        </p:txBody>
+      </p:sp>
+      <p:sp>
+        <p:nvSpPr>
+          <p:cNvPr id="62" name="文本框 61"/>
+          <p:cNvSpPr txBox="1"/>
+          <p:nvPr/>
+        </p:nvSpPr>
+        <p:spPr>
+          <a:xfrm>
+            <a:off x="3084993" y="4237192"/>
+            <a:ext cx="1619397" cy="369332"/>
           </a:xfrm>
           <a:prstGeom prst="rect">
             <a:avLst/>
@@ -18680,6 +18926,19 @@
               <a:t>2014</a:t>
             </a:r>
             <a:r>
+              <a:rPr lang="en-US" altLang="zh-CN" dirty="0" smtClean="0">
+                <a:solidFill>
+                  <a:schemeClr val="tx2">
+                    <a:lumMod val="75000"/>
+                  </a:schemeClr>
+                </a:solidFill>
+                <a:latin typeface="Microsoft YaHei" charset="0"/>
+                <a:ea typeface="Microsoft YaHei" charset="0"/>
+                <a:cs typeface="Microsoft YaHei" charset="0"/>
+              </a:rPr>
+              <a:t>.08</a:t>
+            </a:r>
+            <a:r>
               <a:rPr lang="zh-CN" altLang="en-US" dirty="0" smtClean="0">
                 <a:solidFill>
                   <a:schemeClr val="tx2">
@@ -18690,20 +18949,7 @@
                 <a:ea typeface="Microsoft YaHei" charset="0"/>
                 <a:cs typeface="Microsoft YaHei" charset="0"/>
               </a:rPr>
-              <a:t>～</a:t>
-            </a:r>
-            <a:r>
-              <a:rPr lang="en-US" altLang="zh-CN" dirty="0" smtClean="0">
-                <a:solidFill>
-                  <a:schemeClr val="tx2">
-                    <a:lumMod val="75000"/>
-                  </a:schemeClr>
-                </a:solidFill>
-                <a:latin typeface="Microsoft YaHei" charset="0"/>
-                <a:ea typeface="Microsoft YaHei" charset="0"/>
-                <a:cs typeface="Microsoft YaHei" charset="0"/>
-              </a:rPr>
-              <a:t>2015</a:t>
+              <a:t>至今</a:t>
             </a:r>
             <a:endParaRPr lang="zh-CN" altLang="en-US" dirty="0" smtClean="0">
               <a:solidFill>
@@ -18720,13 +18966,13 @@
       </p:sp>
       <p:sp>
         <p:nvSpPr>
-          <p:cNvPr id="34" name="文本框 33"/>
+          <p:cNvPr id="63" name="文本框 62"/>
           <p:cNvSpPr txBox="1"/>
           <p:nvPr/>
         </p:nvSpPr>
         <p:spPr>
           <a:xfrm>
-            <a:off x="4804776" y="2943589"/>
+            <a:off x="6426606" y="4237192"/>
             <a:ext cx="1580215" cy="369332"/>
           </a:xfrm>
           <a:prstGeom prst="rect">
@@ -18751,7 +18997,7 @@
                 <a:ea typeface="Microsoft YaHei" charset="0"/>
                 <a:cs typeface="Microsoft YaHei" charset="0"/>
               </a:rPr>
-              <a:t>2016</a:t>
+              <a:t>2016.03</a:t>
             </a:r>
             <a:r>
               <a:rPr lang="zh-CN" altLang="en-US" dirty="0" smtClean="0">
@@ -18764,7 +19010,155 @@
                 <a:ea typeface="Microsoft YaHei" charset="0"/>
                 <a:cs typeface="Microsoft YaHei" charset="0"/>
               </a:rPr>
-              <a:t>～</a:t>
+              <a:t>至今</a:t>
+            </a:r>
+            <a:r>
+              <a:rPr lang="en-US" altLang="zh-CN" dirty="0" smtClean="0">
+                <a:solidFill>
+                  <a:schemeClr val="tx2">
+                    <a:lumMod val="75000"/>
+                  </a:schemeClr>
+                </a:solidFill>
+                <a:latin typeface="Microsoft YaHei" charset="0"/>
+                <a:ea typeface="Microsoft YaHei" charset="0"/>
+                <a:cs typeface="Microsoft YaHei" charset="0"/>
+              </a:rPr>
+              <a:t>   </a:t>
+            </a:r>
+            <a:endParaRPr lang="zh-CN" altLang="en-US" dirty="0" smtClean="0">
+              <a:solidFill>
+                <a:schemeClr val="tx2">
+                  <a:lumMod val="75000"/>
+                </a:schemeClr>
+              </a:solidFill>
+              <a:latin typeface="Microsoft YaHei" charset="0"/>
+              <a:ea typeface="Microsoft YaHei" charset="0"/>
+              <a:cs typeface="Microsoft YaHei" charset="0"/>
+            </a:endParaRPr>
+          </a:p>
+        </p:txBody>
+      </p:sp>
+      <p:sp>
+        <p:nvSpPr>
+          <p:cNvPr id="64" name="文本框 63"/>
+          <p:cNvSpPr txBox="1"/>
+          <p:nvPr/>
+        </p:nvSpPr>
+        <p:spPr>
+          <a:xfrm>
+            <a:off x="8071270" y="1947940"/>
+            <a:ext cx="1580215" cy="369332"/>
+          </a:xfrm>
+          <a:prstGeom prst="rect">
+            <a:avLst/>
+          </a:prstGeom>
+          <a:noFill/>
+        </p:spPr>
+        <p:txBody>
+          <a:bodyPr wrap="square" rtlCol="0">
+            <a:spAutoFit/>
+          </a:bodyPr>
+          <a:lstStyle/>
+          <a:p>
+            <a:r>
+              <a:rPr lang="en-US" altLang="zh-CN" dirty="0" smtClean="0">
+                <a:solidFill>
+                  <a:schemeClr val="tx2">
+                    <a:lumMod val="75000"/>
+                  </a:schemeClr>
+                </a:solidFill>
+                <a:latin typeface="Microsoft YaHei" charset="0"/>
+                <a:ea typeface="Microsoft YaHei" charset="0"/>
+                <a:cs typeface="Microsoft YaHei" charset="0"/>
+              </a:rPr>
+              <a:t>2016.04</a:t>
+            </a:r>
+            <a:r>
+              <a:rPr lang="zh-CN" altLang="en-US" dirty="0" smtClean="0">
+                <a:solidFill>
+                  <a:schemeClr val="tx2">
+                    <a:lumMod val="75000"/>
+                  </a:schemeClr>
+                </a:solidFill>
+                <a:latin typeface="Microsoft YaHei" charset="0"/>
+                <a:ea typeface="Microsoft YaHei" charset="0"/>
+                <a:cs typeface="Microsoft YaHei" charset="0"/>
+              </a:rPr>
+              <a:t>至今</a:t>
+            </a:r>
+            <a:r>
+              <a:rPr lang="en-US" altLang="zh-CN" dirty="0" smtClean="0">
+                <a:solidFill>
+                  <a:schemeClr val="tx2">
+                    <a:lumMod val="75000"/>
+                  </a:schemeClr>
+                </a:solidFill>
+                <a:latin typeface="Microsoft YaHei" charset="0"/>
+                <a:ea typeface="Microsoft YaHei" charset="0"/>
+                <a:cs typeface="Microsoft YaHei" charset="0"/>
+              </a:rPr>
+              <a:t>   </a:t>
+            </a:r>
+            <a:endParaRPr lang="zh-CN" altLang="en-US" dirty="0" smtClean="0">
+              <a:solidFill>
+                <a:schemeClr val="tx2">
+                  <a:lumMod val="75000"/>
+                </a:schemeClr>
+              </a:solidFill>
+              <a:latin typeface="Microsoft YaHei" charset="0"/>
+              <a:ea typeface="Microsoft YaHei" charset="0"/>
+              <a:cs typeface="Microsoft YaHei" charset="0"/>
+            </a:endParaRPr>
+          </a:p>
+        </p:txBody>
+      </p:sp>
+      <p:sp>
+        <p:nvSpPr>
+          <p:cNvPr id="65" name="文本框 64"/>
+          <p:cNvSpPr txBox="1"/>
+          <p:nvPr/>
+        </p:nvSpPr>
+        <p:spPr>
+          <a:xfrm>
+            <a:off x="9708763" y="4237192"/>
+            <a:ext cx="1580215" cy="369332"/>
+          </a:xfrm>
+          <a:prstGeom prst="rect">
+            <a:avLst/>
+          </a:prstGeom>
+          <a:noFill/>
+        </p:spPr>
+        <p:txBody>
+          <a:bodyPr wrap="square" rtlCol="0">
+            <a:spAutoFit/>
+          </a:bodyPr>
+          <a:lstStyle/>
+          <a:p>
+            <a:r>
+              <a:rPr lang="en-US" altLang="zh-CN" dirty="0" smtClean="0">
+                <a:solidFill>
+                  <a:schemeClr val="tx2">
+                    <a:lumMod val="75000"/>
+                  </a:schemeClr>
+                </a:solidFill>
+                <a:latin typeface="Microsoft YaHei" charset="0"/>
+                <a:ea typeface="Microsoft YaHei" charset="0"/>
+                <a:cs typeface="Microsoft YaHei" charset="0"/>
+              </a:rPr>
+              <a:t>2016.05</a:t>
+            </a:r>
+            <a:r>
+              <a:rPr lang="zh-CN" altLang="en-US" dirty="0" smtClean="0">
+                <a:solidFill>
+                  <a:schemeClr val="tx2">
+                    <a:lumMod val="75000"/>
+                  </a:schemeClr>
+                </a:solidFill>
+                <a:latin typeface="Microsoft YaHei" charset="0"/>
+                <a:ea typeface="Microsoft YaHei" charset="0"/>
+                <a:cs typeface="Microsoft YaHei" charset="0"/>
+              </a:rPr>
+              <a:t>至今</a:t>
             </a:r>
             <a:r>
               <a:rPr lang="en-US" altLang="zh-CN" dirty="0" smtClean="0">
@@ -18836,7 +19230,7 @@
                                           </p:stCondLst>
                                         </p:cTn>
                                         <p:tgtEl>
-                                          <p:spTgt spid="11"/>
+                                          <p:spTgt spid="36"/>
                                         </p:tgtEl>
                                         <p:attrNameLst>
                                           <p:attrName>style.visibility</p:attrName>
@@ -18850,7 +19244,7 @@
                                       <p:cBhvr>
                                         <p:cTn id="7" dur="500"/>
                                         <p:tgtEl>
-                                          <p:spTgt spid="11"/>
+                                          <p:spTgt spid="36"/>
                                         </p:tgtEl>
                                       </p:cBhvr>
                                     </p:animEffect>
@@ -18871,7 +19265,7 @@
                                           </p:stCondLst>
                                         </p:cTn>
                                         <p:tgtEl>
-                                          <p:spTgt spid="12"/>
+                                          <p:spTgt spid="39"/>
                                         </p:tgtEl>
                                         <p:attrNameLst>
                                           <p:attrName>style.visibility</p:attrName>
@@ -18885,7 +19279,7 @@
                                       <p:cBhvr>
                                         <p:cTn id="10" dur="500"/>
                                         <p:tgtEl>
-                                          <p:spTgt spid="12"/>
+                                          <p:spTgt spid="39"/>
                                         </p:tgtEl>
                                       </p:cBhvr>
                                     </p:animEffect>
@@ -18906,7 +19300,7 @@
                                           </p:stCondLst>
                                         </p:cTn>
                                         <p:tgtEl>
-                                          <p:spTgt spid="13"/>
+                                          <p:spTgt spid="40"/>
                                         </p:tgtEl>
                                         <p:attrNameLst>
                                           <p:attrName>style.visibility</p:attrName>
@@ -18920,7 +19314,7 @@
                                       <p:cBhvr>
                                         <p:cTn id="13" dur="500"/>
                                         <p:tgtEl>
-                                          <p:spTgt spid="13"/>
+                                          <p:spTgt spid="40"/>
                                         </p:tgtEl>
                                       </p:cBhvr>
                                     </p:animEffect>
@@ -18941,7 +19335,7 @@
                                           </p:stCondLst>
                                         </p:cTn>
                                         <p:tgtEl>
-                                          <p:spTgt spid="33"/>
+                                          <p:spTgt spid="60"/>
                                         </p:tgtEl>
                                         <p:attrNameLst>
                                           <p:attrName>style.visibility</p:attrName>
@@ -18955,7 +19349,7 @@
                                       <p:cBhvr>
                                         <p:cTn id="16" dur="500"/>
                                         <p:tgtEl>
-                                          <p:spTgt spid="33"/>
+                                          <p:spTgt spid="60"/>
                                         </p:tgtEl>
                                       </p:cBhvr>
                                     </p:animEffect>
@@ -18976,7 +19370,7 @@
                                           </p:stCondLst>
                                         </p:cTn>
                                         <p:tgtEl>
-                                          <p:spTgt spid="16"/>
+                                          <p:spTgt spid="43"/>
                                         </p:tgtEl>
                                         <p:attrNameLst>
                                           <p:attrName>style.visibility</p:attrName>
@@ -18990,7 +19384,7 @@
                                       <p:cBhvr>
                                         <p:cTn id="19" dur="500"/>
                                         <p:tgtEl>
-                                          <p:spTgt spid="16"/>
+                                          <p:spTgt spid="43"/>
                                         </p:tgtEl>
                                       </p:cBhvr>
                                     </p:animEffect>
@@ -19029,7 +19423,7 @@
                                           </p:stCondLst>
                                         </p:cTn>
                                         <p:tgtEl>
-                                          <p:spTgt spid="34"/>
+                                          <p:spTgt spid="61"/>
                                         </p:tgtEl>
                                         <p:attrNameLst>
                                           <p:attrName>style.visibility</p:attrName>
@@ -19043,7 +19437,7 @@
                                       <p:cBhvr>
                                         <p:cTn id="24" dur="500"/>
                                         <p:tgtEl>
-                                          <p:spTgt spid="34"/>
+                                          <p:spTgt spid="61"/>
                                         </p:tgtEl>
                                       </p:cBhvr>
                                     </p:animEffect>
@@ -19064,7 +19458,7 @@
                                           </p:stCondLst>
                                         </p:cTn>
                                         <p:tgtEl>
-                                          <p:spTgt spid="17"/>
+                                          <p:spTgt spid="44"/>
                                         </p:tgtEl>
                                         <p:attrNameLst>
                                           <p:attrName>style.visibility</p:attrName>
@@ -19078,7 +19472,7 @@
                                       <p:cBhvr>
                                         <p:cTn id="27" dur="500"/>
                                         <p:tgtEl>
-                                          <p:spTgt spid="17"/>
+                                          <p:spTgt spid="44"/>
                                         </p:tgtEl>
                                       </p:cBhvr>
                                     </p:animEffect>
@@ -19099,7 +19493,7 @@
                                           </p:stCondLst>
                                         </p:cTn>
                                         <p:tgtEl>
-                                          <p:spTgt spid="20"/>
+                                          <p:spTgt spid="47"/>
                                         </p:tgtEl>
                                         <p:attrNameLst>
                                           <p:attrName>style.visibility</p:attrName>
@@ -19113,7 +19507,7 @@
                                       <p:cBhvr>
                                         <p:cTn id="30" dur="500"/>
                                         <p:tgtEl>
-                                          <p:spTgt spid="20"/>
+                                          <p:spTgt spid="47"/>
                                         </p:tgtEl>
                                       </p:cBhvr>
                                     </p:animEffect>
@@ -19134,7 +19528,7 @@
                                           </p:stCondLst>
                                         </p:cTn>
                                         <p:tgtEl>
-                                          <p:spTgt spid="21"/>
+                                          <p:spTgt spid="48"/>
                                         </p:tgtEl>
                                         <p:attrNameLst>
                                           <p:attrName>style.visibility</p:attrName>
@@ -19148,7 +19542,7 @@
                                       <p:cBhvr>
                                         <p:cTn id="33" dur="500"/>
                                         <p:tgtEl>
-                                          <p:spTgt spid="21"/>
+                                          <p:spTgt spid="48"/>
                                         </p:tgtEl>
                                       </p:cBhvr>
                                     </p:animEffect>
@@ -19169,7 +19563,7 @@
                                           </p:stCondLst>
                                         </p:cTn>
                                         <p:tgtEl>
-                                          <p:spTgt spid="24"/>
+                                          <p:spTgt spid="51"/>
                                         </p:tgtEl>
                                         <p:attrNameLst>
                                           <p:attrName>style.visibility</p:attrName>
@@ -19183,7 +19577,7 @@
                                       <p:cBhvr>
                                         <p:cTn id="36" dur="500"/>
                                         <p:tgtEl>
-                                          <p:spTgt spid="24"/>
+                                          <p:spTgt spid="51"/>
                                         </p:tgtEl>
                                       </p:cBhvr>
                                     </p:animEffect>
@@ -19222,7 +19616,7 @@
                                           </p:stCondLst>
                                         </p:cTn>
                                         <p:tgtEl>
-                                          <p:spTgt spid="25"/>
+                                          <p:spTgt spid="52"/>
                                         </p:tgtEl>
                                         <p:attrNameLst>
                                           <p:attrName>style.visibility</p:attrName>
@@ -19236,7 +19630,7 @@
                                       <p:cBhvr>
                                         <p:cTn id="41" dur="500"/>
                                         <p:tgtEl>
-                                          <p:spTgt spid="25"/>
+                                          <p:spTgt spid="52"/>
                                         </p:tgtEl>
                                       </p:cBhvr>
                                     </p:animEffect>
@@ -19257,7 +19651,7 @@
                                           </p:stCondLst>
                                         </p:cTn>
                                         <p:tgtEl>
-                                          <p:spTgt spid="28"/>
+                                          <p:spTgt spid="55"/>
                                         </p:tgtEl>
                                         <p:attrNameLst>
                                           <p:attrName>style.visibility</p:attrName>
@@ -19271,7 +19665,7 @@
                                       <p:cBhvr>
                                         <p:cTn id="44" dur="500"/>
                                         <p:tgtEl>
-                                          <p:spTgt spid="28"/>
+                                          <p:spTgt spid="55"/>
                                         </p:tgtEl>
                                       </p:cBhvr>
                                     </p:animEffect>
@@ -19292,7 +19686,7 @@
                                           </p:stCondLst>
                                         </p:cTn>
                                         <p:tgtEl>
-                                          <p:spTgt spid="29"/>
+                                          <p:spTgt spid="56"/>
                                         </p:tgtEl>
                                         <p:attrNameLst>
                                           <p:attrName>style.visibility</p:attrName>
@@ -19306,7 +19700,7 @@
                                       <p:cBhvr>
                                         <p:cTn id="47" dur="500"/>
                                         <p:tgtEl>
-                                          <p:spTgt spid="29"/>
+                                          <p:spTgt spid="56"/>
                                         </p:tgtEl>
                                       </p:cBhvr>
                                     </p:animEffect>
@@ -19327,7 +19721,7 @@
                                           </p:stCondLst>
                                         </p:cTn>
                                         <p:tgtEl>
-                                          <p:spTgt spid="32"/>
+                                          <p:spTgt spid="59"/>
                                         </p:tgtEl>
                                         <p:attrNameLst>
                                           <p:attrName>style.visibility</p:attrName>
@@ -19341,7 +19735,201 @@
                                       <p:cBhvr>
                                         <p:cTn id="50" dur="500"/>
                                         <p:tgtEl>
-                                          <p:spTgt spid="32"/>
+                                          <p:spTgt spid="59"/>
+                                        </p:tgtEl>
+                                      </p:cBhvr>
+                                    </p:animEffect>
+                                  </p:childTnLst>
+                                </p:cTn>
+                              </p:par>
+                              <p:par>
+                                <p:cTn id="51" presetID="16" presetClass="entr" presetSubtype="21" fill="hold" grpId="0" nodeType="withEffect">
+                                  <p:stCondLst>
+                                    <p:cond delay="0"/>
+                                  </p:stCondLst>
+                                  <p:childTnLst>
+                                    <p:set>
+                                      <p:cBhvr>
+                                        <p:cTn id="52" dur="1" fill="hold">
+                                          <p:stCondLst>
+                                            <p:cond delay="0"/>
+                                          </p:stCondLst>
+                                        </p:cTn>
+                                        <p:tgtEl>
+                                          <p:spTgt spid="62"/>
+                                        </p:tgtEl>
+                                        <p:attrNameLst>
+                                          <p:attrName>style.visibility</p:attrName>
+                                        </p:attrNameLst>
+                                      </p:cBhvr>
+                                      <p:to>
+                                        <p:strVal val="visible"/>
+                                      </p:to>
+                                    </p:set>
+                                    <p:animEffect transition="in" filter="barn(inVertical)">
+                                      <p:cBhvr>
+                                        <p:cTn id="53" dur="500"/>
+                                        <p:tgtEl>
+                                          <p:spTgt spid="62"/>
+                                        </p:tgtEl>
+                                      </p:cBhvr>
+                                    </p:animEffect>
+                                  </p:childTnLst>
+                                </p:cTn>
+                              </p:par>
+                            </p:childTnLst>
+                          </p:cTn>
+                        </p:par>
+                      </p:childTnLst>
+                    </p:cTn>
+                  </p:par>
+                  <p:par>
+                    <p:cTn id="54" fill="hold">
+                      <p:stCondLst>
+                        <p:cond delay="indefinite"/>
+                      </p:stCondLst>
+                      <p:childTnLst>
+                        <p:par>
+                          <p:cTn id="55" fill="hold">
+                            <p:stCondLst>
+                              <p:cond delay="0"/>
+                            </p:stCondLst>
+                            <p:childTnLst>
+                              <p:par>
+                                <p:cTn id="56" presetID="16" presetClass="entr" presetSubtype="21" fill="hold" grpId="0" nodeType="clickEffect">
+                                  <p:stCondLst>
+                                    <p:cond delay="0"/>
+                                  </p:stCondLst>
+                                  <p:childTnLst>
+                                    <p:set>
+                                      <p:cBhvr>
+                                        <p:cTn id="57" dur="1" fill="hold">
+                                          <p:stCondLst>
+                                            <p:cond delay="0"/>
+                                          </p:stCondLst>
+                                        </p:cTn>
+                                        <p:tgtEl>
+                                          <p:spTgt spid="63"/>
+                                        </p:tgtEl>
+                                        <p:attrNameLst>
+                                          <p:attrName>style.visibility</p:attrName>
+                                        </p:attrNameLst>
+                                      </p:cBhvr>
+                                      <p:to>
+                                        <p:strVal val="visible"/>
+                                      </p:to>
+                                    </p:set>
+                                    <p:animEffect transition="in" filter="barn(inVertical)">
+                                      <p:cBhvr>
+                                        <p:cTn id="58" dur="500"/>
+                                        <p:tgtEl>
+                                          <p:spTgt spid="63"/>
+                                        </p:tgtEl>
+                                      </p:cBhvr>
+                                    </p:animEffect>
+                                  </p:childTnLst>
+                                </p:cTn>
+                              </p:par>
+                            </p:childTnLst>
+                          </p:cTn>
+                        </p:par>
+                      </p:childTnLst>
+                    </p:cTn>
+                  </p:par>
+                  <p:par>
+                    <p:cTn id="59" fill="hold">
+                      <p:stCondLst>
+                        <p:cond delay="indefinite"/>
+                      </p:stCondLst>
+                      <p:childTnLst>
+                        <p:par>
+                          <p:cTn id="60" fill="hold">
+                            <p:stCondLst>
+                              <p:cond delay="0"/>
+                            </p:stCondLst>
+                            <p:childTnLst>
+                              <p:par>
+                                <p:cTn id="61" presetID="16" presetClass="entr" presetSubtype="21" fill="hold" grpId="0" nodeType="clickEffect">
+                                  <p:stCondLst>
+                                    <p:cond delay="0"/>
+                                  </p:stCondLst>
+                                  <p:childTnLst>
+                                    <p:set>
+                                      <p:cBhvr>
+                                        <p:cTn id="62" dur="1" fill="hold">
+                                          <p:stCondLst>
+                                            <p:cond delay="0"/>
+                                          </p:stCondLst>
+                                        </p:cTn>
+                                        <p:tgtEl>
+                                          <p:spTgt spid="64"/>
+                                        </p:tgtEl>
+                                        <p:attrNameLst>
+                                          <p:attrName>style.visibility</p:attrName>
+                                        </p:attrNameLst>
+                                      </p:cBhvr>
+                                      <p:to>
+                                        <p:strVal val="visible"/>
+                                      </p:to>
+                                    </p:set>
+                                    <p:animEffect transition="in" filter="barn(inVertical)">
+                                      <p:cBhvr>
+                                        <p:cTn id="63" dur="500"/>
+                                        <p:tgtEl>
+                                          <p:spTgt spid="64"/>
+                                        </p:tgtEl>
+                                      </p:cBhvr>
+                                    </p:animEffect>
+                                  </p:childTnLst>
+                                </p:cTn>
+                              </p:par>
+                            </p:childTnLst>
+                          </p:cTn>
+                        </p:par>
+                      </p:childTnLst>
+                    </p:cTn>
+                  </p:par>
+                  <p:par>
+                    <p:cTn id="64" fill="hold">
+                      <p:stCondLst>
+                        <p:cond delay="indefinite"/>
+                      </p:stCondLst>
+                      <p:childTnLst>
+                        <p:par>
+                          <p:cTn id="65" fill="hold">
+                            <p:stCondLst>
+                              <p:cond delay="0"/>
+                            </p:stCondLst>
+                            <p:childTnLst>
+                              <p:par>
+                                <p:cTn id="66" presetID="16" presetClass="entr" presetSubtype="21" fill="hold" grpId="0" nodeType="clickEffect">
+                                  <p:stCondLst>
+                                    <p:cond delay="0"/>
+                                  </p:stCondLst>
+                                  <p:childTnLst>
+                                    <p:set>
+                                      <p:cBhvr>
+                                        <p:cTn id="67" dur="1" fill="hold">
+                                          <p:stCondLst>
+                                            <p:cond delay="0"/>
+                                          </p:stCondLst>
+                                        </p:cTn>
+                                        <p:tgtEl>
+                                          <p:spTgt spid="65"/>
+                                        </p:tgtEl>
+                                        <p:attrNameLst>
+                                          <p:attrName>style.visibility</p:attrName>
+                                        </p:attrNameLst>
+                                      </p:cBhvr>
+                                      <p:to>
+                                        <p:strVal val="visible"/>
+                                      </p:to>
+                                    </p:set>
+                                    <p:animEffect transition="in" filter="barn(inVertical)">
+                                      <p:cBhvr>
+                                        <p:cTn id="68" dur="500"/>
+                                        <p:tgtEl>
+                                          <p:spTgt spid="65"/>
                                         </p:tgtEl>
                                       </p:cBhvr>
                                     </p:animEffect>
@@ -19376,14 +19964,18 @@
       </p:par>
     </p:tnLst>
     <p:bldLst>
-      <p:bldP spid="12" grpId="0"/>
-      <p:bldP spid="16" grpId="0"/>
-      <p:bldP spid="20" grpId="0"/>
-      <p:bldP spid="24" grpId="0"/>
-      <p:bldP spid="28" grpId="0"/>
-      <p:bldP spid="32" grpId="0"/>
-      <p:bldP spid="33" grpId="0"/>
-      <p:bldP spid="34" grpId="0"/>
+      <p:bldP spid="39" grpId="0"/>
+      <p:bldP spid="43" grpId="0"/>
+      <p:bldP spid="47" grpId="0"/>
+      <p:bldP spid="51" grpId="0"/>
+      <p:bldP spid="55" grpId="0"/>
+      <p:bldP spid="59" grpId="0"/>
+      <p:bldP spid="60" grpId="0"/>
+      <p:bldP spid="61" grpId="0"/>
+      <p:bldP spid="62" grpId="0"/>
+      <p:bldP spid="63" grpId="0"/>
+      <p:bldP spid="64" grpId="0"/>
+      <p:bldP spid="65" grpId="0"/>
     </p:bldLst>
   </p:timing>
 </p:sld>
